--- a/Software Design/08. Quality Attributes.pptx
+++ b/Software Design/08. Quality Attributes.pptx
@@ -277,7 +277,7 @@
             <a:fld id="{AD4026E6-0412-4830-8F06-DF45033103D5}" type="datetimeFigureOut">
               <a:rPr lang="en-US" smtClean="0"/>
               <a:pPr/>
-              <a:t>3/11/2025</a:t>
+              <a:t>5/30/2026</a:t>
             </a:fld>
             <a:endParaRPr lang="en-US"/>
           </a:p>
@@ -734,7 +734,7 @@
               <a:pPr>
                 <a:defRPr/>
               </a:pPr>
-              <a:t>3/11/2025</a:t>
+              <a:t>5/30/2026</a:t>
             </a:fld>
             <a:endParaRPr lang="en-US"/>
           </a:p>
@@ -926,7 +926,7 @@
               <a:pPr>
                 <a:defRPr/>
               </a:pPr>
-              <a:t>3/11/2025</a:t>
+              <a:t>5/30/2026</a:t>
             </a:fld>
             <a:endParaRPr lang="en-US"/>
           </a:p>
@@ -1128,7 +1128,7 @@
               <a:pPr>
                 <a:defRPr/>
               </a:pPr>
-              <a:t>3/11/2025</a:t>
+              <a:t>5/30/2026</a:t>
             </a:fld>
             <a:endParaRPr lang="en-US"/>
           </a:p>
@@ -1320,7 +1320,7 @@
               <a:pPr>
                 <a:defRPr/>
               </a:pPr>
-              <a:t>3/11/2025</a:t>
+              <a:t>5/30/2026</a:t>
             </a:fld>
             <a:endParaRPr lang="en-US"/>
           </a:p>
@@ -1588,7 +1588,7 @@
               <a:pPr>
                 <a:defRPr/>
               </a:pPr>
-              <a:t>3/11/2025</a:t>
+              <a:t>5/30/2026</a:t>
             </a:fld>
             <a:endParaRPr lang="en-US"/>
           </a:p>
@@ -1898,7 +1898,7 @@
               <a:pPr>
                 <a:defRPr/>
               </a:pPr>
-              <a:t>3/11/2025</a:t>
+              <a:t>5/30/2026</a:t>
             </a:fld>
             <a:endParaRPr lang="en-US"/>
           </a:p>
@@ -2342,7 +2342,7 @@
               <a:pPr>
                 <a:defRPr/>
               </a:pPr>
-              <a:t>3/11/2025</a:t>
+              <a:t>5/30/2026</a:t>
             </a:fld>
             <a:endParaRPr lang="en-US"/>
           </a:p>
@@ -2482,7 +2482,7 @@
               <a:pPr>
                 <a:defRPr/>
               </a:pPr>
-              <a:t>3/11/2025</a:t>
+              <a:t>5/30/2026</a:t>
             </a:fld>
             <a:endParaRPr lang="en-US"/>
           </a:p>
@@ -2599,7 +2599,7 @@
               <a:pPr>
                 <a:defRPr/>
               </a:pPr>
-              <a:t>3/11/2025</a:t>
+              <a:t>5/30/2026</a:t>
             </a:fld>
             <a:endParaRPr lang="en-US"/>
           </a:p>
@@ -2898,7 +2898,7 @@
               <a:pPr>
                 <a:defRPr/>
               </a:pPr>
-              <a:t>3/11/2025</a:t>
+              <a:t>5/30/2026</a:t>
             </a:fld>
             <a:endParaRPr lang="en-US"/>
           </a:p>
@@ -3176,7 +3176,7 @@
               <a:pPr>
                 <a:defRPr/>
               </a:pPr>
-              <a:t>3/11/2025</a:t>
+              <a:t>5/30/2026</a:t>
             </a:fld>
             <a:endParaRPr lang="en-US"/>
           </a:p>
@@ -3424,7 +3424,7 @@
               <a:pPr>
                 <a:defRPr/>
               </a:pPr>
-              <a:t>3/11/2025</a:t>
+              <a:t>5/30/2026</a:t>
             </a:fld>
             <a:endParaRPr lang="en-US"/>
           </a:p>
@@ -8499,7 +8499,24 @@
               <a:rPr lang="en-US" sz="2200" dirty="0" smtClean="0">
                 <a:hlinkClick r:id="rId2"/>
               </a:rPr>
-              <a:t>https://www.acunetix.com/</a:t>
+              <a:t>https://portswigger.net/burp/pro</a:t>
+            </a:r>
+            <a:endParaRPr lang="en-US" sz="2200" dirty="0" smtClean="0">
+              <a:hlinkClick r:id="rId2"/>
+            </a:endParaRPr>
+          </a:p>
+          <a:p>
+            <a:r>
+              <a:rPr lang="en-US" sz="2200" dirty="0" smtClean="0">
+                <a:hlinkClick r:id="rId2"/>
+              </a:rPr>
+              <a:t>https</a:t>
+            </a:r>
+            <a:r>
+              <a:rPr lang="en-US" sz="2200" dirty="0" smtClean="0">
+                <a:hlinkClick r:id="rId2"/>
+              </a:rPr>
+              <a:t>://www.acunetix.com/</a:t>
             </a:r>
             <a:endParaRPr lang="en-US" sz="2200" dirty="0" smtClean="0"/>
           </a:p>

--- a/Software Design/08. Quality Attributes.pptx
+++ b/Software Design/08. Quality Attributes.pptx
@@ -277,7 +277,7 @@
             <a:fld id="{AD4026E6-0412-4830-8F06-DF45033103D5}" type="datetimeFigureOut">
               <a:rPr lang="en-US" smtClean="0"/>
               <a:pPr/>
-              <a:t>5/30/2026</a:t>
+              <a:t>6/9/2026</a:t>
             </a:fld>
             <a:endParaRPr lang="en-US"/>
           </a:p>
@@ -734,7 +734,7 @@
               <a:pPr>
                 <a:defRPr/>
               </a:pPr>
-              <a:t>5/30/2026</a:t>
+              <a:t>6/9/2026</a:t>
             </a:fld>
             <a:endParaRPr lang="en-US"/>
           </a:p>
@@ -926,7 +926,7 @@
               <a:pPr>
                 <a:defRPr/>
               </a:pPr>
-              <a:t>5/30/2026</a:t>
+              <a:t>6/9/2026</a:t>
             </a:fld>
             <a:endParaRPr lang="en-US"/>
           </a:p>
@@ -1128,7 +1128,7 @@
               <a:pPr>
                 <a:defRPr/>
               </a:pPr>
-              <a:t>5/30/2026</a:t>
+              <a:t>6/9/2026</a:t>
             </a:fld>
             <a:endParaRPr lang="en-US"/>
           </a:p>
@@ -1320,7 +1320,7 @@
               <a:pPr>
                 <a:defRPr/>
               </a:pPr>
-              <a:t>5/30/2026</a:t>
+              <a:t>6/9/2026</a:t>
             </a:fld>
             <a:endParaRPr lang="en-US"/>
           </a:p>
@@ -1588,7 +1588,7 @@
               <a:pPr>
                 <a:defRPr/>
               </a:pPr>
-              <a:t>5/30/2026</a:t>
+              <a:t>6/9/2026</a:t>
             </a:fld>
             <a:endParaRPr lang="en-US"/>
           </a:p>
@@ -1898,7 +1898,7 @@
               <a:pPr>
                 <a:defRPr/>
               </a:pPr>
-              <a:t>5/30/2026</a:t>
+              <a:t>6/9/2026</a:t>
             </a:fld>
             <a:endParaRPr lang="en-US"/>
           </a:p>
@@ -2342,7 +2342,7 @@
               <a:pPr>
                 <a:defRPr/>
               </a:pPr>
-              <a:t>5/30/2026</a:t>
+              <a:t>6/9/2026</a:t>
             </a:fld>
             <a:endParaRPr lang="en-US"/>
           </a:p>
@@ -2482,7 +2482,7 @@
               <a:pPr>
                 <a:defRPr/>
               </a:pPr>
-              <a:t>5/30/2026</a:t>
+              <a:t>6/9/2026</a:t>
             </a:fld>
             <a:endParaRPr lang="en-US"/>
           </a:p>
@@ -2599,7 +2599,7 @@
               <a:pPr>
                 <a:defRPr/>
               </a:pPr>
-              <a:t>5/30/2026</a:t>
+              <a:t>6/9/2026</a:t>
             </a:fld>
             <a:endParaRPr lang="en-US"/>
           </a:p>
@@ -2898,7 +2898,7 @@
               <a:pPr>
                 <a:defRPr/>
               </a:pPr>
-              <a:t>5/30/2026</a:t>
+              <a:t>6/9/2026</a:t>
             </a:fld>
             <a:endParaRPr lang="en-US"/>
           </a:p>
@@ -3176,7 +3176,7 @@
               <a:pPr>
                 <a:defRPr/>
               </a:pPr>
-              <a:t>5/30/2026</a:t>
+              <a:t>6/9/2026</a:t>
             </a:fld>
             <a:endParaRPr lang="en-US"/>
           </a:p>
@@ -3424,7 +3424,7 @@
               <a:pPr>
                 <a:defRPr/>
               </a:pPr>
-              <a:t>5/30/2026</a:t>
+              <a:t>6/9/2026</a:t>
             </a:fld>
             <a:endParaRPr lang="en-US"/>
           </a:p>
@@ -6850,7 +6850,7 @@
           <a:p>
             <a:r>
               <a:rPr lang="en-US" dirty="0" smtClean="0"/>
-              <a:t>Tools for Availability</a:t>
+              <a:t>Tools for Testing Availability</a:t>
             </a:r>
             <a:endParaRPr lang="en-US" dirty="0"/>
           </a:p>
@@ -7578,7 +7578,11 @@
           <a:p>
             <a:r>
               <a:rPr lang="en-US" dirty="0" smtClean="0"/>
-              <a:t>Tools for Performance</a:t>
+              <a:t>Tools for </a:t>
+            </a:r>
+            <a:r>
+              <a:rPr lang="en-US" dirty="0" smtClean="0"/>
+              <a:t>Testing Performance</a:t>
             </a:r>
             <a:endParaRPr lang="en-US" dirty="0"/>
           </a:p>
@@ -7600,36 +7604,66 @@
           <a:lstStyle/>
           <a:p>
             <a:r>
-              <a:rPr lang="en-US" sz="2400" dirty="0" smtClean="0">
+              <a:rPr lang="en-US" sz="2200" dirty="0" smtClean="0">
                 <a:hlinkClick r:id="rId2"/>
               </a:rPr>
               <a:t>https://developer.android.com/studio/profile</a:t>
             </a:r>
-            <a:endParaRPr lang="en-US" sz="2400" dirty="0" smtClean="0"/>
-          </a:p>
-          <a:p>
-            <a:r>
-              <a:rPr lang="en-US" sz="2400" dirty="0" smtClean="0">
+            <a:endParaRPr lang="en-US" sz="2200" dirty="0" smtClean="0"/>
+          </a:p>
+          <a:p>
+            <a:r>
+              <a:rPr lang="en-US" sz="2200" dirty="0" smtClean="0">
                 <a:hlinkClick r:id="rId3"/>
               </a:rPr>
               <a:t>https://developer.apple.com/videos/play/wwdc2019/411/</a:t>
             </a:r>
-            <a:endParaRPr lang="en-US" sz="2400" dirty="0" smtClean="0"/>
-          </a:p>
-          <a:p>
-            <a:r>
-              <a:rPr lang="en-US" sz="2400" dirty="0" smtClean="0">
+            <a:endParaRPr lang="en-US" sz="2200" dirty="0" smtClean="0"/>
+          </a:p>
+          <a:p>
+            <a:r>
+              <a:rPr lang="en-US" sz="2200" dirty="0" smtClean="0">
                 <a:hlinkClick r:id="rId4"/>
               </a:rPr>
-              <a:t>https://locust.io/</a:t>
-            </a:r>
-            <a:endParaRPr lang="en-US" sz="2400" dirty="0" smtClean="0"/>
-          </a:p>
-          <a:p>
-            <a:endParaRPr lang="en-US" sz="2400" dirty="0" smtClean="0"/>
-          </a:p>
-          <a:p>
-            <a:endParaRPr lang="en-US" sz="2400" dirty="0" smtClean="0"/>
+              <a:t>https://locust.io</a:t>
+            </a:r>
+            <a:r>
+              <a:rPr lang="en-US" sz="2200" dirty="0" smtClean="0">
+                <a:hlinkClick r:id="rId4"/>
+              </a:rPr>
+              <a:t>/</a:t>
+            </a:r>
+            <a:endParaRPr lang="en-US" sz="2200" dirty="0" smtClean="0"/>
+          </a:p>
+          <a:p>
+            <a:r>
+              <a:rPr lang="en-US" sz="2200" dirty="0" smtClean="0">
+                <a:hlinkClick r:id="rId5"/>
+              </a:rPr>
+              <a:t>https://k6.io</a:t>
+            </a:r>
+            <a:r>
+              <a:rPr lang="en-US" sz="2200" dirty="0" smtClean="0">
+                <a:hlinkClick r:id="rId5"/>
+              </a:rPr>
+              <a:t>/</a:t>
+            </a:r>
+            <a:endParaRPr lang="en-US" sz="2200" dirty="0" smtClean="0"/>
+          </a:p>
+          <a:p>
+            <a:r>
+              <a:rPr lang="en-US" sz="2200" dirty="0" smtClean="0">
+                <a:hlinkClick r:id="rId6"/>
+              </a:rPr>
+              <a:t>https://grafana.com/pricing/?</a:t>
+            </a:r>
+            <a:r>
+              <a:rPr lang="en-US" sz="2200" dirty="0" smtClean="0">
+                <a:hlinkClick r:id="rId6"/>
+              </a:rPr>
+              <a:t>src=k6io#k6-performance-testing</a:t>
+            </a:r>
+            <a:endParaRPr lang="en-US" sz="2200" dirty="0" smtClean="0"/>
           </a:p>
         </p:txBody>
       </p:sp>
@@ -7702,7 +7736,7 @@
           <p:nvPr/>
         </p:nvPicPr>
         <p:blipFill>
-          <a:blip r:embed="rId5" cstate="print"/>
+          <a:blip r:embed="rId7" cstate="print"/>
           <a:srcRect/>
           <a:stretch>
             <a:fillRect/>
@@ -7710,8 +7744,8 @@
         </p:blipFill>
         <p:spPr bwMode="auto">
           <a:xfrm>
-            <a:off x="2301875" y="3387725"/>
-            <a:ext cx="4540250" cy="2555875"/>
+            <a:off x="2667000" y="4038600"/>
+            <a:ext cx="3631174" cy="2045030"/>
           </a:xfrm>
           <a:prstGeom prst="rect">
             <a:avLst/>
@@ -8473,8 +8507,8 @@
           <a:lstStyle/>
           <a:p>
             <a:r>
-              <a:rPr lang="en-US" dirty="0" smtClean="0"/>
-              <a:t>Tools for Security</a:t>
+              <a:rPr lang="en-US" smtClean="0"/>
+              <a:t>Tools for Security Testing</a:t>
             </a:r>
             <a:endParaRPr lang="en-US" dirty="0"/>
           </a:p>
@@ -8501,22 +8535,13 @@
               </a:rPr>
               <a:t>https://portswigger.net/burp/pro</a:t>
             </a:r>
-            <a:endParaRPr lang="en-US" sz="2200" dirty="0" smtClean="0">
-              <a:hlinkClick r:id="rId2"/>
-            </a:endParaRPr>
           </a:p>
           <a:p>
             <a:r>
               <a:rPr lang="en-US" sz="2200" dirty="0" smtClean="0">
                 <a:hlinkClick r:id="rId2"/>
               </a:rPr>
-              <a:t>https</a:t>
-            </a:r>
-            <a:r>
-              <a:rPr lang="en-US" sz="2200" dirty="0" smtClean="0">
-                <a:hlinkClick r:id="rId2"/>
-              </a:rPr>
-              <a:t>://www.acunetix.com/</a:t>
+              <a:t>https://www.acunetix.com/</a:t>
             </a:r>
             <a:endParaRPr lang="en-US" sz="2200" dirty="0" smtClean="0"/>
           </a:p>

--- a/Software Design/08. Quality Attributes.pptx
+++ b/Software Design/08. Quality Attributes.pptx
@@ -8507,7 +8507,7 @@
           <a:lstStyle/>
           <a:p>
             <a:r>
-              <a:rPr lang="en-US" smtClean="0"/>
+              <a:rPr lang="en-US" dirty="0" smtClean="0"/>
               <a:t>Tools for Security Testing</a:t>
             </a:r>
             <a:endParaRPr lang="en-US" dirty="0"/>

--- a/Software Design/08. Quality Attributes.pptx
+++ b/Software Design/08. Quality Attributes.pptx
@@ -277,7 +277,7 @@
             <a:fld id="{AD4026E6-0412-4830-8F06-DF45033103D5}" type="datetimeFigureOut">
               <a:rPr lang="en-US" smtClean="0"/>
               <a:pPr/>
-              <a:t>6/9/2026</a:t>
+              <a:t>7/11/2026</a:t>
             </a:fld>
             <a:endParaRPr lang="en-US"/>
           </a:p>
@@ -734,7 +734,7 @@
               <a:pPr>
                 <a:defRPr/>
               </a:pPr>
-              <a:t>6/9/2026</a:t>
+              <a:t>7/11/2026</a:t>
             </a:fld>
             <a:endParaRPr lang="en-US"/>
           </a:p>
@@ -926,7 +926,7 @@
               <a:pPr>
                 <a:defRPr/>
               </a:pPr>
-              <a:t>6/9/2026</a:t>
+              <a:t>7/11/2026</a:t>
             </a:fld>
             <a:endParaRPr lang="en-US"/>
           </a:p>
@@ -1128,7 +1128,7 @@
               <a:pPr>
                 <a:defRPr/>
               </a:pPr>
-              <a:t>6/9/2026</a:t>
+              <a:t>7/11/2026</a:t>
             </a:fld>
             <a:endParaRPr lang="en-US"/>
           </a:p>
@@ -1320,7 +1320,7 @@
               <a:pPr>
                 <a:defRPr/>
               </a:pPr>
-              <a:t>6/9/2026</a:t>
+              <a:t>7/11/2026</a:t>
             </a:fld>
             <a:endParaRPr lang="en-US"/>
           </a:p>
@@ -1588,7 +1588,7 @@
               <a:pPr>
                 <a:defRPr/>
               </a:pPr>
-              <a:t>6/9/2026</a:t>
+              <a:t>7/11/2026</a:t>
             </a:fld>
             <a:endParaRPr lang="en-US"/>
           </a:p>
@@ -1898,7 +1898,7 @@
               <a:pPr>
                 <a:defRPr/>
               </a:pPr>
-              <a:t>6/9/2026</a:t>
+              <a:t>7/11/2026</a:t>
             </a:fld>
             <a:endParaRPr lang="en-US"/>
           </a:p>
@@ -2342,7 +2342,7 @@
               <a:pPr>
                 <a:defRPr/>
               </a:pPr>
-              <a:t>6/9/2026</a:t>
+              <a:t>7/11/2026</a:t>
             </a:fld>
             <a:endParaRPr lang="en-US"/>
           </a:p>
@@ -2482,7 +2482,7 @@
               <a:pPr>
                 <a:defRPr/>
               </a:pPr>
-              <a:t>6/9/2026</a:t>
+              <a:t>7/11/2026</a:t>
             </a:fld>
             <a:endParaRPr lang="en-US"/>
           </a:p>
@@ -2599,7 +2599,7 @@
               <a:pPr>
                 <a:defRPr/>
               </a:pPr>
-              <a:t>6/9/2026</a:t>
+              <a:t>7/11/2026</a:t>
             </a:fld>
             <a:endParaRPr lang="en-US"/>
           </a:p>
@@ -2898,7 +2898,7 @@
               <a:pPr>
                 <a:defRPr/>
               </a:pPr>
-              <a:t>6/9/2026</a:t>
+              <a:t>7/11/2026</a:t>
             </a:fld>
             <a:endParaRPr lang="en-US"/>
           </a:p>
@@ -3176,7 +3176,7 @@
               <a:pPr>
                 <a:defRPr/>
               </a:pPr>
-              <a:t>6/9/2026</a:t>
+              <a:t>7/11/2026</a:t>
             </a:fld>
             <a:endParaRPr lang="en-US"/>
           </a:p>
@@ -3424,7 +3424,7 @@
               <a:pPr>
                 <a:defRPr/>
               </a:pPr>
-              <a:t>6/9/2026</a:t>
+              <a:t>7/11/2026</a:t>
             </a:fld>
             <a:endParaRPr lang="en-US"/>
           </a:p>
@@ -7578,11 +7578,7 @@
           <a:p>
             <a:r>
               <a:rPr lang="en-US" dirty="0" smtClean="0"/>
-              <a:t>Tools for </a:t>
-            </a:r>
-            <a:r>
-              <a:rPr lang="en-US" dirty="0" smtClean="0"/>
-              <a:t>Testing Performance</a:t>
+              <a:t>Tools for Testing Performance</a:t>
             </a:r>
             <a:endParaRPr lang="en-US" dirty="0"/>
           </a:p>
@@ -7625,13 +7621,7 @@
               <a:rPr lang="en-US" sz="2200" dirty="0" smtClean="0">
                 <a:hlinkClick r:id="rId4"/>
               </a:rPr>
-              <a:t>https://locust.io</a:t>
-            </a:r>
-            <a:r>
-              <a:rPr lang="en-US" sz="2200" dirty="0" smtClean="0">
-                <a:hlinkClick r:id="rId4"/>
-              </a:rPr>
-              <a:t>/</a:t>
+              <a:t>https://locust.io/</a:t>
             </a:r>
             <a:endParaRPr lang="en-US" sz="2200" dirty="0" smtClean="0"/>
           </a:p>
@@ -7640,13 +7630,7 @@
               <a:rPr lang="en-US" sz="2200" dirty="0" smtClean="0">
                 <a:hlinkClick r:id="rId5"/>
               </a:rPr>
-              <a:t>https://k6.io</a:t>
-            </a:r>
-            <a:r>
-              <a:rPr lang="en-US" sz="2200" dirty="0" smtClean="0">
-                <a:hlinkClick r:id="rId5"/>
-              </a:rPr>
-              <a:t>/</a:t>
+              <a:t>https://k6.io/</a:t>
             </a:r>
             <a:endParaRPr lang="en-US" sz="2200" dirty="0" smtClean="0"/>
           </a:p>
@@ -7655,13 +7639,7 @@
               <a:rPr lang="en-US" sz="2200" dirty="0" smtClean="0">
                 <a:hlinkClick r:id="rId6"/>
               </a:rPr>
-              <a:t>https://grafana.com/pricing/?</a:t>
-            </a:r>
-            <a:r>
-              <a:rPr lang="en-US" sz="2200" dirty="0" smtClean="0">
-                <a:hlinkClick r:id="rId6"/>
-              </a:rPr>
-              <a:t>src=k6io#k6-performance-testing</a:t>
+              <a:t>https://grafana.com/pricing/?src=k6io#k6-performance-testing</a:t>
             </a:r>
             <a:endParaRPr lang="en-US" sz="2200" dirty="0" smtClean="0"/>
           </a:p>

--- a/Software Design/08. Quality Attributes.pptx
+++ b/Software Design/08. Quality Attributes.pptx
@@ -5,7 +5,7 @@
     <p:sldMasterId id="2147483708" r:id="rId1"/>
   </p:sldMasterIdLst>
   <p:notesMasterIdLst>
-    <p:notesMasterId r:id="rId57"/>
+    <p:notesMasterId r:id="rId62"/>
   </p:notesMasterIdLst>
   <p:sldIdLst>
     <p:sldId id="256" r:id="rId2"/>
@@ -22,47 +22,52 @@
     <p:sldId id="481" r:id="rId13"/>
     <p:sldId id="437" r:id="rId14"/>
     <p:sldId id="439" r:id="rId15"/>
-    <p:sldId id="482" r:id="rId16"/>
-    <p:sldId id="440" r:id="rId17"/>
-    <p:sldId id="483" r:id="rId18"/>
-    <p:sldId id="438" r:id="rId19"/>
-    <p:sldId id="441" r:id="rId20"/>
-    <p:sldId id="522" r:id="rId21"/>
-    <p:sldId id="523" r:id="rId22"/>
-    <p:sldId id="484" r:id="rId23"/>
-    <p:sldId id="533" r:id="rId24"/>
-    <p:sldId id="536" r:id="rId25"/>
-    <p:sldId id="507" r:id="rId26"/>
-    <p:sldId id="534" r:id="rId27"/>
-    <p:sldId id="535" r:id="rId28"/>
-    <p:sldId id="509" r:id="rId29"/>
-    <p:sldId id="487" r:id="rId30"/>
-    <p:sldId id="494" r:id="rId31"/>
-    <p:sldId id="525" r:id="rId32"/>
-    <p:sldId id="510" r:id="rId33"/>
-    <p:sldId id="499" r:id="rId34"/>
-    <p:sldId id="500" r:id="rId35"/>
-    <p:sldId id="497" r:id="rId36"/>
-    <p:sldId id="498" r:id="rId37"/>
-    <p:sldId id="526" r:id="rId38"/>
-    <p:sldId id="511" r:id="rId39"/>
-    <p:sldId id="503" r:id="rId40"/>
-    <p:sldId id="504" r:id="rId41"/>
-    <p:sldId id="512" r:id="rId42"/>
-    <p:sldId id="501" r:id="rId43"/>
-    <p:sldId id="502" r:id="rId44"/>
-    <p:sldId id="514" r:id="rId45"/>
-    <p:sldId id="515" r:id="rId46"/>
-    <p:sldId id="516" r:id="rId47"/>
-    <p:sldId id="527" r:id="rId48"/>
-    <p:sldId id="528" r:id="rId49"/>
-    <p:sldId id="529" r:id="rId50"/>
-    <p:sldId id="530" r:id="rId51"/>
-    <p:sldId id="531" r:id="rId52"/>
-    <p:sldId id="532" r:id="rId53"/>
-    <p:sldId id="517" r:id="rId54"/>
-    <p:sldId id="518" r:id="rId55"/>
-    <p:sldId id="359" r:id="rId56"/>
+    <p:sldId id="538" r:id="rId16"/>
+    <p:sldId id="540" r:id="rId17"/>
+    <p:sldId id="542" r:id="rId18"/>
+    <p:sldId id="539" r:id="rId19"/>
+    <p:sldId id="543" r:id="rId20"/>
+    <p:sldId id="482" r:id="rId21"/>
+    <p:sldId id="440" r:id="rId22"/>
+    <p:sldId id="483" r:id="rId23"/>
+    <p:sldId id="438" r:id="rId24"/>
+    <p:sldId id="441" r:id="rId25"/>
+    <p:sldId id="522" r:id="rId26"/>
+    <p:sldId id="523" r:id="rId27"/>
+    <p:sldId id="484" r:id="rId28"/>
+    <p:sldId id="533" r:id="rId29"/>
+    <p:sldId id="536" r:id="rId30"/>
+    <p:sldId id="507" r:id="rId31"/>
+    <p:sldId id="534" r:id="rId32"/>
+    <p:sldId id="535" r:id="rId33"/>
+    <p:sldId id="509" r:id="rId34"/>
+    <p:sldId id="487" r:id="rId35"/>
+    <p:sldId id="494" r:id="rId36"/>
+    <p:sldId id="525" r:id="rId37"/>
+    <p:sldId id="510" r:id="rId38"/>
+    <p:sldId id="499" r:id="rId39"/>
+    <p:sldId id="500" r:id="rId40"/>
+    <p:sldId id="497" r:id="rId41"/>
+    <p:sldId id="498" r:id="rId42"/>
+    <p:sldId id="526" r:id="rId43"/>
+    <p:sldId id="511" r:id="rId44"/>
+    <p:sldId id="503" r:id="rId45"/>
+    <p:sldId id="504" r:id="rId46"/>
+    <p:sldId id="512" r:id="rId47"/>
+    <p:sldId id="501" r:id="rId48"/>
+    <p:sldId id="502" r:id="rId49"/>
+    <p:sldId id="514" r:id="rId50"/>
+    <p:sldId id="515" r:id="rId51"/>
+    <p:sldId id="516" r:id="rId52"/>
+    <p:sldId id="527" r:id="rId53"/>
+    <p:sldId id="528" r:id="rId54"/>
+    <p:sldId id="529" r:id="rId55"/>
+    <p:sldId id="530" r:id="rId56"/>
+    <p:sldId id="531" r:id="rId57"/>
+    <p:sldId id="532" r:id="rId58"/>
+    <p:sldId id="517" r:id="rId59"/>
+    <p:sldId id="518" r:id="rId60"/>
+    <p:sldId id="359" r:id="rId61"/>
   </p:sldIdLst>
   <p:sldSz cx="9144000" cy="6858000" type="screen4x3"/>
   <p:notesSz cx="6858000" cy="9144000"/>
@@ -277,7 +282,7 @@
             <a:fld id="{AD4026E6-0412-4830-8F06-DF45033103D5}" type="datetimeFigureOut">
               <a:rPr lang="en-US" smtClean="0"/>
               <a:pPr/>
-              <a:t>7/11/2026</a:t>
+              <a:t>7/12/2026</a:t>
             </a:fld>
             <a:endParaRPr lang="en-US"/>
           </a:p>
@@ -734,7 +739,7 @@
               <a:pPr>
                 <a:defRPr/>
               </a:pPr>
-              <a:t>7/11/2026</a:t>
+              <a:t>7/12/2026</a:t>
             </a:fld>
             <a:endParaRPr lang="en-US"/>
           </a:p>
@@ -926,7 +931,7 @@
               <a:pPr>
                 <a:defRPr/>
               </a:pPr>
-              <a:t>7/11/2026</a:t>
+              <a:t>7/12/2026</a:t>
             </a:fld>
             <a:endParaRPr lang="en-US"/>
           </a:p>
@@ -1128,7 +1133,7 @@
               <a:pPr>
                 <a:defRPr/>
               </a:pPr>
-              <a:t>7/11/2026</a:t>
+              <a:t>7/12/2026</a:t>
             </a:fld>
             <a:endParaRPr lang="en-US"/>
           </a:p>
@@ -1320,7 +1325,7 @@
               <a:pPr>
                 <a:defRPr/>
               </a:pPr>
-              <a:t>7/11/2026</a:t>
+              <a:t>7/12/2026</a:t>
             </a:fld>
             <a:endParaRPr lang="en-US"/>
           </a:p>
@@ -1588,7 +1593,7 @@
               <a:pPr>
                 <a:defRPr/>
               </a:pPr>
-              <a:t>7/11/2026</a:t>
+              <a:t>7/12/2026</a:t>
             </a:fld>
             <a:endParaRPr lang="en-US"/>
           </a:p>
@@ -1898,7 +1903,7 @@
               <a:pPr>
                 <a:defRPr/>
               </a:pPr>
-              <a:t>7/11/2026</a:t>
+              <a:t>7/12/2026</a:t>
             </a:fld>
             <a:endParaRPr lang="en-US"/>
           </a:p>
@@ -2342,7 +2347,7 @@
               <a:pPr>
                 <a:defRPr/>
               </a:pPr>
-              <a:t>7/11/2026</a:t>
+              <a:t>7/12/2026</a:t>
             </a:fld>
             <a:endParaRPr lang="en-US"/>
           </a:p>
@@ -2482,7 +2487,7 @@
               <a:pPr>
                 <a:defRPr/>
               </a:pPr>
-              <a:t>7/11/2026</a:t>
+              <a:t>7/12/2026</a:t>
             </a:fld>
             <a:endParaRPr lang="en-US"/>
           </a:p>
@@ -2599,7 +2604,7 @@
               <a:pPr>
                 <a:defRPr/>
               </a:pPr>
-              <a:t>7/11/2026</a:t>
+              <a:t>7/12/2026</a:t>
             </a:fld>
             <a:endParaRPr lang="en-US"/>
           </a:p>
@@ -2898,7 +2903,7 @@
               <a:pPr>
                 <a:defRPr/>
               </a:pPr>
-              <a:t>7/11/2026</a:t>
+              <a:t>7/12/2026</a:t>
             </a:fld>
             <a:endParaRPr lang="en-US"/>
           </a:p>
@@ -3176,7 +3181,7 @@
               <a:pPr>
                 <a:defRPr/>
               </a:pPr>
-              <a:t>7/11/2026</a:t>
+              <a:t>7/12/2026</a:t>
             </a:fld>
             <a:endParaRPr lang="en-US"/>
           </a:p>
@@ -3424,7 +3429,7 @@
               <a:pPr>
                 <a:defRPr/>
               </a:pPr>
-              <a:t>7/11/2026</a:t>
+              <a:t>7/12/2026</a:t>
             </a:fld>
             <a:endParaRPr lang="en-US"/>
           </a:p>
@@ -4989,10 +4994,18 @@
           <a:lstStyle/>
           <a:p>
             <a:r>
-              <a:rPr lang="en-US" sz="3800" dirty="0" smtClean="0"/>
-              <a:t>Example Quality Attribute: Modifiability</a:t>
-            </a:r>
-            <a:endParaRPr lang="en-US" sz="3800" dirty="0"/>
+              <a:rPr lang="en-US" dirty="0" smtClean="0"/>
+              <a:t>Record </a:t>
+            </a:r>
+            <a:r>
+              <a:rPr lang="en-US" dirty="0" smtClean="0"/>
+              <a:t>PC </a:t>
+            </a:r>
+            <a:r>
+              <a:rPr lang="en-US" dirty="0" smtClean="0"/>
+              <a:t>information</a:t>
+            </a:r>
+            <a:endParaRPr lang="en-US" dirty="0"/>
           </a:p>
         </p:txBody>
       </p:sp>
@@ -5011,136 +5024,319 @@
           <a:bodyPr/>
           <a:lstStyle/>
           <a:p>
-            <a:r>
-              <a:rPr lang="en-US" sz="2400" dirty="0" smtClean="0"/>
-              <a:t>For </a:t>
-            </a:r>
-            <a:r>
-              <a:rPr lang="en-US" sz="2400" i="1" dirty="0" smtClean="0">
-                <a:solidFill>
-                  <a:srgbClr val="C00000"/>
-                </a:solidFill>
-              </a:rPr>
-              <a:t>modifiability</a:t>
-            </a:r>
-            <a:r>
-              <a:rPr lang="en-US" sz="2400" dirty="0" smtClean="0"/>
-              <a:t>, the external </a:t>
-            </a:r>
-            <a:r>
-              <a:rPr lang="en-US" sz="2400" i="1" dirty="0" smtClean="0">
-                <a:solidFill>
-                  <a:srgbClr val="C00000"/>
-                </a:solidFill>
-              </a:rPr>
-              <a:t>stimuli</a:t>
-            </a:r>
-            <a:r>
-              <a:rPr lang="en-US" sz="2400" dirty="0" smtClean="0"/>
-              <a:t> are </a:t>
-            </a:r>
-            <a:r>
-              <a:rPr lang="en-US" sz="2400" u="sng" dirty="0" smtClean="0"/>
-              <a:t>change requests</a:t>
-            </a:r>
-            <a:r>
-              <a:rPr lang="en-US" sz="2400" dirty="0" smtClean="0"/>
-              <a:t> to the system's software.</a:t>
-            </a:r>
-          </a:p>
-          <a:p>
-            <a:r>
-              <a:rPr lang="en-US" sz="2400" i="1" dirty="0" smtClean="0">
-                <a:solidFill>
-                  <a:srgbClr val="C00000"/>
-                </a:solidFill>
-              </a:rPr>
-              <a:t>Architectural decisions</a:t>
-            </a:r>
-            <a:r>
-              <a:rPr lang="en-US" sz="2400" dirty="0" smtClean="0"/>
-              <a:t> include </a:t>
-            </a:r>
-            <a:r>
-              <a:rPr lang="en-US" sz="2400" u="sng" dirty="0" smtClean="0"/>
-              <a:t>encapsulation</a:t>
-            </a:r>
-            <a:r>
-              <a:rPr lang="en-US" sz="2400" dirty="0" smtClean="0"/>
-              <a:t> and </a:t>
-            </a:r>
-            <a:r>
-              <a:rPr lang="en-US" sz="2400" u="sng" dirty="0" smtClean="0"/>
-              <a:t>indirection mechanisms</a:t>
-            </a:r>
-            <a:r>
-              <a:rPr lang="en-US" sz="2400" dirty="0" smtClean="0"/>
-              <a:t>, and </a:t>
-            </a:r>
-          </a:p>
-          <a:p>
-            <a:r>
-              <a:rPr lang="en-US" sz="2400" dirty="0" smtClean="0"/>
-              <a:t>the </a:t>
-            </a:r>
-            <a:r>
-              <a:rPr lang="en-US" sz="2400" i="1" dirty="0" smtClean="0">
-                <a:solidFill>
-                  <a:srgbClr val="C00000"/>
-                </a:solidFill>
-              </a:rPr>
-              <a:t>response</a:t>
-            </a:r>
-            <a:r>
-              <a:rPr lang="en-US" sz="2400" dirty="0" smtClean="0"/>
-              <a:t> is measured in terms of the </a:t>
-            </a:r>
-            <a:r>
-              <a:rPr lang="en-US" sz="2400" u="sng" dirty="0" smtClean="0"/>
-              <a:t>number of affected</a:t>
-            </a:r>
-            <a:r>
-              <a:rPr lang="en-US" sz="2400" dirty="0" smtClean="0"/>
-              <a:t> components, connectors, and interfaces and </a:t>
-            </a:r>
-            <a:r>
-              <a:rPr lang="en-US" sz="2400" u="sng" dirty="0" smtClean="0"/>
-              <a:t>the amount of effort</a:t>
-            </a:r>
-            <a:r>
-              <a:rPr lang="en-US" sz="2400" dirty="0" smtClean="0"/>
-              <a:t> involved in changing these affected elements.</a:t>
-            </a:r>
-            <a:endParaRPr lang="en-US" sz="2400" dirty="0"/>
-          </a:p>
-        </p:txBody>
-      </p:sp>
-      <p:pic>
-        <p:nvPicPr>
-          <p:cNvPr id="11266" name="Picture 2" descr="https://i1.wp.com/www.complexsql.com/wp-content/uploads/2018/01/Alter-table.png?fit=400%2C400&amp;ssl=1"/>
-          <p:cNvPicPr>
-            <a:picLocks noChangeAspect="1" noChangeArrowheads="1"/>
-          </p:cNvPicPr>
+            <a:endParaRPr lang="en-US" dirty="0"/>
+          </a:p>
+        </p:txBody>
+      </p:sp>
+      <p:sp>
+        <p:nvSpPr>
+          <p:cNvPr id="4" name="Rectangle 3"/>
+          <p:cNvSpPr/>
           <p:nvPr/>
-        </p:nvPicPr>
-        <p:blipFill>
-          <a:blip r:embed="rId2" cstate="print"/>
-          <a:srcRect/>
-          <a:stretch>
-            <a:fillRect/>
-          </a:stretch>
-        </p:blipFill>
-        <p:spPr bwMode="auto">
+        </p:nvSpPr>
+        <p:spPr>
           <a:xfrm>
-            <a:off x="3810000" y="4495800"/>
-            <a:ext cx="1828800" cy="1828800"/>
+            <a:off x="457200" y="1600200"/>
+            <a:ext cx="8229600" cy="1477328"/>
           </a:xfrm>
           <a:prstGeom prst="rect">
             <a:avLst/>
           </a:prstGeom>
-          <a:noFill/>
         </p:spPr>
-      </p:pic>
+        <p:style>
+          <a:lnRef idx="2">
+            <a:schemeClr val="dk1"/>
+          </a:lnRef>
+          <a:fillRef idx="1">
+            <a:schemeClr val="lt1"/>
+          </a:fillRef>
+          <a:effectRef idx="0">
+            <a:schemeClr val="dk1"/>
+          </a:effectRef>
+          <a:fontRef idx="minor">
+            <a:schemeClr val="dk1"/>
+          </a:fontRef>
+        </p:style>
+        <p:txBody>
+          <a:bodyPr wrap="square">
+            <a:spAutoFit/>
+          </a:bodyPr>
+          <a:lstStyle/>
+          <a:p>
+            <a:r>
+              <a:rPr lang="en-US" dirty="0" smtClean="0"/>
+              <a:t>Get-</a:t>
+            </a:r>
+            <a:r>
+              <a:rPr lang="en-US" dirty="0" err="1" smtClean="0"/>
+              <a:t>ComputerInfo</a:t>
+            </a:r>
+            <a:r>
+              <a:rPr lang="en-US" dirty="0" smtClean="0"/>
+              <a:t> |</a:t>
+            </a:r>
+          </a:p>
+          <a:p>
+            <a:r>
+              <a:rPr lang="en-US" dirty="0" smtClean="0"/>
+              <a:t>    Select-Object </a:t>
+            </a:r>
+            <a:r>
+              <a:rPr lang="en-US" dirty="0" err="1" smtClean="0"/>
+              <a:t>WindowsProductName</a:t>
+            </a:r>
+            <a:r>
+              <a:rPr lang="en-US" dirty="0" smtClean="0"/>
+              <a:t>, </a:t>
+            </a:r>
+            <a:r>
+              <a:rPr lang="en-US" dirty="0" err="1" smtClean="0"/>
+              <a:t>WindowsVersion</a:t>
+            </a:r>
+            <a:r>
+              <a:rPr lang="en-US" dirty="0" smtClean="0"/>
+              <a:t>, </a:t>
+            </a:r>
+            <a:r>
+              <a:rPr lang="en-US" dirty="0" err="1" smtClean="0"/>
+              <a:t>OsArchitecture</a:t>
+            </a:r>
+            <a:r>
+              <a:rPr lang="en-US" dirty="0" smtClean="0"/>
+              <a:t>,</a:t>
+            </a:r>
+          </a:p>
+          <a:p>
+            <a:r>
+              <a:rPr lang="en-US" dirty="0" smtClean="0"/>
+              <a:t>        </a:t>
+            </a:r>
+            <a:r>
+              <a:rPr lang="en-US" dirty="0" err="1" smtClean="0"/>
+              <a:t>CsManufacturer</a:t>
+            </a:r>
+            <a:r>
+              <a:rPr lang="en-US" dirty="0" smtClean="0"/>
+              <a:t>, </a:t>
+            </a:r>
+            <a:r>
+              <a:rPr lang="en-US" dirty="0" err="1" smtClean="0"/>
+              <a:t>CsModel</a:t>
+            </a:r>
+            <a:r>
+              <a:rPr lang="en-US" dirty="0" smtClean="0"/>
+              <a:t>, </a:t>
+            </a:r>
+            <a:r>
+              <a:rPr lang="en-US" dirty="0" err="1" smtClean="0"/>
+              <a:t>CsProcessors</a:t>
+            </a:r>
+            <a:r>
+              <a:rPr lang="en-US" dirty="0" smtClean="0"/>
+              <a:t>, </a:t>
+            </a:r>
+            <a:r>
+              <a:rPr lang="en-US" dirty="0" err="1" smtClean="0"/>
+              <a:t>CsTotalPhysicalMemory</a:t>
+            </a:r>
+            <a:r>
+              <a:rPr lang="en-US" dirty="0" smtClean="0"/>
+              <a:t> |</a:t>
+            </a:r>
+          </a:p>
+          <a:p>
+            <a:r>
+              <a:rPr lang="en-US" dirty="0" smtClean="0"/>
+              <a:t>    Format-List |</a:t>
+            </a:r>
+          </a:p>
+          <a:p>
+            <a:r>
+              <a:rPr lang="en-US" dirty="0" smtClean="0"/>
+              <a:t>    Out-File system-info.txt</a:t>
+            </a:r>
+            <a:endParaRPr lang="en-US" dirty="0"/>
+          </a:p>
+        </p:txBody>
+      </p:sp>
+      <p:sp>
+        <p:nvSpPr>
+          <p:cNvPr id="5" name="Rectangle 4"/>
+          <p:cNvSpPr/>
+          <p:nvPr/>
+        </p:nvSpPr>
+        <p:spPr>
+          <a:xfrm>
+            <a:off x="457200" y="3352800"/>
+            <a:ext cx="8229600" cy="1200329"/>
+          </a:xfrm>
+          <a:prstGeom prst="rect">
+            <a:avLst/>
+          </a:prstGeom>
+        </p:spPr>
+        <p:style>
+          <a:lnRef idx="2">
+            <a:schemeClr val="dk1"/>
+          </a:lnRef>
+          <a:fillRef idx="1">
+            <a:schemeClr val="lt1"/>
+          </a:fillRef>
+          <a:effectRef idx="0">
+            <a:schemeClr val="dk1"/>
+          </a:effectRef>
+          <a:fontRef idx="minor">
+            <a:schemeClr val="dk1"/>
+          </a:fontRef>
+        </p:style>
+        <p:txBody>
+          <a:bodyPr wrap="square">
+            <a:spAutoFit/>
+          </a:bodyPr>
+          <a:lstStyle/>
+          <a:p>
+            <a:r>
+              <a:rPr lang="en-US" dirty="0" smtClean="0"/>
+              <a:t>Get-</a:t>
+            </a:r>
+            <a:r>
+              <a:rPr lang="en-US" dirty="0" err="1" smtClean="0"/>
+              <a:t>CimInstance</a:t>
+            </a:r>
+            <a:r>
+              <a:rPr lang="en-US" dirty="0" smtClean="0"/>
+              <a:t> Win32_Processor |</a:t>
+            </a:r>
+          </a:p>
+          <a:p>
+            <a:r>
+              <a:rPr lang="en-US" dirty="0" smtClean="0"/>
+              <a:t>    Format-List Name, </a:t>
+            </a:r>
+            <a:r>
+              <a:rPr lang="en-US" dirty="0" err="1" smtClean="0"/>
+              <a:t>NumberOfCores</a:t>
+            </a:r>
+            <a:r>
+              <a:rPr lang="en-US" dirty="0" smtClean="0"/>
+              <a:t>, </a:t>
+            </a:r>
+            <a:r>
+              <a:rPr lang="en-US" dirty="0" err="1" smtClean="0"/>
+              <a:t>NumberOfLogicalProcessors</a:t>
+            </a:r>
+            <a:r>
+              <a:rPr lang="en-US" dirty="0" smtClean="0"/>
+              <a:t>,</a:t>
+            </a:r>
+          </a:p>
+          <a:p>
+            <a:r>
+              <a:rPr lang="en-US" dirty="0" smtClean="0"/>
+              <a:t>        </a:t>
+            </a:r>
+            <a:r>
+              <a:rPr lang="en-US" dirty="0" err="1" smtClean="0"/>
+              <a:t>MaxClockSpeed</a:t>
+            </a:r>
+            <a:r>
+              <a:rPr lang="en-US" dirty="0" smtClean="0"/>
+              <a:t> |</a:t>
+            </a:r>
+          </a:p>
+          <a:p>
+            <a:r>
+              <a:rPr lang="en-US" dirty="0" smtClean="0"/>
+              <a:t>    Out-File cpu-info.txt</a:t>
+            </a:r>
+            <a:endParaRPr lang="en-US" dirty="0"/>
+          </a:p>
+        </p:txBody>
+      </p:sp>
+      <p:sp>
+        <p:nvSpPr>
+          <p:cNvPr id="6" name="Rectangle 5"/>
+          <p:cNvSpPr/>
+          <p:nvPr/>
+        </p:nvSpPr>
+        <p:spPr>
+          <a:xfrm>
+            <a:off x="457200" y="4876800"/>
+            <a:ext cx="8229600" cy="1200329"/>
+          </a:xfrm>
+          <a:prstGeom prst="rect">
+            <a:avLst/>
+          </a:prstGeom>
+        </p:spPr>
+        <p:style>
+          <a:lnRef idx="2">
+            <a:schemeClr val="dk1"/>
+          </a:lnRef>
+          <a:fillRef idx="1">
+            <a:schemeClr val="lt1"/>
+          </a:fillRef>
+          <a:effectRef idx="0">
+            <a:schemeClr val="dk1"/>
+          </a:effectRef>
+          <a:fontRef idx="minor">
+            <a:schemeClr val="dk1"/>
+          </a:fontRef>
+        </p:style>
+        <p:txBody>
+          <a:bodyPr wrap="square">
+            <a:spAutoFit/>
+          </a:bodyPr>
+          <a:lstStyle/>
+          <a:p>
+            <a:r>
+              <a:rPr lang="en-US" dirty="0" smtClean="0"/>
+              <a:t>Get-</a:t>
+            </a:r>
+            <a:r>
+              <a:rPr lang="en-US" dirty="0" err="1" smtClean="0"/>
+              <a:t>CimInstance</a:t>
+            </a:r>
+            <a:r>
+              <a:rPr lang="en-US" dirty="0" smtClean="0"/>
+              <a:t> Win32_PhysicalMemory |</a:t>
+            </a:r>
+          </a:p>
+          <a:p>
+            <a:r>
+              <a:rPr lang="en-US" dirty="0" smtClean="0"/>
+              <a:t>    Format-Table Manufacturer, </a:t>
+            </a:r>
+            <a:r>
+              <a:rPr lang="en-US" dirty="0" err="1" smtClean="0"/>
+              <a:t>PartNumber</a:t>
+            </a:r>
+            <a:r>
+              <a:rPr lang="en-US" dirty="0" smtClean="0"/>
+              <a:t>, Capacity, Speed,</a:t>
+            </a:r>
+          </a:p>
+          <a:p>
+            <a:r>
+              <a:rPr lang="en-US" dirty="0" smtClean="0"/>
+              <a:t>        </a:t>
+            </a:r>
+            <a:r>
+              <a:rPr lang="en-US" dirty="0" err="1" smtClean="0"/>
+              <a:t>ConfiguredClockSpeed</a:t>
+            </a:r>
+            <a:r>
+              <a:rPr lang="en-US" dirty="0" smtClean="0"/>
+              <a:t> |</a:t>
+            </a:r>
+          </a:p>
+          <a:p>
+            <a:r>
+              <a:rPr lang="en-US" dirty="0" smtClean="0"/>
+              <a:t>    Out-File ram-info.txt</a:t>
+            </a:r>
+            <a:endParaRPr lang="en-US" dirty="0"/>
+          </a:p>
+        </p:txBody>
+      </p:sp>
     </p:spTree>
   </p:cSld>
   <p:clrMapOvr>
@@ -5182,10 +5378,18 @@
           <a:lstStyle/>
           <a:p>
             <a:r>
-              <a:rPr lang="en-US" sz="4000" dirty="0" smtClean="0"/>
-              <a:t>Why Use Attribute Characterizations?</a:t>
-            </a:r>
-            <a:endParaRPr lang="en-US" sz="4000" dirty="0"/>
+              <a:rPr lang="en-US" dirty="0" smtClean="0"/>
+              <a:t>Install </a:t>
+            </a:r>
+            <a:r>
+              <a:rPr lang="en-US" dirty="0" smtClean="0"/>
+              <a:t>the benchmark </a:t>
+            </a:r>
+            <a:r>
+              <a:rPr lang="en-US" dirty="0" smtClean="0"/>
+              <a:t>tools (I)</a:t>
+            </a:r>
+            <a:endParaRPr lang="en-US" dirty="0"/>
           </a:p>
         </p:txBody>
       </p:sp>
@@ -5205,104 +5409,122 @@
           <a:lstStyle/>
           <a:p>
             <a:r>
-              <a:rPr lang="en-US" sz="2400" dirty="0" smtClean="0"/>
-              <a:t>The attribute characterizations help to </a:t>
-            </a:r>
-            <a:r>
-              <a:rPr lang="en-US" sz="2400" u="sng" dirty="0" smtClean="0"/>
-              <a:t>ensure attribute coverage</a:t>
-            </a:r>
-            <a:r>
-              <a:rPr lang="en-US" sz="2400" dirty="0" smtClean="0"/>
-              <a:t> as well as offering a rationale </a:t>
-            </a:r>
-            <a:r>
-              <a:rPr lang="en-US" sz="2400" i="1" dirty="0" smtClean="0">
-                <a:solidFill>
-                  <a:srgbClr val="C00000"/>
-                </a:solidFill>
-              </a:rPr>
-              <a:t>for asking elicitation questions</a:t>
-            </a:r>
-            <a:r>
-              <a:rPr lang="en-US" sz="2400" dirty="0" smtClean="0"/>
-              <a:t>. (REQUIREMENTS ELICITATION)</a:t>
-            </a:r>
-          </a:p>
-          <a:p>
-            <a:r>
-              <a:rPr lang="en-US" sz="2400" dirty="0" smtClean="0"/>
-              <a:t>Examples of </a:t>
-            </a:r>
-            <a:r>
-              <a:rPr lang="en-US" sz="2400" i="1" dirty="0" smtClean="0">
-                <a:solidFill>
-                  <a:srgbClr val="C00000"/>
-                </a:solidFill>
-              </a:rPr>
-              <a:t>performance related questions</a:t>
-            </a:r>
-            <a:r>
-              <a:rPr lang="en-US" sz="2400" dirty="0" smtClean="0"/>
+              <a:rPr lang="en-US" sz="1800" dirty="0" smtClean="0"/>
+              <a:t># On Windows </a:t>
+            </a:r>
+            <a:r>
+              <a:rPr lang="en-US" sz="1800" dirty="0" err="1" smtClean="0"/>
+              <a:t>PowerShell</a:t>
+            </a:r>
+            <a:r>
+              <a:rPr lang="en-US" sz="1800" dirty="0" smtClean="0"/>
               <a:t>:</a:t>
             </a:r>
           </a:p>
           <a:p>
-            <a:pPr lvl="1"/>
-            <a:r>
-              <a:rPr lang="en-US" sz="1600" dirty="0" smtClean="0"/>
-              <a:t>What is the physical location of the hardware and its connectivity?</a:t>
-            </a:r>
-          </a:p>
-          <a:p>
-            <a:pPr lvl="1"/>
-            <a:r>
-              <a:rPr lang="en-US" sz="1600" dirty="0" smtClean="0"/>
-              <a:t>What are the bandwidth characteristics of the network?</a:t>
-            </a:r>
-          </a:p>
-          <a:p>
-            <a:pPr lvl="1"/>
-            <a:r>
-              <a:rPr lang="en-US" sz="1600" dirty="0" smtClean="0"/>
-              <a:t>Do you use a synchronous or an asynchronous protocol?</a:t>
-            </a:r>
-          </a:p>
-          <a:p>
-            <a:pPr lvl="1"/>
-            <a:r>
-              <a:rPr lang="en-US" sz="1600" dirty="0" smtClean="0"/>
-              <a:t>What is the location of firewalls and their impact on performance?</a:t>
-            </a:r>
-          </a:p>
-          <a:p>
-            <a:pPr lvl="1"/>
-            <a:r>
-              <a:rPr lang="en-US" sz="1600" dirty="0" smtClean="0"/>
-              <a:t>What information is cached versus regenerated? Based upon what principles?</a:t>
-            </a:r>
-          </a:p>
-          <a:p>
-            <a:pPr lvl="1"/>
-            <a:r>
-              <a:rPr lang="en-US" sz="1600" dirty="0" smtClean="0"/>
-              <a:t>How are resources allocated to service requests?</a:t>
-            </a:r>
-          </a:p>
-          <a:p>
-            <a:pPr lvl="1"/>
-            <a:r>
-              <a:rPr lang="en-US" sz="1600" dirty="0" smtClean="0"/>
-              <a:t>How do we characterize client loading, (e.g., how many concurrent sessions, how many users)?</a:t>
-            </a:r>
-          </a:p>
-          <a:p>
-            <a:pPr lvl="1"/>
-            <a:r>
-              <a:rPr lang="en-US" sz="1600" dirty="0" smtClean="0"/>
-              <a:t>What are the performance characteristics of the middleware: load balancing, monitoring, reconfiguring services to resources?</a:t>
-            </a:r>
-            <a:endParaRPr lang="en-US" sz="1600" dirty="0"/>
+            <a:r>
+              <a:rPr lang="en-US" sz="1800" dirty="0" err="1" smtClean="0"/>
+              <a:t>choco</a:t>
+            </a:r>
+            <a:r>
+              <a:rPr lang="en-US" sz="1800" dirty="0" smtClean="0"/>
+              <a:t> --version</a:t>
+            </a:r>
+          </a:p>
+          <a:p>
+            <a:r>
+              <a:rPr lang="en-US" sz="1800" dirty="0" err="1" smtClean="0"/>
+              <a:t>git</a:t>
+            </a:r>
+            <a:r>
+              <a:rPr lang="en-US" sz="1800" dirty="0" smtClean="0"/>
+              <a:t> --</a:t>
+            </a:r>
+            <a:r>
+              <a:rPr lang="en-US" sz="1800" dirty="0" smtClean="0"/>
+              <a:t>version</a:t>
+            </a:r>
+          </a:p>
+          <a:p>
+            <a:r>
+              <a:rPr lang="en-US" sz="1800" dirty="0" smtClean="0"/>
+              <a:t>## LLVM is a compiler infrastructure that includes tools such as Clang for compiling C, C++, and related languages.</a:t>
+            </a:r>
+          </a:p>
+          <a:p>
+            <a:r>
+              <a:rPr lang="en-US" sz="1800" dirty="0" err="1" smtClean="0"/>
+              <a:t>choco</a:t>
+            </a:r>
+            <a:r>
+              <a:rPr lang="en-US" sz="1800" dirty="0" smtClean="0"/>
+              <a:t> install </a:t>
+            </a:r>
+            <a:r>
+              <a:rPr lang="en-US" sz="1800" dirty="0" err="1" smtClean="0"/>
+              <a:t>llvm</a:t>
+            </a:r>
+            <a:r>
+              <a:rPr lang="en-US" sz="1800" dirty="0" smtClean="0"/>
+              <a:t> -y</a:t>
+            </a:r>
+          </a:p>
+          <a:p>
+            <a:r>
+              <a:rPr lang="en-US" sz="1800" dirty="0" smtClean="0"/>
+              <a:t>## </a:t>
+            </a:r>
+            <a:r>
+              <a:rPr lang="en-US" sz="1800" dirty="0" smtClean="0"/>
+              <a:t>Restart </a:t>
+            </a:r>
+            <a:r>
+              <a:rPr lang="en-US" sz="1800" dirty="0" err="1" smtClean="0"/>
+              <a:t>PowerShell</a:t>
+            </a:r>
+            <a:endParaRPr lang="en-US" sz="1800" dirty="0" smtClean="0"/>
+          </a:p>
+          <a:p>
+            <a:r>
+              <a:rPr lang="en-US" sz="1800" dirty="0" smtClean="0"/>
+              <a:t>clang --version</a:t>
+            </a:r>
+          </a:p>
+          <a:p>
+            <a:r>
+              <a:rPr lang="en-US" sz="1800" dirty="0" smtClean="0"/>
+              <a:t>7z</a:t>
+            </a:r>
+          </a:p>
+          <a:p>
+            <a:r>
+              <a:rPr lang="en-US" sz="1800" dirty="0" smtClean="0"/>
+              <a:t>## iperf3 is a command-line tool for measuring network throughput, jitter, packet loss, and connection quality between two computers.</a:t>
+            </a:r>
+          </a:p>
+          <a:p>
+            <a:r>
+              <a:rPr lang="en-US" sz="1800" dirty="0" err="1" smtClean="0"/>
+              <a:t>choco</a:t>
+            </a:r>
+            <a:r>
+              <a:rPr lang="en-US" sz="1800" dirty="0" smtClean="0"/>
+              <a:t> install iperf3 -</a:t>
+            </a:r>
+            <a:r>
+              <a:rPr lang="en-US" sz="1800" dirty="0" smtClean="0"/>
+              <a:t>y</a:t>
+            </a:r>
+          </a:p>
+          <a:p>
+            <a:r>
+              <a:rPr lang="en-US" sz="1800" dirty="0" smtClean="0"/>
+              <a:t>iperf3 --</a:t>
+            </a:r>
+            <a:r>
+              <a:rPr lang="en-US" sz="1800" dirty="0" smtClean="0"/>
+              <a:t>version</a:t>
+            </a:r>
           </a:p>
         </p:txBody>
       </p:sp>
@@ -5331,32 +5553,196 @@
           <a:chExt cx="0" cy="0"/>
         </a:xfrm>
       </p:grpSpPr>
-      <p:pic>
-        <p:nvPicPr>
-          <p:cNvPr id="4" name="Picture 2" descr="https://lh3.ggpht.com/1IfZLL2QDSjZ0wS7sUhaMlsAOS8BBzdR3wZ1WawgRn7KZAM8nEVZYMOUM-lqQb0ikIzp=w300"/>
-          <p:cNvPicPr>
-            <a:picLocks noChangeAspect="1" noChangeArrowheads="1"/>
-          </p:cNvPicPr>
-          <p:nvPr/>
-        </p:nvPicPr>
-        <p:blipFill>
-          <a:blip r:embed="rId2" cstate="print"/>
-          <a:srcRect/>
-          <a:stretch>
-            <a:fillRect/>
-          </a:stretch>
-        </p:blipFill>
-        <p:spPr bwMode="auto">
-          <a:xfrm>
-            <a:off x="3276600" y="1905000"/>
-            <a:ext cx="2857500" cy="2857500"/>
-          </a:xfrm>
-          <a:prstGeom prst="rect">
-            <a:avLst/>
-          </a:prstGeom>
-          <a:noFill/>
-        </p:spPr>
-      </p:pic>
+      <p:sp>
+        <p:nvSpPr>
+          <p:cNvPr id="2" name="Title 1"/>
+          <p:cNvSpPr>
+            <a:spLocks noGrp="1"/>
+          </p:cNvSpPr>
+          <p:nvPr>
+            <p:ph type="title"/>
+          </p:nvPr>
+        </p:nvSpPr>
+        <p:spPr/>
+        <p:txBody>
+          <a:bodyPr/>
+          <a:lstStyle/>
+          <a:p>
+            <a:r>
+              <a:rPr lang="en-US" dirty="0" smtClean="0"/>
+              <a:t>Install </a:t>
+            </a:r>
+            <a:r>
+              <a:rPr lang="en-US" dirty="0" smtClean="0"/>
+              <a:t>the benchmark </a:t>
+            </a:r>
+            <a:r>
+              <a:rPr lang="en-US" dirty="0" smtClean="0"/>
+              <a:t>tools (II)</a:t>
+            </a:r>
+            <a:endParaRPr lang="en-US" dirty="0"/>
+          </a:p>
+        </p:txBody>
+      </p:sp>
+      <p:sp>
+        <p:nvSpPr>
+          <p:cNvPr id="3" name="Content Placeholder 2"/>
+          <p:cNvSpPr>
+            <a:spLocks noGrp="1"/>
+          </p:cNvSpPr>
+          <p:nvPr>
+            <p:ph idx="1"/>
+          </p:nvPr>
+        </p:nvSpPr>
+        <p:spPr/>
+        <p:txBody>
+          <a:bodyPr/>
+          <a:lstStyle/>
+          <a:p>
+            <a:r>
+              <a:rPr lang="en-US" sz="1800" dirty="0" smtClean="0"/>
+              <a:t># On Windows </a:t>
+            </a:r>
+            <a:r>
+              <a:rPr lang="en-US" sz="1800" dirty="0" err="1" smtClean="0"/>
+              <a:t>PowerShell</a:t>
+            </a:r>
+            <a:r>
+              <a:rPr lang="en-US" sz="1800" dirty="0" smtClean="0"/>
+              <a:t>:</a:t>
+            </a:r>
+          </a:p>
+          <a:p>
+            <a:r>
+              <a:rPr lang="en-US" sz="1800" dirty="0" smtClean="0"/>
+              <a:t>## </a:t>
+            </a:r>
+            <a:r>
+              <a:rPr lang="en-US" sz="1800" dirty="0" err="1" smtClean="0"/>
+              <a:t>fio</a:t>
+            </a:r>
+            <a:r>
+              <a:rPr lang="en-US" sz="1800" dirty="0" smtClean="0"/>
+              <a:t> (Flexible I/O Tester) is a command-line tool for benchmarking and stress-testing storage devices by measuring throughput, IOPS, and latency under configurable disk I/O workloads.</a:t>
+            </a:r>
+          </a:p>
+          <a:p>
+            <a:r>
+              <a:rPr lang="en-US" sz="1800" dirty="0" err="1" smtClean="0"/>
+              <a:t>choco</a:t>
+            </a:r>
+            <a:r>
+              <a:rPr lang="en-US" sz="1800" dirty="0" smtClean="0"/>
+              <a:t> install </a:t>
+            </a:r>
+            <a:r>
+              <a:rPr lang="en-US" sz="1800" dirty="0" err="1" smtClean="0"/>
+              <a:t>fio</a:t>
+            </a:r>
+            <a:r>
+              <a:rPr lang="en-US" sz="1800" dirty="0" smtClean="0"/>
+              <a:t> -</a:t>
+            </a:r>
+            <a:r>
+              <a:rPr lang="en-US" sz="1800" dirty="0" smtClean="0"/>
+              <a:t>y</a:t>
+            </a:r>
+          </a:p>
+          <a:p>
+            <a:r>
+              <a:rPr lang="en-US" sz="1800" dirty="0" err="1" smtClean="0"/>
+              <a:t>fio</a:t>
+            </a:r>
+            <a:r>
+              <a:rPr lang="en-US" sz="1800" dirty="0" smtClean="0"/>
+              <a:t> --</a:t>
+            </a:r>
+            <a:r>
+              <a:rPr lang="en-US" sz="1800" dirty="0" smtClean="0"/>
+              <a:t>version</a:t>
+            </a:r>
+          </a:p>
+          <a:p>
+            <a:r>
+              <a:rPr lang="en-US" sz="1800" dirty="0" smtClean="0"/>
+              <a:t>## </a:t>
+            </a:r>
+            <a:r>
+              <a:rPr lang="en-US" sz="1800" dirty="0" err="1" smtClean="0"/>
+              <a:t>jq</a:t>
+            </a:r>
+            <a:r>
+              <a:rPr lang="en-US" sz="1800" dirty="0" smtClean="0"/>
+              <a:t> is a command-line tool for parsing, querying, transforming, and formatting JSON data.</a:t>
+            </a:r>
+          </a:p>
+          <a:p>
+            <a:r>
+              <a:rPr lang="en-US" sz="1800" dirty="0" err="1" smtClean="0"/>
+              <a:t>choco</a:t>
+            </a:r>
+            <a:r>
+              <a:rPr lang="en-US" sz="1800" dirty="0" smtClean="0"/>
+              <a:t> install </a:t>
+            </a:r>
+            <a:r>
+              <a:rPr lang="en-US" sz="1800" dirty="0" err="1" smtClean="0"/>
+              <a:t>jq</a:t>
+            </a:r>
+            <a:r>
+              <a:rPr lang="en-US" sz="1800" dirty="0" smtClean="0"/>
+              <a:t> -</a:t>
+            </a:r>
+            <a:r>
+              <a:rPr lang="en-US" sz="1800" dirty="0" smtClean="0"/>
+              <a:t>y</a:t>
+            </a:r>
+          </a:p>
+          <a:p>
+            <a:r>
+              <a:rPr lang="en-US" sz="1800" dirty="0" err="1" smtClean="0"/>
+              <a:t>jq</a:t>
+            </a:r>
+            <a:r>
+              <a:rPr lang="en-US" sz="1800" dirty="0" smtClean="0"/>
+              <a:t> --</a:t>
+            </a:r>
+            <a:r>
+              <a:rPr lang="en-US" sz="1800" dirty="0" smtClean="0"/>
+              <a:t>version</a:t>
+            </a:r>
+          </a:p>
+          <a:p>
+            <a:r>
+              <a:rPr lang="en-US" sz="1800" dirty="0" smtClean="0"/>
+              <a:t>## STREAM is not packaged consistently, so build it from source on both machines.</a:t>
+            </a:r>
+          </a:p>
+          <a:p>
+            <a:r>
+              <a:rPr lang="en-US" sz="1800" dirty="0" err="1" smtClean="0"/>
+              <a:t>git</a:t>
+            </a:r>
+            <a:r>
+              <a:rPr lang="en-US" sz="1800" dirty="0" smtClean="0"/>
+              <a:t> clone https://github.com/jeffhammond/STREAM.git</a:t>
+            </a:r>
+          </a:p>
+          <a:p>
+            <a:r>
+              <a:rPr lang="en-US" sz="1800" dirty="0" err="1" smtClean="0"/>
+              <a:t>cd</a:t>
+            </a:r>
+            <a:r>
+              <a:rPr lang="en-US" sz="1800" dirty="0" smtClean="0"/>
+              <a:t> STREAM</a:t>
+            </a:r>
+          </a:p>
+          <a:p>
+            <a:endParaRPr lang="en-US" sz="1800" dirty="0" smtClean="0"/>
+          </a:p>
+        </p:txBody>
+      </p:sp>
     </p:spTree>
   </p:cSld>
   <p:clrMapOvr>
@@ -5399,7 +5785,19 @@
           <a:p>
             <a:r>
               <a:rPr lang="en-US" dirty="0" smtClean="0"/>
-              <a:t>Scenarios</a:t>
+              <a:t>Record </a:t>
+            </a:r>
+            <a:r>
+              <a:rPr lang="en-US" dirty="0" err="1" smtClean="0"/>
+              <a:t>MacBook</a:t>
+            </a:r>
+            <a:r>
+              <a:rPr lang="en-US" dirty="0" smtClean="0"/>
+              <a:t> </a:t>
+            </a:r>
+            <a:r>
+              <a:rPr lang="en-US" dirty="0" smtClean="0"/>
+              <a:t>information</a:t>
             </a:r>
             <a:endParaRPr lang="en-US" dirty="0"/>
           </a:p>
@@ -5420,140 +5818,116 @@
           <a:bodyPr/>
           <a:lstStyle/>
           <a:p>
-            <a:r>
-              <a:rPr lang="en-US" sz="2200" dirty="0" smtClean="0"/>
-              <a:t>Typically the first job of an architecture analysis is to precisely </a:t>
-            </a:r>
-            <a:r>
-              <a:rPr lang="en-US" sz="2200" i="1" dirty="0" smtClean="0">
-                <a:solidFill>
-                  <a:srgbClr val="C00000"/>
-                </a:solidFill>
-              </a:rPr>
-              <a:t>elicit the specific quality goals</a:t>
-            </a:r>
-            <a:r>
-              <a:rPr lang="en-US" sz="2200" dirty="0" smtClean="0"/>
-              <a:t> against which the architecture will be judged. The </a:t>
-            </a:r>
-            <a:r>
-              <a:rPr lang="en-US" sz="2200" i="1" dirty="0" smtClean="0">
-                <a:solidFill>
-                  <a:srgbClr val="C00000"/>
-                </a:solidFill>
-              </a:rPr>
-              <a:t>mechanism</a:t>
-            </a:r>
-            <a:r>
-              <a:rPr lang="en-US" sz="2200" dirty="0" smtClean="0"/>
-              <a:t> that we use for this elicitation is the </a:t>
-            </a:r>
-            <a:r>
-              <a:rPr lang="en-US" sz="2200" u="sng" dirty="0" smtClean="0"/>
-              <a:t>scenario</a:t>
-            </a:r>
-            <a:r>
-              <a:rPr lang="en-US" sz="2200" dirty="0" smtClean="0"/>
-              <a:t>.</a:t>
-            </a:r>
-          </a:p>
-          <a:p>
-            <a:r>
-              <a:rPr lang="en-US" sz="2200" i="1" dirty="0" smtClean="0">
-                <a:solidFill>
-                  <a:srgbClr val="C00000"/>
-                </a:solidFill>
-              </a:rPr>
-              <a:t>A scenario</a:t>
-            </a:r>
-            <a:r>
-              <a:rPr lang="en-US" sz="2200" dirty="0" smtClean="0"/>
-              <a:t> is a </a:t>
-            </a:r>
-            <a:r>
-              <a:rPr lang="en-US" sz="2200" u="sng" dirty="0" smtClean="0"/>
-              <a:t>short statement</a:t>
-            </a:r>
-            <a:r>
-              <a:rPr lang="en-US" sz="2200" dirty="0" smtClean="0"/>
-              <a:t> describing an </a:t>
-            </a:r>
-            <a:r>
-              <a:rPr lang="en-US" sz="2200" u="sng" dirty="0" smtClean="0"/>
-              <a:t>interaction</a:t>
-            </a:r>
-            <a:r>
-              <a:rPr lang="en-US" sz="2200" dirty="0" smtClean="0"/>
-              <a:t> of one of the </a:t>
-            </a:r>
-            <a:r>
-              <a:rPr lang="en-US" sz="2200" u="sng" dirty="0" smtClean="0"/>
-              <a:t>stakeholders</a:t>
-            </a:r>
-            <a:r>
-              <a:rPr lang="en-US" sz="2200" dirty="0" smtClean="0"/>
-              <a:t> with the system.</a:t>
-            </a:r>
-          </a:p>
-          <a:p>
-            <a:pPr lvl="1"/>
-            <a:r>
-              <a:rPr lang="en-US" sz="1700" i="1" dirty="0" smtClean="0">
-                <a:solidFill>
-                  <a:srgbClr val="C00000"/>
-                </a:solidFill>
-              </a:rPr>
-              <a:t>A user</a:t>
-            </a:r>
-            <a:r>
-              <a:rPr lang="en-US" sz="1700" dirty="0" smtClean="0"/>
-              <a:t> would describe using the system to perform some task; his scenarios would very much resemble use cases in object-oriented parlance.</a:t>
-            </a:r>
-          </a:p>
-          <a:p>
-            <a:pPr lvl="1"/>
-            <a:r>
-              <a:rPr lang="en-US" sz="1700" i="1" dirty="0" smtClean="0">
-                <a:solidFill>
-                  <a:srgbClr val="C00000"/>
-                </a:solidFill>
-              </a:rPr>
-              <a:t>A maintainer</a:t>
-            </a:r>
-            <a:r>
-              <a:rPr lang="en-US" sz="1700" dirty="0" smtClean="0"/>
-              <a:t> would describe making a change to the system, such as upgrading the operating system in a particular way or adding a specific new function.</a:t>
-            </a:r>
-          </a:p>
-          <a:p>
-            <a:pPr lvl="1"/>
-            <a:r>
-              <a:rPr lang="en-US" sz="1700" i="1" dirty="0" smtClean="0">
-                <a:solidFill>
-                  <a:srgbClr val="C00000"/>
-                </a:solidFill>
-              </a:rPr>
-              <a:t>A developer's</a:t>
-            </a:r>
-            <a:r>
-              <a:rPr lang="en-US" sz="1700" dirty="0" smtClean="0"/>
-              <a:t> scenario might talk about using the architecture to build the system or predict its performance.</a:t>
-            </a:r>
-          </a:p>
-          <a:p>
-            <a:pPr lvl="1"/>
-            <a:r>
-              <a:rPr lang="en-US" sz="1700" i="1" dirty="0" smtClean="0">
-                <a:solidFill>
-                  <a:srgbClr val="C00000"/>
-                </a:solidFill>
-              </a:rPr>
-              <a:t>A customer's</a:t>
-            </a:r>
-            <a:r>
-              <a:rPr lang="en-US" sz="1700" dirty="0" smtClean="0"/>
-              <a:t> scenario might describe how the architecture is to be re-used for a second product in a product line.</a:t>
-            </a:r>
+            <a:endParaRPr lang="en-US" dirty="0"/>
+          </a:p>
+        </p:txBody>
+      </p:sp>
+      <p:sp>
+        <p:nvSpPr>
+          <p:cNvPr id="4" name="Rectangle 3"/>
+          <p:cNvSpPr/>
+          <p:nvPr/>
+        </p:nvSpPr>
+        <p:spPr>
+          <a:xfrm>
+            <a:off x="457200" y="1600200"/>
+            <a:ext cx="8229600" cy="1200329"/>
+          </a:xfrm>
+          <a:prstGeom prst="rect">
+            <a:avLst/>
+          </a:prstGeom>
+        </p:spPr>
+        <p:style>
+          <a:lnRef idx="2">
+            <a:schemeClr val="dk1"/>
+          </a:lnRef>
+          <a:fillRef idx="1">
+            <a:schemeClr val="lt1"/>
+          </a:fillRef>
+          <a:effectRef idx="0">
+            <a:schemeClr val="dk1"/>
+          </a:effectRef>
+          <a:fontRef idx="minor">
+            <a:schemeClr val="dk1"/>
+          </a:fontRef>
+        </p:style>
+        <p:txBody>
+          <a:bodyPr wrap="square">
+            <a:spAutoFit/>
+          </a:bodyPr>
+          <a:lstStyle/>
+          <a:p>
+            <a:r>
+              <a:rPr lang="en-US" dirty="0" err="1" smtClean="0"/>
+              <a:t>system_profiler</a:t>
+            </a:r>
+            <a:r>
+              <a:rPr lang="en-US" dirty="0" smtClean="0"/>
+              <a:t> </a:t>
+            </a:r>
+            <a:r>
+              <a:rPr lang="en-US" dirty="0" err="1" smtClean="0"/>
+              <a:t>SPHardwareDataType</a:t>
+            </a:r>
+            <a:r>
+              <a:rPr lang="en-US" dirty="0" smtClean="0"/>
+              <a:t> &gt; system-info.txt</a:t>
+            </a:r>
+          </a:p>
+          <a:p>
+            <a:r>
+              <a:rPr lang="en-US" dirty="0" err="1" smtClean="0"/>
+              <a:t>system_profiler</a:t>
+            </a:r>
+            <a:r>
+              <a:rPr lang="en-US" dirty="0" smtClean="0"/>
+              <a:t> </a:t>
+            </a:r>
+            <a:r>
+              <a:rPr lang="en-US" dirty="0" err="1" smtClean="0"/>
+              <a:t>SPMemoryDataType</a:t>
+            </a:r>
+            <a:r>
+              <a:rPr lang="en-US" dirty="0" smtClean="0"/>
+              <a:t> &gt; ram-info.txt</a:t>
+            </a:r>
+          </a:p>
+          <a:p>
+            <a:r>
+              <a:rPr lang="en-US" dirty="0" err="1" smtClean="0"/>
+              <a:t>system_profiler</a:t>
+            </a:r>
+            <a:r>
+              <a:rPr lang="en-US" dirty="0" smtClean="0"/>
+              <a:t> </a:t>
+            </a:r>
+            <a:r>
+              <a:rPr lang="en-US" dirty="0" err="1" smtClean="0"/>
+              <a:t>SPNVMeDataType</a:t>
+            </a:r>
+            <a:r>
+              <a:rPr lang="en-US" dirty="0" smtClean="0"/>
+              <a:t> &gt; disk-info.txt</a:t>
+            </a:r>
+          </a:p>
+          <a:p>
+            <a:r>
+              <a:rPr lang="en-US" dirty="0" err="1" smtClean="0"/>
+              <a:t>system_profiler</a:t>
+            </a:r>
+            <a:r>
+              <a:rPr lang="en-US" dirty="0" smtClean="0"/>
+              <a:t> </a:t>
+            </a:r>
+            <a:r>
+              <a:rPr lang="en-US" dirty="0" err="1" smtClean="0"/>
+              <a:t>SPNetworkDataType</a:t>
+            </a:r>
+            <a:r>
+              <a:rPr lang="en-US" dirty="0" smtClean="0"/>
+              <a:t> &gt; network-info.txt</a:t>
+            </a:r>
+            <a:endParaRPr lang="en-US" dirty="0"/>
           </a:p>
         </p:txBody>
       </p:sp>
@@ -5599,7 +5973,15 @@
           <a:p>
             <a:r>
               <a:rPr lang="en-US" dirty="0" smtClean="0"/>
-              <a:t>Use Case Scenarios</a:t>
+              <a:t>Install </a:t>
+            </a:r>
+            <a:r>
+              <a:rPr lang="en-US" dirty="0" smtClean="0"/>
+              <a:t>the benchmark </a:t>
+            </a:r>
+            <a:r>
+              <a:rPr lang="en-US" dirty="0" smtClean="0"/>
+              <a:t>tools (I)</a:t>
             </a:r>
             <a:endParaRPr lang="en-US" dirty="0"/>
           </a:p>
@@ -5621,54 +6003,115 @@
           <a:lstStyle/>
           <a:p>
             <a:r>
-              <a:rPr lang="en-US" sz="2600" i="1" dirty="0" smtClean="0">
-                <a:solidFill>
-                  <a:srgbClr val="C00000"/>
-                </a:solidFill>
-              </a:rPr>
-              <a:t>Use case scenarios</a:t>
-            </a:r>
-            <a:r>
-              <a:rPr lang="en-US" sz="2600" dirty="0" smtClean="0"/>
-              <a:t> describe a </a:t>
-            </a:r>
-            <a:r>
-              <a:rPr lang="en-US" sz="2600" u="sng" dirty="0" smtClean="0"/>
-              <a:t>user's intended interaction</a:t>
-            </a:r>
-            <a:r>
-              <a:rPr lang="en-US" sz="2600" dirty="0" smtClean="0"/>
-              <a:t> with the completed, running system.</a:t>
-            </a:r>
-          </a:p>
-          <a:p>
-            <a:pPr lvl="1"/>
-            <a:r>
-              <a:rPr lang="en-US" sz="2200" dirty="0" smtClean="0"/>
-              <a:t>The user wants to examine budgetary and actual data under different fiscal years without re-entering project data. (</a:t>
-            </a:r>
-            <a:r>
-              <a:rPr lang="en-US" sz="2200" b="1" dirty="0" smtClean="0"/>
-              <a:t>usability</a:t>
-            </a:r>
-            <a:r>
-              <a:rPr lang="en-US" sz="2200" dirty="0" smtClean="0"/>
-              <a:t>)</a:t>
-            </a:r>
-          </a:p>
-          <a:p>
-            <a:pPr lvl="1"/>
-            <a:r>
-              <a:rPr lang="en-US" sz="2200" dirty="0" smtClean="0"/>
-              <a:t>User changes graph layout from horizontal to vertical and graph is redrawn in one second. (</a:t>
-            </a:r>
-            <a:r>
-              <a:rPr lang="en-US" sz="2200" b="1" dirty="0" smtClean="0"/>
-              <a:t>performance</a:t>
-            </a:r>
-            <a:r>
-              <a:rPr lang="en-US" sz="2200" dirty="0" smtClean="0"/>
-              <a:t>)</a:t>
+              <a:rPr lang="en-US" sz="1800" dirty="0" smtClean="0"/>
+              <a:t># On </a:t>
+            </a:r>
+            <a:r>
+              <a:rPr lang="en-US" sz="1800" dirty="0" err="1" smtClean="0"/>
+              <a:t>macOS</a:t>
+            </a:r>
+            <a:r>
+              <a:rPr lang="en-US" sz="1800" dirty="0" smtClean="0"/>
+              <a:t> SSH Terminal:</a:t>
+            </a:r>
+          </a:p>
+          <a:p>
+            <a:r>
+              <a:rPr lang="en-US" sz="1800" smtClean="0"/>
+              <a:t>git</a:t>
+            </a:r>
+            <a:r>
+              <a:rPr lang="en-US" sz="1800" dirty="0" smtClean="0"/>
+              <a:t> </a:t>
+            </a:r>
+            <a:r>
+              <a:rPr lang="en-US" sz="1800" dirty="0" smtClean="0"/>
+              <a:t>--</a:t>
+            </a:r>
+            <a:r>
+              <a:rPr lang="en-US" sz="1800" dirty="0" smtClean="0"/>
+              <a:t>version</a:t>
+            </a:r>
+          </a:p>
+          <a:p>
+            <a:r>
+              <a:rPr lang="en-US" sz="1800" dirty="0" smtClean="0"/>
+              <a:t>## LLVM is a compiler infrastructure that includes tools such as Clang for compiling C, C++, and related languages.</a:t>
+            </a:r>
+          </a:p>
+          <a:p>
+            <a:r>
+              <a:rPr lang="en-US" sz="1800" dirty="0" err="1" smtClean="0"/>
+              <a:t>choco</a:t>
+            </a:r>
+            <a:r>
+              <a:rPr lang="en-US" sz="1800" dirty="0" smtClean="0"/>
+              <a:t> install </a:t>
+            </a:r>
+            <a:r>
+              <a:rPr lang="en-US" sz="1800" dirty="0" err="1" smtClean="0"/>
+              <a:t>llvm</a:t>
+            </a:r>
+            <a:r>
+              <a:rPr lang="en-US" sz="1800" dirty="0" smtClean="0"/>
+              <a:t> -y</a:t>
+            </a:r>
+          </a:p>
+          <a:p>
+            <a:r>
+              <a:rPr lang="en-US" sz="1800" dirty="0" smtClean="0"/>
+              <a:t>## </a:t>
+            </a:r>
+            <a:r>
+              <a:rPr lang="en-US" sz="1800" dirty="0" smtClean="0"/>
+              <a:t>Restart </a:t>
+            </a:r>
+            <a:r>
+              <a:rPr lang="en-US" sz="1800" dirty="0" err="1" smtClean="0"/>
+              <a:t>PowerShell</a:t>
+            </a:r>
+            <a:endParaRPr lang="en-US" sz="1800" dirty="0" smtClean="0"/>
+          </a:p>
+          <a:p>
+            <a:r>
+              <a:rPr lang="en-US" sz="1800" dirty="0" smtClean="0"/>
+              <a:t>clang --version</a:t>
+            </a:r>
+          </a:p>
+          <a:p>
+            <a:r>
+              <a:rPr lang="en-US" sz="1800" dirty="0" smtClean="0"/>
+              <a:t>7z</a:t>
+            </a:r>
+          </a:p>
+          <a:p>
+            <a:r>
+              <a:rPr lang="en-US" sz="1800" dirty="0" smtClean="0"/>
+              <a:t>## iperf3 is a command-line tool for measuring network throughput, jitter, packet loss, and connection quality between two computers.</a:t>
+            </a:r>
+          </a:p>
+          <a:p>
+            <a:r>
+              <a:rPr lang="en-US" sz="1800" dirty="0" err="1" smtClean="0"/>
+              <a:t>choco</a:t>
+            </a:r>
+            <a:r>
+              <a:rPr lang="en-US" sz="1800" dirty="0" smtClean="0"/>
+              <a:t> install iperf3 -</a:t>
+            </a:r>
+            <a:r>
+              <a:rPr lang="en-US" sz="1800" dirty="0" smtClean="0"/>
+              <a:t>y</a:t>
+            </a:r>
+          </a:p>
+          <a:p>
+            <a:r>
+              <a:rPr lang="en-US" sz="1800" dirty="0" smtClean="0"/>
+              <a:t>iperf3 --</a:t>
+            </a:r>
+            <a:r>
+              <a:rPr lang="en-US" sz="1800" dirty="0" smtClean="0"/>
+              <a:t>version</a:t>
             </a:r>
           </a:p>
         </p:txBody>
@@ -5895,10 +6338,10 @@
           <a:lstStyle/>
           <a:p>
             <a:r>
-              <a:rPr lang="en-US" dirty="0" smtClean="0"/>
-              <a:t>Growth Scenarios</a:t>
-            </a:r>
-            <a:endParaRPr lang="en-US" dirty="0"/>
+              <a:rPr lang="en-US" sz="3800" dirty="0" smtClean="0"/>
+              <a:t>Example Quality Attribute: Modifiability</a:t>
+            </a:r>
+            <a:endParaRPr lang="en-US" sz="3800" dirty="0"/>
           </a:p>
         </p:txBody>
       </p:sp>
@@ -5918,55 +6361,135 @@
           <a:lstStyle/>
           <a:p>
             <a:r>
-              <a:rPr lang="en-US" sz="2600" i="1" dirty="0" smtClean="0">
+              <a:rPr lang="en-US" sz="2400" dirty="0" smtClean="0"/>
+              <a:t>For </a:t>
+            </a:r>
+            <a:r>
+              <a:rPr lang="en-US" sz="2400" i="1" dirty="0" smtClean="0">
                 <a:solidFill>
                   <a:srgbClr val="C00000"/>
                 </a:solidFill>
               </a:rPr>
-              <a:t>Growth scenarios</a:t>
-            </a:r>
-            <a:r>
-              <a:rPr lang="en-US" sz="2600" dirty="0" smtClean="0"/>
-              <a:t> represent typical anticipated future changes to a system.</a:t>
-            </a:r>
-          </a:p>
-          <a:p>
-            <a:pPr lvl="1"/>
-            <a:r>
-              <a:rPr lang="en-US" sz="2200" dirty="0" smtClean="0"/>
-              <a:t>The maximum number of tracks to be handled by the system doubles and the maximum latency of track data to the screen is kept to </a:t>
-            </a:r>
-            <a:r>
-              <a:rPr lang="en-US" sz="2200" b="1" dirty="0" smtClean="0"/>
-              <a:t>200 </a:t>
-            </a:r>
-            <a:r>
-              <a:rPr lang="en-US" sz="2200" b="1" dirty="0" err="1" smtClean="0"/>
-              <a:t>ms</a:t>
-            </a:r>
-            <a:r>
-              <a:rPr lang="en-US" sz="2200" dirty="0" err="1" smtClean="0"/>
-              <a:t>.</a:t>
-            </a:r>
-            <a:endParaRPr lang="en-US" sz="2200" dirty="0" smtClean="0"/>
-          </a:p>
-          <a:p>
-            <a:pPr lvl="1"/>
-            <a:r>
-              <a:rPr lang="en-US" sz="2200" dirty="0" smtClean="0"/>
-              <a:t>Migrate to a new operating system, or a new release of the existing operating system in less than </a:t>
-            </a:r>
-            <a:r>
-              <a:rPr lang="en-US" sz="2200" b="1" dirty="0" smtClean="0"/>
-              <a:t>a person-year of work</a:t>
-            </a:r>
-            <a:r>
-              <a:rPr lang="en-US" sz="2200" dirty="0" smtClean="0"/>
-              <a:t>.</a:t>
-            </a:r>
-          </a:p>
-        </p:txBody>
-      </p:sp>
+              <a:t>modifiability</a:t>
+            </a:r>
+            <a:r>
+              <a:rPr lang="en-US" sz="2400" dirty="0" smtClean="0"/>
+              <a:t>, the external </a:t>
+            </a:r>
+            <a:r>
+              <a:rPr lang="en-US" sz="2400" i="1" dirty="0" smtClean="0">
+                <a:solidFill>
+                  <a:srgbClr val="C00000"/>
+                </a:solidFill>
+              </a:rPr>
+              <a:t>stimuli</a:t>
+            </a:r>
+            <a:r>
+              <a:rPr lang="en-US" sz="2400" dirty="0" smtClean="0"/>
+              <a:t> are </a:t>
+            </a:r>
+            <a:r>
+              <a:rPr lang="en-US" sz="2400" u="sng" dirty="0" smtClean="0"/>
+              <a:t>change requests</a:t>
+            </a:r>
+            <a:r>
+              <a:rPr lang="en-US" sz="2400" dirty="0" smtClean="0"/>
+              <a:t> to the system's software.</a:t>
+            </a:r>
+          </a:p>
+          <a:p>
+            <a:r>
+              <a:rPr lang="en-US" sz="2400" i="1" dirty="0" smtClean="0">
+                <a:solidFill>
+                  <a:srgbClr val="C00000"/>
+                </a:solidFill>
+              </a:rPr>
+              <a:t>Architectural decisions</a:t>
+            </a:r>
+            <a:r>
+              <a:rPr lang="en-US" sz="2400" dirty="0" smtClean="0"/>
+              <a:t> include </a:t>
+            </a:r>
+            <a:r>
+              <a:rPr lang="en-US" sz="2400" u="sng" dirty="0" smtClean="0"/>
+              <a:t>encapsulation</a:t>
+            </a:r>
+            <a:r>
+              <a:rPr lang="en-US" sz="2400" dirty="0" smtClean="0"/>
+              <a:t> and </a:t>
+            </a:r>
+            <a:r>
+              <a:rPr lang="en-US" sz="2400" u="sng" dirty="0" smtClean="0"/>
+              <a:t>indirection mechanisms</a:t>
+            </a:r>
+            <a:r>
+              <a:rPr lang="en-US" sz="2400" dirty="0" smtClean="0"/>
+              <a:t>, and </a:t>
+            </a:r>
+          </a:p>
+          <a:p>
+            <a:r>
+              <a:rPr lang="en-US" sz="2400" dirty="0" smtClean="0"/>
+              <a:t>the </a:t>
+            </a:r>
+            <a:r>
+              <a:rPr lang="en-US" sz="2400" i="1" dirty="0" smtClean="0">
+                <a:solidFill>
+                  <a:srgbClr val="C00000"/>
+                </a:solidFill>
+              </a:rPr>
+              <a:t>response</a:t>
+            </a:r>
+            <a:r>
+              <a:rPr lang="en-US" sz="2400" dirty="0" smtClean="0"/>
+              <a:t> is measured in terms of the </a:t>
+            </a:r>
+            <a:r>
+              <a:rPr lang="en-US" sz="2400" u="sng" dirty="0" smtClean="0"/>
+              <a:t>number of affected</a:t>
+            </a:r>
+            <a:r>
+              <a:rPr lang="en-US" sz="2400" dirty="0" smtClean="0"/>
+              <a:t> components, connectors, and interfaces and </a:t>
+            </a:r>
+            <a:r>
+              <a:rPr lang="en-US" sz="2400" u="sng" dirty="0" smtClean="0"/>
+              <a:t>the amount of effort</a:t>
+            </a:r>
+            <a:r>
+              <a:rPr lang="en-US" sz="2400" dirty="0" smtClean="0"/>
+              <a:t> involved in changing these affected elements.</a:t>
+            </a:r>
+            <a:endParaRPr lang="en-US" sz="2400" dirty="0"/>
+          </a:p>
+        </p:txBody>
+      </p:sp>
+      <p:pic>
+        <p:nvPicPr>
+          <p:cNvPr id="11266" name="Picture 2" descr="https://i1.wp.com/www.complexsql.com/wp-content/uploads/2018/01/Alter-table.png?fit=400%2C400&amp;ssl=1"/>
+          <p:cNvPicPr>
+            <a:picLocks noChangeAspect="1" noChangeArrowheads="1"/>
+          </p:cNvPicPr>
+          <p:nvPr/>
+        </p:nvPicPr>
+        <p:blipFill>
+          <a:blip r:embed="rId2" cstate="print"/>
+          <a:srcRect/>
+          <a:stretch>
+            <a:fillRect/>
+          </a:stretch>
+        </p:blipFill>
+        <p:spPr bwMode="auto">
+          <a:xfrm>
+            <a:off x="3810000" y="4495800"/>
+            <a:ext cx="1828800" cy="1828800"/>
+          </a:xfrm>
+          <a:prstGeom prst="rect">
+            <a:avLst/>
+          </a:prstGeom>
+          <a:noFill/>
+        </p:spPr>
+      </p:pic>
     </p:spTree>
   </p:cSld>
   <p:clrMapOvr>
@@ -6008,10 +6531,10 @@
           <a:lstStyle/>
           <a:p>
             <a:r>
-              <a:rPr lang="en-US" dirty="0" smtClean="0"/>
-              <a:t>Exploratory Scenarios</a:t>
-            </a:r>
-            <a:endParaRPr lang="en-US" dirty="0"/>
+              <a:rPr lang="en-US" sz="4000" dirty="0" smtClean="0"/>
+              <a:t>Why Use Attribute Characterizations?</a:t>
+            </a:r>
+            <a:endParaRPr lang="en-US" sz="4000" dirty="0"/>
           </a:p>
         </p:txBody>
       </p:sp>
@@ -6031,48 +6554,104 @@
           <a:lstStyle/>
           <a:p>
             <a:r>
-              <a:rPr lang="en-US" sz="2600" i="1" dirty="0" smtClean="0">
+              <a:rPr lang="en-US" sz="2400" dirty="0" smtClean="0"/>
+              <a:t>The attribute characterizations help to </a:t>
+            </a:r>
+            <a:r>
+              <a:rPr lang="en-US" sz="2400" u="sng" dirty="0" smtClean="0"/>
+              <a:t>ensure attribute coverage</a:t>
+            </a:r>
+            <a:r>
+              <a:rPr lang="en-US" sz="2400" dirty="0" smtClean="0"/>
+              <a:t> as well as offering a rationale </a:t>
+            </a:r>
+            <a:r>
+              <a:rPr lang="en-US" sz="2400" i="1" dirty="0" smtClean="0">
                 <a:solidFill>
                   <a:srgbClr val="C00000"/>
                 </a:solidFill>
               </a:rPr>
-              <a:t>Exploratory scenarios</a:t>
-            </a:r>
-            <a:r>
-              <a:rPr lang="en-US" sz="2600" dirty="0" smtClean="0"/>
-              <a:t> push the envelope and stress the system.</a:t>
+              <a:t>for asking elicitation questions</a:t>
+            </a:r>
+            <a:r>
+              <a:rPr lang="en-US" sz="2400" dirty="0" smtClean="0"/>
+              <a:t>. (REQUIREMENTS ELICITATION)</a:t>
+            </a:r>
+          </a:p>
+          <a:p>
+            <a:r>
+              <a:rPr lang="en-US" sz="2400" dirty="0" smtClean="0"/>
+              <a:t>Examples of </a:t>
+            </a:r>
+            <a:r>
+              <a:rPr lang="en-US" sz="2400" i="1" dirty="0" smtClean="0">
+                <a:solidFill>
+                  <a:srgbClr val="C00000"/>
+                </a:solidFill>
+              </a:rPr>
+              <a:t>performance related questions</a:t>
+            </a:r>
+            <a:r>
+              <a:rPr lang="en-US" sz="2400" dirty="0" smtClean="0"/>
+              <a:t>:</a:t>
             </a:r>
           </a:p>
           <a:p>
             <a:pPr lvl="1"/>
             <a:r>
-              <a:rPr lang="en-US" sz="2200" dirty="0" smtClean="0"/>
-              <a:t>Improve the system's </a:t>
-            </a:r>
-            <a:r>
-              <a:rPr lang="en-US" sz="2200" b="1" dirty="0" smtClean="0"/>
-              <a:t>availability</a:t>
-            </a:r>
-            <a:r>
-              <a:rPr lang="en-US" sz="2200" dirty="0" smtClean="0"/>
-              <a:t> from 98% to 99.999%.</a:t>
+              <a:rPr lang="en-US" sz="1600" dirty="0" smtClean="0"/>
+              <a:t>What is the physical location of the hardware and its connectivity?</a:t>
             </a:r>
           </a:p>
           <a:p>
             <a:pPr lvl="1"/>
             <a:r>
-              <a:rPr lang="en-US" sz="2200" dirty="0" smtClean="0"/>
-              <a:t>Half of the servers go down during normal operation without affecting overall system </a:t>
-            </a:r>
-            <a:r>
-              <a:rPr lang="en-US" sz="2200" b="1" dirty="0" smtClean="0"/>
-              <a:t>availability</a:t>
-            </a:r>
-            <a:r>
-              <a:rPr lang="en-US" sz="2200" dirty="0" smtClean="0"/>
-              <a:t>.</a:t>
-            </a:r>
-            <a:endParaRPr lang="en-US" sz="2200" dirty="0"/>
+              <a:rPr lang="en-US" sz="1600" dirty="0" smtClean="0"/>
+              <a:t>What are the bandwidth characteristics of the network?</a:t>
+            </a:r>
+          </a:p>
+          <a:p>
+            <a:pPr lvl="1"/>
+            <a:r>
+              <a:rPr lang="en-US" sz="1600" dirty="0" smtClean="0"/>
+              <a:t>Do you use a synchronous or an asynchronous protocol?</a:t>
+            </a:r>
+          </a:p>
+          <a:p>
+            <a:pPr lvl="1"/>
+            <a:r>
+              <a:rPr lang="en-US" sz="1600" dirty="0" smtClean="0"/>
+              <a:t>What is the location of firewalls and their impact on performance?</a:t>
+            </a:r>
+          </a:p>
+          <a:p>
+            <a:pPr lvl="1"/>
+            <a:r>
+              <a:rPr lang="en-US" sz="1600" dirty="0" smtClean="0"/>
+              <a:t>What information is cached versus regenerated? Based upon what principles?</a:t>
+            </a:r>
+          </a:p>
+          <a:p>
+            <a:pPr lvl="1"/>
+            <a:r>
+              <a:rPr lang="en-US" sz="1600" dirty="0" smtClean="0"/>
+              <a:t>How are resources allocated to service requests?</a:t>
+            </a:r>
+          </a:p>
+          <a:p>
+            <a:pPr lvl="1"/>
+            <a:r>
+              <a:rPr lang="en-US" sz="1600" dirty="0" smtClean="0"/>
+              <a:t>How do we characterize client loading, (e.g., how many concurrent sessions, how many users)?</a:t>
+            </a:r>
+          </a:p>
+          <a:p>
+            <a:pPr lvl="1"/>
+            <a:r>
+              <a:rPr lang="en-US" sz="1600" dirty="0" smtClean="0"/>
+              <a:t>What are the performance characteristics of the middleware: load balancing, monitoring, reconfiguring services to resources?</a:t>
+            </a:r>
+            <a:endParaRPr lang="en-US" sz="1600" dirty="0"/>
           </a:p>
         </p:txBody>
       </p:sp>
@@ -6085,921 +6664,6 @@
 </file>
 
 <file path=ppt/slides/slide22.xml><?xml version="1.0" encoding="utf-8"?>
-<p:sld xmlns:a="http://schemas.openxmlformats.org/drawingml/2006/main" xmlns:r="http://schemas.openxmlformats.org/officeDocument/2006/relationships" xmlns:p="http://schemas.openxmlformats.org/presentationml/2006/main">
-  <p:cSld>
-    <p:spTree>
-      <p:nvGrpSpPr>
-        <p:cNvPr id="1" name=""/>
-        <p:cNvGrpSpPr/>
-        <p:nvPr/>
-      </p:nvGrpSpPr>
-      <p:grpSpPr>
-        <a:xfrm>
-          <a:off x="0" y="0"/>
-          <a:ext cx="0" cy="0"/>
-          <a:chOff x="0" y="0"/>
-          <a:chExt cx="0" cy="0"/>
-        </a:xfrm>
-      </p:grpSpPr>
-      <p:sp>
-        <p:nvSpPr>
-          <p:cNvPr id="2" name="Title 1"/>
-          <p:cNvSpPr>
-            <a:spLocks noGrp="1"/>
-          </p:cNvSpPr>
-          <p:nvPr>
-            <p:ph type="title"/>
-          </p:nvPr>
-        </p:nvSpPr>
-        <p:spPr/>
-        <p:txBody>
-          <a:bodyPr/>
-          <a:lstStyle/>
-          <a:p>
-            <a:r>
-              <a:rPr lang="en-US" dirty="0" smtClean="0"/>
-              <a:t>Quality Attribute Scenario Representation [1]</a:t>
-            </a:r>
-            <a:endParaRPr lang="en-US" dirty="0"/>
-          </a:p>
-        </p:txBody>
-      </p:sp>
-      <p:sp>
-        <p:nvSpPr>
-          <p:cNvPr id="3" name="Content Placeholder 2"/>
-          <p:cNvSpPr>
-            <a:spLocks noGrp="1"/>
-          </p:cNvSpPr>
-          <p:nvPr>
-            <p:ph idx="1"/>
-          </p:nvPr>
-        </p:nvSpPr>
-        <p:spPr/>
-        <p:txBody>
-          <a:bodyPr/>
-          <a:lstStyle/>
-          <a:p>
-            <a:r>
-              <a:rPr lang="en-US" sz="2400" dirty="0" smtClean="0"/>
-              <a:t>Quality attribute scenarios have six parts: Stimulus, Stimulus Source, Response, Response Measure, Environment, Artifact.</a:t>
-            </a:r>
-          </a:p>
-          <a:p>
-            <a:r>
-              <a:rPr lang="en-US" sz="2400" dirty="0" smtClean="0"/>
-              <a:t>The environment is the set of circumstances in which the scenario takes place.</a:t>
-            </a:r>
-          </a:p>
-        </p:txBody>
-      </p:sp>
-      <p:pic>
-        <p:nvPicPr>
-          <p:cNvPr id="26625" name="Picture 1"/>
-          <p:cNvPicPr>
-            <a:picLocks noChangeAspect="1" noChangeArrowheads="1"/>
-          </p:cNvPicPr>
-          <p:nvPr/>
-        </p:nvPicPr>
-        <p:blipFill>
-          <a:blip r:embed="rId2" cstate="print"/>
-          <a:srcRect/>
-          <a:stretch>
-            <a:fillRect/>
-          </a:stretch>
-        </p:blipFill>
-        <p:spPr bwMode="auto">
-          <a:xfrm>
-            <a:off x="1690688" y="4035425"/>
-            <a:ext cx="5762625" cy="1908175"/>
-          </a:xfrm>
-          <a:prstGeom prst="rect">
-            <a:avLst/>
-          </a:prstGeom>
-          <a:noFill/>
-          <a:ln w="9525">
-            <a:noFill/>
-            <a:miter lim="800000"/>
-            <a:headEnd/>
-            <a:tailEnd/>
-          </a:ln>
-        </p:spPr>
-      </p:pic>
-    </p:spTree>
-  </p:cSld>
-  <p:clrMapOvr>
-    <a:masterClrMapping/>
-  </p:clrMapOvr>
-</p:sld>
-</file>
-
-<file path=ppt/slides/slide23.xml><?xml version="1.0" encoding="utf-8"?>
-<p:sld xmlns:a="http://schemas.openxmlformats.org/drawingml/2006/main" xmlns:r="http://schemas.openxmlformats.org/officeDocument/2006/relationships" xmlns:p="http://schemas.openxmlformats.org/presentationml/2006/main">
-  <p:cSld>
-    <p:spTree>
-      <p:nvGrpSpPr>
-        <p:cNvPr id="1" name=""/>
-        <p:cNvGrpSpPr/>
-        <p:nvPr/>
-      </p:nvGrpSpPr>
-      <p:grpSpPr>
-        <a:xfrm>
-          <a:off x="0" y="0"/>
-          <a:ext cx="0" cy="0"/>
-          <a:chOff x="0" y="0"/>
-          <a:chExt cx="0" cy="0"/>
-        </a:xfrm>
-      </p:grpSpPr>
-      <p:sp>
-        <p:nvSpPr>
-          <p:cNvPr id="2" name="Title 1"/>
-          <p:cNvSpPr>
-            <a:spLocks noGrp="1"/>
-          </p:cNvSpPr>
-          <p:nvPr>
-            <p:ph type="title"/>
-          </p:nvPr>
-        </p:nvSpPr>
-        <p:spPr/>
-        <p:txBody>
-          <a:bodyPr/>
-          <a:lstStyle/>
-          <a:p>
-            <a:r>
-              <a:rPr lang="en-US" dirty="0" smtClean="0"/>
-              <a:t>Example: Availability Scenario</a:t>
-            </a:r>
-            <a:endParaRPr lang="en-US" dirty="0"/>
-          </a:p>
-        </p:txBody>
-      </p:sp>
-      <p:sp>
-        <p:nvSpPr>
-          <p:cNvPr id="3" name="Content Placeholder 2"/>
-          <p:cNvSpPr>
-            <a:spLocks noGrp="1"/>
-          </p:cNvSpPr>
-          <p:nvPr>
-            <p:ph idx="1"/>
-          </p:nvPr>
-        </p:nvSpPr>
-        <p:spPr/>
-        <p:txBody>
-          <a:bodyPr/>
-          <a:lstStyle/>
-          <a:p>
-            <a:r>
-              <a:rPr lang="en-US" sz="2000" i="1" dirty="0" smtClean="0">
-                <a:solidFill>
-                  <a:srgbClr val="C00000"/>
-                </a:solidFill>
-              </a:rPr>
-              <a:t>Availability</a:t>
-            </a:r>
-            <a:r>
-              <a:rPr lang="en-US" sz="2000" dirty="0" smtClean="0"/>
-              <a:t> refers to a property of software that it is there and </a:t>
-            </a:r>
-            <a:r>
-              <a:rPr lang="en-US" sz="2000" u="sng" dirty="0" smtClean="0"/>
-              <a:t>ready to carry out its task</a:t>
-            </a:r>
-            <a:r>
-              <a:rPr lang="en-US" sz="2000" dirty="0" smtClean="0"/>
-              <a:t> when you need it to be.</a:t>
-            </a:r>
-          </a:p>
-          <a:p>
-            <a:r>
-              <a:rPr lang="en-US" sz="2000" dirty="0" smtClean="0"/>
-              <a:t>Mean Time Between Failure (MTBF), Mean Time To Recovery (MTTR).</a:t>
-            </a:r>
-            <a:endParaRPr lang="en-US" sz="2000" dirty="0"/>
-          </a:p>
-        </p:txBody>
-      </p:sp>
-      <p:pic>
-        <p:nvPicPr>
-          <p:cNvPr id="65538" name="Picture 2"/>
-          <p:cNvPicPr>
-            <a:picLocks noChangeAspect="1" noChangeArrowheads="1"/>
-          </p:cNvPicPr>
-          <p:nvPr/>
-        </p:nvPicPr>
-        <p:blipFill>
-          <a:blip r:embed="rId2" cstate="print"/>
-          <a:srcRect/>
-          <a:stretch>
-            <a:fillRect/>
-          </a:stretch>
-        </p:blipFill>
-        <p:spPr bwMode="auto">
-          <a:xfrm>
-            <a:off x="1333500" y="3492500"/>
-            <a:ext cx="6477000" cy="2146300"/>
-          </a:xfrm>
-          <a:prstGeom prst="rect">
-            <a:avLst/>
-          </a:prstGeom>
-          <a:noFill/>
-          <a:ln w="9525">
-            <a:noFill/>
-            <a:miter lim="800000"/>
-            <a:headEnd/>
-            <a:tailEnd/>
-          </a:ln>
-        </p:spPr>
-      </p:pic>
-    </p:spTree>
-  </p:cSld>
-  <p:clrMapOvr>
-    <a:masterClrMapping/>
-  </p:clrMapOvr>
-</p:sld>
-</file>
-
-<file path=ppt/slides/slide24.xml><?xml version="1.0" encoding="utf-8"?>
-<p:sld xmlns:a="http://schemas.openxmlformats.org/drawingml/2006/main" xmlns:r="http://schemas.openxmlformats.org/officeDocument/2006/relationships" xmlns:p="http://schemas.openxmlformats.org/presentationml/2006/main">
-  <p:cSld>
-    <p:spTree>
-      <p:nvGrpSpPr>
-        <p:cNvPr id="1" name=""/>
-        <p:cNvGrpSpPr/>
-        <p:nvPr/>
-      </p:nvGrpSpPr>
-      <p:grpSpPr>
-        <a:xfrm>
-          <a:off x="0" y="0"/>
-          <a:ext cx="0" cy="0"/>
-          <a:chOff x="0" y="0"/>
-          <a:chExt cx="0" cy="0"/>
-        </a:xfrm>
-      </p:grpSpPr>
-      <p:sp>
-        <p:nvSpPr>
-          <p:cNvPr id="2" name="Title 1"/>
-          <p:cNvSpPr>
-            <a:spLocks noGrp="1"/>
-          </p:cNvSpPr>
-          <p:nvPr>
-            <p:ph type="title"/>
-          </p:nvPr>
-        </p:nvSpPr>
-        <p:spPr/>
-        <p:txBody>
-          <a:bodyPr/>
-          <a:lstStyle/>
-          <a:p>
-            <a:r>
-              <a:rPr lang="en-US" dirty="0" smtClean="0"/>
-              <a:t>More Complex Availability Scenario</a:t>
-            </a:r>
-            <a:endParaRPr lang="en-US" dirty="0"/>
-          </a:p>
-        </p:txBody>
-      </p:sp>
-      <p:pic>
-        <p:nvPicPr>
-          <p:cNvPr id="23553" name="Picture 1"/>
-          <p:cNvPicPr>
-            <a:picLocks noChangeAspect="1" noChangeArrowheads="1"/>
-          </p:cNvPicPr>
-          <p:nvPr/>
-        </p:nvPicPr>
-        <p:blipFill>
-          <a:blip r:embed="rId2" cstate="print"/>
-          <a:srcRect/>
-          <a:stretch>
-            <a:fillRect/>
-          </a:stretch>
-        </p:blipFill>
-        <p:spPr bwMode="auto">
-          <a:xfrm>
-            <a:off x="1127125" y="2438400"/>
-            <a:ext cx="6889750" cy="2597150"/>
-          </a:xfrm>
-          <a:prstGeom prst="rect">
-            <a:avLst/>
-          </a:prstGeom>
-          <a:noFill/>
-          <a:ln w="9525">
-            <a:noFill/>
-            <a:miter lim="800000"/>
-            <a:headEnd/>
-            <a:tailEnd/>
-          </a:ln>
-        </p:spPr>
-      </p:pic>
-    </p:spTree>
-  </p:cSld>
-  <p:clrMapOvr>
-    <a:masterClrMapping/>
-  </p:clrMapOvr>
-</p:sld>
-</file>
-
-<file path=ppt/slides/slide25.xml><?xml version="1.0" encoding="utf-8"?>
-<p:sld xmlns:a="http://schemas.openxmlformats.org/drawingml/2006/main" xmlns:r="http://schemas.openxmlformats.org/officeDocument/2006/relationships" xmlns:p="http://schemas.openxmlformats.org/presentationml/2006/main">
-  <p:cSld>
-    <p:spTree>
-      <p:nvGrpSpPr>
-        <p:cNvPr id="1" name=""/>
-        <p:cNvGrpSpPr/>
-        <p:nvPr/>
-      </p:nvGrpSpPr>
-      <p:grpSpPr>
-        <a:xfrm>
-          <a:off x="0" y="0"/>
-          <a:ext cx="0" cy="0"/>
-          <a:chOff x="0" y="0"/>
-          <a:chExt cx="0" cy="0"/>
-        </a:xfrm>
-      </p:grpSpPr>
-      <p:sp>
-        <p:nvSpPr>
-          <p:cNvPr id="2" name="Title 1"/>
-          <p:cNvSpPr>
-            <a:spLocks noGrp="1"/>
-          </p:cNvSpPr>
-          <p:nvPr>
-            <p:ph type="title"/>
-          </p:nvPr>
-        </p:nvSpPr>
-        <p:spPr/>
-        <p:txBody>
-          <a:bodyPr/>
-          <a:lstStyle/>
-          <a:p>
-            <a:r>
-              <a:rPr lang="en-US" dirty="0" smtClean="0"/>
-              <a:t>Architectural Tactics</a:t>
-            </a:r>
-            <a:endParaRPr lang="en-US" dirty="0"/>
-          </a:p>
-        </p:txBody>
-      </p:sp>
-      <p:sp>
-        <p:nvSpPr>
-          <p:cNvPr id="3" name="Content Placeholder 2"/>
-          <p:cNvSpPr>
-            <a:spLocks noGrp="1"/>
-          </p:cNvSpPr>
-          <p:nvPr>
-            <p:ph idx="1"/>
-          </p:nvPr>
-        </p:nvSpPr>
-        <p:spPr/>
-        <p:txBody>
-          <a:bodyPr/>
-          <a:lstStyle/>
-          <a:p>
-            <a:r>
-              <a:rPr lang="en-US" sz="2200" i="1" dirty="0" smtClean="0">
-                <a:solidFill>
-                  <a:srgbClr val="C00000"/>
-                </a:solidFill>
-              </a:rPr>
-              <a:t>Architectural tactics</a:t>
-            </a:r>
-            <a:r>
-              <a:rPr lang="en-US" sz="2200" dirty="0" smtClean="0"/>
-              <a:t> – the </a:t>
-            </a:r>
-            <a:r>
-              <a:rPr lang="en-US" sz="2200" u="sng" dirty="0" smtClean="0"/>
-              <a:t>techniques</a:t>
-            </a:r>
-            <a:r>
-              <a:rPr lang="en-US" sz="2200" dirty="0" smtClean="0"/>
-              <a:t> an architect can use to achieve the required quality attributes.</a:t>
-            </a:r>
-          </a:p>
-          <a:p>
-            <a:r>
-              <a:rPr lang="en-US" sz="2200" dirty="0" smtClean="0"/>
-              <a:t>A </a:t>
-            </a:r>
-            <a:r>
-              <a:rPr lang="en-US" sz="2200" i="1" dirty="0" smtClean="0">
-                <a:solidFill>
-                  <a:srgbClr val="C00000"/>
-                </a:solidFill>
-              </a:rPr>
-              <a:t>tactic</a:t>
-            </a:r>
-            <a:r>
-              <a:rPr lang="en-US" sz="2200" dirty="0" smtClean="0"/>
-              <a:t> is a </a:t>
-            </a:r>
-            <a:r>
-              <a:rPr lang="en-US" sz="2200" u="sng" dirty="0" smtClean="0"/>
-              <a:t>design decision</a:t>
-            </a:r>
-            <a:r>
-              <a:rPr lang="en-US" sz="2200" dirty="0" smtClean="0"/>
-              <a:t> that influences the achievement of a quality attribute response—tactics directly affect the system's </a:t>
-            </a:r>
-            <a:r>
-              <a:rPr lang="en-US" sz="2200" u="sng" dirty="0" smtClean="0"/>
-              <a:t>response</a:t>
-            </a:r>
-            <a:r>
-              <a:rPr lang="en-US" sz="2200" dirty="0" smtClean="0"/>
-              <a:t> to some </a:t>
-            </a:r>
-            <a:r>
-              <a:rPr lang="en-US" sz="2200" u="sng" dirty="0" smtClean="0"/>
-              <a:t>stimulus</a:t>
-            </a:r>
-            <a:r>
-              <a:rPr lang="en-US" sz="2200" dirty="0" smtClean="0"/>
-              <a:t>.</a:t>
-            </a:r>
-          </a:p>
-          <a:p>
-            <a:endParaRPr lang="en-US" sz="2200" dirty="0" smtClean="0"/>
-          </a:p>
-          <a:p>
-            <a:endParaRPr lang="en-US" sz="2200" dirty="0" smtClean="0"/>
-          </a:p>
-          <a:p>
-            <a:endParaRPr lang="en-US" sz="2200" dirty="0" smtClean="0"/>
-          </a:p>
-          <a:p>
-            <a:endParaRPr lang="en-US" sz="2200" dirty="0" smtClean="0"/>
-          </a:p>
-          <a:p>
-            <a:r>
-              <a:rPr lang="en-US" sz="2200" dirty="0" smtClean="0"/>
-              <a:t>If </a:t>
-            </a:r>
-            <a:r>
-              <a:rPr lang="en-US" sz="2200" i="1" dirty="0" smtClean="0">
-                <a:solidFill>
-                  <a:srgbClr val="C00000"/>
-                </a:solidFill>
-              </a:rPr>
-              <a:t>no pattern exists</a:t>
-            </a:r>
-            <a:r>
-              <a:rPr lang="en-US" sz="2200" dirty="0" smtClean="0"/>
-              <a:t> to realize the architect's design goal, </a:t>
-            </a:r>
-            <a:r>
-              <a:rPr lang="en-US" sz="2200" b="1" dirty="0" smtClean="0"/>
-              <a:t>tactics</a:t>
-            </a:r>
-            <a:r>
-              <a:rPr lang="en-US" sz="2200" dirty="0" smtClean="0"/>
-              <a:t> allow the architect to construct a design fragment from “first principles.”</a:t>
-            </a:r>
-          </a:p>
-        </p:txBody>
-      </p:sp>
-      <p:pic>
-        <p:nvPicPr>
-          <p:cNvPr id="1027" name="Picture 3"/>
-          <p:cNvPicPr>
-            <a:picLocks noChangeAspect="1" noChangeArrowheads="1"/>
-          </p:cNvPicPr>
-          <p:nvPr/>
-        </p:nvPicPr>
-        <p:blipFill>
-          <a:blip r:embed="rId2" cstate="print"/>
-          <a:srcRect/>
-          <a:stretch>
-            <a:fillRect/>
-          </a:stretch>
-        </p:blipFill>
-        <p:spPr bwMode="auto">
-          <a:xfrm>
-            <a:off x="2820924" y="3505200"/>
-            <a:ext cx="3579876" cy="1426464"/>
-          </a:xfrm>
-          <a:prstGeom prst="rect">
-            <a:avLst/>
-          </a:prstGeom>
-          <a:noFill/>
-          <a:ln w="9525">
-            <a:noFill/>
-            <a:miter lim="800000"/>
-            <a:headEnd/>
-            <a:tailEnd/>
-          </a:ln>
-        </p:spPr>
-      </p:pic>
-    </p:spTree>
-  </p:cSld>
-  <p:clrMapOvr>
-    <a:masterClrMapping/>
-  </p:clrMapOvr>
-</p:sld>
-</file>
-
-<file path=ppt/slides/slide26.xml><?xml version="1.0" encoding="utf-8"?>
-<p:sld xmlns:a="http://schemas.openxmlformats.org/drawingml/2006/main" xmlns:r="http://schemas.openxmlformats.org/officeDocument/2006/relationships" xmlns:p="http://schemas.openxmlformats.org/presentationml/2006/main">
-  <p:cSld>
-    <p:spTree>
-      <p:nvGrpSpPr>
-        <p:cNvPr id="1" name=""/>
-        <p:cNvGrpSpPr/>
-        <p:nvPr/>
-      </p:nvGrpSpPr>
-      <p:grpSpPr>
-        <a:xfrm>
-          <a:off x="0" y="0"/>
-          <a:ext cx="0" cy="0"/>
-          <a:chOff x="0" y="0"/>
-          <a:chExt cx="0" cy="0"/>
-        </a:xfrm>
-      </p:grpSpPr>
-      <p:sp>
-        <p:nvSpPr>
-          <p:cNvPr id="2" name="Title 1"/>
-          <p:cNvSpPr>
-            <a:spLocks noGrp="1"/>
-          </p:cNvSpPr>
-          <p:nvPr>
-            <p:ph type="title"/>
-          </p:nvPr>
-        </p:nvSpPr>
-        <p:spPr/>
-        <p:txBody>
-          <a:bodyPr/>
-          <a:lstStyle/>
-          <a:p>
-            <a:r>
-              <a:rPr lang="en-US" dirty="0" smtClean="0"/>
-              <a:t>Example: Tactics for Availability</a:t>
-            </a:r>
-            <a:endParaRPr lang="en-US" dirty="0"/>
-          </a:p>
-        </p:txBody>
-      </p:sp>
-      <p:sp>
-        <p:nvSpPr>
-          <p:cNvPr id="3" name="Content Placeholder 2"/>
-          <p:cNvSpPr>
-            <a:spLocks noGrp="1"/>
-          </p:cNvSpPr>
-          <p:nvPr>
-            <p:ph idx="1"/>
-          </p:nvPr>
-        </p:nvSpPr>
-        <p:spPr/>
-        <p:txBody>
-          <a:bodyPr/>
-          <a:lstStyle/>
-          <a:p>
-            <a:r>
-              <a:rPr lang="en-US" sz="2400" dirty="0" smtClean="0"/>
-              <a:t>How to design an architecture for availability?</a:t>
-            </a:r>
-          </a:p>
-          <a:p>
-            <a:pPr lvl="1"/>
-            <a:r>
-              <a:rPr lang="en-US" sz="2000" dirty="0" smtClean="0"/>
-              <a:t>Detect Faults.</a:t>
-            </a:r>
-          </a:p>
-          <a:p>
-            <a:pPr lvl="2"/>
-            <a:r>
-              <a:rPr lang="en-US" sz="1600" dirty="0" smtClean="0"/>
-              <a:t>Ping/echo.</a:t>
-            </a:r>
-          </a:p>
-          <a:p>
-            <a:pPr lvl="2"/>
-            <a:r>
-              <a:rPr lang="en-US" sz="1600" dirty="0" smtClean="0"/>
-              <a:t>Monitor.</a:t>
-            </a:r>
-          </a:p>
-          <a:p>
-            <a:pPr lvl="2"/>
-            <a:r>
-              <a:rPr lang="en-US" sz="1600" dirty="0" smtClean="0"/>
-              <a:t>Heartbeat.</a:t>
-            </a:r>
-          </a:p>
-          <a:p>
-            <a:pPr lvl="2"/>
-            <a:r>
-              <a:rPr lang="en-US" sz="1600" dirty="0" smtClean="0"/>
-              <a:t>Timeout.</a:t>
-            </a:r>
-          </a:p>
-          <a:p>
-            <a:pPr lvl="1"/>
-            <a:r>
-              <a:rPr lang="en-US" sz="2000" dirty="0" smtClean="0"/>
-              <a:t>Recover from Faults.</a:t>
-            </a:r>
-          </a:p>
-          <a:p>
-            <a:pPr lvl="2"/>
-            <a:r>
-              <a:rPr lang="en-US" sz="1600" dirty="0" smtClean="0"/>
-              <a:t>Active redundancy (hot spare).</a:t>
-            </a:r>
-          </a:p>
-          <a:p>
-            <a:pPr lvl="2"/>
-            <a:r>
-              <a:rPr lang="en-US" sz="1600" dirty="0" smtClean="0"/>
-              <a:t>Passive redundancy (warm spare).</a:t>
-            </a:r>
-          </a:p>
-          <a:p>
-            <a:pPr lvl="2"/>
-            <a:r>
-              <a:rPr lang="en-US" sz="1600" dirty="0" smtClean="0"/>
-              <a:t>Rollback.</a:t>
-            </a:r>
-          </a:p>
-          <a:p>
-            <a:pPr lvl="2"/>
-            <a:r>
-              <a:rPr lang="en-US" sz="1600" dirty="0" smtClean="0"/>
-              <a:t>Retry.</a:t>
-            </a:r>
-          </a:p>
-          <a:p>
-            <a:pPr lvl="1"/>
-            <a:r>
-              <a:rPr lang="en-US" sz="2000" dirty="0" smtClean="0"/>
-              <a:t>Prevent Faults.</a:t>
-            </a:r>
-          </a:p>
-          <a:p>
-            <a:pPr lvl="2"/>
-            <a:r>
-              <a:rPr lang="en-US" sz="1600" dirty="0" smtClean="0"/>
-              <a:t>Transactions. (ACID properties.)</a:t>
-            </a:r>
-          </a:p>
-          <a:p>
-            <a:pPr lvl="2"/>
-            <a:r>
-              <a:rPr lang="en-US" sz="1600" dirty="0" smtClean="0"/>
-              <a:t>Exception prevention.</a:t>
-            </a:r>
-            <a:endParaRPr lang="en-US" sz="1600" dirty="0"/>
-          </a:p>
-        </p:txBody>
-      </p:sp>
-      <p:pic>
-        <p:nvPicPr>
-          <p:cNvPr id="4" name="Picture 4"/>
-          <p:cNvPicPr>
-            <a:picLocks noChangeAspect="1" noChangeArrowheads="1"/>
-          </p:cNvPicPr>
-          <p:nvPr/>
-        </p:nvPicPr>
-        <p:blipFill>
-          <a:blip r:embed="rId2" cstate="print"/>
-          <a:srcRect/>
-          <a:stretch>
-            <a:fillRect/>
-          </a:stretch>
-        </p:blipFill>
-        <p:spPr bwMode="auto">
-          <a:xfrm>
-            <a:off x="6248400" y="1981200"/>
-            <a:ext cx="2314575" cy="1981200"/>
-          </a:xfrm>
-          <a:prstGeom prst="rect">
-            <a:avLst/>
-          </a:prstGeom>
-          <a:noFill/>
-          <a:ln w="9525">
-            <a:noFill/>
-            <a:miter lim="800000"/>
-            <a:headEnd/>
-            <a:tailEnd/>
-          </a:ln>
-          <a:effectLst/>
-        </p:spPr>
-      </p:pic>
-      <p:pic>
-        <p:nvPicPr>
-          <p:cNvPr id="36868" name="Picture 4" descr="https://www.schranner.com/images/default-source/insights-blog/title-images/tactics7642960fcbe368bdbc66ff000097e6db.png?sfvrsn=51a1fe69_4"/>
-          <p:cNvPicPr>
-            <a:picLocks noChangeAspect="1" noChangeArrowheads="1"/>
-          </p:cNvPicPr>
-          <p:nvPr/>
-        </p:nvPicPr>
-        <p:blipFill>
-          <a:blip r:embed="rId3" cstate="print"/>
-          <a:srcRect/>
-          <a:stretch>
-            <a:fillRect/>
-          </a:stretch>
-        </p:blipFill>
-        <p:spPr bwMode="auto">
-          <a:xfrm>
-            <a:off x="5461355" y="4267200"/>
-            <a:ext cx="2844445" cy="2133334"/>
-          </a:xfrm>
-          <a:prstGeom prst="rect">
-            <a:avLst/>
-          </a:prstGeom>
-          <a:noFill/>
-        </p:spPr>
-      </p:pic>
-    </p:spTree>
-  </p:cSld>
-  <p:clrMapOvr>
-    <a:masterClrMapping/>
-  </p:clrMapOvr>
-</p:sld>
-</file>
-
-<file path=ppt/slides/slide27.xml><?xml version="1.0" encoding="utf-8"?>
-<p:sld xmlns:a="http://schemas.openxmlformats.org/drawingml/2006/main" xmlns:r="http://schemas.openxmlformats.org/officeDocument/2006/relationships" xmlns:p="http://schemas.openxmlformats.org/presentationml/2006/main">
-  <p:cSld>
-    <p:spTree>
-      <p:nvGrpSpPr>
-        <p:cNvPr id="1" name=""/>
-        <p:cNvGrpSpPr/>
-        <p:nvPr/>
-      </p:nvGrpSpPr>
-      <p:grpSpPr>
-        <a:xfrm>
-          <a:off x="0" y="0"/>
-          <a:ext cx="0" cy="0"/>
-          <a:chOff x="0" y="0"/>
-          <a:chExt cx="0" cy="0"/>
-        </a:xfrm>
-      </p:grpSpPr>
-      <p:sp>
-        <p:nvSpPr>
-          <p:cNvPr id="2" name="Title 1"/>
-          <p:cNvSpPr>
-            <a:spLocks noGrp="1"/>
-          </p:cNvSpPr>
-          <p:nvPr>
-            <p:ph type="title"/>
-          </p:nvPr>
-        </p:nvSpPr>
-        <p:spPr/>
-        <p:txBody>
-          <a:bodyPr/>
-          <a:lstStyle/>
-          <a:p>
-            <a:r>
-              <a:rPr lang="en-US" dirty="0" smtClean="0"/>
-              <a:t>Tools for Testing Availability</a:t>
-            </a:r>
-            <a:endParaRPr lang="en-US" dirty="0"/>
-          </a:p>
-        </p:txBody>
-      </p:sp>
-      <p:sp>
-        <p:nvSpPr>
-          <p:cNvPr id="3" name="Content Placeholder 2"/>
-          <p:cNvSpPr>
-            <a:spLocks noGrp="1"/>
-          </p:cNvSpPr>
-          <p:nvPr>
-            <p:ph idx="1"/>
-          </p:nvPr>
-        </p:nvSpPr>
-        <p:spPr/>
-        <p:txBody>
-          <a:bodyPr/>
-          <a:lstStyle/>
-          <a:p>
-            <a:r>
-              <a:rPr lang="en-US" sz="2400" dirty="0" smtClean="0">
-                <a:hlinkClick r:id="rId2"/>
-              </a:rPr>
-              <a:t>https://uptimerobot.com/</a:t>
-            </a:r>
-            <a:endParaRPr lang="en-US" sz="2400" dirty="0" smtClean="0"/>
-          </a:p>
-          <a:p>
-            <a:r>
-              <a:rPr lang="en-US" sz="2400" dirty="0" smtClean="0">
-                <a:hlinkClick r:id="rId3"/>
-              </a:rPr>
-              <a:t>https://www.pingdom.com/</a:t>
-            </a:r>
-            <a:endParaRPr lang="en-US" sz="2400" dirty="0" smtClean="0"/>
-          </a:p>
-          <a:p>
-            <a:r>
-              <a:rPr lang="en-US" sz="2400" dirty="0" smtClean="0">
-                <a:hlinkClick r:id="rId4"/>
-              </a:rPr>
-              <a:t>https://jmeter.apache.org/</a:t>
-            </a:r>
-            <a:endParaRPr lang="en-US" sz="2400" dirty="0" smtClean="0"/>
-          </a:p>
-        </p:txBody>
-      </p:sp>
-      <p:sp>
-        <p:nvSpPr>
-          <p:cNvPr id="1026" name="AutoShape 2" descr="17 Software Development Trends for 2025 &amp; Beyond"/>
-          <p:cNvSpPr>
-            <a:spLocks noChangeAspect="1" noChangeArrowheads="1"/>
-          </p:cNvSpPr>
-          <p:nvPr/>
-        </p:nvSpPr>
-        <p:spPr bwMode="auto">
-          <a:xfrm>
-            <a:off x="155575" y="-144463"/>
-            <a:ext cx="304800" cy="304801"/>
-          </a:xfrm>
-          <a:prstGeom prst="rect">
-            <a:avLst/>
-          </a:prstGeom>
-          <a:noFill/>
-        </p:spPr>
-        <p:txBody>
-          <a:bodyPr vert="horz" wrap="square" lIns="91440" tIns="45720" rIns="91440" bIns="45720" numCol="1" anchor="t" anchorCtr="0" compatLnSpc="1">
-            <a:prstTxWarp prst="textNoShape">
-              <a:avLst/>
-            </a:prstTxWarp>
-          </a:bodyPr>
-          <a:lstStyle/>
-          <a:p>
-            <a:endParaRPr lang="en-US"/>
-          </a:p>
-        </p:txBody>
-      </p:sp>
-      <p:sp>
-        <p:nvSpPr>
-          <p:cNvPr id="1028" name="AutoShape 4" descr="https://www.netsolutions.com/wp-content/uploads/2023/03/The-Future-of-Software-Development-in-2024-and-Beyond.webp"/>
-          <p:cNvSpPr>
-            <a:spLocks noChangeAspect="1" noChangeArrowheads="1"/>
-          </p:cNvSpPr>
-          <p:nvPr/>
-        </p:nvSpPr>
-        <p:spPr bwMode="auto">
-          <a:xfrm>
-            <a:off x="155575" y="-2590800"/>
-            <a:ext cx="9601200" cy="5400675"/>
-          </a:xfrm>
-          <a:prstGeom prst="rect">
-            <a:avLst/>
-          </a:prstGeom>
-          <a:noFill/>
-        </p:spPr>
-        <p:txBody>
-          <a:bodyPr vert="horz" wrap="square" lIns="91440" tIns="45720" rIns="91440" bIns="45720" numCol="1" anchor="t" anchorCtr="0" compatLnSpc="1">
-            <a:prstTxWarp prst="textNoShape">
-              <a:avLst/>
-            </a:prstTxWarp>
-          </a:bodyPr>
-          <a:lstStyle/>
-          <a:p>
-            <a:endParaRPr lang="en-US"/>
-          </a:p>
-        </p:txBody>
-      </p:sp>
-      <p:pic>
-        <p:nvPicPr>
-          <p:cNvPr id="1029" name="Picture 5"/>
-          <p:cNvPicPr>
-            <a:picLocks noChangeAspect="1" noChangeArrowheads="1"/>
-          </p:cNvPicPr>
-          <p:nvPr/>
-        </p:nvPicPr>
-        <p:blipFill>
-          <a:blip r:embed="rId5" cstate="print"/>
-          <a:srcRect/>
-          <a:stretch>
-            <a:fillRect/>
-          </a:stretch>
-        </p:blipFill>
-        <p:spPr bwMode="auto">
-          <a:xfrm>
-            <a:off x="2301875" y="3387725"/>
-            <a:ext cx="4540250" cy="2555875"/>
-          </a:xfrm>
-          <a:prstGeom prst="rect">
-            <a:avLst/>
-          </a:prstGeom>
-          <a:noFill/>
-          <a:ln w="9525">
-            <a:noFill/>
-            <a:miter lim="800000"/>
-            <a:headEnd/>
-            <a:tailEnd/>
-          </a:ln>
-        </p:spPr>
-      </p:pic>
-    </p:spTree>
-  </p:cSld>
-  <p:clrMapOvr>
-    <a:masterClrMapping/>
-  </p:clrMapOvr>
-</p:sld>
-</file>
-
-<file path=ppt/slides/slide28.xml><?xml version="1.0" encoding="utf-8"?>
 <p:sld xmlns:a="http://schemas.openxmlformats.org/drawingml/2006/main" xmlns:r="http://schemas.openxmlformats.org/officeDocument/2006/relationships" xmlns:p="http://schemas.openxmlformats.org/presentationml/2006/main">
   <p:cSld>
     <p:spTree>
@@ -7050,6 +6714,777 @@
 </p:sld>
 </file>
 
+<file path=ppt/slides/slide23.xml><?xml version="1.0" encoding="utf-8"?>
+<p:sld xmlns:a="http://schemas.openxmlformats.org/drawingml/2006/main" xmlns:r="http://schemas.openxmlformats.org/officeDocument/2006/relationships" xmlns:p="http://schemas.openxmlformats.org/presentationml/2006/main">
+  <p:cSld>
+    <p:spTree>
+      <p:nvGrpSpPr>
+        <p:cNvPr id="1" name=""/>
+        <p:cNvGrpSpPr/>
+        <p:nvPr/>
+      </p:nvGrpSpPr>
+      <p:grpSpPr>
+        <a:xfrm>
+          <a:off x="0" y="0"/>
+          <a:ext cx="0" cy="0"/>
+          <a:chOff x="0" y="0"/>
+          <a:chExt cx="0" cy="0"/>
+        </a:xfrm>
+      </p:grpSpPr>
+      <p:sp>
+        <p:nvSpPr>
+          <p:cNvPr id="2" name="Title 1"/>
+          <p:cNvSpPr>
+            <a:spLocks noGrp="1"/>
+          </p:cNvSpPr>
+          <p:nvPr>
+            <p:ph type="title"/>
+          </p:nvPr>
+        </p:nvSpPr>
+        <p:spPr/>
+        <p:txBody>
+          <a:bodyPr/>
+          <a:lstStyle/>
+          <a:p>
+            <a:r>
+              <a:rPr lang="en-US" dirty="0" smtClean="0"/>
+              <a:t>Scenarios</a:t>
+            </a:r>
+            <a:endParaRPr lang="en-US" dirty="0"/>
+          </a:p>
+        </p:txBody>
+      </p:sp>
+      <p:sp>
+        <p:nvSpPr>
+          <p:cNvPr id="3" name="Content Placeholder 2"/>
+          <p:cNvSpPr>
+            <a:spLocks noGrp="1"/>
+          </p:cNvSpPr>
+          <p:nvPr>
+            <p:ph idx="1"/>
+          </p:nvPr>
+        </p:nvSpPr>
+        <p:spPr/>
+        <p:txBody>
+          <a:bodyPr/>
+          <a:lstStyle/>
+          <a:p>
+            <a:r>
+              <a:rPr lang="en-US" sz="2200" dirty="0" smtClean="0"/>
+              <a:t>Typically the first job of an architecture analysis is to precisely </a:t>
+            </a:r>
+            <a:r>
+              <a:rPr lang="en-US" sz="2200" i="1" dirty="0" smtClean="0">
+                <a:solidFill>
+                  <a:srgbClr val="C00000"/>
+                </a:solidFill>
+              </a:rPr>
+              <a:t>elicit the specific quality goals</a:t>
+            </a:r>
+            <a:r>
+              <a:rPr lang="en-US" sz="2200" dirty="0" smtClean="0"/>
+              <a:t> against which the architecture will be judged. The </a:t>
+            </a:r>
+            <a:r>
+              <a:rPr lang="en-US" sz="2200" i="1" dirty="0" smtClean="0">
+                <a:solidFill>
+                  <a:srgbClr val="C00000"/>
+                </a:solidFill>
+              </a:rPr>
+              <a:t>mechanism</a:t>
+            </a:r>
+            <a:r>
+              <a:rPr lang="en-US" sz="2200" dirty="0" smtClean="0"/>
+              <a:t> that we use for this elicitation is the </a:t>
+            </a:r>
+            <a:r>
+              <a:rPr lang="en-US" sz="2200" u="sng" dirty="0" smtClean="0"/>
+              <a:t>scenario</a:t>
+            </a:r>
+            <a:r>
+              <a:rPr lang="en-US" sz="2200" dirty="0" smtClean="0"/>
+              <a:t>.</a:t>
+            </a:r>
+          </a:p>
+          <a:p>
+            <a:r>
+              <a:rPr lang="en-US" sz="2200" i="1" dirty="0" smtClean="0">
+                <a:solidFill>
+                  <a:srgbClr val="C00000"/>
+                </a:solidFill>
+              </a:rPr>
+              <a:t>A scenario</a:t>
+            </a:r>
+            <a:r>
+              <a:rPr lang="en-US" sz="2200" dirty="0" smtClean="0"/>
+              <a:t> is a </a:t>
+            </a:r>
+            <a:r>
+              <a:rPr lang="en-US" sz="2200" u="sng" dirty="0" smtClean="0"/>
+              <a:t>short statement</a:t>
+            </a:r>
+            <a:r>
+              <a:rPr lang="en-US" sz="2200" dirty="0" smtClean="0"/>
+              <a:t> describing an </a:t>
+            </a:r>
+            <a:r>
+              <a:rPr lang="en-US" sz="2200" u="sng" dirty="0" smtClean="0"/>
+              <a:t>interaction</a:t>
+            </a:r>
+            <a:r>
+              <a:rPr lang="en-US" sz="2200" dirty="0" smtClean="0"/>
+              <a:t> of one of the </a:t>
+            </a:r>
+            <a:r>
+              <a:rPr lang="en-US" sz="2200" u="sng" dirty="0" smtClean="0"/>
+              <a:t>stakeholders</a:t>
+            </a:r>
+            <a:r>
+              <a:rPr lang="en-US" sz="2200" dirty="0" smtClean="0"/>
+              <a:t> with the system.</a:t>
+            </a:r>
+          </a:p>
+          <a:p>
+            <a:pPr lvl="1"/>
+            <a:r>
+              <a:rPr lang="en-US" sz="1700" i="1" dirty="0" smtClean="0">
+                <a:solidFill>
+                  <a:srgbClr val="C00000"/>
+                </a:solidFill>
+              </a:rPr>
+              <a:t>A user</a:t>
+            </a:r>
+            <a:r>
+              <a:rPr lang="en-US" sz="1700" dirty="0" smtClean="0"/>
+              <a:t> would describe using the system to perform some task; his scenarios would very much resemble use cases in object-oriented parlance.</a:t>
+            </a:r>
+          </a:p>
+          <a:p>
+            <a:pPr lvl="1"/>
+            <a:r>
+              <a:rPr lang="en-US" sz="1700" i="1" dirty="0" smtClean="0">
+                <a:solidFill>
+                  <a:srgbClr val="C00000"/>
+                </a:solidFill>
+              </a:rPr>
+              <a:t>A maintainer</a:t>
+            </a:r>
+            <a:r>
+              <a:rPr lang="en-US" sz="1700" dirty="0" smtClean="0"/>
+              <a:t> would describe making a change to the system, such as upgrading the operating system in a particular way or adding a specific new function.</a:t>
+            </a:r>
+          </a:p>
+          <a:p>
+            <a:pPr lvl="1"/>
+            <a:r>
+              <a:rPr lang="en-US" sz="1700" i="1" dirty="0" smtClean="0">
+                <a:solidFill>
+                  <a:srgbClr val="C00000"/>
+                </a:solidFill>
+              </a:rPr>
+              <a:t>A developer's</a:t>
+            </a:r>
+            <a:r>
+              <a:rPr lang="en-US" sz="1700" dirty="0" smtClean="0"/>
+              <a:t> scenario might talk about using the architecture to build the system or predict its performance.</a:t>
+            </a:r>
+          </a:p>
+          <a:p>
+            <a:pPr lvl="1"/>
+            <a:r>
+              <a:rPr lang="en-US" sz="1700" i="1" dirty="0" smtClean="0">
+                <a:solidFill>
+                  <a:srgbClr val="C00000"/>
+                </a:solidFill>
+              </a:rPr>
+              <a:t>A customer's</a:t>
+            </a:r>
+            <a:r>
+              <a:rPr lang="en-US" sz="1700" dirty="0" smtClean="0"/>
+              <a:t> scenario might describe how the architecture is to be re-used for a second product in a product line.</a:t>
+            </a:r>
+          </a:p>
+        </p:txBody>
+      </p:sp>
+    </p:spTree>
+  </p:cSld>
+  <p:clrMapOvr>
+    <a:masterClrMapping/>
+  </p:clrMapOvr>
+</p:sld>
+</file>
+
+<file path=ppt/slides/slide24.xml><?xml version="1.0" encoding="utf-8"?>
+<p:sld xmlns:a="http://schemas.openxmlformats.org/drawingml/2006/main" xmlns:r="http://schemas.openxmlformats.org/officeDocument/2006/relationships" xmlns:p="http://schemas.openxmlformats.org/presentationml/2006/main">
+  <p:cSld>
+    <p:spTree>
+      <p:nvGrpSpPr>
+        <p:cNvPr id="1" name=""/>
+        <p:cNvGrpSpPr/>
+        <p:nvPr/>
+      </p:nvGrpSpPr>
+      <p:grpSpPr>
+        <a:xfrm>
+          <a:off x="0" y="0"/>
+          <a:ext cx="0" cy="0"/>
+          <a:chOff x="0" y="0"/>
+          <a:chExt cx="0" cy="0"/>
+        </a:xfrm>
+      </p:grpSpPr>
+      <p:sp>
+        <p:nvSpPr>
+          <p:cNvPr id="2" name="Title 1"/>
+          <p:cNvSpPr>
+            <a:spLocks noGrp="1"/>
+          </p:cNvSpPr>
+          <p:nvPr>
+            <p:ph type="title"/>
+          </p:nvPr>
+        </p:nvSpPr>
+        <p:spPr/>
+        <p:txBody>
+          <a:bodyPr/>
+          <a:lstStyle/>
+          <a:p>
+            <a:r>
+              <a:rPr lang="en-US" dirty="0" smtClean="0"/>
+              <a:t>Use Case Scenarios</a:t>
+            </a:r>
+            <a:endParaRPr lang="en-US" dirty="0"/>
+          </a:p>
+        </p:txBody>
+      </p:sp>
+      <p:sp>
+        <p:nvSpPr>
+          <p:cNvPr id="3" name="Content Placeholder 2"/>
+          <p:cNvSpPr>
+            <a:spLocks noGrp="1"/>
+          </p:cNvSpPr>
+          <p:nvPr>
+            <p:ph idx="1"/>
+          </p:nvPr>
+        </p:nvSpPr>
+        <p:spPr/>
+        <p:txBody>
+          <a:bodyPr/>
+          <a:lstStyle/>
+          <a:p>
+            <a:r>
+              <a:rPr lang="en-US" sz="2600" i="1" dirty="0" smtClean="0">
+                <a:solidFill>
+                  <a:srgbClr val="C00000"/>
+                </a:solidFill>
+              </a:rPr>
+              <a:t>Use case scenarios</a:t>
+            </a:r>
+            <a:r>
+              <a:rPr lang="en-US" sz="2600" dirty="0" smtClean="0"/>
+              <a:t> describe a </a:t>
+            </a:r>
+            <a:r>
+              <a:rPr lang="en-US" sz="2600" u="sng" dirty="0" smtClean="0"/>
+              <a:t>user's intended interaction</a:t>
+            </a:r>
+            <a:r>
+              <a:rPr lang="en-US" sz="2600" dirty="0" smtClean="0"/>
+              <a:t> with the completed, running system.</a:t>
+            </a:r>
+          </a:p>
+          <a:p>
+            <a:pPr lvl="1"/>
+            <a:r>
+              <a:rPr lang="en-US" sz="2200" dirty="0" smtClean="0"/>
+              <a:t>The user wants to examine budgetary and actual data under different fiscal years without re-entering project data. (</a:t>
+            </a:r>
+            <a:r>
+              <a:rPr lang="en-US" sz="2200" b="1" dirty="0" smtClean="0"/>
+              <a:t>usability</a:t>
+            </a:r>
+            <a:r>
+              <a:rPr lang="en-US" sz="2200" dirty="0" smtClean="0"/>
+              <a:t>)</a:t>
+            </a:r>
+          </a:p>
+          <a:p>
+            <a:pPr lvl="1"/>
+            <a:r>
+              <a:rPr lang="en-US" sz="2200" dirty="0" smtClean="0"/>
+              <a:t>User changes graph layout from horizontal to vertical and graph is redrawn in one second. (</a:t>
+            </a:r>
+            <a:r>
+              <a:rPr lang="en-US" sz="2200" b="1" dirty="0" smtClean="0"/>
+              <a:t>performance</a:t>
+            </a:r>
+            <a:r>
+              <a:rPr lang="en-US" sz="2200" dirty="0" smtClean="0"/>
+              <a:t>)</a:t>
+            </a:r>
+          </a:p>
+        </p:txBody>
+      </p:sp>
+    </p:spTree>
+  </p:cSld>
+  <p:clrMapOvr>
+    <a:masterClrMapping/>
+  </p:clrMapOvr>
+</p:sld>
+</file>
+
+<file path=ppt/slides/slide25.xml><?xml version="1.0" encoding="utf-8"?>
+<p:sld xmlns:a="http://schemas.openxmlformats.org/drawingml/2006/main" xmlns:r="http://schemas.openxmlformats.org/officeDocument/2006/relationships" xmlns:p="http://schemas.openxmlformats.org/presentationml/2006/main">
+  <p:cSld>
+    <p:spTree>
+      <p:nvGrpSpPr>
+        <p:cNvPr id="1" name=""/>
+        <p:cNvGrpSpPr/>
+        <p:nvPr/>
+      </p:nvGrpSpPr>
+      <p:grpSpPr>
+        <a:xfrm>
+          <a:off x="0" y="0"/>
+          <a:ext cx="0" cy="0"/>
+          <a:chOff x="0" y="0"/>
+          <a:chExt cx="0" cy="0"/>
+        </a:xfrm>
+      </p:grpSpPr>
+      <p:sp>
+        <p:nvSpPr>
+          <p:cNvPr id="2" name="Title 1"/>
+          <p:cNvSpPr>
+            <a:spLocks noGrp="1"/>
+          </p:cNvSpPr>
+          <p:nvPr>
+            <p:ph type="title"/>
+          </p:nvPr>
+        </p:nvSpPr>
+        <p:spPr/>
+        <p:txBody>
+          <a:bodyPr/>
+          <a:lstStyle/>
+          <a:p>
+            <a:r>
+              <a:rPr lang="en-US" dirty="0" smtClean="0"/>
+              <a:t>Growth Scenarios</a:t>
+            </a:r>
+            <a:endParaRPr lang="en-US" dirty="0"/>
+          </a:p>
+        </p:txBody>
+      </p:sp>
+      <p:sp>
+        <p:nvSpPr>
+          <p:cNvPr id="3" name="Content Placeholder 2"/>
+          <p:cNvSpPr>
+            <a:spLocks noGrp="1"/>
+          </p:cNvSpPr>
+          <p:nvPr>
+            <p:ph idx="1"/>
+          </p:nvPr>
+        </p:nvSpPr>
+        <p:spPr/>
+        <p:txBody>
+          <a:bodyPr/>
+          <a:lstStyle/>
+          <a:p>
+            <a:r>
+              <a:rPr lang="en-US" sz="2600" i="1" dirty="0" smtClean="0">
+                <a:solidFill>
+                  <a:srgbClr val="C00000"/>
+                </a:solidFill>
+              </a:rPr>
+              <a:t>Growth scenarios</a:t>
+            </a:r>
+            <a:r>
+              <a:rPr lang="en-US" sz="2600" dirty="0" smtClean="0"/>
+              <a:t> represent typical anticipated future changes to a system.</a:t>
+            </a:r>
+          </a:p>
+          <a:p>
+            <a:pPr lvl="1"/>
+            <a:r>
+              <a:rPr lang="en-US" sz="2200" dirty="0" smtClean="0"/>
+              <a:t>The maximum number of tracks to be handled by the system doubles and the maximum latency of track data to the screen is kept to </a:t>
+            </a:r>
+            <a:r>
+              <a:rPr lang="en-US" sz="2200" b="1" dirty="0" smtClean="0"/>
+              <a:t>200 </a:t>
+            </a:r>
+            <a:r>
+              <a:rPr lang="en-US" sz="2200" b="1" dirty="0" err="1" smtClean="0"/>
+              <a:t>ms</a:t>
+            </a:r>
+            <a:r>
+              <a:rPr lang="en-US" sz="2200" dirty="0" err="1" smtClean="0"/>
+              <a:t>.</a:t>
+            </a:r>
+            <a:endParaRPr lang="en-US" sz="2200" dirty="0" smtClean="0"/>
+          </a:p>
+          <a:p>
+            <a:pPr lvl="1"/>
+            <a:r>
+              <a:rPr lang="en-US" sz="2200" dirty="0" smtClean="0"/>
+              <a:t>Migrate to a new operating system, or a new release of the existing operating system in less than </a:t>
+            </a:r>
+            <a:r>
+              <a:rPr lang="en-US" sz="2200" b="1" dirty="0" smtClean="0"/>
+              <a:t>a person-year of work</a:t>
+            </a:r>
+            <a:r>
+              <a:rPr lang="en-US" sz="2200" dirty="0" smtClean="0"/>
+              <a:t>.</a:t>
+            </a:r>
+          </a:p>
+        </p:txBody>
+      </p:sp>
+    </p:spTree>
+  </p:cSld>
+  <p:clrMapOvr>
+    <a:masterClrMapping/>
+  </p:clrMapOvr>
+</p:sld>
+</file>
+
+<file path=ppt/slides/slide26.xml><?xml version="1.0" encoding="utf-8"?>
+<p:sld xmlns:a="http://schemas.openxmlformats.org/drawingml/2006/main" xmlns:r="http://schemas.openxmlformats.org/officeDocument/2006/relationships" xmlns:p="http://schemas.openxmlformats.org/presentationml/2006/main">
+  <p:cSld>
+    <p:spTree>
+      <p:nvGrpSpPr>
+        <p:cNvPr id="1" name=""/>
+        <p:cNvGrpSpPr/>
+        <p:nvPr/>
+      </p:nvGrpSpPr>
+      <p:grpSpPr>
+        <a:xfrm>
+          <a:off x="0" y="0"/>
+          <a:ext cx="0" cy="0"/>
+          <a:chOff x="0" y="0"/>
+          <a:chExt cx="0" cy="0"/>
+        </a:xfrm>
+      </p:grpSpPr>
+      <p:sp>
+        <p:nvSpPr>
+          <p:cNvPr id="2" name="Title 1"/>
+          <p:cNvSpPr>
+            <a:spLocks noGrp="1"/>
+          </p:cNvSpPr>
+          <p:nvPr>
+            <p:ph type="title"/>
+          </p:nvPr>
+        </p:nvSpPr>
+        <p:spPr/>
+        <p:txBody>
+          <a:bodyPr/>
+          <a:lstStyle/>
+          <a:p>
+            <a:r>
+              <a:rPr lang="en-US" dirty="0" smtClean="0"/>
+              <a:t>Exploratory Scenarios</a:t>
+            </a:r>
+            <a:endParaRPr lang="en-US" dirty="0"/>
+          </a:p>
+        </p:txBody>
+      </p:sp>
+      <p:sp>
+        <p:nvSpPr>
+          <p:cNvPr id="3" name="Content Placeholder 2"/>
+          <p:cNvSpPr>
+            <a:spLocks noGrp="1"/>
+          </p:cNvSpPr>
+          <p:nvPr>
+            <p:ph idx="1"/>
+          </p:nvPr>
+        </p:nvSpPr>
+        <p:spPr/>
+        <p:txBody>
+          <a:bodyPr/>
+          <a:lstStyle/>
+          <a:p>
+            <a:r>
+              <a:rPr lang="en-US" sz="2600" i="1" dirty="0" smtClean="0">
+                <a:solidFill>
+                  <a:srgbClr val="C00000"/>
+                </a:solidFill>
+              </a:rPr>
+              <a:t>Exploratory scenarios</a:t>
+            </a:r>
+            <a:r>
+              <a:rPr lang="en-US" sz="2600" dirty="0" smtClean="0"/>
+              <a:t> push the envelope and stress the system.</a:t>
+            </a:r>
+          </a:p>
+          <a:p>
+            <a:pPr lvl="1"/>
+            <a:r>
+              <a:rPr lang="en-US" sz="2200" dirty="0" smtClean="0"/>
+              <a:t>Improve the system's </a:t>
+            </a:r>
+            <a:r>
+              <a:rPr lang="en-US" sz="2200" b="1" dirty="0" smtClean="0"/>
+              <a:t>availability</a:t>
+            </a:r>
+            <a:r>
+              <a:rPr lang="en-US" sz="2200" dirty="0" smtClean="0"/>
+              <a:t> from 98% to 99.999%.</a:t>
+            </a:r>
+          </a:p>
+          <a:p>
+            <a:pPr lvl="1"/>
+            <a:r>
+              <a:rPr lang="en-US" sz="2200" dirty="0" smtClean="0"/>
+              <a:t>Half of the servers go down during normal operation without affecting overall system </a:t>
+            </a:r>
+            <a:r>
+              <a:rPr lang="en-US" sz="2200" b="1" dirty="0" smtClean="0"/>
+              <a:t>availability</a:t>
+            </a:r>
+            <a:r>
+              <a:rPr lang="en-US" sz="2200" dirty="0" smtClean="0"/>
+              <a:t>.</a:t>
+            </a:r>
+            <a:endParaRPr lang="en-US" sz="2200" dirty="0"/>
+          </a:p>
+        </p:txBody>
+      </p:sp>
+    </p:spTree>
+  </p:cSld>
+  <p:clrMapOvr>
+    <a:masterClrMapping/>
+  </p:clrMapOvr>
+</p:sld>
+</file>
+
+<file path=ppt/slides/slide27.xml><?xml version="1.0" encoding="utf-8"?>
+<p:sld xmlns:a="http://schemas.openxmlformats.org/drawingml/2006/main" xmlns:r="http://schemas.openxmlformats.org/officeDocument/2006/relationships" xmlns:p="http://schemas.openxmlformats.org/presentationml/2006/main">
+  <p:cSld>
+    <p:spTree>
+      <p:nvGrpSpPr>
+        <p:cNvPr id="1" name=""/>
+        <p:cNvGrpSpPr/>
+        <p:nvPr/>
+      </p:nvGrpSpPr>
+      <p:grpSpPr>
+        <a:xfrm>
+          <a:off x="0" y="0"/>
+          <a:ext cx="0" cy="0"/>
+          <a:chOff x="0" y="0"/>
+          <a:chExt cx="0" cy="0"/>
+        </a:xfrm>
+      </p:grpSpPr>
+      <p:sp>
+        <p:nvSpPr>
+          <p:cNvPr id="2" name="Title 1"/>
+          <p:cNvSpPr>
+            <a:spLocks noGrp="1"/>
+          </p:cNvSpPr>
+          <p:nvPr>
+            <p:ph type="title"/>
+          </p:nvPr>
+        </p:nvSpPr>
+        <p:spPr/>
+        <p:txBody>
+          <a:bodyPr/>
+          <a:lstStyle/>
+          <a:p>
+            <a:r>
+              <a:rPr lang="en-US" dirty="0" smtClean="0"/>
+              <a:t>Quality Attribute Scenario Representation [1]</a:t>
+            </a:r>
+            <a:endParaRPr lang="en-US" dirty="0"/>
+          </a:p>
+        </p:txBody>
+      </p:sp>
+      <p:sp>
+        <p:nvSpPr>
+          <p:cNvPr id="3" name="Content Placeholder 2"/>
+          <p:cNvSpPr>
+            <a:spLocks noGrp="1"/>
+          </p:cNvSpPr>
+          <p:nvPr>
+            <p:ph idx="1"/>
+          </p:nvPr>
+        </p:nvSpPr>
+        <p:spPr/>
+        <p:txBody>
+          <a:bodyPr/>
+          <a:lstStyle/>
+          <a:p>
+            <a:r>
+              <a:rPr lang="en-US" sz="2400" dirty="0" smtClean="0"/>
+              <a:t>Quality attribute scenarios have six parts: Stimulus, Stimulus Source, Response, Response Measure, Environment, Artifact.</a:t>
+            </a:r>
+          </a:p>
+          <a:p>
+            <a:r>
+              <a:rPr lang="en-US" sz="2400" dirty="0" smtClean="0"/>
+              <a:t>The environment is the set of circumstances in which the scenario takes place.</a:t>
+            </a:r>
+          </a:p>
+        </p:txBody>
+      </p:sp>
+      <p:pic>
+        <p:nvPicPr>
+          <p:cNvPr id="26625" name="Picture 1"/>
+          <p:cNvPicPr>
+            <a:picLocks noChangeAspect="1" noChangeArrowheads="1"/>
+          </p:cNvPicPr>
+          <p:nvPr/>
+        </p:nvPicPr>
+        <p:blipFill>
+          <a:blip r:embed="rId2" cstate="print"/>
+          <a:srcRect/>
+          <a:stretch>
+            <a:fillRect/>
+          </a:stretch>
+        </p:blipFill>
+        <p:spPr bwMode="auto">
+          <a:xfrm>
+            <a:off x="1690688" y="4035425"/>
+            <a:ext cx="5762625" cy="1908175"/>
+          </a:xfrm>
+          <a:prstGeom prst="rect">
+            <a:avLst/>
+          </a:prstGeom>
+          <a:noFill/>
+          <a:ln w="9525">
+            <a:noFill/>
+            <a:miter lim="800000"/>
+            <a:headEnd/>
+            <a:tailEnd/>
+          </a:ln>
+        </p:spPr>
+      </p:pic>
+    </p:spTree>
+  </p:cSld>
+  <p:clrMapOvr>
+    <a:masterClrMapping/>
+  </p:clrMapOvr>
+</p:sld>
+</file>
+
+<file path=ppt/slides/slide28.xml><?xml version="1.0" encoding="utf-8"?>
+<p:sld xmlns:a="http://schemas.openxmlformats.org/drawingml/2006/main" xmlns:r="http://schemas.openxmlformats.org/officeDocument/2006/relationships" xmlns:p="http://schemas.openxmlformats.org/presentationml/2006/main">
+  <p:cSld>
+    <p:spTree>
+      <p:nvGrpSpPr>
+        <p:cNvPr id="1" name=""/>
+        <p:cNvGrpSpPr/>
+        <p:nvPr/>
+      </p:nvGrpSpPr>
+      <p:grpSpPr>
+        <a:xfrm>
+          <a:off x="0" y="0"/>
+          <a:ext cx="0" cy="0"/>
+          <a:chOff x="0" y="0"/>
+          <a:chExt cx="0" cy="0"/>
+        </a:xfrm>
+      </p:grpSpPr>
+      <p:sp>
+        <p:nvSpPr>
+          <p:cNvPr id="2" name="Title 1"/>
+          <p:cNvSpPr>
+            <a:spLocks noGrp="1"/>
+          </p:cNvSpPr>
+          <p:nvPr>
+            <p:ph type="title"/>
+          </p:nvPr>
+        </p:nvSpPr>
+        <p:spPr/>
+        <p:txBody>
+          <a:bodyPr/>
+          <a:lstStyle/>
+          <a:p>
+            <a:r>
+              <a:rPr lang="en-US" dirty="0" smtClean="0"/>
+              <a:t>Example: Availability Scenario</a:t>
+            </a:r>
+            <a:endParaRPr lang="en-US" dirty="0"/>
+          </a:p>
+        </p:txBody>
+      </p:sp>
+      <p:sp>
+        <p:nvSpPr>
+          <p:cNvPr id="3" name="Content Placeholder 2"/>
+          <p:cNvSpPr>
+            <a:spLocks noGrp="1"/>
+          </p:cNvSpPr>
+          <p:nvPr>
+            <p:ph idx="1"/>
+          </p:nvPr>
+        </p:nvSpPr>
+        <p:spPr/>
+        <p:txBody>
+          <a:bodyPr/>
+          <a:lstStyle/>
+          <a:p>
+            <a:r>
+              <a:rPr lang="en-US" sz="2000" i="1" dirty="0" smtClean="0">
+                <a:solidFill>
+                  <a:srgbClr val="C00000"/>
+                </a:solidFill>
+              </a:rPr>
+              <a:t>Availability</a:t>
+            </a:r>
+            <a:r>
+              <a:rPr lang="en-US" sz="2000" dirty="0" smtClean="0"/>
+              <a:t> refers to a property of software that it is there and </a:t>
+            </a:r>
+            <a:r>
+              <a:rPr lang="en-US" sz="2000" u="sng" dirty="0" smtClean="0"/>
+              <a:t>ready to carry out its task</a:t>
+            </a:r>
+            <a:r>
+              <a:rPr lang="en-US" sz="2000" dirty="0" smtClean="0"/>
+              <a:t> when you need it to be.</a:t>
+            </a:r>
+          </a:p>
+          <a:p>
+            <a:r>
+              <a:rPr lang="en-US" sz="2000" dirty="0" smtClean="0"/>
+              <a:t>Mean Time Between Failure (MTBF), Mean Time To Recovery (MTTR).</a:t>
+            </a:r>
+            <a:endParaRPr lang="en-US" sz="2000" dirty="0"/>
+          </a:p>
+        </p:txBody>
+      </p:sp>
+      <p:pic>
+        <p:nvPicPr>
+          <p:cNvPr id="65538" name="Picture 2"/>
+          <p:cNvPicPr>
+            <a:picLocks noChangeAspect="1" noChangeArrowheads="1"/>
+          </p:cNvPicPr>
+          <p:nvPr/>
+        </p:nvPicPr>
+        <p:blipFill>
+          <a:blip r:embed="rId2" cstate="print"/>
+          <a:srcRect/>
+          <a:stretch>
+            <a:fillRect/>
+          </a:stretch>
+        </p:blipFill>
+        <p:spPr bwMode="auto">
+          <a:xfrm>
+            <a:off x="1333500" y="3492500"/>
+            <a:ext cx="6477000" cy="2146300"/>
+          </a:xfrm>
+          <a:prstGeom prst="rect">
+            <a:avLst/>
+          </a:prstGeom>
+          <a:noFill/>
+          <a:ln w="9525">
+            <a:noFill/>
+            <a:miter lim="800000"/>
+            <a:headEnd/>
+            <a:tailEnd/>
+          </a:ln>
+        </p:spPr>
+      </p:pic>
+    </p:spTree>
+  </p:cSld>
+  <p:clrMapOvr>
+    <a:masterClrMapping/>
+  </p:clrMapOvr>
+</p:sld>
+</file>
+
 <file path=ppt/slides/slide29.xml><?xml version="1.0" encoding="utf-8"?>
 <p:sld xmlns:a="http://schemas.openxmlformats.org/drawingml/2006/main" xmlns:r="http://schemas.openxmlformats.org/officeDocument/2006/relationships" xmlns:p="http://schemas.openxmlformats.org/presentationml/2006/main">
   <p:cSld>
@@ -7084,54 +7519,15 @@
           <a:p>
             <a:r>
               <a:rPr lang="en-US" dirty="0" smtClean="0"/>
-              <a:t>Performance Scenario</a:t>
+              <a:t>More Complex Availability Scenario</a:t>
             </a:r>
             <a:endParaRPr lang="en-US" dirty="0"/>
-          </a:p>
-        </p:txBody>
-      </p:sp>
-      <p:sp>
-        <p:nvSpPr>
-          <p:cNvPr id="3" name="Content Placeholder 2"/>
-          <p:cNvSpPr>
-            <a:spLocks noGrp="1"/>
-          </p:cNvSpPr>
-          <p:nvPr>
-            <p:ph idx="1"/>
-          </p:nvPr>
-        </p:nvSpPr>
-        <p:spPr/>
-        <p:txBody>
-          <a:bodyPr/>
-          <a:lstStyle/>
-          <a:p>
-            <a:r>
-              <a:rPr lang="en-US" sz="2400" i="1" dirty="0" smtClean="0">
-                <a:solidFill>
-                  <a:srgbClr val="C00000"/>
-                </a:solidFill>
-              </a:rPr>
-              <a:t>Performance</a:t>
-            </a:r>
-            <a:r>
-              <a:rPr lang="en-US" sz="2400" dirty="0" smtClean="0"/>
-              <a:t>, that is: It's about time and the software system's ability to </a:t>
-            </a:r>
-            <a:r>
-              <a:rPr lang="en-US" sz="2400" u="sng" dirty="0" smtClean="0"/>
-              <a:t>meet timing requirements</a:t>
-            </a:r>
-            <a:r>
-              <a:rPr lang="en-US" sz="2400" dirty="0" smtClean="0"/>
-              <a:t>.</a:t>
-            </a:r>
-            <a:endParaRPr lang="en-US" sz="2400" dirty="0"/>
           </a:p>
         </p:txBody>
       </p:sp>
       <p:pic>
         <p:nvPicPr>
-          <p:cNvPr id="3075" name="Picture 3"/>
+          <p:cNvPr id="23553" name="Picture 1"/>
           <p:cNvPicPr>
             <a:picLocks noChangeAspect="1" noChangeArrowheads="1"/>
           </p:cNvPicPr>
@@ -7146,8 +7542,8 @@
         </p:blipFill>
         <p:spPr bwMode="auto">
           <a:xfrm>
-            <a:off x="1085850" y="2698750"/>
-            <a:ext cx="6972300" cy="3625850"/>
+            <a:off x="1127125" y="2438400"/>
+            <a:ext cx="6889750" cy="2597150"/>
           </a:xfrm>
           <a:prstGeom prst="rect">
             <a:avLst/>
@@ -7351,6 +7747,778 @@
           <a:p>
             <a:r>
               <a:rPr lang="en-US" dirty="0" smtClean="0"/>
+              <a:t>Architectural Tactics</a:t>
+            </a:r>
+            <a:endParaRPr lang="en-US" dirty="0"/>
+          </a:p>
+        </p:txBody>
+      </p:sp>
+      <p:sp>
+        <p:nvSpPr>
+          <p:cNvPr id="3" name="Content Placeholder 2"/>
+          <p:cNvSpPr>
+            <a:spLocks noGrp="1"/>
+          </p:cNvSpPr>
+          <p:nvPr>
+            <p:ph idx="1"/>
+          </p:nvPr>
+        </p:nvSpPr>
+        <p:spPr/>
+        <p:txBody>
+          <a:bodyPr/>
+          <a:lstStyle/>
+          <a:p>
+            <a:r>
+              <a:rPr lang="en-US" sz="2200" i="1" dirty="0" smtClean="0">
+                <a:solidFill>
+                  <a:srgbClr val="C00000"/>
+                </a:solidFill>
+              </a:rPr>
+              <a:t>Architectural tactics</a:t>
+            </a:r>
+            <a:r>
+              <a:rPr lang="en-US" sz="2200" dirty="0" smtClean="0"/>
+              <a:t> – the </a:t>
+            </a:r>
+            <a:r>
+              <a:rPr lang="en-US" sz="2200" u="sng" dirty="0" smtClean="0"/>
+              <a:t>techniques</a:t>
+            </a:r>
+            <a:r>
+              <a:rPr lang="en-US" sz="2200" dirty="0" smtClean="0"/>
+              <a:t> an architect can use to achieve the required quality attributes.</a:t>
+            </a:r>
+          </a:p>
+          <a:p>
+            <a:r>
+              <a:rPr lang="en-US" sz="2200" dirty="0" smtClean="0"/>
+              <a:t>A </a:t>
+            </a:r>
+            <a:r>
+              <a:rPr lang="en-US" sz="2200" i="1" dirty="0" smtClean="0">
+                <a:solidFill>
+                  <a:srgbClr val="C00000"/>
+                </a:solidFill>
+              </a:rPr>
+              <a:t>tactic</a:t>
+            </a:r>
+            <a:r>
+              <a:rPr lang="en-US" sz="2200" dirty="0" smtClean="0"/>
+              <a:t> is a </a:t>
+            </a:r>
+            <a:r>
+              <a:rPr lang="en-US" sz="2200" u="sng" dirty="0" smtClean="0"/>
+              <a:t>design decision</a:t>
+            </a:r>
+            <a:r>
+              <a:rPr lang="en-US" sz="2200" dirty="0" smtClean="0"/>
+              <a:t> that influences the achievement of a quality attribute response—tactics directly affect the system's </a:t>
+            </a:r>
+            <a:r>
+              <a:rPr lang="en-US" sz="2200" u="sng" dirty="0" smtClean="0"/>
+              <a:t>response</a:t>
+            </a:r>
+            <a:r>
+              <a:rPr lang="en-US" sz="2200" dirty="0" smtClean="0"/>
+              <a:t> to some </a:t>
+            </a:r>
+            <a:r>
+              <a:rPr lang="en-US" sz="2200" u="sng" dirty="0" smtClean="0"/>
+              <a:t>stimulus</a:t>
+            </a:r>
+            <a:r>
+              <a:rPr lang="en-US" sz="2200" dirty="0" smtClean="0"/>
+              <a:t>.</a:t>
+            </a:r>
+          </a:p>
+          <a:p>
+            <a:endParaRPr lang="en-US" sz="2200" dirty="0" smtClean="0"/>
+          </a:p>
+          <a:p>
+            <a:endParaRPr lang="en-US" sz="2200" dirty="0" smtClean="0"/>
+          </a:p>
+          <a:p>
+            <a:endParaRPr lang="en-US" sz="2200" dirty="0" smtClean="0"/>
+          </a:p>
+          <a:p>
+            <a:endParaRPr lang="en-US" sz="2200" dirty="0" smtClean="0"/>
+          </a:p>
+          <a:p>
+            <a:r>
+              <a:rPr lang="en-US" sz="2200" dirty="0" smtClean="0"/>
+              <a:t>If </a:t>
+            </a:r>
+            <a:r>
+              <a:rPr lang="en-US" sz="2200" i="1" dirty="0" smtClean="0">
+                <a:solidFill>
+                  <a:srgbClr val="C00000"/>
+                </a:solidFill>
+              </a:rPr>
+              <a:t>no pattern exists</a:t>
+            </a:r>
+            <a:r>
+              <a:rPr lang="en-US" sz="2200" dirty="0" smtClean="0"/>
+              <a:t> to realize the architect's design goal, </a:t>
+            </a:r>
+            <a:r>
+              <a:rPr lang="en-US" sz="2200" b="1" dirty="0" smtClean="0"/>
+              <a:t>tactics</a:t>
+            </a:r>
+            <a:r>
+              <a:rPr lang="en-US" sz="2200" dirty="0" smtClean="0"/>
+              <a:t> allow the architect to construct a design fragment from “first principles.”</a:t>
+            </a:r>
+          </a:p>
+        </p:txBody>
+      </p:sp>
+      <p:pic>
+        <p:nvPicPr>
+          <p:cNvPr id="1027" name="Picture 3"/>
+          <p:cNvPicPr>
+            <a:picLocks noChangeAspect="1" noChangeArrowheads="1"/>
+          </p:cNvPicPr>
+          <p:nvPr/>
+        </p:nvPicPr>
+        <p:blipFill>
+          <a:blip r:embed="rId2" cstate="print"/>
+          <a:srcRect/>
+          <a:stretch>
+            <a:fillRect/>
+          </a:stretch>
+        </p:blipFill>
+        <p:spPr bwMode="auto">
+          <a:xfrm>
+            <a:off x="2820924" y="3505200"/>
+            <a:ext cx="3579876" cy="1426464"/>
+          </a:xfrm>
+          <a:prstGeom prst="rect">
+            <a:avLst/>
+          </a:prstGeom>
+          <a:noFill/>
+          <a:ln w="9525">
+            <a:noFill/>
+            <a:miter lim="800000"/>
+            <a:headEnd/>
+            <a:tailEnd/>
+          </a:ln>
+        </p:spPr>
+      </p:pic>
+    </p:spTree>
+  </p:cSld>
+  <p:clrMapOvr>
+    <a:masterClrMapping/>
+  </p:clrMapOvr>
+</p:sld>
+</file>
+
+<file path=ppt/slides/slide31.xml><?xml version="1.0" encoding="utf-8"?>
+<p:sld xmlns:a="http://schemas.openxmlformats.org/drawingml/2006/main" xmlns:r="http://schemas.openxmlformats.org/officeDocument/2006/relationships" xmlns:p="http://schemas.openxmlformats.org/presentationml/2006/main">
+  <p:cSld>
+    <p:spTree>
+      <p:nvGrpSpPr>
+        <p:cNvPr id="1" name=""/>
+        <p:cNvGrpSpPr/>
+        <p:nvPr/>
+      </p:nvGrpSpPr>
+      <p:grpSpPr>
+        <a:xfrm>
+          <a:off x="0" y="0"/>
+          <a:ext cx="0" cy="0"/>
+          <a:chOff x="0" y="0"/>
+          <a:chExt cx="0" cy="0"/>
+        </a:xfrm>
+      </p:grpSpPr>
+      <p:sp>
+        <p:nvSpPr>
+          <p:cNvPr id="2" name="Title 1"/>
+          <p:cNvSpPr>
+            <a:spLocks noGrp="1"/>
+          </p:cNvSpPr>
+          <p:nvPr>
+            <p:ph type="title"/>
+          </p:nvPr>
+        </p:nvSpPr>
+        <p:spPr/>
+        <p:txBody>
+          <a:bodyPr/>
+          <a:lstStyle/>
+          <a:p>
+            <a:r>
+              <a:rPr lang="en-US" dirty="0" smtClean="0"/>
+              <a:t>Example: Tactics for Availability</a:t>
+            </a:r>
+            <a:endParaRPr lang="en-US" dirty="0"/>
+          </a:p>
+        </p:txBody>
+      </p:sp>
+      <p:sp>
+        <p:nvSpPr>
+          <p:cNvPr id="3" name="Content Placeholder 2"/>
+          <p:cNvSpPr>
+            <a:spLocks noGrp="1"/>
+          </p:cNvSpPr>
+          <p:nvPr>
+            <p:ph idx="1"/>
+          </p:nvPr>
+        </p:nvSpPr>
+        <p:spPr/>
+        <p:txBody>
+          <a:bodyPr/>
+          <a:lstStyle/>
+          <a:p>
+            <a:r>
+              <a:rPr lang="en-US" sz="2400" dirty="0" smtClean="0"/>
+              <a:t>How to design an architecture for availability?</a:t>
+            </a:r>
+          </a:p>
+          <a:p>
+            <a:pPr lvl="1"/>
+            <a:r>
+              <a:rPr lang="en-US" sz="2000" dirty="0" smtClean="0"/>
+              <a:t>Detect Faults.</a:t>
+            </a:r>
+          </a:p>
+          <a:p>
+            <a:pPr lvl="2"/>
+            <a:r>
+              <a:rPr lang="en-US" sz="1600" dirty="0" smtClean="0"/>
+              <a:t>Ping/echo.</a:t>
+            </a:r>
+          </a:p>
+          <a:p>
+            <a:pPr lvl="2"/>
+            <a:r>
+              <a:rPr lang="en-US" sz="1600" dirty="0" smtClean="0"/>
+              <a:t>Monitor.</a:t>
+            </a:r>
+          </a:p>
+          <a:p>
+            <a:pPr lvl="2"/>
+            <a:r>
+              <a:rPr lang="en-US" sz="1600" dirty="0" smtClean="0"/>
+              <a:t>Heartbeat.</a:t>
+            </a:r>
+          </a:p>
+          <a:p>
+            <a:pPr lvl="2"/>
+            <a:r>
+              <a:rPr lang="en-US" sz="1600" dirty="0" smtClean="0"/>
+              <a:t>Timeout.</a:t>
+            </a:r>
+          </a:p>
+          <a:p>
+            <a:pPr lvl="1"/>
+            <a:r>
+              <a:rPr lang="en-US" sz="2000" dirty="0" smtClean="0"/>
+              <a:t>Recover from Faults.</a:t>
+            </a:r>
+          </a:p>
+          <a:p>
+            <a:pPr lvl="2"/>
+            <a:r>
+              <a:rPr lang="en-US" sz="1600" dirty="0" smtClean="0"/>
+              <a:t>Active redundancy (hot spare).</a:t>
+            </a:r>
+          </a:p>
+          <a:p>
+            <a:pPr lvl="2"/>
+            <a:r>
+              <a:rPr lang="en-US" sz="1600" dirty="0" smtClean="0"/>
+              <a:t>Passive redundancy (warm spare).</a:t>
+            </a:r>
+          </a:p>
+          <a:p>
+            <a:pPr lvl="2"/>
+            <a:r>
+              <a:rPr lang="en-US" sz="1600" dirty="0" smtClean="0"/>
+              <a:t>Rollback.</a:t>
+            </a:r>
+          </a:p>
+          <a:p>
+            <a:pPr lvl="2"/>
+            <a:r>
+              <a:rPr lang="en-US" sz="1600" dirty="0" smtClean="0"/>
+              <a:t>Retry.</a:t>
+            </a:r>
+          </a:p>
+          <a:p>
+            <a:pPr lvl="1"/>
+            <a:r>
+              <a:rPr lang="en-US" sz="2000" dirty="0" smtClean="0"/>
+              <a:t>Prevent Faults.</a:t>
+            </a:r>
+          </a:p>
+          <a:p>
+            <a:pPr lvl="2"/>
+            <a:r>
+              <a:rPr lang="en-US" sz="1600" dirty="0" smtClean="0"/>
+              <a:t>Transactions. (ACID properties.)</a:t>
+            </a:r>
+          </a:p>
+          <a:p>
+            <a:pPr lvl="2"/>
+            <a:r>
+              <a:rPr lang="en-US" sz="1600" dirty="0" smtClean="0"/>
+              <a:t>Exception prevention.</a:t>
+            </a:r>
+            <a:endParaRPr lang="en-US" sz="1600" dirty="0"/>
+          </a:p>
+        </p:txBody>
+      </p:sp>
+      <p:pic>
+        <p:nvPicPr>
+          <p:cNvPr id="4" name="Picture 4"/>
+          <p:cNvPicPr>
+            <a:picLocks noChangeAspect="1" noChangeArrowheads="1"/>
+          </p:cNvPicPr>
+          <p:nvPr/>
+        </p:nvPicPr>
+        <p:blipFill>
+          <a:blip r:embed="rId2" cstate="print"/>
+          <a:srcRect/>
+          <a:stretch>
+            <a:fillRect/>
+          </a:stretch>
+        </p:blipFill>
+        <p:spPr bwMode="auto">
+          <a:xfrm>
+            <a:off x="6248400" y="1981200"/>
+            <a:ext cx="2314575" cy="1981200"/>
+          </a:xfrm>
+          <a:prstGeom prst="rect">
+            <a:avLst/>
+          </a:prstGeom>
+          <a:noFill/>
+          <a:ln w="9525">
+            <a:noFill/>
+            <a:miter lim="800000"/>
+            <a:headEnd/>
+            <a:tailEnd/>
+          </a:ln>
+          <a:effectLst/>
+        </p:spPr>
+      </p:pic>
+      <p:pic>
+        <p:nvPicPr>
+          <p:cNvPr id="36868" name="Picture 4" descr="https://www.schranner.com/images/default-source/insights-blog/title-images/tactics7642960fcbe368bdbc66ff000097e6db.png?sfvrsn=51a1fe69_4"/>
+          <p:cNvPicPr>
+            <a:picLocks noChangeAspect="1" noChangeArrowheads="1"/>
+          </p:cNvPicPr>
+          <p:nvPr/>
+        </p:nvPicPr>
+        <p:blipFill>
+          <a:blip r:embed="rId3" cstate="print"/>
+          <a:srcRect/>
+          <a:stretch>
+            <a:fillRect/>
+          </a:stretch>
+        </p:blipFill>
+        <p:spPr bwMode="auto">
+          <a:xfrm>
+            <a:off x="5461355" y="4267200"/>
+            <a:ext cx="2844445" cy="2133334"/>
+          </a:xfrm>
+          <a:prstGeom prst="rect">
+            <a:avLst/>
+          </a:prstGeom>
+          <a:noFill/>
+        </p:spPr>
+      </p:pic>
+    </p:spTree>
+  </p:cSld>
+  <p:clrMapOvr>
+    <a:masterClrMapping/>
+  </p:clrMapOvr>
+</p:sld>
+</file>
+
+<file path=ppt/slides/slide32.xml><?xml version="1.0" encoding="utf-8"?>
+<p:sld xmlns:a="http://schemas.openxmlformats.org/drawingml/2006/main" xmlns:r="http://schemas.openxmlformats.org/officeDocument/2006/relationships" xmlns:p="http://schemas.openxmlformats.org/presentationml/2006/main">
+  <p:cSld>
+    <p:spTree>
+      <p:nvGrpSpPr>
+        <p:cNvPr id="1" name=""/>
+        <p:cNvGrpSpPr/>
+        <p:nvPr/>
+      </p:nvGrpSpPr>
+      <p:grpSpPr>
+        <a:xfrm>
+          <a:off x="0" y="0"/>
+          <a:ext cx="0" cy="0"/>
+          <a:chOff x="0" y="0"/>
+          <a:chExt cx="0" cy="0"/>
+        </a:xfrm>
+      </p:grpSpPr>
+      <p:sp>
+        <p:nvSpPr>
+          <p:cNvPr id="2" name="Title 1"/>
+          <p:cNvSpPr>
+            <a:spLocks noGrp="1"/>
+          </p:cNvSpPr>
+          <p:nvPr>
+            <p:ph type="title"/>
+          </p:nvPr>
+        </p:nvSpPr>
+        <p:spPr/>
+        <p:txBody>
+          <a:bodyPr/>
+          <a:lstStyle/>
+          <a:p>
+            <a:r>
+              <a:rPr lang="en-US" dirty="0" smtClean="0"/>
+              <a:t>Tools for Testing Availability</a:t>
+            </a:r>
+            <a:endParaRPr lang="en-US" dirty="0"/>
+          </a:p>
+        </p:txBody>
+      </p:sp>
+      <p:sp>
+        <p:nvSpPr>
+          <p:cNvPr id="3" name="Content Placeholder 2"/>
+          <p:cNvSpPr>
+            <a:spLocks noGrp="1"/>
+          </p:cNvSpPr>
+          <p:nvPr>
+            <p:ph idx="1"/>
+          </p:nvPr>
+        </p:nvSpPr>
+        <p:spPr/>
+        <p:txBody>
+          <a:bodyPr/>
+          <a:lstStyle/>
+          <a:p>
+            <a:r>
+              <a:rPr lang="en-US" sz="2400" dirty="0" smtClean="0">
+                <a:hlinkClick r:id="rId2"/>
+              </a:rPr>
+              <a:t>https://uptimerobot.com/</a:t>
+            </a:r>
+            <a:endParaRPr lang="en-US" sz="2400" dirty="0" smtClean="0"/>
+          </a:p>
+          <a:p>
+            <a:r>
+              <a:rPr lang="en-US" sz="2400" dirty="0" smtClean="0">
+                <a:hlinkClick r:id="rId3"/>
+              </a:rPr>
+              <a:t>https://www.pingdom.com/</a:t>
+            </a:r>
+            <a:endParaRPr lang="en-US" sz="2400" dirty="0" smtClean="0"/>
+          </a:p>
+          <a:p>
+            <a:r>
+              <a:rPr lang="en-US" sz="2400" dirty="0" smtClean="0">
+                <a:hlinkClick r:id="rId4"/>
+              </a:rPr>
+              <a:t>https://jmeter.apache.org/</a:t>
+            </a:r>
+            <a:endParaRPr lang="en-US" sz="2400" dirty="0" smtClean="0"/>
+          </a:p>
+        </p:txBody>
+      </p:sp>
+      <p:sp>
+        <p:nvSpPr>
+          <p:cNvPr id="1026" name="AutoShape 2" descr="17 Software Development Trends for 2025 &amp; Beyond"/>
+          <p:cNvSpPr>
+            <a:spLocks noChangeAspect="1" noChangeArrowheads="1"/>
+          </p:cNvSpPr>
+          <p:nvPr/>
+        </p:nvSpPr>
+        <p:spPr bwMode="auto">
+          <a:xfrm>
+            <a:off x="155575" y="-144463"/>
+            <a:ext cx="304800" cy="304801"/>
+          </a:xfrm>
+          <a:prstGeom prst="rect">
+            <a:avLst/>
+          </a:prstGeom>
+          <a:noFill/>
+        </p:spPr>
+        <p:txBody>
+          <a:bodyPr vert="horz" wrap="square" lIns="91440" tIns="45720" rIns="91440" bIns="45720" numCol="1" anchor="t" anchorCtr="0" compatLnSpc="1">
+            <a:prstTxWarp prst="textNoShape">
+              <a:avLst/>
+            </a:prstTxWarp>
+          </a:bodyPr>
+          <a:lstStyle/>
+          <a:p>
+            <a:endParaRPr lang="en-US"/>
+          </a:p>
+        </p:txBody>
+      </p:sp>
+      <p:sp>
+        <p:nvSpPr>
+          <p:cNvPr id="1028" name="AutoShape 4" descr="https://www.netsolutions.com/wp-content/uploads/2023/03/The-Future-of-Software-Development-in-2024-and-Beyond.webp"/>
+          <p:cNvSpPr>
+            <a:spLocks noChangeAspect="1" noChangeArrowheads="1"/>
+          </p:cNvSpPr>
+          <p:nvPr/>
+        </p:nvSpPr>
+        <p:spPr bwMode="auto">
+          <a:xfrm>
+            <a:off x="155575" y="-2590800"/>
+            <a:ext cx="9601200" cy="5400675"/>
+          </a:xfrm>
+          <a:prstGeom prst="rect">
+            <a:avLst/>
+          </a:prstGeom>
+          <a:noFill/>
+        </p:spPr>
+        <p:txBody>
+          <a:bodyPr vert="horz" wrap="square" lIns="91440" tIns="45720" rIns="91440" bIns="45720" numCol="1" anchor="t" anchorCtr="0" compatLnSpc="1">
+            <a:prstTxWarp prst="textNoShape">
+              <a:avLst/>
+            </a:prstTxWarp>
+          </a:bodyPr>
+          <a:lstStyle/>
+          <a:p>
+            <a:endParaRPr lang="en-US"/>
+          </a:p>
+        </p:txBody>
+      </p:sp>
+      <p:pic>
+        <p:nvPicPr>
+          <p:cNvPr id="1029" name="Picture 5"/>
+          <p:cNvPicPr>
+            <a:picLocks noChangeAspect="1" noChangeArrowheads="1"/>
+          </p:cNvPicPr>
+          <p:nvPr/>
+        </p:nvPicPr>
+        <p:blipFill>
+          <a:blip r:embed="rId5" cstate="print"/>
+          <a:srcRect/>
+          <a:stretch>
+            <a:fillRect/>
+          </a:stretch>
+        </p:blipFill>
+        <p:spPr bwMode="auto">
+          <a:xfrm>
+            <a:off x="2301875" y="3387725"/>
+            <a:ext cx="4540250" cy="2555875"/>
+          </a:xfrm>
+          <a:prstGeom prst="rect">
+            <a:avLst/>
+          </a:prstGeom>
+          <a:noFill/>
+          <a:ln w="9525">
+            <a:noFill/>
+            <a:miter lim="800000"/>
+            <a:headEnd/>
+            <a:tailEnd/>
+          </a:ln>
+        </p:spPr>
+      </p:pic>
+    </p:spTree>
+  </p:cSld>
+  <p:clrMapOvr>
+    <a:masterClrMapping/>
+  </p:clrMapOvr>
+</p:sld>
+</file>
+
+<file path=ppt/slides/slide33.xml><?xml version="1.0" encoding="utf-8"?>
+<p:sld xmlns:a="http://schemas.openxmlformats.org/drawingml/2006/main" xmlns:r="http://schemas.openxmlformats.org/officeDocument/2006/relationships" xmlns:p="http://schemas.openxmlformats.org/presentationml/2006/main">
+  <p:cSld>
+    <p:spTree>
+      <p:nvGrpSpPr>
+        <p:cNvPr id="1" name=""/>
+        <p:cNvGrpSpPr/>
+        <p:nvPr/>
+      </p:nvGrpSpPr>
+      <p:grpSpPr>
+        <a:xfrm>
+          <a:off x="0" y="0"/>
+          <a:ext cx="0" cy="0"/>
+          <a:chOff x="0" y="0"/>
+          <a:chExt cx="0" cy="0"/>
+        </a:xfrm>
+      </p:grpSpPr>
+      <p:pic>
+        <p:nvPicPr>
+          <p:cNvPr id="4" name="Picture 2" descr="https://lh3.ggpht.com/1IfZLL2QDSjZ0wS7sUhaMlsAOS8BBzdR3wZ1WawgRn7KZAM8nEVZYMOUM-lqQb0ikIzp=w300"/>
+          <p:cNvPicPr>
+            <a:picLocks noChangeAspect="1" noChangeArrowheads="1"/>
+          </p:cNvPicPr>
+          <p:nvPr/>
+        </p:nvPicPr>
+        <p:blipFill>
+          <a:blip r:embed="rId2" cstate="print"/>
+          <a:srcRect/>
+          <a:stretch>
+            <a:fillRect/>
+          </a:stretch>
+        </p:blipFill>
+        <p:spPr bwMode="auto">
+          <a:xfrm>
+            <a:off x="3276600" y="1905000"/>
+            <a:ext cx="2857500" cy="2857500"/>
+          </a:xfrm>
+          <a:prstGeom prst="rect">
+            <a:avLst/>
+          </a:prstGeom>
+          <a:noFill/>
+        </p:spPr>
+      </p:pic>
+    </p:spTree>
+  </p:cSld>
+  <p:clrMapOvr>
+    <a:masterClrMapping/>
+  </p:clrMapOvr>
+</p:sld>
+</file>
+
+<file path=ppt/slides/slide34.xml><?xml version="1.0" encoding="utf-8"?>
+<p:sld xmlns:a="http://schemas.openxmlformats.org/drawingml/2006/main" xmlns:r="http://schemas.openxmlformats.org/officeDocument/2006/relationships" xmlns:p="http://schemas.openxmlformats.org/presentationml/2006/main">
+  <p:cSld>
+    <p:spTree>
+      <p:nvGrpSpPr>
+        <p:cNvPr id="1" name=""/>
+        <p:cNvGrpSpPr/>
+        <p:nvPr/>
+      </p:nvGrpSpPr>
+      <p:grpSpPr>
+        <a:xfrm>
+          <a:off x="0" y="0"/>
+          <a:ext cx="0" cy="0"/>
+          <a:chOff x="0" y="0"/>
+          <a:chExt cx="0" cy="0"/>
+        </a:xfrm>
+      </p:grpSpPr>
+      <p:sp>
+        <p:nvSpPr>
+          <p:cNvPr id="2" name="Title 1"/>
+          <p:cNvSpPr>
+            <a:spLocks noGrp="1"/>
+          </p:cNvSpPr>
+          <p:nvPr>
+            <p:ph type="title"/>
+          </p:nvPr>
+        </p:nvSpPr>
+        <p:spPr/>
+        <p:txBody>
+          <a:bodyPr/>
+          <a:lstStyle/>
+          <a:p>
+            <a:r>
+              <a:rPr lang="en-US" dirty="0" smtClean="0"/>
+              <a:t>Performance Scenario</a:t>
+            </a:r>
+            <a:endParaRPr lang="en-US" dirty="0"/>
+          </a:p>
+        </p:txBody>
+      </p:sp>
+      <p:sp>
+        <p:nvSpPr>
+          <p:cNvPr id="3" name="Content Placeholder 2"/>
+          <p:cNvSpPr>
+            <a:spLocks noGrp="1"/>
+          </p:cNvSpPr>
+          <p:nvPr>
+            <p:ph idx="1"/>
+          </p:nvPr>
+        </p:nvSpPr>
+        <p:spPr/>
+        <p:txBody>
+          <a:bodyPr/>
+          <a:lstStyle/>
+          <a:p>
+            <a:r>
+              <a:rPr lang="en-US" sz="2400" i="1" dirty="0" smtClean="0">
+                <a:solidFill>
+                  <a:srgbClr val="C00000"/>
+                </a:solidFill>
+              </a:rPr>
+              <a:t>Performance</a:t>
+            </a:r>
+            <a:r>
+              <a:rPr lang="en-US" sz="2400" dirty="0" smtClean="0"/>
+              <a:t>, that is: It's about time and the software system's ability to </a:t>
+            </a:r>
+            <a:r>
+              <a:rPr lang="en-US" sz="2400" u="sng" dirty="0" smtClean="0"/>
+              <a:t>meet timing requirements</a:t>
+            </a:r>
+            <a:r>
+              <a:rPr lang="en-US" sz="2400" dirty="0" smtClean="0"/>
+              <a:t>.</a:t>
+            </a:r>
+            <a:endParaRPr lang="en-US" sz="2400" dirty="0"/>
+          </a:p>
+        </p:txBody>
+      </p:sp>
+      <p:pic>
+        <p:nvPicPr>
+          <p:cNvPr id="3075" name="Picture 3"/>
+          <p:cNvPicPr>
+            <a:picLocks noChangeAspect="1" noChangeArrowheads="1"/>
+          </p:cNvPicPr>
+          <p:nvPr/>
+        </p:nvPicPr>
+        <p:blipFill>
+          <a:blip r:embed="rId2" cstate="print"/>
+          <a:srcRect/>
+          <a:stretch>
+            <a:fillRect/>
+          </a:stretch>
+        </p:blipFill>
+        <p:spPr bwMode="auto">
+          <a:xfrm>
+            <a:off x="1085850" y="2698750"/>
+            <a:ext cx="6972300" cy="3625850"/>
+          </a:xfrm>
+          <a:prstGeom prst="rect">
+            <a:avLst/>
+          </a:prstGeom>
+          <a:noFill/>
+          <a:ln w="9525">
+            <a:noFill/>
+            <a:miter lim="800000"/>
+            <a:headEnd/>
+            <a:tailEnd/>
+          </a:ln>
+        </p:spPr>
+      </p:pic>
+    </p:spTree>
+  </p:cSld>
+  <p:clrMapOvr>
+    <a:masterClrMapping/>
+  </p:clrMapOvr>
+</p:sld>
+</file>
+
+<file path=ppt/slides/slide35.xml><?xml version="1.0" encoding="utf-8"?>
+<p:sld xmlns:a="http://schemas.openxmlformats.org/drawingml/2006/main" xmlns:r="http://schemas.openxmlformats.org/officeDocument/2006/relationships" xmlns:p="http://schemas.openxmlformats.org/presentationml/2006/main">
+  <p:cSld>
+    <p:spTree>
+      <p:nvGrpSpPr>
+        <p:cNvPr id="1" name=""/>
+        <p:cNvGrpSpPr/>
+        <p:nvPr/>
+      </p:nvGrpSpPr>
+      <p:grpSpPr>
+        <a:xfrm>
+          <a:off x="0" y="0"/>
+          <a:ext cx="0" cy="0"/>
+          <a:chOff x="0" y="0"/>
+          <a:chExt cx="0" cy="0"/>
+        </a:xfrm>
+      </p:grpSpPr>
+      <p:sp>
+        <p:nvSpPr>
+          <p:cNvPr id="2" name="Title 1"/>
+          <p:cNvSpPr>
+            <a:spLocks noGrp="1"/>
+          </p:cNvSpPr>
+          <p:nvPr>
+            <p:ph type="title"/>
+          </p:nvPr>
+        </p:nvSpPr>
+        <p:spPr/>
+        <p:txBody>
+          <a:bodyPr/>
+          <a:lstStyle/>
+          <a:p>
+            <a:r>
+              <a:rPr lang="en-US" dirty="0" smtClean="0"/>
               <a:t>Tactics for Performance</a:t>
             </a:r>
             <a:endParaRPr lang="en-US" dirty="0"/>
@@ -7544,7 +8712,7 @@
 </p:sld>
 </file>
 
-<file path=ppt/slides/slide31.xml><?xml version="1.0" encoding="utf-8"?>
+<file path=ppt/slides/slide36.xml><?xml version="1.0" encoding="utf-8"?>
 <p:sld xmlns:a="http://schemas.openxmlformats.org/drawingml/2006/main" xmlns:r="http://schemas.openxmlformats.org/officeDocument/2006/relationships" xmlns:p="http://schemas.openxmlformats.org/presentationml/2006/main">
   <p:cSld>
     <p:spTree>
@@ -7745,7 +8913,7 @@
 </p:sld>
 </file>
 
-<file path=ppt/slides/slide32.xml><?xml version="1.0" encoding="utf-8"?>
+<file path=ppt/slides/slide37.xml><?xml version="1.0" encoding="utf-8"?>
 <p:sld xmlns:a="http://schemas.openxmlformats.org/drawingml/2006/main" xmlns:r="http://schemas.openxmlformats.org/officeDocument/2006/relationships" xmlns:p="http://schemas.openxmlformats.org/presentationml/2006/main">
   <p:cSld>
     <p:spTree>
@@ -7796,7 +8964,7 @@
 </p:sld>
 </file>
 
-<file path=ppt/slides/slide33.xml><?xml version="1.0" encoding="utf-8"?>
+<file path=ppt/slides/slide38.xml><?xml version="1.0" encoding="utf-8"?>
 <p:sld xmlns:a="http://schemas.openxmlformats.org/drawingml/2006/main" xmlns:r="http://schemas.openxmlformats.org/officeDocument/2006/relationships" xmlns:p="http://schemas.openxmlformats.org/presentationml/2006/main">
   <p:cSld>
     <p:spTree>
@@ -7949,7 +9117,7 @@
 </p:sld>
 </file>
 
-<file path=ppt/slides/slide34.xml><?xml version="1.0" encoding="utf-8"?>
+<file path=ppt/slides/slide39.xml><?xml version="1.0" encoding="utf-8"?>
 <p:sld xmlns:a="http://schemas.openxmlformats.org/drawingml/2006/main" xmlns:r="http://schemas.openxmlformats.org/officeDocument/2006/relationships" xmlns:p="http://schemas.openxmlformats.org/presentationml/2006/main">
   <p:cSld>
     <p:spTree>
@@ -8099,7 +9267,163 @@
 </p:sld>
 </file>
 
-<file path=ppt/slides/slide35.xml><?xml version="1.0" encoding="utf-8"?>
+<file path=ppt/slides/slide4.xml><?xml version="1.0" encoding="utf-8"?>
+<p:sld xmlns:a="http://schemas.openxmlformats.org/drawingml/2006/main" xmlns:r="http://schemas.openxmlformats.org/officeDocument/2006/relationships" xmlns:p="http://schemas.openxmlformats.org/presentationml/2006/main">
+  <p:cSld>
+    <p:spTree>
+      <p:nvGrpSpPr>
+        <p:cNvPr id="1" name=""/>
+        <p:cNvGrpSpPr/>
+        <p:nvPr/>
+      </p:nvGrpSpPr>
+      <p:grpSpPr>
+        <a:xfrm>
+          <a:off x="0" y="0"/>
+          <a:ext cx="0" cy="0"/>
+          <a:chOff x="0" y="0"/>
+          <a:chExt cx="0" cy="0"/>
+        </a:xfrm>
+      </p:grpSpPr>
+      <p:sp>
+        <p:nvSpPr>
+          <p:cNvPr id="2" name="Title 1"/>
+          <p:cNvSpPr>
+            <a:spLocks noGrp="1"/>
+          </p:cNvSpPr>
+          <p:nvPr>
+            <p:ph type="title"/>
+          </p:nvPr>
+        </p:nvSpPr>
+        <p:spPr/>
+        <p:txBody>
+          <a:bodyPr/>
+          <a:lstStyle/>
+          <a:p>
+            <a:r>
+              <a:rPr lang="en-US" dirty="0" smtClean="0"/>
+              <a:t>References</a:t>
+            </a:r>
+            <a:endParaRPr lang="en-US" dirty="0"/>
+          </a:p>
+        </p:txBody>
+      </p:sp>
+      <p:sp>
+        <p:nvSpPr>
+          <p:cNvPr id="3" name="Content Placeholder 2"/>
+          <p:cNvSpPr>
+            <a:spLocks noGrp="1"/>
+          </p:cNvSpPr>
+          <p:nvPr>
+            <p:ph idx="1"/>
+          </p:nvPr>
+        </p:nvSpPr>
+        <p:spPr>
+          <a:xfrm>
+            <a:off x="304800" y="1600200"/>
+            <a:ext cx="5867400" cy="4724400"/>
+          </a:xfrm>
+        </p:spPr>
+        <p:txBody>
+          <a:bodyPr/>
+          <a:lstStyle/>
+          <a:p>
+            <a:pPr marL="457200" indent="-457200">
+              <a:buFont typeface="+mj-lt"/>
+              <a:buAutoNum type="arabicPeriod"/>
+            </a:pPr>
+            <a:r>
+              <a:rPr lang="en-US" sz="2400" dirty="0" smtClean="0"/>
+              <a:t>Len Bass, Paul Clements and Rick </a:t>
+            </a:r>
+            <a:r>
+              <a:rPr lang="en-US" sz="2400" dirty="0" err="1" smtClean="0"/>
+              <a:t>Kazman</a:t>
+            </a:r>
+            <a:r>
+              <a:rPr lang="en-US" sz="2400" dirty="0" smtClean="0"/>
+              <a:t> (2021). Software Architecture in Practice. Addison-Wesley.</a:t>
+            </a:r>
+          </a:p>
+          <a:p>
+            <a:pPr marL="457200" indent="-457200">
+              <a:buFont typeface="+mj-lt"/>
+              <a:buAutoNum type="arabicPeriod"/>
+            </a:pPr>
+            <a:r>
+              <a:rPr lang="en-US" sz="2400" dirty="0" smtClean="0"/>
+              <a:t>R. </a:t>
+            </a:r>
+            <a:r>
+              <a:rPr lang="en-US" sz="2400" dirty="0" err="1" smtClean="0"/>
+              <a:t>Kazman</a:t>
+            </a:r>
+            <a:r>
+              <a:rPr lang="en-US" sz="2400" dirty="0" smtClean="0"/>
+              <a:t>, M. Klein and P. Clements (1998). Evaluating Software Architectures for Real-Time Systems.</a:t>
+            </a:r>
+          </a:p>
+          <a:p>
+            <a:pPr marL="457200" indent="-457200">
+              <a:buFont typeface="+mj-lt"/>
+              <a:buAutoNum type="arabicPeriod"/>
+            </a:pPr>
+            <a:r>
+              <a:rPr lang="en-US" sz="2400" dirty="0" smtClean="0"/>
+              <a:t>Rick </a:t>
+            </a:r>
+            <a:r>
+              <a:rPr lang="en-US" sz="2400" dirty="0" err="1" smtClean="0"/>
+              <a:t>Kazman</a:t>
+            </a:r>
+            <a:r>
+              <a:rPr lang="en-US" sz="2400" dirty="0" smtClean="0"/>
+              <a:t>, Mark Klein and Paul Clements (2000). ATAM: Method for Architecture Evaluation.</a:t>
+            </a:r>
+          </a:p>
+        </p:txBody>
+      </p:sp>
+      <p:pic>
+        <p:nvPicPr>
+          <p:cNvPr id="4" name="Picture 4" descr="http://2.bp.blogspot.com/-FqRM_5NQE6Q/TaSdzyWfvtI/AAAAAAAAAFg/C_2LDJWJOx4/s1600/books-pile.jpg"/>
+          <p:cNvPicPr>
+            <a:picLocks noChangeAspect="1" noChangeArrowheads="1"/>
+          </p:cNvPicPr>
+          <p:nvPr/>
+        </p:nvPicPr>
+        <p:blipFill>
+          <a:blip r:embed="rId2" cstate="print"/>
+          <a:srcRect/>
+          <a:stretch>
+            <a:fillRect/>
+          </a:stretch>
+        </p:blipFill>
+        <p:spPr bwMode="auto">
+          <a:xfrm>
+            <a:off x="6267450" y="1752600"/>
+            <a:ext cx="2724150" cy="4133850"/>
+          </a:xfrm>
+          <a:prstGeom prst="rect">
+            <a:avLst/>
+          </a:prstGeom>
+          <a:noFill/>
+        </p:spPr>
+      </p:pic>
+    </p:spTree>
+  </p:cSld>
+  <p:clrMapOvr>
+    <a:masterClrMapping/>
+  </p:clrMapOvr>
+  <p:timing>
+    <p:tnLst>
+      <p:par>
+        <p:cTn id="1" dur="indefinite" restart="never" nodeType="tmRoot"/>
+      </p:par>
+    </p:tnLst>
+  </p:timing>
+</p:sld>
+</file>
+
+<file path=ppt/slides/slide40.xml><?xml version="1.0" encoding="utf-8"?>
 <p:sld xmlns:a="http://schemas.openxmlformats.org/drawingml/2006/main" xmlns:r="http://schemas.openxmlformats.org/officeDocument/2006/relationships" xmlns:p="http://schemas.openxmlformats.org/presentationml/2006/main">
   <p:cSld>
     <p:spTree>
@@ -8225,7 +9549,7 @@
 </p:sld>
 </file>
 
-<file path=ppt/slides/slide36.xml><?xml version="1.0" encoding="utf-8"?>
+<file path=ppt/slides/slide41.xml><?xml version="1.0" encoding="utf-8"?>
 <p:sld xmlns:a="http://schemas.openxmlformats.org/drawingml/2006/main" xmlns:r="http://schemas.openxmlformats.org/officeDocument/2006/relationships" xmlns:p="http://schemas.openxmlformats.org/presentationml/2006/main">
   <p:cSld>
     <p:spTree>
@@ -8452,7 +9776,7 @@
 </p:sld>
 </file>
 
-<file path=ppt/slides/slide37.xml><?xml version="1.0" encoding="utf-8"?>
+<file path=ppt/slides/slide42.xml><?xml version="1.0" encoding="utf-8"?>
 <p:sld xmlns:a="http://schemas.openxmlformats.org/drawingml/2006/main" xmlns:r="http://schemas.openxmlformats.org/officeDocument/2006/relationships" xmlns:p="http://schemas.openxmlformats.org/presentationml/2006/main">
   <p:cSld>
     <p:spTree>
@@ -8637,7 +9961,7 @@
 </p:sld>
 </file>
 
-<file path=ppt/slides/slide38.xml><?xml version="1.0" encoding="utf-8"?>
+<file path=ppt/slides/slide43.xml><?xml version="1.0" encoding="utf-8"?>
 <p:sld xmlns:a="http://schemas.openxmlformats.org/drawingml/2006/main" xmlns:r="http://schemas.openxmlformats.org/officeDocument/2006/relationships" xmlns:p="http://schemas.openxmlformats.org/presentationml/2006/main">
   <p:cSld>
     <p:spTree>
@@ -8688,7 +10012,7 @@
 </p:sld>
 </file>
 
-<file path=ppt/slides/slide39.xml><?xml version="1.0" encoding="utf-8"?>
+<file path=ppt/slides/slide44.xml><?xml version="1.0" encoding="utf-8"?>
 <p:sld xmlns:a="http://schemas.openxmlformats.org/drawingml/2006/main" xmlns:r="http://schemas.openxmlformats.org/officeDocument/2006/relationships" xmlns:p="http://schemas.openxmlformats.org/presentationml/2006/main">
   <p:cSld>
     <p:spTree>
@@ -8799,163 +10123,7 @@
 </p:sld>
 </file>
 
-<file path=ppt/slides/slide4.xml><?xml version="1.0" encoding="utf-8"?>
-<p:sld xmlns:a="http://schemas.openxmlformats.org/drawingml/2006/main" xmlns:r="http://schemas.openxmlformats.org/officeDocument/2006/relationships" xmlns:p="http://schemas.openxmlformats.org/presentationml/2006/main">
-  <p:cSld>
-    <p:spTree>
-      <p:nvGrpSpPr>
-        <p:cNvPr id="1" name=""/>
-        <p:cNvGrpSpPr/>
-        <p:nvPr/>
-      </p:nvGrpSpPr>
-      <p:grpSpPr>
-        <a:xfrm>
-          <a:off x="0" y="0"/>
-          <a:ext cx="0" cy="0"/>
-          <a:chOff x="0" y="0"/>
-          <a:chExt cx="0" cy="0"/>
-        </a:xfrm>
-      </p:grpSpPr>
-      <p:sp>
-        <p:nvSpPr>
-          <p:cNvPr id="2" name="Title 1"/>
-          <p:cNvSpPr>
-            <a:spLocks noGrp="1"/>
-          </p:cNvSpPr>
-          <p:nvPr>
-            <p:ph type="title"/>
-          </p:nvPr>
-        </p:nvSpPr>
-        <p:spPr/>
-        <p:txBody>
-          <a:bodyPr/>
-          <a:lstStyle/>
-          <a:p>
-            <a:r>
-              <a:rPr lang="en-US" dirty="0" smtClean="0"/>
-              <a:t>References</a:t>
-            </a:r>
-            <a:endParaRPr lang="en-US" dirty="0"/>
-          </a:p>
-        </p:txBody>
-      </p:sp>
-      <p:sp>
-        <p:nvSpPr>
-          <p:cNvPr id="3" name="Content Placeholder 2"/>
-          <p:cNvSpPr>
-            <a:spLocks noGrp="1"/>
-          </p:cNvSpPr>
-          <p:nvPr>
-            <p:ph idx="1"/>
-          </p:nvPr>
-        </p:nvSpPr>
-        <p:spPr>
-          <a:xfrm>
-            <a:off x="304800" y="1600200"/>
-            <a:ext cx="5867400" cy="4724400"/>
-          </a:xfrm>
-        </p:spPr>
-        <p:txBody>
-          <a:bodyPr/>
-          <a:lstStyle/>
-          <a:p>
-            <a:pPr marL="457200" indent="-457200">
-              <a:buFont typeface="+mj-lt"/>
-              <a:buAutoNum type="arabicPeriod"/>
-            </a:pPr>
-            <a:r>
-              <a:rPr lang="en-US" sz="2400" dirty="0" smtClean="0"/>
-              <a:t>Len Bass, Paul Clements and Rick </a:t>
-            </a:r>
-            <a:r>
-              <a:rPr lang="en-US" sz="2400" dirty="0" err="1" smtClean="0"/>
-              <a:t>Kazman</a:t>
-            </a:r>
-            <a:r>
-              <a:rPr lang="en-US" sz="2400" dirty="0" smtClean="0"/>
-              <a:t> (2021). Software Architecture in Practice. Addison-Wesley.</a:t>
-            </a:r>
-          </a:p>
-          <a:p>
-            <a:pPr marL="457200" indent="-457200">
-              <a:buFont typeface="+mj-lt"/>
-              <a:buAutoNum type="arabicPeriod"/>
-            </a:pPr>
-            <a:r>
-              <a:rPr lang="en-US" sz="2400" dirty="0" smtClean="0"/>
-              <a:t>R. </a:t>
-            </a:r>
-            <a:r>
-              <a:rPr lang="en-US" sz="2400" dirty="0" err="1" smtClean="0"/>
-              <a:t>Kazman</a:t>
-            </a:r>
-            <a:r>
-              <a:rPr lang="en-US" sz="2400" dirty="0" smtClean="0"/>
-              <a:t>, M. Klein and P. Clements (1998). Evaluating Software Architectures for Real-Time Systems.</a:t>
-            </a:r>
-          </a:p>
-          <a:p>
-            <a:pPr marL="457200" indent="-457200">
-              <a:buFont typeface="+mj-lt"/>
-              <a:buAutoNum type="arabicPeriod"/>
-            </a:pPr>
-            <a:r>
-              <a:rPr lang="en-US" sz="2400" dirty="0" smtClean="0"/>
-              <a:t>Rick </a:t>
-            </a:r>
-            <a:r>
-              <a:rPr lang="en-US" sz="2400" dirty="0" err="1" smtClean="0"/>
-              <a:t>Kazman</a:t>
-            </a:r>
-            <a:r>
-              <a:rPr lang="en-US" sz="2400" dirty="0" smtClean="0"/>
-              <a:t>, Mark Klein and Paul Clements (2000). ATAM: Method for Architecture Evaluation.</a:t>
-            </a:r>
-          </a:p>
-        </p:txBody>
-      </p:sp>
-      <p:pic>
-        <p:nvPicPr>
-          <p:cNvPr id="4" name="Picture 4" descr="http://2.bp.blogspot.com/-FqRM_5NQE6Q/TaSdzyWfvtI/AAAAAAAAAFg/C_2LDJWJOx4/s1600/books-pile.jpg"/>
-          <p:cNvPicPr>
-            <a:picLocks noChangeAspect="1" noChangeArrowheads="1"/>
-          </p:cNvPicPr>
-          <p:nvPr/>
-        </p:nvPicPr>
-        <p:blipFill>
-          <a:blip r:embed="rId2" cstate="print"/>
-          <a:srcRect/>
-          <a:stretch>
-            <a:fillRect/>
-          </a:stretch>
-        </p:blipFill>
-        <p:spPr bwMode="auto">
-          <a:xfrm>
-            <a:off x="6267450" y="1752600"/>
-            <a:ext cx="2724150" cy="4133850"/>
-          </a:xfrm>
-          <a:prstGeom prst="rect">
-            <a:avLst/>
-          </a:prstGeom>
-          <a:noFill/>
-        </p:spPr>
-      </p:pic>
-    </p:spTree>
-  </p:cSld>
-  <p:clrMapOvr>
-    <a:masterClrMapping/>
-  </p:clrMapOvr>
-  <p:timing>
-    <p:tnLst>
-      <p:par>
-        <p:cTn id="1" dur="indefinite" restart="never" nodeType="tmRoot"/>
-      </p:par>
-    </p:tnLst>
-  </p:timing>
-</p:sld>
-</file>
-
-<file path=ppt/slides/slide40.xml><?xml version="1.0" encoding="utf-8"?>
+<file path=ppt/slides/slide45.xml><?xml version="1.0" encoding="utf-8"?>
 <p:sld xmlns:a="http://schemas.openxmlformats.org/drawingml/2006/main" xmlns:r="http://schemas.openxmlformats.org/officeDocument/2006/relationships" xmlns:p="http://schemas.openxmlformats.org/presentationml/2006/main">
   <p:cSld>
     <p:spTree>
@@ -9112,7 +10280,7 @@
 </p:sld>
 </file>
 
-<file path=ppt/slides/slide41.xml><?xml version="1.0" encoding="utf-8"?>
+<file path=ppt/slides/slide46.xml><?xml version="1.0" encoding="utf-8"?>
 <p:sld xmlns:a="http://schemas.openxmlformats.org/drawingml/2006/main" xmlns:r="http://schemas.openxmlformats.org/officeDocument/2006/relationships" xmlns:p="http://schemas.openxmlformats.org/presentationml/2006/main">
   <p:cSld>
     <p:spTree>
@@ -9163,7 +10331,7 @@
 </p:sld>
 </file>
 
-<file path=ppt/slides/slide42.xml><?xml version="1.0" encoding="utf-8"?>
+<file path=ppt/slides/slide47.xml><?xml version="1.0" encoding="utf-8"?>
 <p:sld xmlns:a="http://schemas.openxmlformats.org/drawingml/2006/main" xmlns:r="http://schemas.openxmlformats.org/officeDocument/2006/relationships" xmlns:p="http://schemas.openxmlformats.org/presentationml/2006/main">
   <p:cSld>
     <p:spTree>
@@ -9296,7 +10464,7 @@
 </p:sld>
 </file>
 
-<file path=ppt/slides/slide43.xml><?xml version="1.0" encoding="utf-8"?>
+<file path=ppt/slides/slide48.xml><?xml version="1.0" encoding="utf-8"?>
 <p:sld xmlns:a="http://schemas.openxmlformats.org/drawingml/2006/main" xmlns:r="http://schemas.openxmlformats.org/officeDocument/2006/relationships" xmlns:p="http://schemas.openxmlformats.org/presentationml/2006/main">
   <p:cSld>
     <p:spTree>
@@ -9472,7 +10640,7 @@
 </p:sld>
 </file>
 
-<file path=ppt/slides/slide44.xml><?xml version="1.0" encoding="utf-8"?>
+<file path=ppt/slides/slide49.xml><?xml version="1.0" encoding="utf-8"?>
 <p:sld xmlns:a="http://schemas.openxmlformats.org/drawingml/2006/main" xmlns:r="http://schemas.openxmlformats.org/officeDocument/2006/relationships" xmlns:p="http://schemas.openxmlformats.org/presentationml/2006/main">
   <p:cSld>
     <p:spTree>
@@ -9523,7 +10691,184 @@
 </p:sld>
 </file>
 
-<file path=ppt/slides/slide45.xml><?xml version="1.0" encoding="utf-8"?>
+<file path=ppt/slides/slide5.xml><?xml version="1.0" encoding="utf-8"?>
+<p:sld xmlns:a="http://schemas.openxmlformats.org/drawingml/2006/main" xmlns:r="http://schemas.openxmlformats.org/officeDocument/2006/relationships" xmlns:p="http://schemas.openxmlformats.org/presentationml/2006/main">
+  <p:cSld>
+    <p:spTree>
+      <p:nvGrpSpPr>
+        <p:cNvPr id="1" name=""/>
+        <p:cNvGrpSpPr/>
+        <p:nvPr/>
+      </p:nvGrpSpPr>
+      <p:grpSpPr>
+        <a:xfrm>
+          <a:off x="0" y="0"/>
+          <a:ext cx="0" cy="0"/>
+          <a:chOff x="0" y="0"/>
+          <a:chExt cx="0" cy="0"/>
+        </a:xfrm>
+      </p:grpSpPr>
+      <p:sp>
+        <p:nvSpPr>
+          <p:cNvPr id="2" name="Title 1"/>
+          <p:cNvSpPr>
+            <a:spLocks noGrp="1"/>
+          </p:cNvSpPr>
+          <p:nvPr>
+            <p:ph type="title"/>
+          </p:nvPr>
+        </p:nvSpPr>
+        <p:spPr/>
+        <p:txBody>
+          <a:bodyPr/>
+          <a:lstStyle/>
+          <a:p>
+            <a:r>
+              <a:rPr lang="en-US" dirty="0" smtClean="0"/>
+              <a:t>Functionality [1]</a:t>
+            </a:r>
+            <a:endParaRPr lang="en-US" dirty="0"/>
+          </a:p>
+        </p:txBody>
+      </p:sp>
+      <p:sp>
+        <p:nvSpPr>
+          <p:cNvPr id="3" name="Content Placeholder 2"/>
+          <p:cNvSpPr>
+            <a:spLocks noGrp="1"/>
+          </p:cNvSpPr>
+          <p:nvPr>
+            <p:ph idx="1"/>
+          </p:nvPr>
+        </p:nvSpPr>
+        <p:spPr/>
+        <p:txBody>
+          <a:bodyPr/>
+          <a:lstStyle/>
+          <a:p>
+            <a:r>
+              <a:rPr lang="en-US" sz="2400" i="1" dirty="0" smtClean="0">
+                <a:solidFill>
+                  <a:srgbClr val="C00000"/>
+                </a:solidFill>
+              </a:rPr>
+              <a:t>Functionality</a:t>
+            </a:r>
+            <a:r>
+              <a:rPr lang="en-US" sz="2400" dirty="0" smtClean="0"/>
+              <a:t> is the ability of the system to </a:t>
+            </a:r>
+            <a:r>
+              <a:rPr lang="en-US" sz="2400" u="sng" dirty="0" smtClean="0"/>
+              <a:t>do the work</a:t>
+            </a:r>
+            <a:r>
+              <a:rPr lang="en-US" sz="2400" dirty="0" smtClean="0"/>
+              <a:t> for which it was intended.</a:t>
+            </a:r>
+          </a:p>
+          <a:p>
+            <a:r>
+              <a:rPr lang="en-US" sz="2400" dirty="0" smtClean="0"/>
+              <a:t>If functionality were </a:t>
+            </a:r>
+            <a:r>
+              <a:rPr lang="en-US" sz="2400" i="1" dirty="0" smtClean="0">
+                <a:solidFill>
+                  <a:srgbClr val="C00000"/>
+                </a:solidFill>
+              </a:rPr>
+              <a:t>the only thing</a:t>
+            </a:r>
+            <a:r>
+              <a:rPr lang="en-US" sz="2400" dirty="0" smtClean="0"/>
+              <a:t> that mattered, you wouldn't have to divide the system into pieces at all; a single monolithic blob with </a:t>
+            </a:r>
+            <a:r>
+              <a:rPr lang="en-US" sz="2400" u="sng" dirty="0" smtClean="0"/>
+              <a:t>no internal structure</a:t>
+            </a:r>
+            <a:r>
+              <a:rPr lang="en-US" sz="2400" dirty="0" smtClean="0"/>
+              <a:t> would do just fine.</a:t>
+            </a:r>
+          </a:p>
+          <a:p>
+            <a:r>
+              <a:rPr lang="en-US" sz="2400" dirty="0" smtClean="0"/>
+              <a:t>But although functionality is </a:t>
+            </a:r>
+            <a:r>
+              <a:rPr lang="en-US" sz="2400" u="sng" dirty="0" smtClean="0"/>
+              <a:t>independent of any particular structure</a:t>
+            </a:r>
+            <a:r>
+              <a:rPr lang="en-US" sz="2400" dirty="0" smtClean="0"/>
+              <a:t>, functionality is achieved by </a:t>
+            </a:r>
+            <a:r>
+              <a:rPr lang="en-US" sz="2400" i="1" dirty="0" smtClean="0">
+                <a:solidFill>
+                  <a:srgbClr val="C00000"/>
+                </a:solidFill>
+              </a:rPr>
+              <a:t>assigning responsibilities to architectural elements</a:t>
+            </a:r>
+            <a:r>
+              <a:rPr lang="en-US" sz="2400" dirty="0" smtClean="0"/>
+              <a:t>, resulting in one of the most basic of architectural structures.</a:t>
+            </a:r>
+          </a:p>
+          <a:p>
+            <a:r>
+              <a:rPr lang="en-US" sz="2400" dirty="0" smtClean="0"/>
+              <a:t>The architect's interest in functionality is in how it </a:t>
+            </a:r>
+            <a:r>
+              <a:rPr lang="en-US" sz="2400" i="1" dirty="0" smtClean="0">
+                <a:solidFill>
+                  <a:srgbClr val="C00000"/>
+                </a:solidFill>
+              </a:rPr>
+              <a:t>interacts with</a:t>
+            </a:r>
+            <a:r>
+              <a:rPr lang="en-US" sz="2400" dirty="0" smtClean="0"/>
+              <a:t> and </a:t>
+            </a:r>
+            <a:r>
+              <a:rPr lang="en-US" sz="2400" i="1" dirty="0" smtClean="0">
+                <a:solidFill>
+                  <a:srgbClr val="C00000"/>
+                </a:solidFill>
+              </a:rPr>
+              <a:t>constrains</a:t>
+            </a:r>
+            <a:r>
+              <a:rPr lang="en-US" sz="2400" dirty="0" smtClean="0"/>
+              <a:t> </a:t>
+            </a:r>
+            <a:r>
+              <a:rPr lang="en-US" sz="2400" b="1" u="sng" dirty="0" smtClean="0"/>
+              <a:t>other qualities</a:t>
+            </a:r>
+            <a:r>
+              <a:rPr lang="en-US" sz="2400" dirty="0" smtClean="0"/>
+              <a:t>.</a:t>
+            </a:r>
+            <a:endParaRPr lang="en-US" sz="2400" dirty="0"/>
+          </a:p>
+        </p:txBody>
+      </p:sp>
+    </p:spTree>
+  </p:cSld>
+  <p:clrMapOvr>
+    <a:masterClrMapping/>
+  </p:clrMapOvr>
+</p:sld>
+</file>
+
+<file path=ppt/slides/slide50.xml><?xml version="1.0" encoding="utf-8"?>
 <p:sld xmlns:a="http://schemas.openxmlformats.org/drawingml/2006/main" xmlns:r="http://schemas.openxmlformats.org/officeDocument/2006/relationships" xmlns:p="http://schemas.openxmlformats.org/presentationml/2006/main">
   <p:cSld>
     <p:spTree>
@@ -9634,7 +10979,7 @@
 </p:sld>
 </file>
 
-<file path=ppt/slides/slide46.xml><?xml version="1.0" encoding="utf-8"?>
+<file path=ppt/slides/slide51.xml><?xml version="1.0" encoding="utf-8"?>
 <p:sld xmlns:a="http://schemas.openxmlformats.org/drawingml/2006/main" xmlns:r="http://schemas.openxmlformats.org/officeDocument/2006/relationships" xmlns:p="http://schemas.openxmlformats.org/presentationml/2006/main">
   <p:cSld>
     <p:spTree>
@@ -9718,7 +11063,7 @@
 </p:sld>
 </file>
 
-<file path=ppt/slides/slide47.xml><?xml version="1.0" encoding="utf-8"?>
+<file path=ppt/slides/slide52.xml><?xml version="1.0" encoding="utf-8"?>
 <p:sld xmlns:a="http://schemas.openxmlformats.org/drawingml/2006/main" xmlns:r="http://schemas.openxmlformats.org/officeDocument/2006/relationships" xmlns:p="http://schemas.openxmlformats.org/presentationml/2006/main">
   <p:cSld>
     <p:spTree>
@@ -9769,7 +11114,7 @@
 </p:sld>
 </file>
 
-<file path=ppt/slides/slide48.xml><?xml version="1.0" encoding="utf-8"?>
+<file path=ppt/slides/slide53.xml><?xml version="1.0" encoding="utf-8"?>
 <p:sld xmlns:a="http://schemas.openxmlformats.org/drawingml/2006/main" xmlns:r="http://schemas.openxmlformats.org/officeDocument/2006/relationships" xmlns:p="http://schemas.openxmlformats.org/presentationml/2006/main">
   <p:cSld>
     <p:spTree>
@@ -9896,7 +11241,7 @@
 </p:sld>
 </file>
 
-<file path=ppt/slides/slide49.xml><?xml version="1.0" encoding="utf-8"?>
+<file path=ppt/slides/slide54.xml><?xml version="1.0" encoding="utf-8"?>
 <p:sld xmlns:a="http://schemas.openxmlformats.org/drawingml/2006/main" xmlns:r="http://schemas.openxmlformats.org/officeDocument/2006/relationships" xmlns:p="http://schemas.openxmlformats.org/presentationml/2006/main">
   <p:cSld>
     <p:spTree>
@@ -9976,184 +11321,7 @@
 </p:sld>
 </file>
 
-<file path=ppt/slides/slide5.xml><?xml version="1.0" encoding="utf-8"?>
-<p:sld xmlns:a="http://schemas.openxmlformats.org/drawingml/2006/main" xmlns:r="http://schemas.openxmlformats.org/officeDocument/2006/relationships" xmlns:p="http://schemas.openxmlformats.org/presentationml/2006/main">
-  <p:cSld>
-    <p:spTree>
-      <p:nvGrpSpPr>
-        <p:cNvPr id="1" name=""/>
-        <p:cNvGrpSpPr/>
-        <p:nvPr/>
-      </p:nvGrpSpPr>
-      <p:grpSpPr>
-        <a:xfrm>
-          <a:off x="0" y="0"/>
-          <a:ext cx="0" cy="0"/>
-          <a:chOff x="0" y="0"/>
-          <a:chExt cx="0" cy="0"/>
-        </a:xfrm>
-      </p:grpSpPr>
-      <p:sp>
-        <p:nvSpPr>
-          <p:cNvPr id="2" name="Title 1"/>
-          <p:cNvSpPr>
-            <a:spLocks noGrp="1"/>
-          </p:cNvSpPr>
-          <p:nvPr>
-            <p:ph type="title"/>
-          </p:nvPr>
-        </p:nvSpPr>
-        <p:spPr/>
-        <p:txBody>
-          <a:bodyPr/>
-          <a:lstStyle/>
-          <a:p>
-            <a:r>
-              <a:rPr lang="en-US" dirty="0" smtClean="0"/>
-              <a:t>Functionality [1]</a:t>
-            </a:r>
-            <a:endParaRPr lang="en-US" dirty="0"/>
-          </a:p>
-        </p:txBody>
-      </p:sp>
-      <p:sp>
-        <p:nvSpPr>
-          <p:cNvPr id="3" name="Content Placeholder 2"/>
-          <p:cNvSpPr>
-            <a:spLocks noGrp="1"/>
-          </p:cNvSpPr>
-          <p:nvPr>
-            <p:ph idx="1"/>
-          </p:nvPr>
-        </p:nvSpPr>
-        <p:spPr/>
-        <p:txBody>
-          <a:bodyPr/>
-          <a:lstStyle/>
-          <a:p>
-            <a:r>
-              <a:rPr lang="en-US" sz="2400" i="1" dirty="0" smtClean="0">
-                <a:solidFill>
-                  <a:srgbClr val="C00000"/>
-                </a:solidFill>
-              </a:rPr>
-              <a:t>Functionality</a:t>
-            </a:r>
-            <a:r>
-              <a:rPr lang="en-US" sz="2400" dirty="0" smtClean="0"/>
-              <a:t> is the ability of the system to </a:t>
-            </a:r>
-            <a:r>
-              <a:rPr lang="en-US" sz="2400" u="sng" dirty="0" smtClean="0"/>
-              <a:t>do the work</a:t>
-            </a:r>
-            <a:r>
-              <a:rPr lang="en-US" sz="2400" dirty="0" smtClean="0"/>
-              <a:t> for which it was intended.</a:t>
-            </a:r>
-          </a:p>
-          <a:p>
-            <a:r>
-              <a:rPr lang="en-US" sz="2400" dirty="0" smtClean="0"/>
-              <a:t>If functionality were </a:t>
-            </a:r>
-            <a:r>
-              <a:rPr lang="en-US" sz="2400" i="1" dirty="0" smtClean="0">
-                <a:solidFill>
-                  <a:srgbClr val="C00000"/>
-                </a:solidFill>
-              </a:rPr>
-              <a:t>the only thing</a:t>
-            </a:r>
-            <a:r>
-              <a:rPr lang="en-US" sz="2400" dirty="0" smtClean="0"/>
-              <a:t> that mattered, you wouldn't have to divide the system into pieces at all; a single monolithic blob with </a:t>
-            </a:r>
-            <a:r>
-              <a:rPr lang="en-US" sz="2400" u="sng" dirty="0" smtClean="0"/>
-              <a:t>no internal structure</a:t>
-            </a:r>
-            <a:r>
-              <a:rPr lang="en-US" sz="2400" dirty="0" smtClean="0"/>
-              <a:t> would do just fine.</a:t>
-            </a:r>
-          </a:p>
-          <a:p>
-            <a:r>
-              <a:rPr lang="en-US" sz="2400" dirty="0" smtClean="0"/>
-              <a:t>But although functionality is </a:t>
-            </a:r>
-            <a:r>
-              <a:rPr lang="en-US" sz="2400" u="sng" dirty="0" smtClean="0"/>
-              <a:t>independent of any particular structure</a:t>
-            </a:r>
-            <a:r>
-              <a:rPr lang="en-US" sz="2400" dirty="0" smtClean="0"/>
-              <a:t>, functionality is achieved by </a:t>
-            </a:r>
-            <a:r>
-              <a:rPr lang="en-US" sz="2400" i="1" dirty="0" smtClean="0">
-                <a:solidFill>
-                  <a:srgbClr val="C00000"/>
-                </a:solidFill>
-              </a:rPr>
-              <a:t>assigning responsibilities to architectural elements</a:t>
-            </a:r>
-            <a:r>
-              <a:rPr lang="en-US" sz="2400" dirty="0" smtClean="0"/>
-              <a:t>, resulting in one of the most basic of architectural structures.</a:t>
-            </a:r>
-          </a:p>
-          <a:p>
-            <a:r>
-              <a:rPr lang="en-US" sz="2400" dirty="0" smtClean="0"/>
-              <a:t>The architect's interest in functionality is in how it </a:t>
-            </a:r>
-            <a:r>
-              <a:rPr lang="en-US" sz="2400" i="1" dirty="0" smtClean="0">
-                <a:solidFill>
-                  <a:srgbClr val="C00000"/>
-                </a:solidFill>
-              </a:rPr>
-              <a:t>interacts with</a:t>
-            </a:r>
-            <a:r>
-              <a:rPr lang="en-US" sz="2400" dirty="0" smtClean="0"/>
-              <a:t> and </a:t>
-            </a:r>
-            <a:r>
-              <a:rPr lang="en-US" sz="2400" i="1" dirty="0" smtClean="0">
-                <a:solidFill>
-                  <a:srgbClr val="C00000"/>
-                </a:solidFill>
-              </a:rPr>
-              <a:t>constrains</a:t>
-            </a:r>
-            <a:r>
-              <a:rPr lang="en-US" sz="2400" dirty="0" smtClean="0"/>
-              <a:t> </a:t>
-            </a:r>
-            <a:r>
-              <a:rPr lang="en-US" sz="2400" b="1" u="sng" dirty="0" smtClean="0"/>
-              <a:t>other qualities</a:t>
-            </a:r>
-            <a:r>
-              <a:rPr lang="en-US" sz="2400" dirty="0" smtClean="0"/>
-              <a:t>.</a:t>
-            </a:r>
-            <a:endParaRPr lang="en-US" sz="2400" dirty="0"/>
-          </a:p>
-        </p:txBody>
-      </p:sp>
-    </p:spTree>
-  </p:cSld>
-  <p:clrMapOvr>
-    <a:masterClrMapping/>
-  </p:clrMapOvr>
-</p:sld>
-</file>
-
-<file path=ppt/slides/slide50.xml><?xml version="1.0" encoding="utf-8"?>
+<file path=ppt/slides/slide55.xml><?xml version="1.0" encoding="utf-8"?>
 <p:sld xmlns:a="http://schemas.openxmlformats.org/drawingml/2006/main" xmlns:r="http://schemas.openxmlformats.org/officeDocument/2006/relationships" xmlns:p="http://schemas.openxmlformats.org/presentationml/2006/main">
   <p:cSld>
     <p:spTree>
@@ -10287,7 +11455,7 @@
 </p:sld>
 </file>
 
-<file path=ppt/slides/slide51.xml><?xml version="1.0" encoding="utf-8"?>
+<file path=ppt/slides/slide56.xml><?xml version="1.0" encoding="utf-8"?>
 <p:sld xmlns:a="http://schemas.openxmlformats.org/drawingml/2006/main" xmlns:r="http://schemas.openxmlformats.org/officeDocument/2006/relationships" xmlns:p="http://schemas.openxmlformats.org/presentationml/2006/main">
   <p:cSld>
     <p:spTree>
@@ -10433,7 +11601,7 @@
 </p:sld>
 </file>
 
-<file path=ppt/slides/slide52.xml><?xml version="1.0" encoding="utf-8"?>
+<file path=ppt/slides/slide57.xml><?xml version="1.0" encoding="utf-8"?>
 <p:sld xmlns:a="http://schemas.openxmlformats.org/drawingml/2006/main" xmlns:r="http://schemas.openxmlformats.org/officeDocument/2006/relationships" xmlns:p="http://schemas.openxmlformats.org/presentationml/2006/main">
   <p:cSld>
     <p:spTree>
@@ -10582,7 +11750,7 @@
 </p:sld>
 </file>
 
-<file path=ppt/slides/slide53.xml><?xml version="1.0" encoding="utf-8"?>
+<file path=ppt/slides/slide58.xml><?xml version="1.0" encoding="utf-8"?>
 <p:sld xmlns:a="http://schemas.openxmlformats.org/drawingml/2006/main" xmlns:r="http://schemas.openxmlformats.org/officeDocument/2006/relationships" xmlns:p="http://schemas.openxmlformats.org/presentationml/2006/main">
   <p:cSld>
     <p:spTree>
@@ -10633,7 +11801,7 @@
 </p:sld>
 </file>
 
-<file path=ppt/slides/slide54.xml><?xml version="1.0" encoding="utf-8"?>
+<file path=ppt/slides/slide59.xml><?xml version="1.0" encoding="utf-8"?>
 <p:sld xmlns:a="http://schemas.openxmlformats.org/drawingml/2006/main" xmlns:r="http://schemas.openxmlformats.org/officeDocument/2006/relationships" xmlns:p="http://schemas.openxmlformats.org/presentationml/2006/main">
   <p:cSld>
     <p:spTree>
@@ -10755,86 +11923,6 @@
   <p:clrMapOvr>
     <a:masterClrMapping/>
   </p:clrMapOvr>
-</p:sld>
-</file>
-
-<file path=ppt/slides/slide55.xml><?xml version="1.0" encoding="utf-8"?>
-<p:sld xmlns:a="http://schemas.openxmlformats.org/drawingml/2006/main" xmlns:r="http://schemas.openxmlformats.org/officeDocument/2006/relationships" xmlns:p="http://schemas.openxmlformats.org/presentationml/2006/main">
-  <p:cSld>
-    <p:spTree>
-      <p:nvGrpSpPr>
-        <p:cNvPr id="1" name=""/>
-        <p:cNvGrpSpPr/>
-        <p:nvPr/>
-      </p:nvGrpSpPr>
-      <p:grpSpPr>
-        <a:xfrm>
-          <a:off x="0" y="0"/>
-          <a:ext cx="0" cy="0"/>
-          <a:chOff x="0" y="0"/>
-          <a:chExt cx="0" cy="0"/>
-        </a:xfrm>
-      </p:grpSpPr>
-      <p:sp>
-        <p:nvSpPr>
-          <p:cNvPr id="18434" name="Title 1"/>
-          <p:cNvSpPr>
-            <a:spLocks noGrp="1"/>
-          </p:cNvSpPr>
-          <p:nvPr>
-            <p:ph type="title"/>
-          </p:nvPr>
-        </p:nvSpPr>
-        <p:spPr/>
-        <p:txBody>
-          <a:bodyPr/>
-          <a:lstStyle/>
-          <a:p>
-            <a:pPr eaLnBrk="1" hangingPunct="1"/>
-            <a:r>
-              <a:rPr lang="en-US" dirty="0" smtClean="0"/>
-              <a:t>Thank You &amp; See You Again</a:t>
-            </a:r>
-          </a:p>
-        </p:txBody>
-      </p:sp>
-      <p:pic>
-        <p:nvPicPr>
-          <p:cNvPr id="5" name="Content Placeholder 4"/>
-          <p:cNvPicPr>
-            <a:picLocks noGrp="1" noChangeAspect="1" noChangeArrowheads="1"/>
-          </p:cNvPicPr>
-          <p:nvPr>
-            <p:ph idx="1"/>
-          </p:nvPr>
-        </p:nvPicPr>
-        <p:blipFill>
-          <a:blip r:embed="rId2" cstate="print"/>
-          <a:srcRect/>
-          <a:stretch>
-            <a:fillRect/>
-          </a:stretch>
-        </p:blipFill>
-        <p:spPr>
-          <a:xfrm>
-            <a:off x="1143000" y="1676400"/>
-            <a:ext cx="6810375" cy="4525963"/>
-          </a:xfrm>
-          <a:noFill/>
-        </p:spPr>
-      </p:pic>
-    </p:spTree>
-  </p:cSld>
-  <p:clrMapOvr>
-    <a:masterClrMapping/>
-  </p:clrMapOvr>
-  <p:timing>
-    <p:tnLst>
-      <p:par>
-        <p:cTn id="1" dur="indefinite" restart="never" nodeType="tmRoot"/>
-      </p:par>
-    </p:tnLst>
-  </p:timing>
 </p:sld>
 </file>
 
@@ -10994,6 +12082,86 @@
   <p:clrMapOvr>
     <a:masterClrMapping/>
   </p:clrMapOvr>
+</p:sld>
+</file>
+
+<file path=ppt/slides/slide60.xml><?xml version="1.0" encoding="utf-8"?>
+<p:sld xmlns:a="http://schemas.openxmlformats.org/drawingml/2006/main" xmlns:r="http://schemas.openxmlformats.org/officeDocument/2006/relationships" xmlns:p="http://schemas.openxmlformats.org/presentationml/2006/main">
+  <p:cSld>
+    <p:spTree>
+      <p:nvGrpSpPr>
+        <p:cNvPr id="1" name=""/>
+        <p:cNvGrpSpPr/>
+        <p:nvPr/>
+      </p:nvGrpSpPr>
+      <p:grpSpPr>
+        <a:xfrm>
+          <a:off x="0" y="0"/>
+          <a:ext cx="0" cy="0"/>
+          <a:chOff x="0" y="0"/>
+          <a:chExt cx="0" cy="0"/>
+        </a:xfrm>
+      </p:grpSpPr>
+      <p:sp>
+        <p:nvSpPr>
+          <p:cNvPr id="18434" name="Title 1"/>
+          <p:cNvSpPr>
+            <a:spLocks noGrp="1"/>
+          </p:cNvSpPr>
+          <p:nvPr>
+            <p:ph type="title"/>
+          </p:nvPr>
+        </p:nvSpPr>
+        <p:spPr/>
+        <p:txBody>
+          <a:bodyPr/>
+          <a:lstStyle/>
+          <a:p>
+            <a:pPr eaLnBrk="1" hangingPunct="1"/>
+            <a:r>
+              <a:rPr lang="en-US" dirty="0" smtClean="0"/>
+              <a:t>Thank You &amp; See You Again</a:t>
+            </a:r>
+          </a:p>
+        </p:txBody>
+      </p:sp>
+      <p:pic>
+        <p:nvPicPr>
+          <p:cNvPr id="5" name="Content Placeholder 4"/>
+          <p:cNvPicPr>
+            <a:picLocks noGrp="1" noChangeAspect="1" noChangeArrowheads="1"/>
+          </p:cNvPicPr>
+          <p:nvPr>
+            <p:ph idx="1"/>
+          </p:nvPr>
+        </p:nvPicPr>
+        <p:blipFill>
+          <a:blip r:embed="rId2" cstate="print"/>
+          <a:srcRect/>
+          <a:stretch>
+            <a:fillRect/>
+          </a:stretch>
+        </p:blipFill>
+        <p:spPr>
+          <a:xfrm>
+            <a:off x="1143000" y="1676400"/>
+            <a:ext cx="6810375" cy="4525963"/>
+          </a:xfrm>
+          <a:noFill/>
+        </p:spPr>
+      </p:pic>
+    </p:spTree>
+  </p:cSld>
+  <p:clrMapOvr>
+    <a:masterClrMapping/>
+  </p:clrMapOvr>
+  <p:timing>
+    <p:tnLst>
+      <p:par>
+        <p:cTn id="1" dur="indefinite" restart="never" nodeType="tmRoot"/>
+      </p:par>
+    </p:tnLst>
+  </p:timing>
 </p:sld>
 </file>
 

--- a/Software Design/08. Quality Attributes.pptx
+++ b/Software Design/08. Quality Attributes.pptx
@@ -5,7 +5,7 @@
     <p:sldMasterId id="2147483708" r:id="rId1"/>
   </p:sldMasterIdLst>
   <p:notesMasterIdLst>
-    <p:notesMasterId r:id="rId62"/>
+    <p:notesMasterId r:id="rId65"/>
   </p:notesMasterIdLst>
   <p:sldIdLst>
     <p:sldId id="256" r:id="rId2"/>
@@ -27,47 +27,50 @@
     <p:sldId id="542" r:id="rId18"/>
     <p:sldId id="539" r:id="rId19"/>
     <p:sldId id="543" r:id="rId20"/>
-    <p:sldId id="482" r:id="rId21"/>
-    <p:sldId id="440" r:id="rId22"/>
-    <p:sldId id="483" r:id="rId23"/>
-    <p:sldId id="438" r:id="rId24"/>
-    <p:sldId id="441" r:id="rId25"/>
-    <p:sldId id="522" r:id="rId26"/>
-    <p:sldId id="523" r:id="rId27"/>
-    <p:sldId id="484" r:id="rId28"/>
-    <p:sldId id="533" r:id="rId29"/>
-    <p:sldId id="536" r:id="rId30"/>
-    <p:sldId id="507" r:id="rId31"/>
-    <p:sldId id="534" r:id="rId32"/>
-    <p:sldId id="535" r:id="rId33"/>
-    <p:sldId id="509" r:id="rId34"/>
-    <p:sldId id="487" r:id="rId35"/>
-    <p:sldId id="494" r:id="rId36"/>
-    <p:sldId id="525" r:id="rId37"/>
-    <p:sldId id="510" r:id="rId38"/>
-    <p:sldId id="499" r:id="rId39"/>
-    <p:sldId id="500" r:id="rId40"/>
-    <p:sldId id="497" r:id="rId41"/>
-    <p:sldId id="498" r:id="rId42"/>
-    <p:sldId id="526" r:id="rId43"/>
-    <p:sldId id="511" r:id="rId44"/>
-    <p:sldId id="503" r:id="rId45"/>
-    <p:sldId id="504" r:id="rId46"/>
-    <p:sldId id="512" r:id="rId47"/>
-    <p:sldId id="501" r:id="rId48"/>
-    <p:sldId id="502" r:id="rId49"/>
-    <p:sldId id="514" r:id="rId50"/>
-    <p:sldId id="515" r:id="rId51"/>
-    <p:sldId id="516" r:id="rId52"/>
-    <p:sldId id="527" r:id="rId53"/>
-    <p:sldId id="528" r:id="rId54"/>
-    <p:sldId id="529" r:id="rId55"/>
-    <p:sldId id="530" r:id="rId56"/>
-    <p:sldId id="531" r:id="rId57"/>
-    <p:sldId id="532" r:id="rId58"/>
-    <p:sldId id="517" r:id="rId59"/>
-    <p:sldId id="518" r:id="rId60"/>
-    <p:sldId id="359" r:id="rId61"/>
+    <p:sldId id="544" r:id="rId21"/>
+    <p:sldId id="546" r:id="rId22"/>
+    <p:sldId id="547" r:id="rId23"/>
+    <p:sldId id="482" r:id="rId24"/>
+    <p:sldId id="440" r:id="rId25"/>
+    <p:sldId id="483" r:id="rId26"/>
+    <p:sldId id="438" r:id="rId27"/>
+    <p:sldId id="441" r:id="rId28"/>
+    <p:sldId id="522" r:id="rId29"/>
+    <p:sldId id="523" r:id="rId30"/>
+    <p:sldId id="484" r:id="rId31"/>
+    <p:sldId id="533" r:id="rId32"/>
+    <p:sldId id="536" r:id="rId33"/>
+    <p:sldId id="507" r:id="rId34"/>
+    <p:sldId id="534" r:id="rId35"/>
+    <p:sldId id="535" r:id="rId36"/>
+    <p:sldId id="509" r:id="rId37"/>
+    <p:sldId id="487" r:id="rId38"/>
+    <p:sldId id="494" r:id="rId39"/>
+    <p:sldId id="525" r:id="rId40"/>
+    <p:sldId id="510" r:id="rId41"/>
+    <p:sldId id="499" r:id="rId42"/>
+    <p:sldId id="500" r:id="rId43"/>
+    <p:sldId id="497" r:id="rId44"/>
+    <p:sldId id="498" r:id="rId45"/>
+    <p:sldId id="526" r:id="rId46"/>
+    <p:sldId id="511" r:id="rId47"/>
+    <p:sldId id="503" r:id="rId48"/>
+    <p:sldId id="504" r:id="rId49"/>
+    <p:sldId id="512" r:id="rId50"/>
+    <p:sldId id="501" r:id="rId51"/>
+    <p:sldId id="502" r:id="rId52"/>
+    <p:sldId id="514" r:id="rId53"/>
+    <p:sldId id="515" r:id="rId54"/>
+    <p:sldId id="516" r:id="rId55"/>
+    <p:sldId id="527" r:id="rId56"/>
+    <p:sldId id="528" r:id="rId57"/>
+    <p:sldId id="529" r:id="rId58"/>
+    <p:sldId id="530" r:id="rId59"/>
+    <p:sldId id="531" r:id="rId60"/>
+    <p:sldId id="532" r:id="rId61"/>
+    <p:sldId id="517" r:id="rId62"/>
+    <p:sldId id="518" r:id="rId63"/>
+    <p:sldId id="359" r:id="rId64"/>
   </p:sldIdLst>
   <p:sldSz cx="9144000" cy="6858000" type="screen4x3"/>
   <p:notesSz cx="6858000" cy="9144000"/>
@@ -5409,16 +5412,26 @@
           <a:lstStyle/>
           <a:p>
             <a:r>
-              <a:rPr lang="en-US" sz="1800" dirty="0" smtClean="0"/>
-              <a:t># On Windows </a:t>
-            </a:r>
-            <a:r>
-              <a:rPr lang="en-US" sz="1800" dirty="0" err="1" smtClean="0"/>
+              <a:rPr lang="en-US" sz="1800" b="1" dirty="0" smtClean="0"/>
+              <a:t># In Windows </a:t>
+            </a:r>
+            <a:r>
+              <a:rPr lang="en-US" sz="1800" b="1" dirty="0" err="1" smtClean="0"/>
               <a:t>PowerShell</a:t>
             </a:r>
             <a:r>
-              <a:rPr lang="en-US" sz="1800" dirty="0" smtClean="0"/>
+              <a:rPr lang="en-US" sz="1800" b="1" dirty="0" smtClean="0"/>
               <a:t>:</a:t>
+            </a:r>
+          </a:p>
+          <a:p>
+            <a:r>
+              <a:rPr lang="en-US" sz="1800" b="1" dirty="0" err="1" smtClean="0"/>
+              <a:t>cd</a:t>
+            </a:r>
+            <a:r>
+              <a:rPr lang="en-US" sz="1800" b="1" dirty="0" smtClean="0"/>
+              <a:t> C:\Users\admin\Downloads</a:t>
             </a:r>
           </a:p>
           <a:p>
@@ -5428,7 +5441,11 @@
             </a:r>
             <a:r>
               <a:rPr lang="en-US" sz="1800" dirty="0" smtClean="0"/>
-              <a:t> --version</a:t>
+              <a:t> </a:t>
+            </a:r>
+            <a:r>
+              <a:rPr lang="en-US" sz="1800" dirty="0" smtClean="0"/>
+              <a:t>--version</a:t>
             </a:r>
           </a:p>
           <a:p>
@@ -5601,15 +5618,56 @@
           <a:p>
             <a:r>
               <a:rPr lang="en-US" sz="1800" dirty="0" smtClean="0"/>
-              <a:t># On Windows </a:t>
+              <a:t>## </a:t>
             </a:r>
             <a:r>
               <a:rPr lang="en-US" sz="1800" dirty="0" err="1" smtClean="0"/>
-              <a:t>PowerShell</a:t>
+              <a:t>fio</a:t>
             </a:r>
             <a:r>
               <a:rPr lang="en-US" sz="1800" dirty="0" smtClean="0"/>
-              <a:t>:</a:t>
+              <a:t> (Flexible I/O Tester) is a command-line tool for benchmarking and stress-testing storage devices by measuring throughput, IOPS, and latency under configurable disk I/O workloads</a:t>
+            </a:r>
+            <a:r>
+              <a:rPr lang="en-US" sz="1800" dirty="0" smtClean="0"/>
+              <a:t>.</a:t>
+            </a:r>
+            <a:endParaRPr lang="en-US" sz="1800" dirty="0" smtClean="0"/>
+          </a:p>
+          <a:p>
+            <a:r>
+              <a:rPr lang="en-US" sz="1800" dirty="0" err="1" smtClean="0"/>
+              <a:t>choco</a:t>
+            </a:r>
+            <a:r>
+              <a:rPr lang="en-US" sz="1800" dirty="0" smtClean="0"/>
+              <a:t> install </a:t>
+            </a:r>
+            <a:r>
+              <a:rPr lang="en-US" sz="1800" dirty="0" err="1" smtClean="0"/>
+              <a:t>fio</a:t>
+            </a:r>
+            <a:r>
+              <a:rPr lang="en-US" sz="1800" dirty="0" smtClean="0"/>
+              <a:t> -</a:t>
+            </a:r>
+            <a:r>
+              <a:rPr lang="en-US" sz="1800" dirty="0" smtClean="0"/>
+              <a:t>y</a:t>
+            </a:r>
+          </a:p>
+          <a:p>
+            <a:r>
+              <a:rPr lang="en-US" sz="1800" dirty="0" err="1" smtClean="0"/>
+              <a:t>fio</a:t>
+            </a:r>
+            <a:r>
+              <a:rPr lang="en-US" sz="1800" dirty="0" smtClean="0"/>
+              <a:t> --</a:t>
+            </a:r>
+            <a:r>
+              <a:rPr lang="en-US" sz="1800" dirty="0" smtClean="0"/>
+              <a:t>version</a:t>
             </a:r>
           </a:p>
           <a:p>
@@ -5619,11 +5677,11 @@
             </a:r>
             <a:r>
               <a:rPr lang="en-US" sz="1800" dirty="0" err="1" smtClean="0"/>
-              <a:t>fio</a:t>
+              <a:t>jq</a:t>
             </a:r>
             <a:r>
               <a:rPr lang="en-US" sz="1800" dirty="0" smtClean="0"/>
-              <a:t> (Flexible I/O Tester) is a command-line tool for benchmarking and stress-testing storage devices by measuring throughput, IOPS, and latency under configurable disk I/O workloads.</a:t>
+              <a:t> is a command-line tool for parsing, querying, transforming, and formatting JSON data.</a:t>
             </a:r>
           </a:p>
           <a:p>
@@ -5637,7 +5695,7 @@
             </a:r>
             <a:r>
               <a:rPr lang="en-US" sz="1800" dirty="0" err="1" smtClean="0"/>
-              <a:t>fio</a:t>
+              <a:t>jq</a:t>
             </a:r>
             <a:r>
               <a:rPr lang="en-US" sz="1800" dirty="0" smtClean="0"/>
@@ -5651,7 +5709,7 @@
           <a:p>
             <a:r>
               <a:rPr lang="en-US" sz="1800" dirty="0" err="1" smtClean="0"/>
-              <a:t>fio</a:t>
+              <a:t>jq</a:t>
             </a:r>
             <a:r>
               <a:rPr lang="en-US" sz="1800" dirty="0" smtClean="0"/>
@@ -5665,58 +5723,13 @@
           <a:p>
             <a:r>
               <a:rPr lang="en-US" sz="1800" dirty="0" smtClean="0"/>
-              <a:t>## </a:t>
-            </a:r>
-            <a:r>
-              <a:rPr lang="en-US" sz="1800" dirty="0" err="1" smtClean="0"/>
-              <a:t>jq</a:t>
+              <a:t>## STREAM is not packaged consistently, so build it from </a:t>
             </a:r>
             <a:r>
               <a:rPr lang="en-US" sz="1800" dirty="0" smtClean="0"/>
-              <a:t> is a command-line tool for parsing, querying, transforming, and formatting JSON data.</a:t>
-            </a:r>
-          </a:p>
-          <a:p>
-            <a:r>
-              <a:rPr lang="en-US" sz="1800" dirty="0" err="1" smtClean="0"/>
-              <a:t>choco</a:t>
-            </a:r>
-            <a:r>
-              <a:rPr lang="en-US" sz="1800" dirty="0" smtClean="0"/>
-              <a:t> install </a:t>
-            </a:r>
-            <a:r>
-              <a:rPr lang="en-US" sz="1800" dirty="0" err="1" smtClean="0"/>
-              <a:t>jq</a:t>
-            </a:r>
-            <a:r>
-              <a:rPr lang="en-US" sz="1800" dirty="0" smtClean="0"/>
-              <a:t> -</a:t>
-            </a:r>
-            <a:r>
-              <a:rPr lang="en-US" sz="1800" dirty="0" smtClean="0"/>
-              <a:t>y</a:t>
-            </a:r>
-          </a:p>
-          <a:p>
-            <a:r>
-              <a:rPr lang="en-US" sz="1800" dirty="0" err="1" smtClean="0"/>
-              <a:t>jq</a:t>
-            </a:r>
-            <a:r>
-              <a:rPr lang="en-US" sz="1800" dirty="0" smtClean="0"/>
-              <a:t> --</a:t>
-            </a:r>
-            <a:r>
-              <a:rPr lang="en-US" sz="1800" dirty="0" smtClean="0"/>
-              <a:t>version</a:t>
-            </a:r>
-          </a:p>
-          <a:p>
-            <a:r>
-              <a:rPr lang="en-US" sz="1800" dirty="0" smtClean="0"/>
-              <a:t>## STREAM is not packaged consistently, so build it from source on both machines.</a:t>
-            </a:r>
+              <a:t>source.</a:t>
+            </a:r>
+            <a:endParaRPr lang="en-US" sz="1800" dirty="0" smtClean="0"/>
           </a:p>
           <a:p>
             <a:r>
@@ -5735,8 +5748,51 @@
             </a:r>
             <a:r>
               <a:rPr lang="en-US" sz="1800" dirty="0" smtClean="0"/>
-              <a:t> STREAM</a:t>
-            </a:r>
+              <a:t> </a:t>
+            </a:r>
+            <a:r>
+              <a:rPr lang="en-US" sz="1800" dirty="0" smtClean="0"/>
+              <a:t>STREAM</a:t>
+            </a:r>
+          </a:p>
+          <a:p>
+            <a:r>
+              <a:rPr lang="en-US" sz="1800" b="1" dirty="0" smtClean="0">
+                <a:solidFill>
+                  <a:srgbClr val="C00000"/>
+                </a:solidFill>
+              </a:rPr>
+              <a:t>clang -O3 </a:t>
+            </a:r>
+            <a:r>
+              <a:rPr lang="en-US" sz="1800" b="1" dirty="0" err="1" smtClean="0">
+                <a:solidFill>
+                  <a:srgbClr val="C00000"/>
+                </a:solidFill>
+              </a:rPr>
+              <a:t>stream.c</a:t>
+            </a:r>
+            <a:r>
+              <a:rPr lang="en-US" sz="1800" b="1" dirty="0" smtClean="0">
+                <a:solidFill>
+                  <a:srgbClr val="C00000"/>
+                </a:solidFill>
+              </a:rPr>
+              <a:t> -o </a:t>
+            </a:r>
+            <a:r>
+              <a:rPr lang="en-US" sz="1800" b="1" dirty="0" smtClean="0">
+                <a:solidFill>
+                  <a:srgbClr val="C00000"/>
+                </a:solidFill>
+              </a:rPr>
+              <a:t>stream</a:t>
+            </a:r>
+            <a:endParaRPr lang="en-US" sz="1800" b="1" dirty="0" smtClean="0">
+              <a:solidFill>
+                <a:srgbClr val="C00000"/>
+              </a:solidFill>
+            </a:endParaRPr>
           </a:p>
           <a:p>
             <a:endParaRPr lang="en-US" sz="1800" dirty="0" smtClean="0"/>
@@ -6003,114 +6059,125 @@
           <a:lstStyle/>
           <a:p>
             <a:r>
-              <a:rPr lang="en-US" sz="1800" dirty="0" smtClean="0"/>
-              <a:t># On </a:t>
-            </a:r>
-            <a:r>
-              <a:rPr lang="en-US" sz="1800" dirty="0" err="1" smtClean="0"/>
+              <a:rPr lang="en-US" sz="2000" b="1" dirty="0" smtClean="0"/>
+              <a:t># In </a:t>
+            </a:r>
+            <a:r>
+              <a:rPr lang="en-US" sz="2000" b="1" dirty="0" smtClean="0"/>
+              <a:t>Terminal on </a:t>
+            </a:r>
+            <a:r>
+              <a:rPr lang="en-US" sz="2000" b="1" dirty="0" err="1" smtClean="0"/>
               <a:t>macOS</a:t>
             </a:r>
             <a:r>
-              <a:rPr lang="en-US" sz="1800" dirty="0" smtClean="0"/>
-              <a:t> SSH Terminal:</a:t>
-            </a:r>
-          </a:p>
-          <a:p>
-            <a:r>
-              <a:rPr lang="en-US" sz="1800" smtClean="0"/>
+              <a:rPr lang="en-US" sz="2000" b="1" dirty="0" smtClean="0"/>
+              <a:t> over </a:t>
+            </a:r>
+            <a:r>
+              <a:rPr lang="en-US" sz="2000" b="1" dirty="0" smtClean="0"/>
+              <a:t>SSH:</a:t>
+            </a:r>
+          </a:p>
+          <a:p>
+            <a:r>
+              <a:rPr lang="en-US" sz="2000" dirty="0" err="1" smtClean="0"/>
               <a:t>git</a:t>
             </a:r>
             <a:r>
-              <a:rPr lang="en-US" sz="1800" dirty="0" smtClean="0"/>
+              <a:rPr lang="en-US" sz="2000" dirty="0" smtClean="0"/>
               <a:t> </a:t>
             </a:r>
             <a:r>
-              <a:rPr lang="en-US" sz="1800" dirty="0" smtClean="0"/>
+              <a:rPr lang="en-US" sz="2000" dirty="0" smtClean="0"/>
               <a:t>--</a:t>
             </a:r>
             <a:r>
-              <a:rPr lang="en-US" sz="1800" dirty="0" smtClean="0"/>
+              <a:rPr lang="en-US" sz="2000" dirty="0" smtClean="0"/>
               <a:t>version</a:t>
             </a:r>
           </a:p>
           <a:p>
             <a:r>
-              <a:rPr lang="en-US" sz="1800" dirty="0" smtClean="0"/>
-              <a:t>## LLVM is a compiler infrastructure that includes tools such as Clang for compiling C, C++, and related languages.</a:t>
-            </a:r>
-          </a:p>
-          <a:p>
-            <a:r>
-              <a:rPr lang="en-US" sz="1800" dirty="0" err="1" smtClean="0"/>
+              <a:rPr lang="en-US" sz="2000" dirty="0" smtClean="0"/>
+              <a:t>7zz</a:t>
+            </a:r>
+          </a:p>
+          <a:p>
+            <a:r>
+              <a:rPr lang="en-US" sz="2000" dirty="0" smtClean="0"/>
+              <a:t>## </a:t>
+            </a:r>
+            <a:r>
+              <a:rPr lang="en-US" sz="2000" dirty="0" err="1" smtClean="0"/>
+              <a:t>fio</a:t>
+            </a:r>
+            <a:r>
+              <a:rPr lang="en-US" sz="2000" dirty="0" smtClean="0"/>
+              <a:t> (Flexible I/O Tester) is a command-line tool for benchmarking and stress-testing storage devices by measuring throughput, IOPS, and latency under configurable disk I/O workloads</a:t>
+            </a:r>
+            <a:r>
+              <a:rPr lang="en-US" sz="2000" dirty="0" smtClean="0"/>
+              <a:t>.</a:t>
+            </a:r>
+          </a:p>
+          <a:p>
+            <a:r>
+              <a:rPr lang="en-US" sz="2000" dirty="0" smtClean="0"/>
+              <a:t>brew </a:t>
+            </a:r>
+            <a:r>
+              <a:rPr lang="en-US" sz="2000" dirty="0" smtClean="0"/>
+              <a:t>install </a:t>
+            </a:r>
+            <a:r>
+              <a:rPr lang="en-US" sz="2000" dirty="0" err="1" smtClean="0"/>
+              <a:t>fio</a:t>
+            </a:r>
+            <a:endParaRPr lang="en-US" sz="2000" dirty="0" smtClean="0"/>
+          </a:p>
+          <a:p>
+            <a:r>
+              <a:rPr lang="en-US" sz="2000" dirty="0" err="1" smtClean="0"/>
+              <a:t>fio</a:t>
+            </a:r>
+            <a:r>
+              <a:rPr lang="en-US" sz="2000" dirty="0" smtClean="0"/>
+              <a:t> --version</a:t>
+            </a:r>
+            <a:endParaRPr lang="en-US" sz="2000" dirty="0" smtClean="0"/>
+          </a:p>
+          <a:p>
+            <a:r>
+              <a:rPr lang="en-US" sz="2000" dirty="0" smtClean="0"/>
+              <a:t>## </a:t>
+            </a:r>
+            <a:r>
+              <a:rPr lang="en-US" sz="2000" dirty="0" smtClean="0"/>
+              <a:t>iperf3 is a command-line tool for measuring network throughput, jitter, packet loss, and connection quality between two computers.</a:t>
+            </a:r>
+          </a:p>
+          <a:p>
+            <a:r>
+              <a:rPr lang="en-US" sz="2000" dirty="0" err="1" smtClean="0"/>
               <a:t>choco</a:t>
             </a:r>
             <a:r>
-              <a:rPr lang="en-US" sz="1800" dirty="0" smtClean="0"/>
-              <a:t> install </a:t>
-            </a:r>
-            <a:r>
-              <a:rPr lang="en-US" sz="1800" dirty="0" err="1" smtClean="0"/>
-              <a:t>llvm</a:t>
-            </a:r>
-            <a:r>
-              <a:rPr lang="en-US" sz="1800" dirty="0" smtClean="0"/>
-              <a:t> -y</a:t>
-            </a:r>
-          </a:p>
-          <a:p>
-            <a:r>
-              <a:rPr lang="en-US" sz="1800" dirty="0" smtClean="0"/>
-              <a:t>## </a:t>
-            </a:r>
-            <a:r>
-              <a:rPr lang="en-US" sz="1800" dirty="0" smtClean="0"/>
-              <a:t>Restart </a:t>
-            </a:r>
-            <a:r>
-              <a:rPr lang="en-US" sz="1800" dirty="0" err="1" smtClean="0"/>
-              <a:t>PowerShell</a:t>
-            </a:r>
-            <a:endParaRPr lang="en-US" sz="1800" dirty="0" smtClean="0"/>
-          </a:p>
-          <a:p>
-            <a:r>
-              <a:rPr lang="en-US" sz="1800" dirty="0" smtClean="0"/>
-              <a:t>clang --version</a:t>
-            </a:r>
-          </a:p>
-          <a:p>
-            <a:r>
-              <a:rPr lang="en-US" sz="1800" dirty="0" smtClean="0"/>
-              <a:t>7z</a:t>
-            </a:r>
-          </a:p>
-          <a:p>
-            <a:r>
-              <a:rPr lang="en-US" sz="1800" dirty="0" smtClean="0"/>
-              <a:t>## iperf3 is a command-line tool for measuring network throughput, jitter, packet loss, and connection quality between two computers.</a:t>
-            </a:r>
-          </a:p>
-          <a:p>
-            <a:r>
-              <a:rPr lang="en-US" sz="1800" dirty="0" err="1" smtClean="0"/>
-              <a:t>choco</a:t>
-            </a:r>
-            <a:r>
-              <a:rPr lang="en-US" sz="1800" dirty="0" smtClean="0"/>
+              <a:rPr lang="en-US" sz="2000" dirty="0" smtClean="0"/>
               <a:t> install iperf3 -</a:t>
             </a:r>
             <a:r>
-              <a:rPr lang="en-US" sz="1800" dirty="0" smtClean="0"/>
+              <a:rPr lang="en-US" sz="2000" dirty="0" smtClean="0"/>
               <a:t>y</a:t>
             </a:r>
           </a:p>
           <a:p>
             <a:r>
-              <a:rPr lang="en-US" sz="1800" dirty="0" smtClean="0"/>
+              <a:rPr lang="en-US" sz="2000" dirty="0" smtClean="0"/>
               <a:t>iperf3 --</a:t>
             </a:r>
             <a:r>
-              <a:rPr lang="en-US" sz="1800" dirty="0" smtClean="0"/>
+              <a:rPr lang="en-US" sz="2000" dirty="0" smtClean="0"/>
               <a:t>version</a:t>
             </a:r>
           </a:p>
@@ -6338,6 +6405,610 @@
           <a:lstStyle/>
           <a:p>
             <a:r>
+              <a:rPr lang="en-US" dirty="0" smtClean="0"/>
+              <a:t>Install </a:t>
+            </a:r>
+            <a:r>
+              <a:rPr lang="en-US" dirty="0" smtClean="0"/>
+              <a:t>the benchmark </a:t>
+            </a:r>
+            <a:r>
+              <a:rPr lang="en-US" dirty="0" smtClean="0"/>
+              <a:t>tools (II)</a:t>
+            </a:r>
+            <a:endParaRPr lang="en-US" dirty="0"/>
+          </a:p>
+        </p:txBody>
+      </p:sp>
+      <p:sp>
+        <p:nvSpPr>
+          <p:cNvPr id="3" name="Content Placeholder 2"/>
+          <p:cNvSpPr>
+            <a:spLocks noGrp="1"/>
+          </p:cNvSpPr>
+          <p:nvPr>
+            <p:ph idx="1"/>
+          </p:nvPr>
+        </p:nvSpPr>
+        <p:spPr/>
+        <p:txBody>
+          <a:bodyPr/>
+          <a:lstStyle/>
+          <a:p>
+            <a:r>
+              <a:rPr lang="en-US" sz="1800" dirty="0" smtClean="0"/>
+              <a:t>## </a:t>
+            </a:r>
+            <a:r>
+              <a:rPr lang="en-US" sz="1800" dirty="0" err="1" smtClean="0"/>
+              <a:t>jq</a:t>
+            </a:r>
+            <a:r>
+              <a:rPr lang="en-US" sz="1800" dirty="0" smtClean="0"/>
+              <a:t> is a command-line tool for parsing, querying, transforming, and formatting JSON data.</a:t>
+            </a:r>
+          </a:p>
+          <a:p>
+            <a:r>
+              <a:rPr lang="en-US" sz="1800" dirty="0" smtClean="0"/>
+              <a:t>brew install </a:t>
+            </a:r>
+            <a:r>
+              <a:rPr lang="en-US" sz="1800" dirty="0" err="1" smtClean="0"/>
+              <a:t>jq</a:t>
+            </a:r>
+            <a:endParaRPr lang="en-US" sz="1800" dirty="0" smtClean="0"/>
+          </a:p>
+          <a:p>
+            <a:r>
+              <a:rPr lang="en-US" sz="1800" dirty="0" err="1" smtClean="0"/>
+              <a:t>jq</a:t>
+            </a:r>
+            <a:r>
+              <a:rPr lang="en-US" sz="1800" dirty="0" smtClean="0"/>
+              <a:t> --version</a:t>
+            </a:r>
+          </a:p>
+          <a:p>
+            <a:endParaRPr lang="en-US" sz="1800" dirty="0" smtClean="0"/>
+          </a:p>
+          <a:p>
+            <a:r>
+              <a:rPr lang="en-US" sz="1800" b="1" dirty="0" smtClean="0"/>
+              <a:t>## </a:t>
+            </a:r>
+            <a:r>
+              <a:rPr lang="en-US" sz="1800" b="1" dirty="0" smtClean="0"/>
+              <a:t>STREAM is not packaged consistently, so build it from </a:t>
+            </a:r>
+            <a:r>
+              <a:rPr lang="en-US" sz="1800" b="1" dirty="0" smtClean="0"/>
+              <a:t>source.</a:t>
+            </a:r>
+            <a:endParaRPr lang="en-US" sz="1800" b="1" dirty="0" smtClean="0"/>
+          </a:p>
+          <a:p>
+            <a:r>
+              <a:rPr lang="en-US" sz="1800" dirty="0" err="1" smtClean="0"/>
+              <a:t>git</a:t>
+            </a:r>
+            <a:r>
+              <a:rPr lang="en-US" sz="1800" dirty="0" smtClean="0"/>
+              <a:t> clone https://github.com/jeffhammond/STREAM.git</a:t>
+            </a:r>
+          </a:p>
+          <a:p>
+            <a:r>
+              <a:rPr lang="en-US" sz="1800" dirty="0" err="1" smtClean="0"/>
+              <a:t>cd</a:t>
+            </a:r>
+            <a:r>
+              <a:rPr lang="en-US" sz="1800" dirty="0" smtClean="0"/>
+              <a:t> STREAM</a:t>
+            </a:r>
+          </a:p>
+          <a:p>
+            <a:r>
+              <a:rPr lang="en-US" sz="1800" dirty="0" smtClean="0"/>
+              <a:t>clang -O3 </a:t>
+            </a:r>
+            <a:r>
+              <a:rPr lang="en-US" sz="1800" dirty="0" err="1" smtClean="0"/>
+              <a:t>stream.c</a:t>
+            </a:r>
+            <a:r>
+              <a:rPr lang="en-US" sz="1800" dirty="0" smtClean="0"/>
+              <a:t> -o stream</a:t>
+            </a:r>
+          </a:p>
+          <a:p>
+            <a:r>
+              <a:rPr lang="en-US" sz="1800" dirty="0" smtClean="0"/>
+              <a:t>./stream</a:t>
+            </a:r>
+          </a:p>
+          <a:p>
+            <a:endParaRPr lang="en-US" sz="1800" dirty="0" smtClean="0"/>
+          </a:p>
+        </p:txBody>
+      </p:sp>
+    </p:spTree>
+  </p:cSld>
+  <p:clrMapOvr>
+    <a:masterClrMapping/>
+  </p:clrMapOvr>
+</p:sld>
+</file>
+
+<file path=ppt/slides/slide21.xml><?xml version="1.0" encoding="utf-8"?>
+<p:sld xmlns:a="http://schemas.openxmlformats.org/drawingml/2006/main" xmlns:r="http://schemas.openxmlformats.org/officeDocument/2006/relationships" xmlns:p="http://schemas.openxmlformats.org/presentationml/2006/main">
+  <p:cSld>
+    <p:spTree>
+      <p:nvGrpSpPr>
+        <p:cNvPr id="1" name=""/>
+        <p:cNvGrpSpPr/>
+        <p:nvPr/>
+      </p:nvGrpSpPr>
+      <p:grpSpPr>
+        <a:xfrm>
+          <a:off x="0" y="0"/>
+          <a:ext cx="0" cy="0"/>
+          <a:chOff x="0" y="0"/>
+          <a:chExt cx="0" cy="0"/>
+        </a:xfrm>
+      </p:grpSpPr>
+      <p:sp>
+        <p:nvSpPr>
+          <p:cNvPr id="2" name="Title 1"/>
+          <p:cNvSpPr>
+            <a:spLocks noGrp="1"/>
+          </p:cNvSpPr>
+          <p:nvPr>
+            <p:ph type="title"/>
+          </p:nvPr>
+        </p:nvSpPr>
+        <p:spPr/>
+        <p:txBody>
+          <a:bodyPr/>
+          <a:lstStyle/>
+          <a:p>
+            <a:r>
+              <a:rPr lang="en-US" dirty="0" smtClean="0"/>
+              <a:t>Run the CPU benchmark</a:t>
+            </a:r>
+            <a:endParaRPr lang="en-US" dirty="0"/>
+          </a:p>
+        </p:txBody>
+      </p:sp>
+      <p:sp>
+        <p:nvSpPr>
+          <p:cNvPr id="3" name="Content Placeholder 2"/>
+          <p:cNvSpPr>
+            <a:spLocks noGrp="1"/>
+          </p:cNvSpPr>
+          <p:nvPr>
+            <p:ph idx="1"/>
+          </p:nvPr>
+        </p:nvSpPr>
+        <p:spPr/>
+        <p:txBody>
+          <a:bodyPr/>
+          <a:lstStyle/>
+          <a:p>
+            <a:endParaRPr lang="en-US" dirty="0"/>
+          </a:p>
+        </p:txBody>
+      </p:sp>
+      <p:sp>
+        <p:nvSpPr>
+          <p:cNvPr id="4" name="Rectangle 3"/>
+          <p:cNvSpPr/>
+          <p:nvPr/>
+        </p:nvSpPr>
+        <p:spPr>
+          <a:xfrm>
+            <a:off x="457200" y="1600200"/>
+            <a:ext cx="8229600" cy="2031325"/>
+          </a:xfrm>
+          <a:prstGeom prst="rect">
+            <a:avLst/>
+          </a:prstGeom>
+        </p:spPr>
+        <p:style>
+          <a:lnRef idx="2">
+            <a:schemeClr val="dk1"/>
+          </a:lnRef>
+          <a:fillRef idx="1">
+            <a:schemeClr val="lt1"/>
+          </a:fillRef>
+          <a:effectRef idx="0">
+            <a:schemeClr val="dk1"/>
+          </a:effectRef>
+          <a:fontRef idx="minor">
+            <a:schemeClr val="dk1"/>
+          </a:fontRef>
+        </p:style>
+        <p:txBody>
+          <a:bodyPr wrap="square">
+            <a:spAutoFit/>
+          </a:bodyPr>
+          <a:lstStyle/>
+          <a:p>
+            <a:r>
+              <a:rPr lang="en-US" b="1" dirty="0" smtClean="0"/>
+              <a:t># In Windows </a:t>
+            </a:r>
+            <a:r>
+              <a:rPr lang="en-US" b="1" dirty="0" err="1" smtClean="0"/>
+              <a:t>PowerShell</a:t>
+            </a:r>
+            <a:r>
+              <a:rPr lang="en-US" b="1" dirty="0" smtClean="0"/>
+              <a:t>:</a:t>
+            </a:r>
+            <a:endParaRPr lang="en-US" dirty="0" smtClean="0"/>
+          </a:p>
+          <a:p>
+            <a:r>
+              <a:rPr lang="en-US" dirty="0" smtClean="0"/>
+              <a:t>1</a:t>
+            </a:r>
+            <a:r>
+              <a:rPr lang="en-US" dirty="0" smtClean="0"/>
+              <a:t>..3 | </a:t>
+            </a:r>
+            <a:r>
+              <a:rPr lang="en-US" dirty="0" err="1" smtClean="0"/>
+              <a:t>ForEach</a:t>
+            </a:r>
+            <a:r>
+              <a:rPr lang="en-US" dirty="0" smtClean="0"/>
+              <a:t>-Object {</a:t>
+            </a:r>
+          </a:p>
+          <a:p>
+            <a:r>
+              <a:rPr lang="en-US" dirty="0" smtClean="0"/>
+              <a:t>    &amp; "C:\Program Files\7-Zip\7z.exe" b `</a:t>
+            </a:r>
+          </a:p>
+          <a:p>
+            <a:r>
+              <a:rPr lang="en-US" dirty="0" smtClean="0"/>
+              <a:t>        | Tee-Object -</a:t>
+            </a:r>
+            <a:r>
+              <a:rPr lang="en-US" dirty="0" err="1" smtClean="0"/>
+              <a:t>FilePath</a:t>
+            </a:r>
+            <a:r>
+              <a:rPr lang="en-US" dirty="0" smtClean="0"/>
+              <a:t> "</a:t>
+            </a:r>
+            <a:r>
+              <a:rPr lang="en-US" dirty="0" err="1" smtClean="0"/>
+              <a:t>cpu</a:t>
+            </a:r>
+            <a:r>
+              <a:rPr lang="en-US" dirty="0" smtClean="0"/>
+              <a:t>-run-$_.txt"</a:t>
+            </a:r>
+          </a:p>
+          <a:p>
+            <a:endParaRPr lang="en-US" dirty="0" smtClean="0"/>
+          </a:p>
+          <a:p>
+            <a:r>
+              <a:rPr lang="en-US" dirty="0" smtClean="0"/>
+              <a:t>    Start-Sleep -Seconds 60</a:t>
+            </a:r>
+          </a:p>
+          <a:p>
+            <a:r>
+              <a:rPr lang="en-US" dirty="0" smtClean="0"/>
+              <a:t>}</a:t>
+            </a:r>
+            <a:endParaRPr lang="en-US" dirty="0"/>
+          </a:p>
+        </p:txBody>
+      </p:sp>
+      <p:sp>
+        <p:nvSpPr>
+          <p:cNvPr id="6" name="Rectangle 5"/>
+          <p:cNvSpPr/>
+          <p:nvPr/>
+        </p:nvSpPr>
+        <p:spPr>
+          <a:xfrm>
+            <a:off x="457200" y="4038600"/>
+            <a:ext cx="8229600" cy="1508105"/>
+          </a:xfrm>
+          <a:prstGeom prst="rect">
+            <a:avLst/>
+          </a:prstGeom>
+        </p:spPr>
+        <p:style>
+          <a:lnRef idx="2">
+            <a:schemeClr val="dk1"/>
+          </a:lnRef>
+          <a:fillRef idx="1">
+            <a:schemeClr val="lt1"/>
+          </a:fillRef>
+          <a:effectRef idx="0">
+            <a:schemeClr val="dk1"/>
+          </a:effectRef>
+          <a:fontRef idx="minor">
+            <a:schemeClr val="dk1"/>
+          </a:fontRef>
+        </p:style>
+        <p:txBody>
+          <a:bodyPr wrap="square">
+            <a:spAutoFit/>
+          </a:bodyPr>
+          <a:lstStyle/>
+          <a:p>
+            <a:r>
+              <a:rPr lang="en-US" b="1" dirty="0" smtClean="0"/>
+              <a:t># In Terminal on </a:t>
+            </a:r>
+            <a:r>
+              <a:rPr lang="en-US" b="1" dirty="0" err="1" smtClean="0"/>
+              <a:t>macOS</a:t>
+            </a:r>
+            <a:r>
+              <a:rPr lang="en-US" b="1" dirty="0" smtClean="0"/>
+              <a:t> over SSH:</a:t>
+            </a:r>
+            <a:endParaRPr lang="en-US" dirty="0" smtClean="0"/>
+          </a:p>
+          <a:p>
+            <a:r>
+              <a:rPr lang="en-US" dirty="0" smtClean="0"/>
+              <a:t>for run in 1 2 3; do</a:t>
+            </a:r>
+          </a:p>
+          <a:p>
+            <a:r>
+              <a:rPr lang="en-US" dirty="0" smtClean="0"/>
+              <a:t>    7zz b | tee "</a:t>
+            </a:r>
+            <a:r>
+              <a:rPr lang="en-US" dirty="0" err="1" smtClean="0"/>
+              <a:t>cpu</a:t>
+            </a:r>
+            <a:r>
+              <a:rPr lang="en-US" dirty="0" smtClean="0"/>
+              <a:t>-run-$run.txt"</a:t>
+            </a:r>
+          </a:p>
+          <a:p>
+            <a:r>
+              <a:rPr lang="en-US" dirty="0" smtClean="0"/>
+              <a:t>    sleep 60</a:t>
+            </a:r>
+          </a:p>
+          <a:p>
+            <a:r>
+              <a:rPr lang="en-US" dirty="0" smtClean="0"/>
+              <a:t>done</a:t>
+            </a:r>
+            <a:endParaRPr lang="en-US" dirty="0"/>
+          </a:p>
+        </p:txBody>
+      </p:sp>
+    </p:spTree>
+  </p:cSld>
+  <p:clrMapOvr>
+    <a:masterClrMapping/>
+  </p:clrMapOvr>
+</p:sld>
+</file>
+
+<file path=ppt/slides/slide22.xml><?xml version="1.0" encoding="utf-8"?>
+<p:sld xmlns:a="http://schemas.openxmlformats.org/drawingml/2006/main" xmlns:r="http://schemas.openxmlformats.org/officeDocument/2006/relationships" xmlns:p="http://schemas.openxmlformats.org/presentationml/2006/main">
+  <p:cSld>
+    <p:spTree>
+      <p:nvGrpSpPr>
+        <p:cNvPr id="1" name=""/>
+        <p:cNvGrpSpPr/>
+        <p:nvPr/>
+      </p:nvGrpSpPr>
+      <p:grpSpPr>
+        <a:xfrm>
+          <a:off x="0" y="0"/>
+          <a:ext cx="0" cy="0"/>
+          <a:chOff x="0" y="0"/>
+          <a:chExt cx="0" cy="0"/>
+        </a:xfrm>
+      </p:grpSpPr>
+      <p:sp>
+        <p:nvSpPr>
+          <p:cNvPr id="2" name="Title 1"/>
+          <p:cNvSpPr>
+            <a:spLocks noGrp="1"/>
+          </p:cNvSpPr>
+          <p:nvPr>
+            <p:ph type="title"/>
+          </p:nvPr>
+        </p:nvSpPr>
+        <p:spPr/>
+        <p:txBody>
+          <a:bodyPr/>
+          <a:lstStyle/>
+          <a:p>
+            <a:r>
+              <a:rPr lang="en-US" dirty="0" smtClean="0"/>
+              <a:t>Interpret </a:t>
+            </a:r>
+            <a:r>
+              <a:rPr lang="en-US" dirty="0" smtClean="0"/>
+              <a:t>the CPU </a:t>
+            </a:r>
+            <a:r>
+              <a:rPr lang="en-US" dirty="0" smtClean="0"/>
+              <a:t>benchmark results</a:t>
+            </a:r>
+            <a:endParaRPr lang="en-US" dirty="0"/>
+          </a:p>
+        </p:txBody>
+      </p:sp>
+      <p:sp>
+        <p:nvSpPr>
+          <p:cNvPr id="3" name="Content Placeholder 2"/>
+          <p:cNvSpPr>
+            <a:spLocks noGrp="1"/>
+          </p:cNvSpPr>
+          <p:nvPr>
+            <p:ph idx="1"/>
+          </p:nvPr>
+        </p:nvSpPr>
+        <p:spPr/>
+        <p:txBody>
+          <a:bodyPr/>
+          <a:lstStyle/>
+          <a:p>
+            <a:r>
+              <a:rPr lang="en-US" sz="2000" dirty="0" smtClean="0"/>
+              <a:t>Look near the bottom of each result for:</a:t>
+            </a:r>
+          </a:p>
+          <a:p>
+            <a:pPr lvl="1"/>
+            <a:r>
+              <a:rPr lang="en-US" sz="1800" dirty="0" smtClean="0"/>
+              <a:t>Compressing</a:t>
+            </a:r>
+          </a:p>
+          <a:p>
+            <a:pPr lvl="1"/>
+            <a:r>
+              <a:rPr lang="en-US" sz="1800" dirty="0" smtClean="0"/>
+              <a:t>Decompressing</a:t>
+            </a:r>
+          </a:p>
+          <a:p>
+            <a:pPr lvl="1"/>
+            <a:r>
+              <a:rPr lang="en-US" sz="1800" dirty="0" smtClean="0"/>
+              <a:t>Total Rating</a:t>
+            </a:r>
+          </a:p>
+          <a:p>
+            <a:r>
+              <a:rPr lang="en-US" sz="2000" dirty="0" smtClean="0"/>
+              <a:t>Higher ratings are better.</a:t>
+            </a:r>
+          </a:p>
+          <a:p>
+            <a:endParaRPr lang="en-US" sz="2000" dirty="0"/>
+          </a:p>
+        </p:txBody>
+      </p:sp>
+      <p:pic>
+        <p:nvPicPr>
+          <p:cNvPr id="1026" name="Picture 2"/>
+          <p:cNvPicPr>
+            <a:picLocks noChangeAspect="1" noChangeArrowheads="1"/>
+          </p:cNvPicPr>
+          <p:nvPr/>
+        </p:nvPicPr>
+        <p:blipFill>
+          <a:blip r:embed="rId2" cstate="print"/>
+          <a:srcRect/>
+          <a:stretch>
+            <a:fillRect/>
+          </a:stretch>
+        </p:blipFill>
+        <p:spPr bwMode="auto">
+          <a:xfrm>
+            <a:off x="4191000" y="2057400"/>
+            <a:ext cx="4451350" cy="2076450"/>
+          </a:xfrm>
+          <a:prstGeom prst="rect">
+            <a:avLst/>
+          </a:prstGeom>
+          <a:noFill/>
+          <a:ln w="9525">
+            <a:noFill/>
+            <a:miter lim="800000"/>
+            <a:headEnd/>
+            <a:tailEnd/>
+          </a:ln>
+        </p:spPr>
+      </p:pic>
+      <p:pic>
+        <p:nvPicPr>
+          <p:cNvPr id="1027" name="Picture 3"/>
+          <p:cNvPicPr>
+            <a:picLocks noChangeAspect="1" noChangeArrowheads="1"/>
+          </p:cNvPicPr>
+          <p:nvPr/>
+        </p:nvPicPr>
+        <p:blipFill>
+          <a:blip r:embed="rId3" cstate="print"/>
+          <a:srcRect/>
+          <a:stretch>
+            <a:fillRect/>
+          </a:stretch>
+        </p:blipFill>
+        <p:spPr bwMode="auto">
+          <a:xfrm>
+            <a:off x="1447800" y="4343400"/>
+            <a:ext cx="5289550" cy="2047875"/>
+          </a:xfrm>
+          <a:prstGeom prst="rect">
+            <a:avLst/>
+          </a:prstGeom>
+          <a:noFill/>
+          <a:ln w="9525">
+            <a:noFill/>
+            <a:miter lim="800000"/>
+            <a:headEnd/>
+            <a:tailEnd/>
+          </a:ln>
+        </p:spPr>
+      </p:pic>
+    </p:spTree>
+  </p:cSld>
+  <p:clrMapOvr>
+    <a:masterClrMapping/>
+  </p:clrMapOvr>
+</p:sld>
+</file>
+
+<file path=ppt/slides/slide23.xml><?xml version="1.0" encoding="utf-8"?>
+<p:sld xmlns:a="http://schemas.openxmlformats.org/drawingml/2006/main" xmlns:r="http://schemas.openxmlformats.org/officeDocument/2006/relationships" xmlns:p="http://schemas.openxmlformats.org/presentationml/2006/main">
+  <p:cSld>
+    <p:spTree>
+      <p:nvGrpSpPr>
+        <p:cNvPr id="1" name=""/>
+        <p:cNvGrpSpPr/>
+        <p:nvPr/>
+      </p:nvGrpSpPr>
+      <p:grpSpPr>
+        <a:xfrm>
+          <a:off x="0" y="0"/>
+          <a:ext cx="0" cy="0"/>
+          <a:chOff x="0" y="0"/>
+          <a:chExt cx="0" cy="0"/>
+        </a:xfrm>
+      </p:grpSpPr>
+      <p:sp>
+        <p:nvSpPr>
+          <p:cNvPr id="2" name="Title 1"/>
+          <p:cNvSpPr>
+            <a:spLocks noGrp="1"/>
+          </p:cNvSpPr>
+          <p:nvPr>
+            <p:ph type="title"/>
+          </p:nvPr>
+        </p:nvSpPr>
+        <p:spPr/>
+        <p:txBody>
+          <a:bodyPr/>
+          <a:lstStyle/>
+          <a:p>
+            <a:r>
               <a:rPr lang="en-US" sz="3800" dirty="0" smtClean="0"/>
               <a:t>Example Quality Attribute: Modifiability</a:t>
             </a:r>
@@ -6498,7 +7169,7 @@
 </p:sld>
 </file>
 
-<file path=ppt/slides/slide21.xml><?xml version="1.0" encoding="utf-8"?>
+<file path=ppt/slides/slide24.xml><?xml version="1.0" encoding="utf-8"?>
 <p:sld xmlns:a="http://schemas.openxmlformats.org/drawingml/2006/main" xmlns:r="http://schemas.openxmlformats.org/officeDocument/2006/relationships" xmlns:p="http://schemas.openxmlformats.org/presentationml/2006/main">
   <p:cSld>
     <p:spTree>
@@ -6663,7 +7334,7 @@
 </p:sld>
 </file>
 
-<file path=ppt/slides/slide22.xml><?xml version="1.0" encoding="utf-8"?>
+<file path=ppt/slides/slide25.xml><?xml version="1.0" encoding="utf-8"?>
 <p:sld xmlns:a="http://schemas.openxmlformats.org/drawingml/2006/main" xmlns:r="http://schemas.openxmlformats.org/officeDocument/2006/relationships" xmlns:p="http://schemas.openxmlformats.org/presentationml/2006/main">
   <p:cSld>
     <p:spTree>
@@ -6714,435 +7385,6 @@
 </p:sld>
 </file>
 
-<file path=ppt/slides/slide23.xml><?xml version="1.0" encoding="utf-8"?>
-<p:sld xmlns:a="http://schemas.openxmlformats.org/drawingml/2006/main" xmlns:r="http://schemas.openxmlformats.org/officeDocument/2006/relationships" xmlns:p="http://schemas.openxmlformats.org/presentationml/2006/main">
-  <p:cSld>
-    <p:spTree>
-      <p:nvGrpSpPr>
-        <p:cNvPr id="1" name=""/>
-        <p:cNvGrpSpPr/>
-        <p:nvPr/>
-      </p:nvGrpSpPr>
-      <p:grpSpPr>
-        <a:xfrm>
-          <a:off x="0" y="0"/>
-          <a:ext cx="0" cy="0"/>
-          <a:chOff x="0" y="0"/>
-          <a:chExt cx="0" cy="0"/>
-        </a:xfrm>
-      </p:grpSpPr>
-      <p:sp>
-        <p:nvSpPr>
-          <p:cNvPr id="2" name="Title 1"/>
-          <p:cNvSpPr>
-            <a:spLocks noGrp="1"/>
-          </p:cNvSpPr>
-          <p:nvPr>
-            <p:ph type="title"/>
-          </p:nvPr>
-        </p:nvSpPr>
-        <p:spPr/>
-        <p:txBody>
-          <a:bodyPr/>
-          <a:lstStyle/>
-          <a:p>
-            <a:r>
-              <a:rPr lang="en-US" dirty="0" smtClean="0"/>
-              <a:t>Scenarios</a:t>
-            </a:r>
-            <a:endParaRPr lang="en-US" dirty="0"/>
-          </a:p>
-        </p:txBody>
-      </p:sp>
-      <p:sp>
-        <p:nvSpPr>
-          <p:cNvPr id="3" name="Content Placeholder 2"/>
-          <p:cNvSpPr>
-            <a:spLocks noGrp="1"/>
-          </p:cNvSpPr>
-          <p:nvPr>
-            <p:ph idx="1"/>
-          </p:nvPr>
-        </p:nvSpPr>
-        <p:spPr/>
-        <p:txBody>
-          <a:bodyPr/>
-          <a:lstStyle/>
-          <a:p>
-            <a:r>
-              <a:rPr lang="en-US" sz="2200" dirty="0" smtClean="0"/>
-              <a:t>Typically the first job of an architecture analysis is to precisely </a:t>
-            </a:r>
-            <a:r>
-              <a:rPr lang="en-US" sz="2200" i="1" dirty="0" smtClean="0">
-                <a:solidFill>
-                  <a:srgbClr val="C00000"/>
-                </a:solidFill>
-              </a:rPr>
-              <a:t>elicit the specific quality goals</a:t>
-            </a:r>
-            <a:r>
-              <a:rPr lang="en-US" sz="2200" dirty="0" smtClean="0"/>
-              <a:t> against which the architecture will be judged. The </a:t>
-            </a:r>
-            <a:r>
-              <a:rPr lang="en-US" sz="2200" i="1" dirty="0" smtClean="0">
-                <a:solidFill>
-                  <a:srgbClr val="C00000"/>
-                </a:solidFill>
-              </a:rPr>
-              <a:t>mechanism</a:t>
-            </a:r>
-            <a:r>
-              <a:rPr lang="en-US" sz="2200" dirty="0" smtClean="0"/>
-              <a:t> that we use for this elicitation is the </a:t>
-            </a:r>
-            <a:r>
-              <a:rPr lang="en-US" sz="2200" u="sng" dirty="0" smtClean="0"/>
-              <a:t>scenario</a:t>
-            </a:r>
-            <a:r>
-              <a:rPr lang="en-US" sz="2200" dirty="0" smtClean="0"/>
-              <a:t>.</a:t>
-            </a:r>
-          </a:p>
-          <a:p>
-            <a:r>
-              <a:rPr lang="en-US" sz="2200" i="1" dirty="0" smtClean="0">
-                <a:solidFill>
-                  <a:srgbClr val="C00000"/>
-                </a:solidFill>
-              </a:rPr>
-              <a:t>A scenario</a:t>
-            </a:r>
-            <a:r>
-              <a:rPr lang="en-US" sz="2200" dirty="0" smtClean="0"/>
-              <a:t> is a </a:t>
-            </a:r>
-            <a:r>
-              <a:rPr lang="en-US" sz="2200" u="sng" dirty="0" smtClean="0"/>
-              <a:t>short statement</a:t>
-            </a:r>
-            <a:r>
-              <a:rPr lang="en-US" sz="2200" dirty="0" smtClean="0"/>
-              <a:t> describing an </a:t>
-            </a:r>
-            <a:r>
-              <a:rPr lang="en-US" sz="2200" u="sng" dirty="0" smtClean="0"/>
-              <a:t>interaction</a:t>
-            </a:r>
-            <a:r>
-              <a:rPr lang="en-US" sz="2200" dirty="0" smtClean="0"/>
-              <a:t> of one of the </a:t>
-            </a:r>
-            <a:r>
-              <a:rPr lang="en-US" sz="2200" u="sng" dirty="0" smtClean="0"/>
-              <a:t>stakeholders</a:t>
-            </a:r>
-            <a:r>
-              <a:rPr lang="en-US" sz="2200" dirty="0" smtClean="0"/>
-              <a:t> with the system.</a:t>
-            </a:r>
-          </a:p>
-          <a:p>
-            <a:pPr lvl="1"/>
-            <a:r>
-              <a:rPr lang="en-US" sz="1700" i="1" dirty="0" smtClean="0">
-                <a:solidFill>
-                  <a:srgbClr val="C00000"/>
-                </a:solidFill>
-              </a:rPr>
-              <a:t>A user</a:t>
-            </a:r>
-            <a:r>
-              <a:rPr lang="en-US" sz="1700" dirty="0" smtClean="0"/>
-              <a:t> would describe using the system to perform some task; his scenarios would very much resemble use cases in object-oriented parlance.</a:t>
-            </a:r>
-          </a:p>
-          <a:p>
-            <a:pPr lvl="1"/>
-            <a:r>
-              <a:rPr lang="en-US" sz="1700" i="1" dirty="0" smtClean="0">
-                <a:solidFill>
-                  <a:srgbClr val="C00000"/>
-                </a:solidFill>
-              </a:rPr>
-              <a:t>A maintainer</a:t>
-            </a:r>
-            <a:r>
-              <a:rPr lang="en-US" sz="1700" dirty="0" smtClean="0"/>
-              <a:t> would describe making a change to the system, such as upgrading the operating system in a particular way or adding a specific new function.</a:t>
-            </a:r>
-          </a:p>
-          <a:p>
-            <a:pPr lvl="1"/>
-            <a:r>
-              <a:rPr lang="en-US" sz="1700" i="1" dirty="0" smtClean="0">
-                <a:solidFill>
-                  <a:srgbClr val="C00000"/>
-                </a:solidFill>
-              </a:rPr>
-              <a:t>A developer's</a:t>
-            </a:r>
-            <a:r>
-              <a:rPr lang="en-US" sz="1700" dirty="0" smtClean="0"/>
-              <a:t> scenario might talk about using the architecture to build the system or predict its performance.</a:t>
-            </a:r>
-          </a:p>
-          <a:p>
-            <a:pPr lvl="1"/>
-            <a:r>
-              <a:rPr lang="en-US" sz="1700" i="1" dirty="0" smtClean="0">
-                <a:solidFill>
-                  <a:srgbClr val="C00000"/>
-                </a:solidFill>
-              </a:rPr>
-              <a:t>A customer's</a:t>
-            </a:r>
-            <a:r>
-              <a:rPr lang="en-US" sz="1700" dirty="0" smtClean="0"/>
-              <a:t> scenario might describe how the architecture is to be re-used for a second product in a product line.</a:t>
-            </a:r>
-          </a:p>
-        </p:txBody>
-      </p:sp>
-    </p:spTree>
-  </p:cSld>
-  <p:clrMapOvr>
-    <a:masterClrMapping/>
-  </p:clrMapOvr>
-</p:sld>
-</file>
-
-<file path=ppt/slides/slide24.xml><?xml version="1.0" encoding="utf-8"?>
-<p:sld xmlns:a="http://schemas.openxmlformats.org/drawingml/2006/main" xmlns:r="http://schemas.openxmlformats.org/officeDocument/2006/relationships" xmlns:p="http://schemas.openxmlformats.org/presentationml/2006/main">
-  <p:cSld>
-    <p:spTree>
-      <p:nvGrpSpPr>
-        <p:cNvPr id="1" name=""/>
-        <p:cNvGrpSpPr/>
-        <p:nvPr/>
-      </p:nvGrpSpPr>
-      <p:grpSpPr>
-        <a:xfrm>
-          <a:off x="0" y="0"/>
-          <a:ext cx="0" cy="0"/>
-          <a:chOff x="0" y="0"/>
-          <a:chExt cx="0" cy="0"/>
-        </a:xfrm>
-      </p:grpSpPr>
-      <p:sp>
-        <p:nvSpPr>
-          <p:cNvPr id="2" name="Title 1"/>
-          <p:cNvSpPr>
-            <a:spLocks noGrp="1"/>
-          </p:cNvSpPr>
-          <p:nvPr>
-            <p:ph type="title"/>
-          </p:nvPr>
-        </p:nvSpPr>
-        <p:spPr/>
-        <p:txBody>
-          <a:bodyPr/>
-          <a:lstStyle/>
-          <a:p>
-            <a:r>
-              <a:rPr lang="en-US" dirty="0" smtClean="0"/>
-              <a:t>Use Case Scenarios</a:t>
-            </a:r>
-            <a:endParaRPr lang="en-US" dirty="0"/>
-          </a:p>
-        </p:txBody>
-      </p:sp>
-      <p:sp>
-        <p:nvSpPr>
-          <p:cNvPr id="3" name="Content Placeholder 2"/>
-          <p:cNvSpPr>
-            <a:spLocks noGrp="1"/>
-          </p:cNvSpPr>
-          <p:nvPr>
-            <p:ph idx="1"/>
-          </p:nvPr>
-        </p:nvSpPr>
-        <p:spPr/>
-        <p:txBody>
-          <a:bodyPr/>
-          <a:lstStyle/>
-          <a:p>
-            <a:r>
-              <a:rPr lang="en-US" sz="2600" i="1" dirty="0" smtClean="0">
-                <a:solidFill>
-                  <a:srgbClr val="C00000"/>
-                </a:solidFill>
-              </a:rPr>
-              <a:t>Use case scenarios</a:t>
-            </a:r>
-            <a:r>
-              <a:rPr lang="en-US" sz="2600" dirty="0" smtClean="0"/>
-              <a:t> describe a </a:t>
-            </a:r>
-            <a:r>
-              <a:rPr lang="en-US" sz="2600" u="sng" dirty="0" smtClean="0"/>
-              <a:t>user's intended interaction</a:t>
-            </a:r>
-            <a:r>
-              <a:rPr lang="en-US" sz="2600" dirty="0" smtClean="0"/>
-              <a:t> with the completed, running system.</a:t>
-            </a:r>
-          </a:p>
-          <a:p>
-            <a:pPr lvl="1"/>
-            <a:r>
-              <a:rPr lang="en-US" sz="2200" dirty="0" smtClean="0"/>
-              <a:t>The user wants to examine budgetary and actual data under different fiscal years without re-entering project data. (</a:t>
-            </a:r>
-            <a:r>
-              <a:rPr lang="en-US" sz="2200" b="1" dirty="0" smtClean="0"/>
-              <a:t>usability</a:t>
-            </a:r>
-            <a:r>
-              <a:rPr lang="en-US" sz="2200" dirty="0" smtClean="0"/>
-              <a:t>)</a:t>
-            </a:r>
-          </a:p>
-          <a:p>
-            <a:pPr lvl="1"/>
-            <a:r>
-              <a:rPr lang="en-US" sz="2200" dirty="0" smtClean="0"/>
-              <a:t>User changes graph layout from horizontal to vertical and graph is redrawn in one second. (</a:t>
-            </a:r>
-            <a:r>
-              <a:rPr lang="en-US" sz="2200" b="1" dirty="0" smtClean="0"/>
-              <a:t>performance</a:t>
-            </a:r>
-            <a:r>
-              <a:rPr lang="en-US" sz="2200" dirty="0" smtClean="0"/>
-              <a:t>)</a:t>
-            </a:r>
-          </a:p>
-        </p:txBody>
-      </p:sp>
-    </p:spTree>
-  </p:cSld>
-  <p:clrMapOvr>
-    <a:masterClrMapping/>
-  </p:clrMapOvr>
-</p:sld>
-</file>
-
-<file path=ppt/slides/slide25.xml><?xml version="1.0" encoding="utf-8"?>
-<p:sld xmlns:a="http://schemas.openxmlformats.org/drawingml/2006/main" xmlns:r="http://schemas.openxmlformats.org/officeDocument/2006/relationships" xmlns:p="http://schemas.openxmlformats.org/presentationml/2006/main">
-  <p:cSld>
-    <p:spTree>
-      <p:nvGrpSpPr>
-        <p:cNvPr id="1" name=""/>
-        <p:cNvGrpSpPr/>
-        <p:nvPr/>
-      </p:nvGrpSpPr>
-      <p:grpSpPr>
-        <a:xfrm>
-          <a:off x="0" y="0"/>
-          <a:ext cx="0" cy="0"/>
-          <a:chOff x="0" y="0"/>
-          <a:chExt cx="0" cy="0"/>
-        </a:xfrm>
-      </p:grpSpPr>
-      <p:sp>
-        <p:nvSpPr>
-          <p:cNvPr id="2" name="Title 1"/>
-          <p:cNvSpPr>
-            <a:spLocks noGrp="1"/>
-          </p:cNvSpPr>
-          <p:nvPr>
-            <p:ph type="title"/>
-          </p:nvPr>
-        </p:nvSpPr>
-        <p:spPr/>
-        <p:txBody>
-          <a:bodyPr/>
-          <a:lstStyle/>
-          <a:p>
-            <a:r>
-              <a:rPr lang="en-US" dirty="0" smtClean="0"/>
-              <a:t>Growth Scenarios</a:t>
-            </a:r>
-            <a:endParaRPr lang="en-US" dirty="0"/>
-          </a:p>
-        </p:txBody>
-      </p:sp>
-      <p:sp>
-        <p:nvSpPr>
-          <p:cNvPr id="3" name="Content Placeholder 2"/>
-          <p:cNvSpPr>
-            <a:spLocks noGrp="1"/>
-          </p:cNvSpPr>
-          <p:nvPr>
-            <p:ph idx="1"/>
-          </p:nvPr>
-        </p:nvSpPr>
-        <p:spPr/>
-        <p:txBody>
-          <a:bodyPr/>
-          <a:lstStyle/>
-          <a:p>
-            <a:r>
-              <a:rPr lang="en-US" sz="2600" i="1" dirty="0" smtClean="0">
-                <a:solidFill>
-                  <a:srgbClr val="C00000"/>
-                </a:solidFill>
-              </a:rPr>
-              <a:t>Growth scenarios</a:t>
-            </a:r>
-            <a:r>
-              <a:rPr lang="en-US" sz="2600" dirty="0" smtClean="0"/>
-              <a:t> represent typical anticipated future changes to a system.</a:t>
-            </a:r>
-          </a:p>
-          <a:p>
-            <a:pPr lvl="1"/>
-            <a:r>
-              <a:rPr lang="en-US" sz="2200" dirty="0" smtClean="0"/>
-              <a:t>The maximum number of tracks to be handled by the system doubles and the maximum latency of track data to the screen is kept to </a:t>
-            </a:r>
-            <a:r>
-              <a:rPr lang="en-US" sz="2200" b="1" dirty="0" smtClean="0"/>
-              <a:t>200 </a:t>
-            </a:r>
-            <a:r>
-              <a:rPr lang="en-US" sz="2200" b="1" dirty="0" err="1" smtClean="0"/>
-              <a:t>ms</a:t>
-            </a:r>
-            <a:r>
-              <a:rPr lang="en-US" sz="2200" dirty="0" err="1" smtClean="0"/>
-              <a:t>.</a:t>
-            </a:r>
-            <a:endParaRPr lang="en-US" sz="2200" dirty="0" smtClean="0"/>
-          </a:p>
-          <a:p>
-            <a:pPr lvl="1"/>
-            <a:r>
-              <a:rPr lang="en-US" sz="2200" dirty="0" smtClean="0"/>
-              <a:t>Migrate to a new operating system, or a new release of the existing operating system in less than </a:t>
-            </a:r>
-            <a:r>
-              <a:rPr lang="en-US" sz="2200" b="1" dirty="0" smtClean="0"/>
-              <a:t>a person-year of work</a:t>
-            </a:r>
-            <a:r>
-              <a:rPr lang="en-US" sz="2200" dirty="0" smtClean="0"/>
-              <a:t>.</a:t>
-            </a:r>
-          </a:p>
-        </p:txBody>
-      </p:sp>
-    </p:spTree>
-  </p:cSld>
-  <p:clrMapOvr>
-    <a:masterClrMapping/>
-  </p:clrMapOvr>
-</p:sld>
-</file>
-
 <file path=ppt/slides/slide26.xml><?xml version="1.0" encoding="utf-8"?>
 <p:sld xmlns:a="http://schemas.openxmlformats.org/drawingml/2006/main" xmlns:r="http://schemas.openxmlformats.org/officeDocument/2006/relationships" xmlns:p="http://schemas.openxmlformats.org/presentationml/2006/main">
   <p:cSld>
@@ -7177,7 +7419,7 @@
           <a:p>
             <a:r>
               <a:rPr lang="en-US" dirty="0" smtClean="0"/>
-              <a:t>Exploratory Scenarios</a:t>
+              <a:t>Scenarios</a:t>
             </a:r>
             <a:endParaRPr lang="en-US" dirty="0"/>
           </a:p>
@@ -7199,48 +7441,139 @@
           <a:lstStyle/>
           <a:p>
             <a:r>
-              <a:rPr lang="en-US" sz="2600" i="1" dirty="0" smtClean="0">
+              <a:rPr lang="en-US" sz="2200" dirty="0" smtClean="0"/>
+              <a:t>Typically the first job of an architecture analysis is to precisely </a:t>
+            </a:r>
+            <a:r>
+              <a:rPr lang="en-US" sz="2200" i="1" dirty="0" smtClean="0">
                 <a:solidFill>
                   <a:srgbClr val="C00000"/>
                 </a:solidFill>
               </a:rPr>
-              <a:t>Exploratory scenarios</a:t>
-            </a:r>
-            <a:r>
-              <a:rPr lang="en-US" sz="2600" dirty="0" smtClean="0"/>
-              <a:t> push the envelope and stress the system.</a:t>
-            </a:r>
-          </a:p>
-          <a:p>
-            <a:pPr lvl="1"/>
+              <a:t>elicit the specific quality goals</a:t>
+            </a:r>
             <a:r>
               <a:rPr lang="en-US" sz="2200" dirty="0" smtClean="0"/>
-              <a:t>Improve the system's </a:t>
-            </a:r>
-            <a:r>
-              <a:rPr lang="en-US" sz="2200" b="1" dirty="0" smtClean="0"/>
-              <a:t>availability</a:t>
+              <a:t> against which the architecture will be judged. The </a:t>
+            </a:r>
+            <a:r>
+              <a:rPr lang="en-US" sz="2200" i="1" dirty="0" smtClean="0">
+                <a:solidFill>
+                  <a:srgbClr val="C00000"/>
+                </a:solidFill>
+              </a:rPr>
+              <a:t>mechanism</a:t>
             </a:r>
             <a:r>
               <a:rPr lang="en-US" sz="2200" dirty="0" smtClean="0"/>
-              <a:t> from 98% to 99.999%.</a:t>
-            </a:r>
-          </a:p>
-          <a:p>
-            <a:pPr lvl="1"/>
-            <a:r>
-              <a:rPr lang="en-US" sz="2200" dirty="0" smtClean="0"/>
-              <a:t>Half of the servers go down during normal operation without affecting overall system </a:t>
-            </a:r>
-            <a:r>
-              <a:rPr lang="en-US" sz="2200" b="1" dirty="0" smtClean="0"/>
-              <a:t>availability</a:t>
+              <a:t> that we use for this elicitation is the </a:t>
+            </a:r>
+            <a:r>
+              <a:rPr lang="en-US" sz="2200" u="sng" dirty="0" smtClean="0"/>
+              <a:t>scenario</a:t>
             </a:r>
             <a:r>
               <a:rPr lang="en-US" sz="2200" dirty="0" smtClean="0"/>
               <a:t>.</a:t>
             </a:r>
-            <a:endParaRPr lang="en-US" sz="2200" dirty="0"/>
+          </a:p>
+          <a:p>
+            <a:r>
+              <a:rPr lang="en-US" sz="2200" i="1" dirty="0" smtClean="0">
+                <a:solidFill>
+                  <a:srgbClr val="C00000"/>
+                </a:solidFill>
+              </a:rPr>
+              <a:t>A scenario</a:t>
+            </a:r>
+            <a:r>
+              <a:rPr lang="en-US" sz="2200" dirty="0" smtClean="0"/>
+              <a:t> is a </a:t>
+            </a:r>
+            <a:r>
+              <a:rPr lang="en-US" sz="2200" u="sng" dirty="0" smtClean="0"/>
+              <a:t>short statement</a:t>
+            </a:r>
+            <a:r>
+              <a:rPr lang="en-US" sz="2200" dirty="0" smtClean="0"/>
+              <a:t> describing an </a:t>
+            </a:r>
+            <a:r>
+              <a:rPr lang="en-US" sz="2200" u="sng" dirty="0" smtClean="0"/>
+              <a:t>interaction</a:t>
+            </a:r>
+            <a:r>
+              <a:rPr lang="en-US" sz="2200" dirty="0" smtClean="0"/>
+              <a:t> of one of the </a:t>
+            </a:r>
+            <a:r>
+              <a:rPr lang="en-US" sz="2200" u="sng" dirty="0" smtClean="0"/>
+              <a:t>stakeholders</a:t>
+            </a:r>
+            <a:r>
+              <a:rPr lang="en-US" sz="2200" dirty="0" smtClean="0"/>
+              <a:t> with the system.</a:t>
+            </a:r>
+          </a:p>
+          <a:p>
+            <a:pPr lvl="1"/>
+            <a:r>
+              <a:rPr lang="en-US" sz="1700" i="1" dirty="0" smtClean="0">
+                <a:solidFill>
+                  <a:srgbClr val="C00000"/>
+                </a:solidFill>
+              </a:rPr>
+              <a:t>A user</a:t>
+            </a:r>
+            <a:r>
+              <a:rPr lang="en-US" sz="1700" dirty="0" smtClean="0"/>
+              <a:t> would describe using the system to perform some task; his scenarios would very much resemble use cases in object-oriented parlance.</a:t>
+            </a:r>
+          </a:p>
+          <a:p>
+            <a:pPr lvl="1"/>
+            <a:r>
+              <a:rPr lang="en-US" sz="1700" i="1" dirty="0" smtClean="0">
+                <a:solidFill>
+                  <a:srgbClr val="C00000"/>
+                </a:solidFill>
+              </a:rPr>
+              <a:t>A maintainer</a:t>
+            </a:r>
+            <a:r>
+              <a:rPr lang="en-US" sz="1700" dirty="0" smtClean="0"/>
+              <a:t> would describe making a change to the system, such as upgrading the operating system in a particular way or adding a specific new function.</a:t>
+            </a:r>
+          </a:p>
+          <a:p>
+            <a:pPr lvl="1"/>
+            <a:r>
+              <a:rPr lang="en-US" sz="1700" i="1" dirty="0" smtClean="0">
+                <a:solidFill>
+                  <a:srgbClr val="C00000"/>
+                </a:solidFill>
+              </a:rPr>
+              <a:t>A developer's</a:t>
+            </a:r>
+            <a:r>
+              <a:rPr lang="en-US" sz="1700" dirty="0" smtClean="0"/>
+              <a:t> scenario might talk about using the architecture to build the system or predict its performance.</a:t>
+            </a:r>
+          </a:p>
+          <a:p>
+            <a:pPr lvl="1"/>
+            <a:r>
+              <a:rPr lang="en-US" sz="1700" i="1" dirty="0" smtClean="0">
+                <a:solidFill>
+                  <a:srgbClr val="C00000"/>
+                </a:solidFill>
+              </a:rPr>
+              <a:t>A customer's</a:t>
+            </a:r>
+            <a:r>
+              <a:rPr lang="en-US" sz="1700" dirty="0" smtClean="0"/>
+              <a:t> scenario might describe how the architecture is to be re-used for a second product in a product line.</a:t>
+            </a:r>
           </a:p>
         </p:txBody>
       </p:sp>
@@ -7286,7 +7619,7 @@
           <a:p>
             <a:r>
               <a:rPr lang="en-US" dirty="0" smtClean="0"/>
-              <a:t>Quality Attribute Scenario Representation [1]</a:t>
+              <a:t>Use Case Scenarios</a:t>
             </a:r>
             <a:endParaRPr lang="en-US" dirty="0"/>
           </a:p>
@@ -7308,50 +7641,58 @@
           <a:lstStyle/>
           <a:p>
             <a:r>
-              <a:rPr lang="en-US" sz="2400" dirty="0" smtClean="0"/>
-              <a:t>Quality attribute scenarios have six parts: Stimulus, Stimulus Source, Response, Response Measure, Environment, Artifact.</a:t>
-            </a:r>
-          </a:p>
-          <a:p>
-            <a:r>
-              <a:rPr lang="en-US" sz="2400" dirty="0" smtClean="0"/>
-              <a:t>The environment is the set of circumstances in which the scenario takes place.</a:t>
-            </a:r>
-          </a:p>
-        </p:txBody>
-      </p:sp>
-      <p:pic>
-        <p:nvPicPr>
-          <p:cNvPr id="26625" name="Picture 1"/>
-          <p:cNvPicPr>
-            <a:picLocks noChangeAspect="1" noChangeArrowheads="1"/>
-          </p:cNvPicPr>
-          <p:nvPr/>
-        </p:nvPicPr>
-        <p:blipFill>
-          <a:blip r:embed="rId2" cstate="print"/>
-          <a:srcRect/>
-          <a:stretch>
-            <a:fillRect/>
-          </a:stretch>
-        </p:blipFill>
-        <p:spPr bwMode="auto">
-          <a:xfrm>
-            <a:off x="1690688" y="4035425"/>
-            <a:ext cx="5762625" cy="1908175"/>
-          </a:xfrm>
-          <a:prstGeom prst="rect">
-            <a:avLst/>
-          </a:prstGeom>
-          <a:noFill/>
-          <a:ln w="9525">
-            <a:noFill/>
-            <a:miter lim="800000"/>
-            <a:headEnd/>
-            <a:tailEnd/>
-          </a:ln>
-        </p:spPr>
-      </p:pic>
+              <a:rPr lang="en-US" sz="2600" i="1" dirty="0" smtClean="0">
+                <a:solidFill>
+                  <a:srgbClr val="C00000"/>
+                </a:solidFill>
+              </a:rPr>
+              <a:t>Use case scenarios</a:t>
+            </a:r>
+            <a:r>
+              <a:rPr lang="en-US" sz="2600" dirty="0" smtClean="0"/>
+              <a:t> describe a </a:t>
+            </a:r>
+            <a:r>
+              <a:rPr lang="en-US" sz="2600" u="sng" dirty="0" smtClean="0"/>
+              <a:t>user's intended interaction</a:t>
+            </a:r>
+            <a:r>
+              <a:rPr lang="en-US" sz="2600" dirty="0" smtClean="0"/>
+              <a:t> with the completed, running system.</a:t>
+            </a:r>
+          </a:p>
+          <a:p>
+            <a:pPr lvl="1"/>
+            <a:r>
+              <a:rPr lang="en-US" sz="2200" dirty="0" smtClean="0"/>
+              <a:t>The user wants to examine budgetary and actual data under different fiscal years without re-entering project data. (</a:t>
+            </a:r>
+            <a:r>
+              <a:rPr lang="en-US" sz="2200" b="1" dirty="0" smtClean="0"/>
+              <a:t>usability</a:t>
+            </a:r>
+            <a:r>
+              <a:rPr lang="en-US" sz="2200" dirty="0" smtClean="0"/>
+              <a:t>)</a:t>
+            </a:r>
+          </a:p>
+          <a:p>
+            <a:pPr lvl="1"/>
+            <a:r>
+              <a:rPr lang="en-US" sz="2200" dirty="0" smtClean="0"/>
+              <a:t>User changes graph layout from horizontal to vertical and graph is redrawn in one second. (</a:t>
+            </a:r>
+            <a:r>
+              <a:rPr lang="en-US" sz="2200" b="1" dirty="0" smtClean="0"/>
+              <a:t>performance</a:t>
+            </a:r>
+            <a:r>
+              <a:rPr lang="en-US" sz="2200" dirty="0" smtClean="0"/>
+              <a:t>)</a:t>
+            </a:r>
+          </a:p>
+        </p:txBody>
+      </p:sp>
     </p:spTree>
   </p:cSld>
   <p:clrMapOvr>
@@ -7394,7 +7735,7 @@
           <a:p>
             <a:r>
               <a:rPr lang="en-US" dirty="0" smtClean="0"/>
-              <a:t>Example: Availability Scenario</a:t>
+              <a:t>Growth Scenarios</a:t>
             </a:r>
             <a:endParaRPr lang="en-US" dirty="0"/>
           </a:p>
@@ -7416,67 +7757,55 @@
           <a:lstStyle/>
           <a:p>
             <a:r>
-              <a:rPr lang="en-US" sz="2000" i="1" dirty="0" smtClean="0">
+              <a:rPr lang="en-US" sz="2600" i="1" dirty="0" smtClean="0">
                 <a:solidFill>
                   <a:srgbClr val="C00000"/>
                 </a:solidFill>
               </a:rPr>
-              <a:t>Availability</a:t>
-            </a:r>
-            <a:r>
-              <a:rPr lang="en-US" sz="2000" dirty="0" smtClean="0"/>
-              <a:t> refers to a property of software that it is there and </a:t>
-            </a:r>
-            <a:r>
-              <a:rPr lang="en-US" sz="2000" u="sng" dirty="0" smtClean="0"/>
-              <a:t>ready to carry out its task</a:t>
-            </a:r>
-            <a:r>
-              <a:rPr lang="en-US" sz="2000" dirty="0" smtClean="0"/>
-              <a:t> when you need it to be.</a:t>
-            </a:r>
-          </a:p>
-          <a:p>
-            <a:r>
-              <a:rPr lang="en-US" sz="2000" dirty="0" smtClean="0"/>
-              <a:t>Mean Time Between Failure (MTBF), Mean Time To Recovery (MTTR).</a:t>
-            </a:r>
-            <a:endParaRPr lang="en-US" sz="2000" dirty="0"/>
-          </a:p>
-        </p:txBody>
-      </p:sp>
-      <p:pic>
-        <p:nvPicPr>
-          <p:cNvPr id="65538" name="Picture 2"/>
-          <p:cNvPicPr>
-            <a:picLocks noChangeAspect="1" noChangeArrowheads="1"/>
-          </p:cNvPicPr>
-          <p:nvPr/>
-        </p:nvPicPr>
-        <p:blipFill>
-          <a:blip r:embed="rId2" cstate="print"/>
-          <a:srcRect/>
-          <a:stretch>
-            <a:fillRect/>
-          </a:stretch>
-        </p:blipFill>
-        <p:spPr bwMode="auto">
-          <a:xfrm>
-            <a:off x="1333500" y="3492500"/>
-            <a:ext cx="6477000" cy="2146300"/>
-          </a:xfrm>
-          <a:prstGeom prst="rect">
-            <a:avLst/>
-          </a:prstGeom>
-          <a:noFill/>
-          <a:ln w="9525">
-            <a:noFill/>
-            <a:miter lim="800000"/>
-            <a:headEnd/>
-            <a:tailEnd/>
-          </a:ln>
-        </p:spPr>
-      </p:pic>
+              <a:t>Growth scenarios</a:t>
+            </a:r>
+            <a:r>
+              <a:rPr lang="en-US" sz="2600" dirty="0" smtClean="0"/>
+              <a:t> represent typical anticipated future changes to a system.</a:t>
+            </a:r>
+          </a:p>
+          <a:p>
+            <a:pPr lvl="1"/>
+            <a:r>
+              <a:rPr lang="en-US" sz="2200" dirty="0" smtClean="0"/>
+              <a:t>The maximum number of tracks to be handled by the system doubles and the maximum latency of track data to the screen is kept to </a:t>
+            </a:r>
+            <a:r>
+              <a:rPr lang="en-US" sz="2200" b="1" dirty="0" smtClean="0"/>
+              <a:t>200 </a:t>
+            </a:r>
+            <a:r>
+              <a:rPr lang="en-US" sz="2200" b="1" dirty="0" err="1" smtClean="0"/>
+              <a:t>ms</a:t>
+            </a:r>
+            <a:r>
+              <a:rPr lang="en-US" sz="2200" dirty="0" err="1" smtClean="0"/>
+              <a:t>.</a:t>
+            </a:r>
+            <a:endParaRPr lang="en-US" sz="2200" dirty="0" smtClean="0"/>
+          </a:p>
+          <a:p>
+            <a:pPr lvl="1"/>
+            <a:r>
+              <a:rPr lang="en-US" sz="2200" dirty="0" smtClean="0"/>
+              <a:t>Migrate to a new operating system, or a new release of the existing operating system in less than </a:t>
+            </a:r>
+            <a:r>
+              <a:rPr lang="en-US" sz="2200" b="1" dirty="0" smtClean="0"/>
+              <a:t>a person-year of work</a:t>
+            </a:r>
+            <a:r>
+              <a:rPr lang="en-US" sz="2200" dirty="0" smtClean="0"/>
+              <a:t>.</a:t>
+            </a:r>
+          </a:p>
+        </p:txBody>
+      </p:sp>
     </p:spTree>
   </p:cSld>
   <p:clrMapOvr>
@@ -7519,44 +7848,73 @@
           <a:p>
             <a:r>
               <a:rPr lang="en-US" dirty="0" smtClean="0"/>
-              <a:t>More Complex Availability Scenario</a:t>
+              <a:t>Exploratory Scenarios</a:t>
             </a:r>
             <a:endParaRPr lang="en-US" dirty="0"/>
           </a:p>
         </p:txBody>
       </p:sp>
-      <p:pic>
-        <p:nvPicPr>
-          <p:cNvPr id="23553" name="Picture 1"/>
-          <p:cNvPicPr>
-            <a:picLocks noChangeAspect="1" noChangeArrowheads="1"/>
-          </p:cNvPicPr>
-          <p:nvPr/>
-        </p:nvPicPr>
-        <p:blipFill>
-          <a:blip r:embed="rId2" cstate="print"/>
-          <a:srcRect/>
-          <a:stretch>
-            <a:fillRect/>
-          </a:stretch>
-        </p:blipFill>
-        <p:spPr bwMode="auto">
-          <a:xfrm>
-            <a:off x="1127125" y="2438400"/>
-            <a:ext cx="6889750" cy="2597150"/>
-          </a:xfrm>
-          <a:prstGeom prst="rect">
-            <a:avLst/>
-          </a:prstGeom>
-          <a:noFill/>
-          <a:ln w="9525">
-            <a:noFill/>
-            <a:miter lim="800000"/>
-            <a:headEnd/>
-            <a:tailEnd/>
-          </a:ln>
-        </p:spPr>
-      </p:pic>
+      <p:sp>
+        <p:nvSpPr>
+          <p:cNvPr id="3" name="Content Placeholder 2"/>
+          <p:cNvSpPr>
+            <a:spLocks noGrp="1"/>
+          </p:cNvSpPr>
+          <p:nvPr>
+            <p:ph idx="1"/>
+          </p:nvPr>
+        </p:nvSpPr>
+        <p:spPr/>
+        <p:txBody>
+          <a:bodyPr/>
+          <a:lstStyle/>
+          <a:p>
+            <a:r>
+              <a:rPr lang="en-US" sz="2600" i="1" dirty="0" smtClean="0">
+                <a:solidFill>
+                  <a:srgbClr val="C00000"/>
+                </a:solidFill>
+              </a:rPr>
+              <a:t>Exploratory scenarios</a:t>
+            </a:r>
+            <a:r>
+              <a:rPr lang="en-US" sz="2600" dirty="0" smtClean="0"/>
+              <a:t> push the envelope and stress the system.</a:t>
+            </a:r>
+          </a:p>
+          <a:p>
+            <a:pPr lvl="1"/>
+            <a:r>
+              <a:rPr lang="en-US" sz="2200" dirty="0" smtClean="0"/>
+              <a:t>Improve the system's </a:t>
+            </a:r>
+            <a:r>
+              <a:rPr lang="en-US" sz="2200" b="1" dirty="0" smtClean="0"/>
+              <a:t>availability</a:t>
+            </a:r>
+            <a:r>
+              <a:rPr lang="en-US" sz="2200" dirty="0" smtClean="0"/>
+              <a:t> from 98% to 99.999%.</a:t>
+            </a:r>
+          </a:p>
+          <a:p>
+            <a:pPr lvl="1"/>
+            <a:r>
+              <a:rPr lang="en-US" sz="2200" dirty="0" smtClean="0"/>
+              <a:t>Half of the servers go down during normal operation without affecting overall system </a:t>
+            </a:r>
+            <a:r>
+              <a:rPr lang="en-US" sz="2200" b="1" dirty="0" smtClean="0"/>
+              <a:t>availability</a:t>
+            </a:r>
+            <a:r>
+              <a:rPr lang="en-US" sz="2200" dirty="0" smtClean="0"/>
+              <a:t>.</a:t>
+            </a:r>
+            <a:endParaRPr lang="en-US" sz="2200" dirty="0"/>
+          </a:p>
+        </p:txBody>
+      </p:sp>
     </p:spTree>
   </p:cSld>
   <p:clrMapOvr>
@@ -7747,6 +8105,319 @@
           <a:p>
             <a:r>
               <a:rPr lang="en-US" dirty="0" smtClean="0"/>
+              <a:t>Quality Attribute Scenario Representation [1]</a:t>
+            </a:r>
+            <a:endParaRPr lang="en-US" dirty="0"/>
+          </a:p>
+        </p:txBody>
+      </p:sp>
+      <p:sp>
+        <p:nvSpPr>
+          <p:cNvPr id="3" name="Content Placeholder 2"/>
+          <p:cNvSpPr>
+            <a:spLocks noGrp="1"/>
+          </p:cNvSpPr>
+          <p:nvPr>
+            <p:ph idx="1"/>
+          </p:nvPr>
+        </p:nvSpPr>
+        <p:spPr/>
+        <p:txBody>
+          <a:bodyPr/>
+          <a:lstStyle/>
+          <a:p>
+            <a:r>
+              <a:rPr lang="en-US" sz="2400" dirty="0" smtClean="0"/>
+              <a:t>Quality attribute scenarios have six parts: Stimulus, Stimulus Source, Response, Response Measure, Environment, Artifact.</a:t>
+            </a:r>
+          </a:p>
+          <a:p>
+            <a:r>
+              <a:rPr lang="en-US" sz="2400" dirty="0" smtClean="0"/>
+              <a:t>The environment is the set of circumstances in which the scenario takes place.</a:t>
+            </a:r>
+          </a:p>
+        </p:txBody>
+      </p:sp>
+      <p:pic>
+        <p:nvPicPr>
+          <p:cNvPr id="26625" name="Picture 1"/>
+          <p:cNvPicPr>
+            <a:picLocks noChangeAspect="1" noChangeArrowheads="1"/>
+          </p:cNvPicPr>
+          <p:nvPr/>
+        </p:nvPicPr>
+        <p:blipFill>
+          <a:blip r:embed="rId2" cstate="print"/>
+          <a:srcRect/>
+          <a:stretch>
+            <a:fillRect/>
+          </a:stretch>
+        </p:blipFill>
+        <p:spPr bwMode="auto">
+          <a:xfrm>
+            <a:off x="1690688" y="4035425"/>
+            <a:ext cx="5762625" cy="1908175"/>
+          </a:xfrm>
+          <a:prstGeom prst="rect">
+            <a:avLst/>
+          </a:prstGeom>
+          <a:noFill/>
+          <a:ln w="9525">
+            <a:noFill/>
+            <a:miter lim="800000"/>
+            <a:headEnd/>
+            <a:tailEnd/>
+          </a:ln>
+        </p:spPr>
+      </p:pic>
+    </p:spTree>
+  </p:cSld>
+  <p:clrMapOvr>
+    <a:masterClrMapping/>
+  </p:clrMapOvr>
+</p:sld>
+</file>
+
+<file path=ppt/slides/slide31.xml><?xml version="1.0" encoding="utf-8"?>
+<p:sld xmlns:a="http://schemas.openxmlformats.org/drawingml/2006/main" xmlns:r="http://schemas.openxmlformats.org/officeDocument/2006/relationships" xmlns:p="http://schemas.openxmlformats.org/presentationml/2006/main">
+  <p:cSld>
+    <p:spTree>
+      <p:nvGrpSpPr>
+        <p:cNvPr id="1" name=""/>
+        <p:cNvGrpSpPr/>
+        <p:nvPr/>
+      </p:nvGrpSpPr>
+      <p:grpSpPr>
+        <a:xfrm>
+          <a:off x="0" y="0"/>
+          <a:ext cx="0" cy="0"/>
+          <a:chOff x="0" y="0"/>
+          <a:chExt cx="0" cy="0"/>
+        </a:xfrm>
+      </p:grpSpPr>
+      <p:sp>
+        <p:nvSpPr>
+          <p:cNvPr id="2" name="Title 1"/>
+          <p:cNvSpPr>
+            <a:spLocks noGrp="1"/>
+          </p:cNvSpPr>
+          <p:nvPr>
+            <p:ph type="title"/>
+          </p:nvPr>
+        </p:nvSpPr>
+        <p:spPr/>
+        <p:txBody>
+          <a:bodyPr/>
+          <a:lstStyle/>
+          <a:p>
+            <a:r>
+              <a:rPr lang="en-US" dirty="0" smtClean="0"/>
+              <a:t>Example: Availability Scenario</a:t>
+            </a:r>
+            <a:endParaRPr lang="en-US" dirty="0"/>
+          </a:p>
+        </p:txBody>
+      </p:sp>
+      <p:sp>
+        <p:nvSpPr>
+          <p:cNvPr id="3" name="Content Placeholder 2"/>
+          <p:cNvSpPr>
+            <a:spLocks noGrp="1"/>
+          </p:cNvSpPr>
+          <p:nvPr>
+            <p:ph idx="1"/>
+          </p:nvPr>
+        </p:nvSpPr>
+        <p:spPr/>
+        <p:txBody>
+          <a:bodyPr/>
+          <a:lstStyle/>
+          <a:p>
+            <a:r>
+              <a:rPr lang="en-US" sz="2000" i="1" dirty="0" smtClean="0">
+                <a:solidFill>
+                  <a:srgbClr val="C00000"/>
+                </a:solidFill>
+              </a:rPr>
+              <a:t>Availability</a:t>
+            </a:r>
+            <a:r>
+              <a:rPr lang="en-US" sz="2000" dirty="0" smtClean="0"/>
+              <a:t> refers to a property of software that it is there and </a:t>
+            </a:r>
+            <a:r>
+              <a:rPr lang="en-US" sz="2000" u="sng" dirty="0" smtClean="0"/>
+              <a:t>ready to carry out its task</a:t>
+            </a:r>
+            <a:r>
+              <a:rPr lang="en-US" sz="2000" dirty="0" smtClean="0"/>
+              <a:t> when you need it to be.</a:t>
+            </a:r>
+          </a:p>
+          <a:p>
+            <a:r>
+              <a:rPr lang="en-US" sz="2000" dirty="0" smtClean="0"/>
+              <a:t>Mean Time Between Failure (MTBF), Mean Time To Recovery (MTTR).</a:t>
+            </a:r>
+            <a:endParaRPr lang="en-US" sz="2000" dirty="0"/>
+          </a:p>
+        </p:txBody>
+      </p:sp>
+      <p:pic>
+        <p:nvPicPr>
+          <p:cNvPr id="65538" name="Picture 2"/>
+          <p:cNvPicPr>
+            <a:picLocks noChangeAspect="1" noChangeArrowheads="1"/>
+          </p:cNvPicPr>
+          <p:nvPr/>
+        </p:nvPicPr>
+        <p:blipFill>
+          <a:blip r:embed="rId2" cstate="print"/>
+          <a:srcRect/>
+          <a:stretch>
+            <a:fillRect/>
+          </a:stretch>
+        </p:blipFill>
+        <p:spPr bwMode="auto">
+          <a:xfrm>
+            <a:off x="1333500" y="3492500"/>
+            <a:ext cx="6477000" cy="2146300"/>
+          </a:xfrm>
+          <a:prstGeom prst="rect">
+            <a:avLst/>
+          </a:prstGeom>
+          <a:noFill/>
+          <a:ln w="9525">
+            <a:noFill/>
+            <a:miter lim="800000"/>
+            <a:headEnd/>
+            <a:tailEnd/>
+          </a:ln>
+        </p:spPr>
+      </p:pic>
+    </p:spTree>
+  </p:cSld>
+  <p:clrMapOvr>
+    <a:masterClrMapping/>
+  </p:clrMapOvr>
+</p:sld>
+</file>
+
+<file path=ppt/slides/slide32.xml><?xml version="1.0" encoding="utf-8"?>
+<p:sld xmlns:a="http://schemas.openxmlformats.org/drawingml/2006/main" xmlns:r="http://schemas.openxmlformats.org/officeDocument/2006/relationships" xmlns:p="http://schemas.openxmlformats.org/presentationml/2006/main">
+  <p:cSld>
+    <p:spTree>
+      <p:nvGrpSpPr>
+        <p:cNvPr id="1" name=""/>
+        <p:cNvGrpSpPr/>
+        <p:nvPr/>
+      </p:nvGrpSpPr>
+      <p:grpSpPr>
+        <a:xfrm>
+          <a:off x="0" y="0"/>
+          <a:ext cx="0" cy="0"/>
+          <a:chOff x="0" y="0"/>
+          <a:chExt cx="0" cy="0"/>
+        </a:xfrm>
+      </p:grpSpPr>
+      <p:sp>
+        <p:nvSpPr>
+          <p:cNvPr id="2" name="Title 1"/>
+          <p:cNvSpPr>
+            <a:spLocks noGrp="1"/>
+          </p:cNvSpPr>
+          <p:nvPr>
+            <p:ph type="title"/>
+          </p:nvPr>
+        </p:nvSpPr>
+        <p:spPr/>
+        <p:txBody>
+          <a:bodyPr/>
+          <a:lstStyle/>
+          <a:p>
+            <a:r>
+              <a:rPr lang="en-US" dirty="0" smtClean="0"/>
+              <a:t>More Complex Availability Scenario</a:t>
+            </a:r>
+            <a:endParaRPr lang="en-US" dirty="0"/>
+          </a:p>
+        </p:txBody>
+      </p:sp>
+      <p:pic>
+        <p:nvPicPr>
+          <p:cNvPr id="23553" name="Picture 1"/>
+          <p:cNvPicPr>
+            <a:picLocks noChangeAspect="1" noChangeArrowheads="1"/>
+          </p:cNvPicPr>
+          <p:nvPr/>
+        </p:nvPicPr>
+        <p:blipFill>
+          <a:blip r:embed="rId2" cstate="print"/>
+          <a:srcRect/>
+          <a:stretch>
+            <a:fillRect/>
+          </a:stretch>
+        </p:blipFill>
+        <p:spPr bwMode="auto">
+          <a:xfrm>
+            <a:off x="1127125" y="2438400"/>
+            <a:ext cx="6889750" cy="2597150"/>
+          </a:xfrm>
+          <a:prstGeom prst="rect">
+            <a:avLst/>
+          </a:prstGeom>
+          <a:noFill/>
+          <a:ln w="9525">
+            <a:noFill/>
+            <a:miter lim="800000"/>
+            <a:headEnd/>
+            <a:tailEnd/>
+          </a:ln>
+        </p:spPr>
+      </p:pic>
+    </p:spTree>
+  </p:cSld>
+  <p:clrMapOvr>
+    <a:masterClrMapping/>
+  </p:clrMapOvr>
+</p:sld>
+</file>
+
+<file path=ppt/slides/slide33.xml><?xml version="1.0" encoding="utf-8"?>
+<p:sld xmlns:a="http://schemas.openxmlformats.org/drawingml/2006/main" xmlns:r="http://schemas.openxmlformats.org/officeDocument/2006/relationships" xmlns:p="http://schemas.openxmlformats.org/presentationml/2006/main">
+  <p:cSld>
+    <p:spTree>
+      <p:nvGrpSpPr>
+        <p:cNvPr id="1" name=""/>
+        <p:cNvGrpSpPr/>
+        <p:nvPr/>
+      </p:nvGrpSpPr>
+      <p:grpSpPr>
+        <a:xfrm>
+          <a:off x="0" y="0"/>
+          <a:ext cx="0" cy="0"/>
+          <a:chOff x="0" y="0"/>
+          <a:chExt cx="0" cy="0"/>
+        </a:xfrm>
+      </p:grpSpPr>
+      <p:sp>
+        <p:nvSpPr>
+          <p:cNvPr id="2" name="Title 1"/>
+          <p:cNvSpPr>
+            <a:spLocks noGrp="1"/>
+          </p:cNvSpPr>
+          <p:nvPr>
+            <p:ph type="title"/>
+          </p:nvPr>
+        </p:nvSpPr>
+        <p:spPr/>
+        <p:txBody>
+          <a:bodyPr/>
+          <a:lstStyle/>
+          <a:p>
+            <a:r>
+              <a:rPr lang="en-US" dirty="0" smtClean="0"/>
               <a:t>Architectural Tactics</a:t>
             </a:r>
             <a:endParaRPr lang="en-US" dirty="0"/>
@@ -7911,7 +8582,7 @@
 </p:sld>
 </file>
 
-<file path=ppt/slides/slide31.xml><?xml version="1.0" encoding="utf-8"?>
+<file path=ppt/slides/slide34.xml><?xml version="1.0" encoding="utf-8"?>
 <p:sld xmlns:a="http://schemas.openxmlformats.org/drawingml/2006/main" xmlns:r="http://schemas.openxmlformats.org/officeDocument/2006/relationships" xmlns:p="http://schemas.openxmlformats.org/presentationml/2006/main">
   <p:cSld>
     <p:spTree>
@@ -8132,7 +8803,7 @@
 </p:sld>
 </file>
 
-<file path=ppt/slides/slide32.xml><?xml version="1.0" encoding="utf-8"?>
+<file path=ppt/slides/slide35.xml><?xml version="1.0" encoding="utf-8"?>
 <p:sld xmlns:a="http://schemas.openxmlformats.org/drawingml/2006/main" xmlns:r="http://schemas.openxmlformats.org/officeDocument/2006/relationships" xmlns:p="http://schemas.openxmlformats.org/presentationml/2006/main">
   <p:cSld>
     <p:spTree>
@@ -8315,7 +8986,7 @@
 </p:sld>
 </file>
 
-<file path=ppt/slides/slide33.xml><?xml version="1.0" encoding="utf-8"?>
+<file path=ppt/slides/slide36.xml><?xml version="1.0" encoding="utf-8"?>
 <p:sld xmlns:a="http://schemas.openxmlformats.org/drawingml/2006/main" xmlns:r="http://schemas.openxmlformats.org/officeDocument/2006/relationships" xmlns:p="http://schemas.openxmlformats.org/presentationml/2006/main">
   <p:cSld>
     <p:spTree>
@@ -8366,7 +9037,7 @@
 </p:sld>
 </file>
 
-<file path=ppt/slides/slide34.xml><?xml version="1.0" encoding="utf-8"?>
+<file path=ppt/slides/slide37.xml><?xml version="1.0" encoding="utf-8"?>
 <p:sld xmlns:a="http://schemas.openxmlformats.org/drawingml/2006/main" xmlns:r="http://schemas.openxmlformats.org/officeDocument/2006/relationships" xmlns:p="http://schemas.openxmlformats.org/presentationml/2006/main">
   <p:cSld>
     <p:spTree>
@@ -8485,7 +9156,7 @@
 </p:sld>
 </file>
 
-<file path=ppt/slides/slide35.xml><?xml version="1.0" encoding="utf-8"?>
+<file path=ppt/slides/slide38.xml><?xml version="1.0" encoding="utf-8"?>
 <p:sld xmlns:a="http://schemas.openxmlformats.org/drawingml/2006/main" xmlns:r="http://schemas.openxmlformats.org/officeDocument/2006/relationships" xmlns:p="http://schemas.openxmlformats.org/presentationml/2006/main">
   <p:cSld>
     <p:spTree>
@@ -8712,7 +9383,7 @@
 </p:sld>
 </file>
 
-<file path=ppt/slides/slide36.xml><?xml version="1.0" encoding="utf-8"?>
+<file path=ppt/slides/slide39.xml><?xml version="1.0" encoding="utf-8"?>
 <p:sld xmlns:a="http://schemas.openxmlformats.org/drawingml/2006/main" xmlns:r="http://schemas.openxmlformats.org/officeDocument/2006/relationships" xmlns:p="http://schemas.openxmlformats.org/presentationml/2006/main">
   <p:cSld>
     <p:spTree>
@@ -8903,360 +9574,6 @@
             <a:headEnd/>
             <a:tailEnd/>
           </a:ln>
-        </p:spPr>
-      </p:pic>
-    </p:spTree>
-  </p:cSld>
-  <p:clrMapOvr>
-    <a:masterClrMapping/>
-  </p:clrMapOvr>
-</p:sld>
-</file>
-
-<file path=ppt/slides/slide37.xml><?xml version="1.0" encoding="utf-8"?>
-<p:sld xmlns:a="http://schemas.openxmlformats.org/drawingml/2006/main" xmlns:r="http://schemas.openxmlformats.org/officeDocument/2006/relationships" xmlns:p="http://schemas.openxmlformats.org/presentationml/2006/main">
-  <p:cSld>
-    <p:spTree>
-      <p:nvGrpSpPr>
-        <p:cNvPr id="1" name=""/>
-        <p:cNvGrpSpPr/>
-        <p:nvPr/>
-      </p:nvGrpSpPr>
-      <p:grpSpPr>
-        <a:xfrm>
-          <a:off x="0" y="0"/>
-          <a:ext cx="0" cy="0"/>
-          <a:chOff x="0" y="0"/>
-          <a:chExt cx="0" cy="0"/>
-        </a:xfrm>
-      </p:grpSpPr>
-      <p:pic>
-        <p:nvPicPr>
-          <p:cNvPr id="4" name="Picture 2" descr="https://lh3.ggpht.com/1IfZLL2QDSjZ0wS7sUhaMlsAOS8BBzdR3wZ1WawgRn7KZAM8nEVZYMOUM-lqQb0ikIzp=w300"/>
-          <p:cNvPicPr>
-            <a:picLocks noChangeAspect="1" noChangeArrowheads="1"/>
-          </p:cNvPicPr>
-          <p:nvPr/>
-        </p:nvPicPr>
-        <p:blipFill>
-          <a:blip r:embed="rId2" cstate="print"/>
-          <a:srcRect/>
-          <a:stretch>
-            <a:fillRect/>
-          </a:stretch>
-        </p:blipFill>
-        <p:spPr bwMode="auto">
-          <a:xfrm>
-            <a:off x="3276600" y="1905000"/>
-            <a:ext cx="2857500" cy="2857500"/>
-          </a:xfrm>
-          <a:prstGeom prst="rect">
-            <a:avLst/>
-          </a:prstGeom>
-          <a:noFill/>
-        </p:spPr>
-      </p:pic>
-    </p:spTree>
-  </p:cSld>
-  <p:clrMapOvr>
-    <a:masterClrMapping/>
-  </p:clrMapOvr>
-</p:sld>
-</file>
-
-<file path=ppt/slides/slide38.xml><?xml version="1.0" encoding="utf-8"?>
-<p:sld xmlns:a="http://schemas.openxmlformats.org/drawingml/2006/main" xmlns:r="http://schemas.openxmlformats.org/officeDocument/2006/relationships" xmlns:p="http://schemas.openxmlformats.org/presentationml/2006/main">
-  <p:cSld>
-    <p:spTree>
-      <p:nvGrpSpPr>
-        <p:cNvPr id="1" name=""/>
-        <p:cNvGrpSpPr/>
-        <p:nvPr/>
-      </p:nvGrpSpPr>
-      <p:grpSpPr>
-        <a:xfrm>
-          <a:off x="0" y="0"/>
-          <a:ext cx="0" cy="0"/>
-          <a:chOff x="0" y="0"/>
-          <a:chExt cx="0" cy="0"/>
-        </a:xfrm>
-      </p:grpSpPr>
-      <p:sp>
-        <p:nvSpPr>
-          <p:cNvPr id="2" name="Title 1"/>
-          <p:cNvSpPr>
-            <a:spLocks noGrp="1"/>
-          </p:cNvSpPr>
-          <p:nvPr>
-            <p:ph type="title"/>
-          </p:nvPr>
-        </p:nvSpPr>
-        <p:spPr/>
-        <p:txBody>
-          <a:bodyPr/>
-          <a:lstStyle/>
-          <a:p>
-            <a:r>
-              <a:rPr lang="en-US" dirty="0" smtClean="0"/>
-              <a:t>Security Concepts (I)</a:t>
-            </a:r>
-            <a:endParaRPr lang="en-US" dirty="0"/>
-          </a:p>
-        </p:txBody>
-      </p:sp>
-      <p:sp>
-        <p:nvSpPr>
-          <p:cNvPr id="3" name="Content Placeholder 2"/>
-          <p:cNvSpPr>
-            <a:spLocks noGrp="1"/>
-          </p:cNvSpPr>
-          <p:nvPr>
-            <p:ph idx="1"/>
-          </p:nvPr>
-        </p:nvSpPr>
-        <p:spPr/>
-        <p:txBody>
-          <a:bodyPr/>
-          <a:lstStyle/>
-          <a:p>
-            <a:r>
-              <a:rPr lang="en-US" sz="2400" dirty="0" smtClean="0"/>
-              <a:t>The simplest </a:t>
-            </a:r>
-            <a:r>
-              <a:rPr lang="en-US" sz="2400" i="1" dirty="0" smtClean="0">
-                <a:solidFill>
-                  <a:srgbClr val="C00000"/>
-                </a:solidFill>
-              </a:rPr>
-              <a:t>approach to characterizing security</a:t>
-            </a:r>
-            <a:r>
-              <a:rPr lang="en-US" sz="2400" dirty="0" smtClean="0"/>
-              <a:t> has three characteristics: confidentiality, integrity, and availability (CIA):</a:t>
-            </a:r>
-          </a:p>
-          <a:p>
-            <a:pPr lvl="1"/>
-            <a:r>
-              <a:rPr lang="en-US" sz="2000" i="1" dirty="0" smtClean="0">
-                <a:solidFill>
-                  <a:srgbClr val="C00000"/>
-                </a:solidFill>
-              </a:rPr>
-              <a:t>Confidentiality</a:t>
-            </a:r>
-            <a:r>
-              <a:rPr lang="en-US" sz="2000" dirty="0" smtClean="0"/>
-              <a:t> is the property that data or services are protected from unauthorized access. For example, a hacker cannot access your income tax returns on a government computer.</a:t>
-            </a:r>
-          </a:p>
-          <a:p>
-            <a:pPr lvl="1"/>
-            <a:r>
-              <a:rPr lang="en-US" sz="2000" i="1" dirty="0" smtClean="0">
-                <a:solidFill>
-                  <a:srgbClr val="C00000"/>
-                </a:solidFill>
-              </a:rPr>
-              <a:t>Integrity</a:t>
-            </a:r>
-            <a:r>
-              <a:rPr lang="en-US" sz="2000" dirty="0" smtClean="0"/>
-              <a:t> is the property that data or services are not subject to unauthorized manipulation. For example, your grade has not been changed since your instructor assigned it.</a:t>
-            </a:r>
-          </a:p>
-          <a:p>
-            <a:pPr lvl="1"/>
-            <a:r>
-              <a:rPr lang="en-US" sz="2000" i="1" dirty="0" smtClean="0">
-                <a:solidFill>
-                  <a:srgbClr val="C00000"/>
-                </a:solidFill>
-              </a:rPr>
-              <a:t>Availability</a:t>
-            </a:r>
-            <a:r>
-              <a:rPr lang="en-US" sz="2000" dirty="0" smtClean="0"/>
-              <a:t> is the property that the system will be available for legitimate use. For example, a denial-of-service attack won't prevent you from ordering book from an online bookstore.</a:t>
-            </a:r>
-          </a:p>
-        </p:txBody>
-      </p:sp>
-      <p:pic>
-        <p:nvPicPr>
-          <p:cNvPr id="5" name="Picture 2" descr="https://diamondbusiness.net/wp-content/uploads/2017/04/security-new-Web-Image.jpg"/>
-          <p:cNvPicPr>
-            <a:picLocks noChangeAspect="1" noChangeArrowheads="1"/>
-          </p:cNvPicPr>
-          <p:nvPr/>
-        </p:nvPicPr>
-        <p:blipFill>
-          <a:blip r:embed="rId2" cstate="print"/>
-          <a:srcRect/>
-          <a:stretch>
-            <a:fillRect/>
-          </a:stretch>
-        </p:blipFill>
-        <p:spPr bwMode="auto">
-          <a:xfrm>
-            <a:off x="7239000" y="457200"/>
-            <a:ext cx="1241379" cy="828000"/>
-          </a:xfrm>
-          <a:prstGeom prst="rect">
-            <a:avLst/>
-          </a:prstGeom>
-          <a:noFill/>
-        </p:spPr>
-      </p:pic>
-    </p:spTree>
-  </p:cSld>
-  <p:clrMapOvr>
-    <a:masterClrMapping/>
-  </p:clrMapOvr>
-</p:sld>
-</file>
-
-<file path=ppt/slides/slide39.xml><?xml version="1.0" encoding="utf-8"?>
-<p:sld xmlns:a="http://schemas.openxmlformats.org/drawingml/2006/main" xmlns:r="http://schemas.openxmlformats.org/officeDocument/2006/relationships" xmlns:p="http://schemas.openxmlformats.org/presentationml/2006/main">
-  <p:cSld>
-    <p:spTree>
-      <p:nvGrpSpPr>
-        <p:cNvPr id="1" name=""/>
-        <p:cNvGrpSpPr/>
-        <p:nvPr/>
-      </p:nvGrpSpPr>
-      <p:grpSpPr>
-        <a:xfrm>
-          <a:off x="0" y="0"/>
-          <a:ext cx="0" cy="0"/>
-          <a:chOff x="0" y="0"/>
-          <a:chExt cx="0" cy="0"/>
-        </a:xfrm>
-      </p:grpSpPr>
-      <p:sp>
-        <p:nvSpPr>
-          <p:cNvPr id="2" name="Title 1"/>
-          <p:cNvSpPr>
-            <a:spLocks noGrp="1"/>
-          </p:cNvSpPr>
-          <p:nvPr>
-            <p:ph type="title"/>
-          </p:nvPr>
-        </p:nvSpPr>
-        <p:spPr/>
-        <p:txBody>
-          <a:bodyPr/>
-          <a:lstStyle/>
-          <a:p>
-            <a:r>
-              <a:rPr lang="en-US" dirty="0" smtClean="0"/>
-              <a:t>Security Concepts (II)</a:t>
-            </a:r>
-            <a:endParaRPr lang="en-US" dirty="0"/>
-          </a:p>
-        </p:txBody>
-      </p:sp>
-      <p:sp>
-        <p:nvSpPr>
-          <p:cNvPr id="3" name="Content Placeholder 2"/>
-          <p:cNvSpPr>
-            <a:spLocks noGrp="1"/>
-          </p:cNvSpPr>
-          <p:nvPr>
-            <p:ph idx="1"/>
-          </p:nvPr>
-        </p:nvSpPr>
-        <p:spPr/>
-        <p:txBody>
-          <a:bodyPr/>
-          <a:lstStyle/>
-          <a:p>
-            <a:r>
-              <a:rPr lang="en-US" sz="2400" i="1" dirty="0" smtClean="0">
-                <a:solidFill>
-                  <a:srgbClr val="C00000"/>
-                </a:solidFill>
-              </a:rPr>
-              <a:t>Other characteristics</a:t>
-            </a:r>
-            <a:r>
-              <a:rPr lang="en-US" sz="2400" dirty="0" smtClean="0"/>
-              <a:t> that are used to support CIA are these:</a:t>
-            </a:r>
-          </a:p>
-          <a:p>
-            <a:pPr lvl="1"/>
-            <a:r>
-              <a:rPr lang="en-US" sz="2000" i="1" dirty="0" smtClean="0">
-                <a:solidFill>
-                  <a:srgbClr val="C00000"/>
-                </a:solidFill>
-              </a:rPr>
-              <a:t>Authentication</a:t>
-            </a:r>
-            <a:r>
-              <a:rPr lang="en-US" sz="2000" dirty="0" smtClean="0"/>
-              <a:t> verifies the identities of the parties to a transaction and checks if they are truly who they claim to be. For example, when you get an email purporting to come from a bank, authentication guarantees that it actually comes from the bank.</a:t>
-            </a:r>
-          </a:p>
-          <a:p>
-            <a:pPr lvl="1"/>
-            <a:r>
-              <a:rPr lang="en-US" sz="2000" i="1" dirty="0" err="1" smtClean="0">
-                <a:solidFill>
-                  <a:srgbClr val="C00000"/>
-                </a:solidFill>
-              </a:rPr>
-              <a:t>Nonrepudiation</a:t>
-            </a:r>
-            <a:r>
-              <a:rPr lang="en-US" sz="2000" dirty="0" smtClean="0"/>
-              <a:t> guarantees that the sender of a message cannot later deny having sent the message, and that the recipient cannot deny having received the message. For example, you cannot deny ordering something from the Internet, or the merchant cannot disclaim getting your order.</a:t>
-            </a:r>
-          </a:p>
-          <a:p>
-            <a:pPr lvl="1"/>
-            <a:r>
-              <a:rPr lang="en-US" sz="2000" i="1" dirty="0" smtClean="0">
-                <a:solidFill>
-                  <a:srgbClr val="C00000"/>
-                </a:solidFill>
-              </a:rPr>
-              <a:t>Authorization</a:t>
-            </a:r>
-            <a:r>
-              <a:rPr lang="en-US" sz="2000" dirty="0" smtClean="0"/>
-              <a:t> grants a user the privileges to perform a task. For example, an online banking system authorizes a legitimate user to access his account.</a:t>
-            </a:r>
-            <a:endParaRPr lang="en-US" sz="2000" dirty="0"/>
-          </a:p>
-        </p:txBody>
-      </p:sp>
-      <p:pic>
-        <p:nvPicPr>
-          <p:cNvPr id="4" name="Picture 2" descr="https://diamondbusiness.net/wp-content/uploads/2017/04/security-new-Web-Image.jpg"/>
-          <p:cNvPicPr>
-            <a:picLocks noChangeAspect="1" noChangeArrowheads="1"/>
-          </p:cNvPicPr>
-          <p:nvPr/>
-        </p:nvPicPr>
-        <p:blipFill>
-          <a:blip r:embed="rId2" cstate="print"/>
-          <a:srcRect/>
-          <a:stretch>
-            <a:fillRect/>
-          </a:stretch>
-        </p:blipFill>
-        <p:spPr bwMode="auto">
-          <a:xfrm>
-            <a:off x="7239000" y="457200"/>
-            <a:ext cx="1241379" cy="828000"/>
-          </a:xfrm>
-          <a:prstGeom prst="rect">
-            <a:avLst/>
-          </a:prstGeom>
-          <a:noFill/>
         </p:spPr>
       </p:pic>
     </p:spTree>
@@ -9440,6 +9757,360 @@
           <a:chExt cx="0" cy="0"/>
         </a:xfrm>
       </p:grpSpPr>
+      <p:pic>
+        <p:nvPicPr>
+          <p:cNvPr id="4" name="Picture 2" descr="https://lh3.ggpht.com/1IfZLL2QDSjZ0wS7sUhaMlsAOS8BBzdR3wZ1WawgRn7KZAM8nEVZYMOUM-lqQb0ikIzp=w300"/>
+          <p:cNvPicPr>
+            <a:picLocks noChangeAspect="1" noChangeArrowheads="1"/>
+          </p:cNvPicPr>
+          <p:nvPr/>
+        </p:nvPicPr>
+        <p:blipFill>
+          <a:blip r:embed="rId2" cstate="print"/>
+          <a:srcRect/>
+          <a:stretch>
+            <a:fillRect/>
+          </a:stretch>
+        </p:blipFill>
+        <p:spPr bwMode="auto">
+          <a:xfrm>
+            <a:off x="3276600" y="1905000"/>
+            <a:ext cx="2857500" cy="2857500"/>
+          </a:xfrm>
+          <a:prstGeom prst="rect">
+            <a:avLst/>
+          </a:prstGeom>
+          <a:noFill/>
+        </p:spPr>
+      </p:pic>
+    </p:spTree>
+  </p:cSld>
+  <p:clrMapOvr>
+    <a:masterClrMapping/>
+  </p:clrMapOvr>
+</p:sld>
+</file>
+
+<file path=ppt/slides/slide41.xml><?xml version="1.0" encoding="utf-8"?>
+<p:sld xmlns:a="http://schemas.openxmlformats.org/drawingml/2006/main" xmlns:r="http://schemas.openxmlformats.org/officeDocument/2006/relationships" xmlns:p="http://schemas.openxmlformats.org/presentationml/2006/main">
+  <p:cSld>
+    <p:spTree>
+      <p:nvGrpSpPr>
+        <p:cNvPr id="1" name=""/>
+        <p:cNvGrpSpPr/>
+        <p:nvPr/>
+      </p:nvGrpSpPr>
+      <p:grpSpPr>
+        <a:xfrm>
+          <a:off x="0" y="0"/>
+          <a:ext cx="0" cy="0"/>
+          <a:chOff x="0" y="0"/>
+          <a:chExt cx="0" cy="0"/>
+        </a:xfrm>
+      </p:grpSpPr>
+      <p:sp>
+        <p:nvSpPr>
+          <p:cNvPr id="2" name="Title 1"/>
+          <p:cNvSpPr>
+            <a:spLocks noGrp="1"/>
+          </p:cNvSpPr>
+          <p:nvPr>
+            <p:ph type="title"/>
+          </p:nvPr>
+        </p:nvSpPr>
+        <p:spPr/>
+        <p:txBody>
+          <a:bodyPr/>
+          <a:lstStyle/>
+          <a:p>
+            <a:r>
+              <a:rPr lang="en-US" dirty="0" smtClean="0"/>
+              <a:t>Security Concepts (I)</a:t>
+            </a:r>
+            <a:endParaRPr lang="en-US" dirty="0"/>
+          </a:p>
+        </p:txBody>
+      </p:sp>
+      <p:sp>
+        <p:nvSpPr>
+          <p:cNvPr id="3" name="Content Placeholder 2"/>
+          <p:cNvSpPr>
+            <a:spLocks noGrp="1"/>
+          </p:cNvSpPr>
+          <p:nvPr>
+            <p:ph idx="1"/>
+          </p:nvPr>
+        </p:nvSpPr>
+        <p:spPr/>
+        <p:txBody>
+          <a:bodyPr/>
+          <a:lstStyle/>
+          <a:p>
+            <a:r>
+              <a:rPr lang="en-US" sz="2400" dirty="0" smtClean="0"/>
+              <a:t>The simplest </a:t>
+            </a:r>
+            <a:r>
+              <a:rPr lang="en-US" sz="2400" i="1" dirty="0" smtClean="0">
+                <a:solidFill>
+                  <a:srgbClr val="C00000"/>
+                </a:solidFill>
+              </a:rPr>
+              <a:t>approach to characterizing security</a:t>
+            </a:r>
+            <a:r>
+              <a:rPr lang="en-US" sz="2400" dirty="0" smtClean="0"/>
+              <a:t> has three characteristics: confidentiality, integrity, and availability (CIA):</a:t>
+            </a:r>
+          </a:p>
+          <a:p>
+            <a:pPr lvl="1"/>
+            <a:r>
+              <a:rPr lang="en-US" sz="2000" i="1" dirty="0" smtClean="0">
+                <a:solidFill>
+                  <a:srgbClr val="C00000"/>
+                </a:solidFill>
+              </a:rPr>
+              <a:t>Confidentiality</a:t>
+            </a:r>
+            <a:r>
+              <a:rPr lang="en-US" sz="2000" dirty="0" smtClean="0"/>
+              <a:t> is the property that data or services are protected from unauthorized access. For example, a hacker cannot access your income tax returns on a government computer.</a:t>
+            </a:r>
+          </a:p>
+          <a:p>
+            <a:pPr lvl="1"/>
+            <a:r>
+              <a:rPr lang="en-US" sz="2000" i="1" dirty="0" smtClean="0">
+                <a:solidFill>
+                  <a:srgbClr val="C00000"/>
+                </a:solidFill>
+              </a:rPr>
+              <a:t>Integrity</a:t>
+            </a:r>
+            <a:r>
+              <a:rPr lang="en-US" sz="2000" dirty="0" smtClean="0"/>
+              <a:t> is the property that data or services are not subject to unauthorized manipulation. For example, your grade has not been changed since your instructor assigned it.</a:t>
+            </a:r>
+          </a:p>
+          <a:p>
+            <a:pPr lvl="1"/>
+            <a:r>
+              <a:rPr lang="en-US" sz="2000" i="1" dirty="0" smtClean="0">
+                <a:solidFill>
+                  <a:srgbClr val="C00000"/>
+                </a:solidFill>
+              </a:rPr>
+              <a:t>Availability</a:t>
+            </a:r>
+            <a:r>
+              <a:rPr lang="en-US" sz="2000" dirty="0" smtClean="0"/>
+              <a:t> is the property that the system will be available for legitimate use. For example, a denial-of-service attack won't prevent you from ordering book from an online bookstore.</a:t>
+            </a:r>
+          </a:p>
+        </p:txBody>
+      </p:sp>
+      <p:pic>
+        <p:nvPicPr>
+          <p:cNvPr id="5" name="Picture 2" descr="https://diamondbusiness.net/wp-content/uploads/2017/04/security-new-Web-Image.jpg"/>
+          <p:cNvPicPr>
+            <a:picLocks noChangeAspect="1" noChangeArrowheads="1"/>
+          </p:cNvPicPr>
+          <p:nvPr/>
+        </p:nvPicPr>
+        <p:blipFill>
+          <a:blip r:embed="rId2" cstate="print"/>
+          <a:srcRect/>
+          <a:stretch>
+            <a:fillRect/>
+          </a:stretch>
+        </p:blipFill>
+        <p:spPr bwMode="auto">
+          <a:xfrm>
+            <a:off x="7239000" y="457200"/>
+            <a:ext cx="1241379" cy="828000"/>
+          </a:xfrm>
+          <a:prstGeom prst="rect">
+            <a:avLst/>
+          </a:prstGeom>
+          <a:noFill/>
+        </p:spPr>
+      </p:pic>
+    </p:spTree>
+  </p:cSld>
+  <p:clrMapOvr>
+    <a:masterClrMapping/>
+  </p:clrMapOvr>
+</p:sld>
+</file>
+
+<file path=ppt/slides/slide42.xml><?xml version="1.0" encoding="utf-8"?>
+<p:sld xmlns:a="http://schemas.openxmlformats.org/drawingml/2006/main" xmlns:r="http://schemas.openxmlformats.org/officeDocument/2006/relationships" xmlns:p="http://schemas.openxmlformats.org/presentationml/2006/main">
+  <p:cSld>
+    <p:spTree>
+      <p:nvGrpSpPr>
+        <p:cNvPr id="1" name=""/>
+        <p:cNvGrpSpPr/>
+        <p:nvPr/>
+      </p:nvGrpSpPr>
+      <p:grpSpPr>
+        <a:xfrm>
+          <a:off x="0" y="0"/>
+          <a:ext cx="0" cy="0"/>
+          <a:chOff x="0" y="0"/>
+          <a:chExt cx="0" cy="0"/>
+        </a:xfrm>
+      </p:grpSpPr>
+      <p:sp>
+        <p:nvSpPr>
+          <p:cNvPr id="2" name="Title 1"/>
+          <p:cNvSpPr>
+            <a:spLocks noGrp="1"/>
+          </p:cNvSpPr>
+          <p:nvPr>
+            <p:ph type="title"/>
+          </p:nvPr>
+        </p:nvSpPr>
+        <p:spPr/>
+        <p:txBody>
+          <a:bodyPr/>
+          <a:lstStyle/>
+          <a:p>
+            <a:r>
+              <a:rPr lang="en-US" dirty="0" smtClean="0"/>
+              <a:t>Security Concepts (II)</a:t>
+            </a:r>
+            <a:endParaRPr lang="en-US" dirty="0"/>
+          </a:p>
+        </p:txBody>
+      </p:sp>
+      <p:sp>
+        <p:nvSpPr>
+          <p:cNvPr id="3" name="Content Placeholder 2"/>
+          <p:cNvSpPr>
+            <a:spLocks noGrp="1"/>
+          </p:cNvSpPr>
+          <p:nvPr>
+            <p:ph idx="1"/>
+          </p:nvPr>
+        </p:nvSpPr>
+        <p:spPr/>
+        <p:txBody>
+          <a:bodyPr/>
+          <a:lstStyle/>
+          <a:p>
+            <a:r>
+              <a:rPr lang="en-US" sz="2400" i="1" dirty="0" smtClean="0">
+                <a:solidFill>
+                  <a:srgbClr val="C00000"/>
+                </a:solidFill>
+              </a:rPr>
+              <a:t>Other characteristics</a:t>
+            </a:r>
+            <a:r>
+              <a:rPr lang="en-US" sz="2400" dirty="0" smtClean="0"/>
+              <a:t> that are used to support CIA are these:</a:t>
+            </a:r>
+          </a:p>
+          <a:p>
+            <a:pPr lvl="1"/>
+            <a:r>
+              <a:rPr lang="en-US" sz="2000" i="1" dirty="0" smtClean="0">
+                <a:solidFill>
+                  <a:srgbClr val="C00000"/>
+                </a:solidFill>
+              </a:rPr>
+              <a:t>Authentication</a:t>
+            </a:r>
+            <a:r>
+              <a:rPr lang="en-US" sz="2000" dirty="0" smtClean="0"/>
+              <a:t> verifies the identities of the parties to a transaction and checks if they are truly who they claim to be. For example, when you get an email purporting to come from a bank, authentication guarantees that it actually comes from the bank.</a:t>
+            </a:r>
+          </a:p>
+          <a:p>
+            <a:pPr lvl="1"/>
+            <a:r>
+              <a:rPr lang="en-US" sz="2000" i="1" dirty="0" err="1" smtClean="0">
+                <a:solidFill>
+                  <a:srgbClr val="C00000"/>
+                </a:solidFill>
+              </a:rPr>
+              <a:t>Nonrepudiation</a:t>
+            </a:r>
+            <a:r>
+              <a:rPr lang="en-US" sz="2000" dirty="0" smtClean="0"/>
+              <a:t> guarantees that the sender of a message cannot later deny having sent the message, and that the recipient cannot deny having received the message. For example, you cannot deny ordering something from the Internet, or the merchant cannot disclaim getting your order.</a:t>
+            </a:r>
+          </a:p>
+          <a:p>
+            <a:pPr lvl="1"/>
+            <a:r>
+              <a:rPr lang="en-US" sz="2000" i="1" dirty="0" smtClean="0">
+                <a:solidFill>
+                  <a:srgbClr val="C00000"/>
+                </a:solidFill>
+              </a:rPr>
+              <a:t>Authorization</a:t>
+            </a:r>
+            <a:r>
+              <a:rPr lang="en-US" sz="2000" dirty="0" smtClean="0"/>
+              <a:t> grants a user the privileges to perform a task. For example, an online banking system authorizes a legitimate user to access his account.</a:t>
+            </a:r>
+            <a:endParaRPr lang="en-US" sz="2000" dirty="0"/>
+          </a:p>
+        </p:txBody>
+      </p:sp>
+      <p:pic>
+        <p:nvPicPr>
+          <p:cNvPr id="4" name="Picture 2" descr="https://diamondbusiness.net/wp-content/uploads/2017/04/security-new-Web-Image.jpg"/>
+          <p:cNvPicPr>
+            <a:picLocks noChangeAspect="1" noChangeArrowheads="1"/>
+          </p:cNvPicPr>
+          <p:nvPr/>
+        </p:nvPicPr>
+        <p:blipFill>
+          <a:blip r:embed="rId2" cstate="print"/>
+          <a:srcRect/>
+          <a:stretch>
+            <a:fillRect/>
+          </a:stretch>
+        </p:blipFill>
+        <p:spPr bwMode="auto">
+          <a:xfrm>
+            <a:off x="7239000" y="457200"/>
+            <a:ext cx="1241379" cy="828000"/>
+          </a:xfrm>
+          <a:prstGeom prst="rect">
+            <a:avLst/>
+          </a:prstGeom>
+          <a:noFill/>
+        </p:spPr>
+      </p:pic>
+    </p:spTree>
+  </p:cSld>
+  <p:clrMapOvr>
+    <a:masterClrMapping/>
+  </p:clrMapOvr>
+</p:sld>
+</file>
+
+<file path=ppt/slides/slide43.xml><?xml version="1.0" encoding="utf-8"?>
+<p:sld xmlns:a="http://schemas.openxmlformats.org/drawingml/2006/main" xmlns:r="http://schemas.openxmlformats.org/officeDocument/2006/relationships" xmlns:p="http://schemas.openxmlformats.org/presentationml/2006/main">
+  <p:cSld>
+    <p:spTree>
+      <p:nvGrpSpPr>
+        <p:cNvPr id="1" name=""/>
+        <p:cNvGrpSpPr/>
+        <p:nvPr/>
+      </p:nvGrpSpPr>
+      <p:grpSpPr>
+        <a:xfrm>
+          <a:off x="0" y="0"/>
+          <a:ext cx="0" cy="0"/>
+          <a:chOff x="0" y="0"/>
+          <a:chExt cx="0" cy="0"/>
+        </a:xfrm>
+      </p:grpSpPr>
       <p:sp>
         <p:nvSpPr>
           <p:cNvPr id="2" name="Title 1"/>
@@ -9549,7 +10220,7 @@
 </p:sld>
 </file>
 
-<file path=ppt/slides/slide41.xml><?xml version="1.0" encoding="utf-8"?>
+<file path=ppt/slides/slide44.xml><?xml version="1.0" encoding="utf-8"?>
 <p:sld xmlns:a="http://schemas.openxmlformats.org/drawingml/2006/main" xmlns:r="http://schemas.openxmlformats.org/officeDocument/2006/relationships" xmlns:p="http://schemas.openxmlformats.org/presentationml/2006/main">
   <p:cSld>
     <p:spTree>
@@ -9776,7 +10447,7 @@
 </p:sld>
 </file>
 
-<file path=ppt/slides/slide42.xml><?xml version="1.0" encoding="utf-8"?>
+<file path=ppt/slides/slide45.xml><?xml version="1.0" encoding="utf-8"?>
 <p:sld xmlns:a="http://schemas.openxmlformats.org/drawingml/2006/main" xmlns:r="http://schemas.openxmlformats.org/officeDocument/2006/relationships" xmlns:p="http://schemas.openxmlformats.org/presentationml/2006/main">
   <p:cSld>
     <p:spTree>
@@ -9951,325 +10622,6 @@
             <a:headEnd/>
             <a:tailEnd/>
           </a:ln>
-        </p:spPr>
-      </p:pic>
-    </p:spTree>
-  </p:cSld>
-  <p:clrMapOvr>
-    <a:masterClrMapping/>
-  </p:clrMapOvr>
-</p:sld>
-</file>
-
-<file path=ppt/slides/slide43.xml><?xml version="1.0" encoding="utf-8"?>
-<p:sld xmlns:a="http://schemas.openxmlformats.org/drawingml/2006/main" xmlns:r="http://schemas.openxmlformats.org/officeDocument/2006/relationships" xmlns:p="http://schemas.openxmlformats.org/presentationml/2006/main">
-  <p:cSld>
-    <p:spTree>
-      <p:nvGrpSpPr>
-        <p:cNvPr id="1" name=""/>
-        <p:cNvGrpSpPr/>
-        <p:nvPr/>
-      </p:nvGrpSpPr>
-      <p:grpSpPr>
-        <a:xfrm>
-          <a:off x="0" y="0"/>
-          <a:ext cx="0" cy="0"/>
-          <a:chOff x="0" y="0"/>
-          <a:chExt cx="0" cy="0"/>
-        </a:xfrm>
-      </p:grpSpPr>
-      <p:pic>
-        <p:nvPicPr>
-          <p:cNvPr id="4" name="Picture 2" descr="https://lh3.ggpht.com/1IfZLL2QDSjZ0wS7sUhaMlsAOS8BBzdR3wZ1WawgRn7KZAM8nEVZYMOUM-lqQb0ikIzp=w300"/>
-          <p:cNvPicPr>
-            <a:picLocks noChangeAspect="1" noChangeArrowheads="1"/>
-          </p:cNvPicPr>
-          <p:nvPr/>
-        </p:nvPicPr>
-        <p:blipFill>
-          <a:blip r:embed="rId2" cstate="print"/>
-          <a:srcRect/>
-          <a:stretch>
-            <a:fillRect/>
-          </a:stretch>
-        </p:blipFill>
-        <p:spPr bwMode="auto">
-          <a:xfrm>
-            <a:off x="3276600" y="1905000"/>
-            <a:ext cx="2857500" cy="2857500"/>
-          </a:xfrm>
-          <a:prstGeom prst="rect">
-            <a:avLst/>
-          </a:prstGeom>
-          <a:noFill/>
-        </p:spPr>
-      </p:pic>
-    </p:spTree>
-  </p:cSld>
-  <p:clrMapOvr>
-    <a:masterClrMapping/>
-  </p:clrMapOvr>
-</p:sld>
-</file>
-
-<file path=ppt/slides/slide44.xml><?xml version="1.0" encoding="utf-8"?>
-<p:sld xmlns:a="http://schemas.openxmlformats.org/drawingml/2006/main" xmlns:r="http://schemas.openxmlformats.org/officeDocument/2006/relationships" xmlns:p="http://schemas.openxmlformats.org/presentationml/2006/main">
-  <p:cSld>
-    <p:spTree>
-      <p:nvGrpSpPr>
-        <p:cNvPr id="1" name=""/>
-        <p:cNvGrpSpPr/>
-        <p:nvPr/>
-      </p:nvGrpSpPr>
-      <p:grpSpPr>
-        <a:xfrm>
-          <a:off x="0" y="0"/>
-          <a:ext cx="0" cy="0"/>
-          <a:chOff x="0" y="0"/>
-          <a:chExt cx="0" cy="0"/>
-        </a:xfrm>
-      </p:grpSpPr>
-      <p:sp>
-        <p:nvSpPr>
-          <p:cNvPr id="2" name="Title 1"/>
-          <p:cNvSpPr>
-            <a:spLocks noGrp="1"/>
-          </p:cNvSpPr>
-          <p:nvPr>
-            <p:ph type="title"/>
-          </p:nvPr>
-        </p:nvSpPr>
-        <p:spPr/>
-        <p:txBody>
-          <a:bodyPr/>
-          <a:lstStyle/>
-          <a:p>
-            <a:r>
-              <a:rPr lang="en-US" dirty="0" smtClean="0"/>
-              <a:t>Modifiability Scenario</a:t>
-            </a:r>
-            <a:endParaRPr lang="en-US" dirty="0"/>
-          </a:p>
-        </p:txBody>
-      </p:sp>
-      <p:sp>
-        <p:nvSpPr>
-          <p:cNvPr id="3" name="Content Placeholder 2"/>
-          <p:cNvSpPr>
-            <a:spLocks noGrp="1"/>
-          </p:cNvSpPr>
-          <p:nvPr>
-            <p:ph idx="1"/>
-          </p:nvPr>
-        </p:nvSpPr>
-        <p:spPr/>
-        <p:txBody>
-          <a:bodyPr/>
-          <a:lstStyle/>
-          <a:p>
-            <a:r>
-              <a:rPr lang="en-US" sz="2400" i="1" dirty="0" smtClean="0">
-                <a:solidFill>
-                  <a:srgbClr val="C00000"/>
-                </a:solidFill>
-              </a:rPr>
-              <a:t>Modifiability</a:t>
-            </a:r>
-            <a:r>
-              <a:rPr lang="en-US" sz="2400" dirty="0" smtClean="0"/>
-              <a:t> is about change, and our interest in it centers on the cost and risk of making changes.</a:t>
-            </a:r>
-            <a:endParaRPr lang="en-US" sz="2400" dirty="0"/>
-          </a:p>
-        </p:txBody>
-      </p:sp>
-      <p:pic>
-        <p:nvPicPr>
-          <p:cNvPr id="33795" name="Picture 3"/>
-          <p:cNvPicPr>
-            <a:picLocks noChangeAspect="1" noChangeArrowheads="1"/>
-          </p:cNvPicPr>
-          <p:nvPr/>
-        </p:nvPicPr>
-        <p:blipFill>
-          <a:blip r:embed="rId2" cstate="print"/>
-          <a:srcRect/>
-          <a:stretch>
-            <a:fillRect/>
-          </a:stretch>
-        </p:blipFill>
-        <p:spPr bwMode="auto">
-          <a:xfrm>
-            <a:off x="1184275" y="2733675"/>
-            <a:ext cx="6775450" cy="3209925"/>
-          </a:xfrm>
-          <a:prstGeom prst="rect">
-            <a:avLst/>
-          </a:prstGeom>
-          <a:noFill/>
-          <a:ln w="9525">
-            <a:noFill/>
-            <a:miter lim="800000"/>
-            <a:headEnd/>
-            <a:tailEnd/>
-          </a:ln>
-        </p:spPr>
-      </p:pic>
-    </p:spTree>
-  </p:cSld>
-  <p:clrMapOvr>
-    <a:masterClrMapping/>
-  </p:clrMapOvr>
-</p:sld>
-</file>
-
-<file path=ppt/slides/slide45.xml><?xml version="1.0" encoding="utf-8"?>
-<p:sld xmlns:a="http://schemas.openxmlformats.org/drawingml/2006/main" xmlns:r="http://schemas.openxmlformats.org/officeDocument/2006/relationships" xmlns:p="http://schemas.openxmlformats.org/presentationml/2006/main">
-  <p:cSld>
-    <p:spTree>
-      <p:nvGrpSpPr>
-        <p:cNvPr id="1" name=""/>
-        <p:cNvGrpSpPr/>
-        <p:nvPr/>
-      </p:nvGrpSpPr>
-      <p:grpSpPr>
-        <a:xfrm>
-          <a:off x="0" y="0"/>
-          <a:ext cx="0" cy="0"/>
-          <a:chOff x="0" y="0"/>
-          <a:chExt cx="0" cy="0"/>
-        </a:xfrm>
-      </p:grpSpPr>
-      <p:sp>
-        <p:nvSpPr>
-          <p:cNvPr id="2" name="Title 1"/>
-          <p:cNvSpPr>
-            <a:spLocks noGrp="1"/>
-          </p:cNvSpPr>
-          <p:nvPr>
-            <p:ph type="title"/>
-          </p:nvPr>
-        </p:nvSpPr>
-        <p:spPr/>
-        <p:txBody>
-          <a:bodyPr/>
-          <a:lstStyle/>
-          <a:p>
-            <a:r>
-              <a:rPr lang="en-US" dirty="0" smtClean="0"/>
-              <a:t>Tactics for Modifiability</a:t>
-            </a:r>
-            <a:endParaRPr lang="en-US" dirty="0"/>
-          </a:p>
-        </p:txBody>
-      </p:sp>
-      <p:sp>
-        <p:nvSpPr>
-          <p:cNvPr id="3" name="Content Placeholder 2"/>
-          <p:cNvSpPr>
-            <a:spLocks noGrp="1"/>
-          </p:cNvSpPr>
-          <p:nvPr>
-            <p:ph idx="1"/>
-          </p:nvPr>
-        </p:nvSpPr>
-        <p:spPr/>
-        <p:txBody>
-          <a:bodyPr/>
-          <a:lstStyle/>
-          <a:p>
-            <a:r>
-              <a:rPr lang="en-US" sz="2400" dirty="0" smtClean="0"/>
-              <a:t>How to design an architecture for modifiability?</a:t>
-            </a:r>
-          </a:p>
-          <a:p>
-            <a:pPr lvl="1"/>
-            <a:r>
-              <a:rPr lang="en-US" sz="2000" dirty="0" smtClean="0"/>
-              <a:t>Reduce Size of a Module.</a:t>
-            </a:r>
-          </a:p>
-          <a:p>
-            <a:pPr lvl="1"/>
-            <a:r>
-              <a:rPr lang="en-US" sz="2000" dirty="0" smtClean="0"/>
-              <a:t>Increase Cohesion.</a:t>
-            </a:r>
-          </a:p>
-          <a:p>
-            <a:pPr lvl="1"/>
-            <a:r>
-              <a:rPr lang="en-US" sz="2000" dirty="0" smtClean="0"/>
-              <a:t>Reduce Coupling.</a:t>
-            </a:r>
-          </a:p>
-          <a:p>
-            <a:pPr lvl="1"/>
-            <a:r>
-              <a:rPr lang="en-US" sz="2000" dirty="0" smtClean="0"/>
-              <a:t>Defer Binding.</a:t>
-            </a:r>
-          </a:p>
-        </p:txBody>
-      </p:sp>
-      <p:pic>
-        <p:nvPicPr>
-          <p:cNvPr id="5" name="Picture 4"/>
-          <p:cNvPicPr>
-            <a:picLocks noChangeAspect="1" noChangeArrowheads="1"/>
-          </p:cNvPicPr>
-          <p:nvPr/>
-        </p:nvPicPr>
-        <p:blipFill>
-          <a:blip r:embed="rId2" cstate="print"/>
-          <a:srcRect/>
-          <a:stretch>
-            <a:fillRect/>
-          </a:stretch>
-        </p:blipFill>
-        <p:spPr bwMode="auto">
-          <a:xfrm>
-            <a:off x="6248400" y="2286000"/>
-            <a:ext cx="2314575" cy="1981200"/>
-          </a:xfrm>
-          <a:prstGeom prst="rect">
-            <a:avLst/>
-          </a:prstGeom>
-          <a:noFill/>
-          <a:ln w="9525">
-            <a:noFill/>
-            <a:miter lim="800000"/>
-            <a:headEnd/>
-            <a:tailEnd/>
-          </a:ln>
-          <a:effectLst/>
-        </p:spPr>
-      </p:pic>
-      <p:pic>
-        <p:nvPicPr>
-          <p:cNvPr id="6" name="Picture 4" descr="https://www.schranner.com/images/default-source/insights-blog/title-images/tactics7642960fcbe368bdbc66ff000097e6db.png?sfvrsn=51a1fe69_4"/>
-          <p:cNvPicPr>
-            <a:picLocks noChangeAspect="1" noChangeArrowheads="1"/>
-          </p:cNvPicPr>
-          <p:nvPr/>
-        </p:nvPicPr>
-        <p:blipFill>
-          <a:blip r:embed="rId3" cstate="print"/>
-          <a:srcRect/>
-          <a:stretch>
-            <a:fillRect/>
-          </a:stretch>
-        </p:blipFill>
-        <p:spPr bwMode="auto">
-          <a:xfrm>
-            <a:off x="2590800" y="4038866"/>
-            <a:ext cx="2844445" cy="2133334"/>
-          </a:xfrm>
-          <a:prstGeom prst="rect">
-            <a:avLst/>
-          </a:prstGeom>
-          <a:noFill/>
         </p:spPr>
       </p:pic>
     </p:spTree>
@@ -10365,7 +10717,7 @@
           <a:p>
             <a:r>
               <a:rPr lang="en-US" dirty="0" smtClean="0"/>
-              <a:t>Testability Scenario</a:t>
+              <a:t>Modifiability Scenario</a:t>
             </a:r>
             <a:endParaRPr lang="en-US" dirty="0"/>
           </a:p>
@@ -10386,39 +10738,17 @@
           <a:bodyPr/>
           <a:lstStyle/>
           <a:p>
-            <a:r>
-              <a:rPr lang="en-US" sz="2400" dirty="0" smtClean="0"/>
-              <a:t>Software </a:t>
-            </a:r>
             <a:r>
               <a:rPr lang="en-US" sz="2400" i="1" dirty="0" smtClean="0">
                 <a:solidFill>
                   <a:srgbClr val="C00000"/>
                 </a:solidFill>
               </a:rPr>
-              <a:t>testability</a:t>
+              <a:t>Modifiability</a:t>
             </a:r>
             <a:r>
               <a:rPr lang="en-US" sz="2400" dirty="0" smtClean="0"/>
-              <a:t> refers to the ease with which software can be made to demonstrate its faults through (typically execution-based) testing.</a:t>
-            </a:r>
-          </a:p>
-          <a:p>
-            <a:r>
-              <a:rPr lang="en-US" sz="2400" dirty="0" smtClean="0"/>
-              <a:t>Intuitively, a system is testable if it “gives up” its faults easily. If a fault is present in a system, then we want it to </a:t>
-            </a:r>
-            <a:r>
-              <a:rPr lang="en-US" sz="2400" i="1" dirty="0" smtClean="0">
-                <a:solidFill>
-                  <a:srgbClr val="C00000"/>
-                </a:solidFill>
-              </a:rPr>
-              <a:t>fail during testing as quickly as possible</a:t>
-            </a:r>
-            <a:r>
-              <a:rPr lang="en-US" sz="2400" dirty="0" smtClean="0"/>
-              <a:t>.</a:t>
+              <a:t> is about change, and our interest in it centers on the cost and risk of making changes.</a:t>
             </a:r>
             <a:endParaRPr lang="en-US" sz="2400" dirty="0"/>
           </a:p>
@@ -10426,7 +10756,7 @@
       </p:sp>
       <p:pic>
         <p:nvPicPr>
-          <p:cNvPr id="43013" name="Picture 5"/>
+          <p:cNvPr id="33795" name="Picture 3"/>
           <p:cNvPicPr>
             <a:picLocks noChangeAspect="1" noChangeArrowheads="1"/>
           </p:cNvPicPr>
@@ -10441,8 +10771,8 @@
         </p:blipFill>
         <p:spPr bwMode="auto">
           <a:xfrm>
-            <a:off x="1652588" y="4073525"/>
-            <a:ext cx="5838825" cy="2555875"/>
+            <a:off x="1184275" y="2733675"/>
+            <a:ext cx="6775450" cy="3209925"/>
           </a:xfrm>
           <a:prstGeom prst="rect">
             <a:avLst/>
@@ -10498,7 +10828,7 @@
           <a:p>
             <a:r>
               <a:rPr lang="en-US" dirty="0" smtClean="0"/>
-              <a:t>Tactics for Testability</a:t>
+              <a:t>Tactics for Modifiability</a:t>
             </a:r>
             <a:endParaRPr lang="en-US" dirty="0"/>
           </a:p>
@@ -10521,55 +10851,36 @@
           <a:p>
             <a:r>
               <a:rPr lang="en-US" sz="2400" dirty="0" smtClean="0"/>
-              <a:t>How to design an architecture for testability?</a:t>
+              <a:t>How to design an architecture for modifiability?</a:t>
             </a:r>
           </a:p>
           <a:p>
             <a:pPr lvl="1"/>
             <a:r>
               <a:rPr lang="en-US" sz="2000" dirty="0" smtClean="0"/>
-              <a:t>Control and Observe System State</a:t>
-            </a:r>
-          </a:p>
-          <a:p>
-            <a:pPr lvl="2"/>
-            <a:r>
-              <a:rPr lang="en-US" sz="1600" dirty="0" smtClean="0"/>
-              <a:t>Specialized interfaces</a:t>
-            </a:r>
-          </a:p>
-          <a:p>
-            <a:pPr lvl="2"/>
-            <a:r>
-              <a:rPr lang="en-US" sz="1600" dirty="0" smtClean="0"/>
-              <a:t>Abstract data sources</a:t>
+              <a:t>Reduce Size of a Module.</a:t>
             </a:r>
           </a:p>
           <a:p>
             <a:pPr lvl="1"/>
             <a:r>
               <a:rPr lang="en-US" sz="2000" dirty="0" smtClean="0"/>
-              <a:t>Limit Complexity</a:t>
-            </a:r>
-          </a:p>
-          <a:p>
-            <a:pPr lvl="2"/>
-            <a:r>
-              <a:rPr lang="en-US" sz="1600" dirty="0" smtClean="0"/>
-              <a:t>Limit structural complexity</a:t>
-            </a:r>
-          </a:p>
-          <a:p>
-            <a:pPr lvl="2"/>
-            <a:r>
-              <a:rPr lang="en-US" sz="1600" dirty="0" smtClean="0"/>
-              <a:t>Limit </a:t>
-            </a:r>
-            <a:r>
-              <a:rPr lang="en-US" sz="1600" dirty="0" err="1" smtClean="0"/>
-              <a:t>nondeterminism</a:t>
-            </a:r>
-            <a:endParaRPr lang="en-US" sz="1600" dirty="0" smtClean="0"/>
+              <a:t>Increase Cohesion.</a:t>
+            </a:r>
+          </a:p>
+          <a:p>
+            <a:pPr lvl="1"/>
+            <a:r>
+              <a:rPr lang="en-US" sz="2000" dirty="0" smtClean="0"/>
+              <a:t>Reduce Coupling.</a:t>
+            </a:r>
+          </a:p>
+          <a:p>
+            <a:pPr lvl="1"/>
+            <a:r>
+              <a:rPr lang="en-US" sz="2000" dirty="0" smtClean="0"/>
+              <a:t>Defer Binding.</a:t>
+            </a:r>
           </a:p>
         </p:txBody>
       </p:sp>
@@ -10590,7 +10901,7 @@
         </p:blipFill>
         <p:spPr bwMode="auto">
           <a:xfrm>
-            <a:off x="6248400" y="2133600"/>
+            <a:off x="6248400" y="2286000"/>
             <a:ext cx="2314575" cy="1981200"/>
           </a:xfrm>
           <a:prstGeom prst="rect">
@@ -10623,7 +10934,7 @@
         </p:blipFill>
         <p:spPr bwMode="auto">
           <a:xfrm>
-            <a:off x="2794355" y="4267200"/>
+            <a:off x="2590800" y="4038866"/>
             <a:ext cx="2844445" cy="2133334"/>
           </a:xfrm>
           <a:prstGeom prst="rect">
@@ -10901,12 +11212,8 @@
           <a:lstStyle/>
           <a:p>
             <a:r>
-              <a:rPr lang="en-US" dirty="0" err="1" smtClean="0"/>
-              <a:t>Deployability</a:t>
-            </a:r>
-            <a:r>
               <a:rPr lang="en-US" dirty="0" smtClean="0"/>
-              <a:t> Scenario</a:t>
+              <a:t>Testability Scenario</a:t>
             </a:r>
             <a:endParaRPr lang="en-US" dirty="0"/>
           </a:p>
@@ -10928,12 +11235,38 @@
           <a:lstStyle/>
           <a:p>
             <a:r>
-              <a:rPr lang="en-US" sz="2400" dirty="0" err="1" smtClean="0"/>
-              <a:t>Deployability</a:t>
-            </a:r>
-            <a:r>
               <a:rPr lang="en-US" sz="2400" dirty="0" smtClean="0"/>
-              <a:t> refers to a property of software indicating that it may be deployed—that is, allocated to an environment for execution—within a predictable and acceptable amount of time and effort.</a:t>
+              <a:t>Software </a:t>
+            </a:r>
+            <a:r>
+              <a:rPr lang="en-US" sz="2400" i="1" dirty="0" smtClean="0">
+                <a:solidFill>
+                  <a:srgbClr val="C00000"/>
+                </a:solidFill>
+              </a:rPr>
+              <a:t>testability</a:t>
+            </a:r>
+            <a:r>
+              <a:rPr lang="en-US" sz="2400" dirty="0" smtClean="0"/>
+              <a:t> refers to the ease with which software can be made to demonstrate its faults through (typically execution-based) testing.</a:t>
+            </a:r>
+          </a:p>
+          <a:p>
+            <a:r>
+              <a:rPr lang="en-US" sz="2400" dirty="0" smtClean="0"/>
+              <a:t>Intuitively, a system is testable if it “gives up” its faults easily. If a fault is present in a system, then we want it to </a:t>
+            </a:r>
+            <a:r>
+              <a:rPr lang="en-US" sz="2400" i="1" dirty="0" smtClean="0">
+                <a:solidFill>
+                  <a:srgbClr val="C00000"/>
+                </a:solidFill>
+              </a:rPr>
+              <a:t>fail during testing as quickly as possible</a:t>
+            </a:r>
+            <a:r>
+              <a:rPr lang="en-US" sz="2400" dirty="0" smtClean="0"/>
+              <a:t>.</a:t>
             </a:r>
             <a:endParaRPr lang="en-US" sz="2400" dirty="0"/>
           </a:p>
@@ -10941,7 +11274,7 @@
       </p:sp>
       <p:pic>
         <p:nvPicPr>
-          <p:cNvPr id="1026" name="Picture 2"/>
+          <p:cNvPr id="43013" name="Picture 5"/>
           <p:cNvPicPr>
             <a:picLocks noChangeAspect="1" noChangeArrowheads="1"/>
           </p:cNvPicPr>
@@ -10956,8 +11289,8 @@
         </p:blipFill>
         <p:spPr bwMode="auto">
           <a:xfrm>
-            <a:off x="1211263" y="3470275"/>
-            <a:ext cx="6721475" cy="2397125"/>
+            <a:off x="1652588" y="4073525"/>
+            <a:ext cx="5838825" cy="2555875"/>
           </a:xfrm>
           <a:prstGeom prst="rect">
             <a:avLst/>
@@ -11013,19 +11346,84 @@
           <a:p>
             <a:r>
               <a:rPr lang="en-US" dirty="0" smtClean="0"/>
-              <a:t>Tactics for </a:t>
-            </a:r>
-            <a:r>
-              <a:rPr lang="en-US" dirty="0" err="1" smtClean="0"/>
-              <a:t>Deployability</a:t>
+              <a:t>Tactics for Testability</a:t>
             </a:r>
             <a:endParaRPr lang="en-US" dirty="0"/>
+          </a:p>
+        </p:txBody>
+      </p:sp>
+      <p:sp>
+        <p:nvSpPr>
+          <p:cNvPr id="3" name="Content Placeholder 2"/>
+          <p:cNvSpPr>
+            <a:spLocks noGrp="1"/>
+          </p:cNvSpPr>
+          <p:nvPr>
+            <p:ph idx="1"/>
+          </p:nvPr>
+        </p:nvSpPr>
+        <p:spPr/>
+        <p:txBody>
+          <a:bodyPr/>
+          <a:lstStyle/>
+          <a:p>
+            <a:r>
+              <a:rPr lang="en-US" sz="2400" dirty="0" smtClean="0"/>
+              <a:t>How to design an architecture for testability?</a:t>
+            </a:r>
+          </a:p>
+          <a:p>
+            <a:pPr lvl="1"/>
+            <a:r>
+              <a:rPr lang="en-US" sz="2000" dirty="0" smtClean="0"/>
+              <a:t>Control and Observe System State</a:t>
+            </a:r>
+          </a:p>
+          <a:p>
+            <a:pPr lvl="2"/>
+            <a:r>
+              <a:rPr lang="en-US" sz="1600" dirty="0" smtClean="0"/>
+              <a:t>Specialized interfaces</a:t>
+            </a:r>
+          </a:p>
+          <a:p>
+            <a:pPr lvl="2"/>
+            <a:r>
+              <a:rPr lang="en-US" sz="1600" dirty="0" smtClean="0"/>
+              <a:t>Abstract data sources</a:t>
+            </a:r>
+          </a:p>
+          <a:p>
+            <a:pPr lvl="1"/>
+            <a:r>
+              <a:rPr lang="en-US" sz="2000" dirty="0" smtClean="0"/>
+              <a:t>Limit Complexity</a:t>
+            </a:r>
+          </a:p>
+          <a:p>
+            <a:pPr lvl="2"/>
+            <a:r>
+              <a:rPr lang="en-US" sz="1600" dirty="0" smtClean="0"/>
+              <a:t>Limit structural complexity</a:t>
+            </a:r>
+          </a:p>
+          <a:p>
+            <a:pPr lvl="2"/>
+            <a:r>
+              <a:rPr lang="en-US" sz="1600" dirty="0" smtClean="0"/>
+              <a:t>Limit </a:t>
+            </a:r>
+            <a:r>
+              <a:rPr lang="en-US" sz="1600" dirty="0" err="1" smtClean="0"/>
+              <a:t>nondeterminism</a:t>
+            </a:r>
+            <a:endParaRPr lang="en-US" sz="1600" dirty="0" smtClean="0"/>
           </a:p>
         </p:txBody>
       </p:sp>
       <p:pic>
         <p:nvPicPr>
-          <p:cNvPr id="2054" name="Picture 6"/>
+          <p:cNvPr id="5" name="Picture 4"/>
           <p:cNvPicPr>
             <a:picLocks noChangeAspect="1" noChangeArrowheads="1"/>
           </p:cNvPicPr>
@@ -11040,8 +11438,8 @@
         </p:blipFill>
         <p:spPr bwMode="auto">
           <a:xfrm>
-            <a:off x="679450" y="2057400"/>
-            <a:ext cx="7785100" cy="3505200"/>
+            <a:off x="6248400" y="2133600"/>
+            <a:ext cx="2314575" cy="1981200"/>
           </a:xfrm>
           <a:prstGeom prst="rect">
             <a:avLst/>
@@ -11053,6 +11451,33 @@
             <a:headEnd/>
             <a:tailEnd/>
           </a:ln>
+          <a:effectLst/>
+        </p:spPr>
+      </p:pic>
+      <p:pic>
+        <p:nvPicPr>
+          <p:cNvPr id="6" name="Picture 4" descr="https://www.schranner.com/images/default-source/insights-blog/title-images/tactics7642960fcbe368bdbc66ff000097e6db.png?sfvrsn=51a1fe69_4"/>
+          <p:cNvPicPr>
+            <a:picLocks noChangeAspect="1" noChangeArrowheads="1"/>
+          </p:cNvPicPr>
+          <p:nvPr/>
+        </p:nvPicPr>
+        <p:blipFill>
+          <a:blip r:embed="rId3" cstate="print"/>
+          <a:srcRect/>
+          <a:stretch>
+            <a:fillRect/>
+          </a:stretch>
+        </p:blipFill>
+        <p:spPr bwMode="auto">
+          <a:xfrm>
+            <a:off x="2794355" y="4267200"/>
+            <a:ext cx="2844445" cy="2133334"/>
+          </a:xfrm>
+          <a:prstGeom prst="rect">
+            <a:avLst/>
+          </a:prstGeom>
+          <a:noFill/>
         </p:spPr>
       </p:pic>
     </p:spTree>
@@ -11147,8 +11572,12 @@
           <a:lstStyle/>
           <a:p>
             <a:r>
+              <a:rPr lang="en-US" dirty="0" err="1" smtClean="0"/>
+              <a:t>Deployability</a:t>
+            </a:r>
+            <a:r>
               <a:rPr lang="en-US" dirty="0" smtClean="0"/>
-              <a:t>Usability</a:t>
+              <a:t> Scenario</a:t>
             </a:r>
             <a:endParaRPr lang="en-US" dirty="0"/>
           </a:p>
@@ -11170,32 +11599,12 @@
           <a:lstStyle/>
           <a:p>
             <a:r>
-              <a:rPr lang="en-US" sz="2400" i="1" dirty="0" smtClean="0">
-                <a:solidFill>
-                  <a:srgbClr val="C00000"/>
-                </a:solidFill>
-              </a:rPr>
-              <a:t>Usability</a:t>
+              <a:rPr lang="en-US" sz="2400" dirty="0" err="1" smtClean="0"/>
+              <a:t>Deployability</a:t>
             </a:r>
             <a:r>
               <a:rPr lang="en-US" sz="2400" dirty="0" smtClean="0"/>
-              <a:t> is concerned with </a:t>
-            </a:r>
-            <a:r>
-              <a:rPr lang="en-US" sz="2400" u="sng" dirty="0" smtClean="0"/>
-              <a:t>how easy</a:t>
-            </a:r>
-            <a:r>
-              <a:rPr lang="en-US" sz="2400" dirty="0" smtClean="0"/>
-              <a:t> it is for the user to </a:t>
-            </a:r>
-            <a:r>
-              <a:rPr lang="en-US" sz="2400" u="sng" dirty="0" smtClean="0"/>
-              <a:t>accomplish a desired task</a:t>
-            </a:r>
-            <a:r>
-              <a:rPr lang="en-US" sz="2400" dirty="0" smtClean="0"/>
-              <a:t> and the kind of user support that the system provides.</a:t>
+              <a:t> refers to a property of software indicating that it may be deployed—that is, allocated to an environment for execution—within a predictable and acceptable amount of time and effort.</a:t>
             </a:r>
             <a:endParaRPr lang="en-US" sz="2400" dirty="0"/>
           </a:p>
@@ -11203,7 +11612,7 @@
       </p:sp>
       <p:pic>
         <p:nvPicPr>
-          <p:cNvPr id="62467" name="Picture 3"/>
+          <p:cNvPr id="1026" name="Picture 2"/>
           <p:cNvPicPr>
             <a:picLocks noChangeAspect="1" noChangeArrowheads="1"/>
           </p:cNvPicPr>
@@ -11218,8 +11627,8 @@
         </p:blipFill>
         <p:spPr bwMode="auto">
           <a:xfrm>
-            <a:off x="730250" y="3419475"/>
-            <a:ext cx="7683500" cy="2066925"/>
+            <a:off x="1211263" y="3470275"/>
+            <a:ext cx="6721475" cy="2397125"/>
           </a:xfrm>
           <a:prstGeom prst="rect">
             <a:avLst/>
@@ -11275,7 +11684,11 @@
           <a:p>
             <a:r>
               <a:rPr lang="en-US" dirty="0" smtClean="0"/>
-              <a:t>Tactics for Usability</a:t>
+              <a:t>Tactics for </a:t>
+            </a:r>
+            <a:r>
+              <a:rPr lang="en-US" dirty="0" err="1" smtClean="0"/>
+              <a:t>Deployability</a:t>
             </a:r>
             <a:endParaRPr lang="en-US" dirty="0"/>
           </a:p>
@@ -11283,7 +11696,7 @@
       </p:sp>
       <p:pic>
         <p:nvPicPr>
-          <p:cNvPr id="63490" name="Picture 2"/>
+          <p:cNvPr id="2054" name="Picture 6"/>
           <p:cNvPicPr>
             <a:picLocks noChangeAspect="1" noChangeArrowheads="1"/>
           </p:cNvPicPr>
@@ -11298,8 +11711,8 @@
         </p:blipFill>
         <p:spPr bwMode="auto">
           <a:xfrm>
-            <a:off x="1952625" y="2108200"/>
-            <a:ext cx="5238750" cy="3302000"/>
+            <a:off x="679450" y="2057400"/>
+            <a:ext cx="7785100" cy="3505200"/>
           </a:xfrm>
           <a:prstGeom prst="rect">
             <a:avLst/>
@@ -11322,435 +11735,6 @@
 </file>
 
 <file path=ppt/slides/slide55.xml><?xml version="1.0" encoding="utf-8"?>
-<p:sld xmlns:a="http://schemas.openxmlformats.org/drawingml/2006/main" xmlns:r="http://schemas.openxmlformats.org/officeDocument/2006/relationships" xmlns:p="http://schemas.openxmlformats.org/presentationml/2006/main">
-  <p:cSld>
-    <p:spTree>
-      <p:nvGrpSpPr>
-        <p:cNvPr id="1" name=""/>
-        <p:cNvGrpSpPr/>
-        <p:nvPr/>
-      </p:nvGrpSpPr>
-      <p:grpSpPr>
-        <a:xfrm>
-          <a:off x="0" y="0"/>
-          <a:ext cx="0" cy="0"/>
-          <a:chOff x="0" y="0"/>
-          <a:chExt cx="0" cy="0"/>
-        </a:xfrm>
-      </p:grpSpPr>
-      <p:sp>
-        <p:nvSpPr>
-          <p:cNvPr id="2" name="Title 1"/>
-          <p:cNvSpPr>
-            <a:spLocks noGrp="1"/>
-          </p:cNvSpPr>
-          <p:nvPr>
-            <p:ph type="title"/>
-          </p:nvPr>
-        </p:nvSpPr>
-        <p:spPr/>
-        <p:txBody>
-          <a:bodyPr/>
-          <a:lstStyle/>
-          <a:p>
-            <a:r>
-              <a:rPr lang="en-US" dirty="0" smtClean="0"/>
-              <a:t>Maintain Task Model</a:t>
-            </a:r>
-            <a:endParaRPr lang="en-US" dirty="0"/>
-          </a:p>
-        </p:txBody>
-      </p:sp>
-      <p:sp>
-        <p:nvSpPr>
-          <p:cNvPr id="3" name="Content Placeholder 2"/>
-          <p:cNvSpPr>
-            <a:spLocks noGrp="1"/>
-          </p:cNvSpPr>
-          <p:nvPr>
-            <p:ph idx="1"/>
-          </p:nvPr>
-        </p:nvSpPr>
-        <p:spPr/>
-        <p:txBody>
-          <a:bodyPr/>
-          <a:lstStyle/>
-          <a:p>
-            <a:r>
-              <a:rPr lang="en-US" sz="2400" dirty="0" smtClean="0"/>
-              <a:t>The </a:t>
-            </a:r>
-            <a:r>
-              <a:rPr lang="en-US" sz="2400" i="1" dirty="0" smtClean="0">
-                <a:solidFill>
-                  <a:srgbClr val="C00000"/>
-                </a:solidFill>
-              </a:rPr>
-              <a:t>task model</a:t>
-            </a:r>
-            <a:r>
-              <a:rPr lang="en-US" sz="2400" dirty="0" smtClean="0"/>
-              <a:t> is used to determine context so the system can have some </a:t>
-            </a:r>
-            <a:r>
-              <a:rPr lang="en-US" sz="2400" u="sng" dirty="0" smtClean="0"/>
-              <a:t>idea of what the user is attempting to do</a:t>
-            </a:r>
-            <a:r>
-              <a:rPr lang="en-US" sz="2400" dirty="0" smtClean="0"/>
-              <a:t> and provide assistance.</a:t>
-            </a:r>
-          </a:p>
-          <a:p>
-            <a:r>
-              <a:rPr lang="en-US" sz="2400" dirty="0" smtClean="0"/>
-              <a:t>For example, many search engines provide </a:t>
-            </a:r>
-            <a:r>
-              <a:rPr lang="en-US" sz="2400" i="1" dirty="0" smtClean="0">
-                <a:solidFill>
-                  <a:srgbClr val="C00000"/>
-                </a:solidFill>
-              </a:rPr>
-              <a:t>predictive type-ahead capabilities</a:t>
-            </a:r>
-            <a:r>
-              <a:rPr lang="en-US" sz="2400" dirty="0" smtClean="0"/>
-              <a:t>, and many mail clients provide spell-correction. Both of these functions are based on task models.</a:t>
-            </a:r>
-          </a:p>
-        </p:txBody>
-      </p:sp>
-      <p:pic>
-        <p:nvPicPr>
-          <p:cNvPr id="6146" name="Picture 2" descr="https://images.samsung.com/is/image/samsung/assets/uk/support/mobile-devices/how-can-i-personalise-and-turn-predictive-text-on-and-off-on-my-samsung-galaxy-device/images/1-uk-how-can-i-personalise-and-turn-predictive-text-on-and-off.png?$ORIGIN_PNG$"/>
-          <p:cNvPicPr>
-            <a:picLocks noChangeAspect="1" noChangeArrowheads="1"/>
-          </p:cNvPicPr>
-          <p:nvPr/>
-        </p:nvPicPr>
-        <p:blipFill>
-          <a:blip r:embed="rId2" cstate="print"/>
-          <a:srcRect/>
-          <a:stretch>
-            <a:fillRect/>
-          </a:stretch>
-        </p:blipFill>
-        <p:spPr bwMode="auto">
-          <a:xfrm>
-            <a:off x="3124200" y="4419600"/>
-            <a:ext cx="2767013" cy="1524000"/>
-          </a:xfrm>
-          <a:prstGeom prst="rect">
-            <a:avLst/>
-          </a:prstGeom>
-          <a:noFill/>
-        </p:spPr>
-      </p:pic>
-    </p:spTree>
-  </p:cSld>
-  <p:clrMapOvr>
-    <a:masterClrMapping/>
-  </p:clrMapOvr>
-</p:sld>
-</file>
-
-<file path=ppt/slides/slide56.xml><?xml version="1.0" encoding="utf-8"?>
-<p:sld xmlns:a="http://schemas.openxmlformats.org/drawingml/2006/main" xmlns:r="http://schemas.openxmlformats.org/officeDocument/2006/relationships" xmlns:p="http://schemas.openxmlformats.org/presentationml/2006/main">
-  <p:cSld>
-    <p:spTree>
-      <p:nvGrpSpPr>
-        <p:cNvPr id="1" name=""/>
-        <p:cNvGrpSpPr/>
-        <p:nvPr/>
-      </p:nvGrpSpPr>
-      <p:grpSpPr>
-        <a:xfrm>
-          <a:off x="0" y="0"/>
-          <a:ext cx="0" cy="0"/>
-          <a:chOff x="0" y="0"/>
-          <a:chExt cx="0" cy="0"/>
-        </a:xfrm>
-      </p:grpSpPr>
-      <p:sp>
-        <p:nvSpPr>
-          <p:cNvPr id="2" name="Title 1"/>
-          <p:cNvSpPr>
-            <a:spLocks noGrp="1"/>
-          </p:cNvSpPr>
-          <p:nvPr>
-            <p:ph type="title"/>
-          </p:nvPr>
-        </p:nvSpPr>
-        <p:spPr/>
-        <p:txBody>
-          <a:bodyPr/>
-          <a:lstStyle/>
-          <a:p>
-            <a:r>
-              <a:rPr lang="en-US" dirty="0" smtClean="0"/>
-              <a:t>Maintain User Model</a:t>
-            </a:r>
-            <a:endParaRPr lang="en-US" dirty="0"/>
-          </a:p>
-        </p:txBody>
-      </p:sp>
-      <p:sp>
-        <p:nvSpPr>
-          <p:cNvPr id="3" name="Content Placeholder 2"/>
-          <p:cNvSpPr>
-            <a:spLocks noGrp="1"/>
-          </p:cNvSpPr>
-          <p:nvPr>
-            <p:ph idx="1"/>
-          </p:nvPr>
-        </p:nvSpPr>
-        <p:spPr/>
-        <p:txBody>
-          <a:bodyPr/>
-          <a:lstStyle/>
-          <a:p>
-            <a:r>
-              <a:rPr lang="en-US" sz="2200" dirty="0" smtClean="0"/>
-              <a:t>The </a:t>
-            </a:r>
-            <a:r>
-              <a:rPr lang="en-US" sz="2200" i="1" dirty="0" smtClean="0">
-                <a:solidFill>
-                  <a:srgbClr val="C00000"/>
-                </a:solidFill>
-              </a:rPr>
-              <a:t>user model</a:t>
-            </a:r>
-            <a:r>
-              <a:rPr lang="en-US" sz="2200" dirty="0" smtClean="0"/>
-              <a:t> explicitly represents </a:t>
-            </a:r>
-            <a:r>
-              <a:rPr lang="en-US" sz="2200" u="sng" dirty="0" smtClean="0"/>
-              <a:t>the user's knowledge of the system</a:t>
-            </a:r>
-            <a:r>
-              <a:rPr lang="en-US" sz="2200" dirty="0" smtClean="0"/>
-              <a:t>, the user's behavior in terms of expected response time, and other aspects specific to a user or a class of users.</a:t>
-            </a:r>
-          </a:p>
-          <a:p>
-            <a:r>
-              <a:rPr lang="en-US" sz="2200" dirty="0" smtClean="0"/>
-              <a:t>For example, language-learning apps are constantly monitoring areas </a:t>
-            </a:r>
-            <a:r>
-              <a:rPr lang="en-US" sz="2200" i="1" dirty="0" smtClean="0">
-                <a:solidFill>
-                  <a:srgbClr val="C00000"/>
-                </a:solidFill>
-              </a:rPr>
-              <a:t>where a user makes mistakes</a:t>
-            </a:r>
-            <a:r>
-              <a:rPr lang="en-US" sz="2200" dirty="0" smtClean="0"/>
-              <a:t> and then providing additional exercises to correct those behaviors.</a:t>
-            </a:r>
-          </a:p>
-          <a:p>
-            <a:r>
-              <a:rPr lang="en-US" sz="2200" dirty="0" smtClean="0"/>
-              <a:t>A special case of this tactic is commonly found in user interface customization, wherein a user can explicitly modify the system's user model.</a:t>
-            </a:r>
-          </a:p>
-        </p:txBody>
-      </p:sp>
-      <p:pic>
-        <p:nvPicPr>
-          <p:cNvPr id="5122" name="Picture 2"/>
-          <p:cNvPicPr>
-            <a:picLocks noChangeAspect="1" noChangeArrowheads="1"/>
-          </p:cNvPicPr>
-          <p:nvPr/>
-        </p:nvPicPr>
-        <p:blipFill>
-          <a:blip r:embed="rId2" cstate="print"/>
-          <a:srcRect/>
-          <a:stretch>
-            <a:fillRect/>
-          </a:stretch>
-        </p:blipFill>
-        <p:spPr bwMode="auto">
-          <a:xfrm>
-            <a:off x="2879725" y="4689475"/>
-            <a:ext cx="3384550" cy="1787525"/>
-          </a:xfrm>
-          <a:prstGeom prst="rect">
-            <a:avLst/>
-          </a:prstGeom>
-          <a:noFill/>
-          <a:ln w="9525">
-            <a:noFill/>
-            <a:miter lim="800000"/>
-            <a:headEnd/>
-            <a:tailEnd/>
-          </a:ln>
-        </p:spPr>
-      </p:pic>
-    </p:spTree>
-  </p:cSld>
-  <p:clrMapOvr>
-    <a:masterClrMapping/>
-  </p:clrMapOvr>
-</p:sld>
-</file>
-
-<file path=ppt/slides/slide57.xml><?xml version="1.0" encoding="utf-8"?>
-<p:sld xmlns:a="http://schemas.openxmlformats.org/drawingml/2006/main" xmlns:r="http://schemas.openxmlformats.org/officeDocument/2006/relationships" xmlns:p="http://schemas.openxmlformats.org/presentationml/2006/main">
-  <p:cSld>
-    <p:spTree>
-      <p:nvGrpSpPr>
-        <p:cNvPr id="1" name=""/>
-        <p:cNvGrpSpPr/>
-        <p:nvPr/>
-      </p:nvGrpSpPr>
-      <p:grpSpPr>
-        <a:xfrm>
-          <a:off x="0" y="0"/>
-          <a:ext cx="0" cy="0"/>
-          <a:chOff x="0" y="0"/>
-          <a:chExt cx="0" cy="0"/>
-        </a:xfrm>
-      </p:grpSpPr>
-      <p:sp>
-        <p:nvSpPr>
-          <p:cNvPr id="2" name="Title 1"/>
-          <p:cNvSpPr>
-            <a:spLocks noGrp="1"/>
-          </p:cNvSpPr>
-          <p:nvPr>
-            <p:ph type="title"/>
-          </p:nvPr>
-        </p:nvSpPr>
-        <p:spPr/>
-        <p:txBody>
-          <a:bodyPr/>
-          <a:lstStyle/>
-          <a:p>
-            <a:r>
-              <a:rPr lang="en-US" dirty="0" smtClean="0"/>
-              <a:t>Maintain System Model</a:t>
-            </a:r>
-            <a:endParaRPr lang="en-US" dirty="0"/>
-          </a:p>
-        </p:txBody>
-      </p:sp>
-      <p:sp>
-        <p:nvSpPr>
-          <p:cNvPr id="3" name="Content Placeholder 2"/>
-          <p:cNvSpPr>
-            <a:spLocks noGrp="1"/>
-          </p:cNvSpPr>
-          <p:nvPr>
-            <p:ph idx="1"/>
-          </p:nvPr>
-        </p:nvSpPr>
-        <p:spPr/>
-        <p:txBody>
-          <a:bodyPr/>
-          <a:lstStyle/>
-          <a:p>
-            <a:r>
-              <a:rPr lang="en-US" sz="2400" dirty="0" smtClean="0"/>
-              <a:t>The </a:t>
-            </a:r>
-            <a:r>
-              <a:rPr lang="en-US" sz="2400" i="1" dirty="0" smtClean="0">
-                <a:solidFill>
-                  <a:srgbClr val="C00000"/>
-                </a:solidFill>
-              </a:rPr>
-              <a:t>system</a:t>
-            </a:r>
-            <a:r>
-              <a:rPr lang="en-US" sz="2400" dirty="0" smtClean="0"/>
-              <a:t> maintains an explicit model of itself. This is used to determine </a:t>
-            </a:r>
-            <a:r>
-              <a:rPr lang="en-US" sz="2400" u="sng" dirty="0" smtClean="0"/>
-              <a:t>expected system behavior</a:t>
-            </a:r>
-            <a:r>
-              <a:rPr lang="en-US" sz="2400" dirty="0" smtClean="0"/>
-              <a:t> so that </a:t>
-            </a:r>
-            <a:r>
-              <a:rPr lang="en-US" sz="2400" u="sng" dirty="0" smtClean="0"/>
-              <a:t>appropriate feedback</a:t>
-            </a:r>
-            <a:r>
-              <a:rPr lang="en-US" sz="2400" dirty="0" smtClean="0"/>
-              <a:t> can be given to the user.</a:t>
-            </a:r>
-          </a:p>
-          <a:p>
-            <a:r>
-              <a:rPr lang="en-US" sz="2400" dirty="0" smtClean="0"/>
-              <a:t>A common manifestation of a system model is </a:t>
-            </a:r>
-            <a:r>
-              <a:rPr lang="en-US" sz="2400" i="1" dirty="0" smtClean="0">
-                <a:solidFill>
-                  <a:srgbClr val="C00000"/>
-                </a:solidFill>
-              </a:rPr>
-              <a:t>a progress bar</a:t>
-            </a:r>
-            <a:r>
-              <a:rPr lang="en-US" sz="2400" dirty="0" smtClean="0"/>
-              <a:t> that predicts the time needed to complete the current activity.</a:t>
-            </a:r>
-            <a:endParaRPr lang="en-US" sz="2400" dirty="0"/>
-          </a:p>
-        </p:txBody>
-      </p:sp>
-      <p:pic>
-        <p:nvPicPr>
-          <p:cNvPr id="4098" name="Picture 2"/>
-          <p:cNvPicPr>
-            <a:picLocks noChangeAspect="1" noChangeArrowheads="1"/>
-          </p:cNvPicPr>
-          <p:nvPr/>
-        </p:nvPicPr>
-        <p:blipFill>
-          <a:blip r:embed="rId2" cstate="print"/>
-          <a:srcRect/>
-          <a:stretch>
-            <a:fillRect/>
-          </a:stretch>
-        </p:blipFill>
-        <p:spPr bwMode="auto">
-          <a:xfrm>
-            <a:off x="3048000" y="4267200"/>
-            <a:ext cx="3101340" cy="1619250"/>
-          </a:xfrm>
-          <a:prstGeom prst="rect">
-            <a:avLst/>
-          </a:prstGeom>
-          <a:noFill/>
-          <a:ln w="9525">
-            <a:noFill/>
-            <a:miter lim="800000"/>
-            <a:headEnd/>
-            <a:tailEnd/>
-          </a:ln>
-        </p:spPr>
-      </p:pic>
-    </p:spTree>
-  </p:cSld>
-  <p:clrMapOvr>
-    <a:masterClrMapping/>
-  </p:clrMapOvr>
-</p:sld>
-</file>
-
-<file path=ppt/slides/slide58.xml><?xml version="1.0" encoding="utf-8"?>
 <p:sld xmlns:a="http://schemas.openxmlformats.org/drawingml/2006/main" xmlns:r="http://schemas.openxmlformats.org/officeDocument/2006/relationships" xmlns:p="http://schemas.openxmlformats.org/presentationml/2006/main">
   <p:cSld>
     <p:spTree>
@@ -11801,6 +11785,347 @@
 </p:sld>
 </file>
 
+<file path=ppt/slides/slide56.xml><?xml version="1.0" encoding="utf-8"?>
+<p:sld xmlns:a="http://schemas.openxmlformats.org/drawingml/2006/main" xmlns:r="http://schemas.openxmlformats.org/officeDocument/2006/relationships" xmlns:p="http://schemas.openxmlformats.org/presentationml/2006/main">
+  <p:cSld>
+    <p:spTree>
+      <p:nvGrpSpPr>
+        <p:cNvPr id="1" name=""/>
+        <p:cNvGrpSpPr/>
+        <p:nvPr/>
+      </p:nvGrpSpPr>
+      <p:grpSpPr>
+        <a:xfrm>
+          <a:off x="0" y="0"/>
+          <a:ext cx="0" cy="0"/>
+          <a:chOff x="0" y="0"/>
+          <a:chExt cx="0" cy="0"/>
+        </a:xfrm>
+      </p:grpSpPr>
+      <p:sp>
+        <p:nvSpPr>
+          <p:cNvPr id="2" name="Title 1"/>
+          <p:cNvSpPr>
+            <a:spLocks noGrp="1"/>
+          </p:cNvSpPr>
+          <p:nvPr>
+            <p:ph type="title"/>
+          </p:nvPr>
+        </p:nvSpPr>
+        <p:spPr/>
+        <p:txBody>
+          <a:bodyPr/>
+          <a:lstStyle/>
+          <a:p>
+            <a:r>
+              <a:rPr lang="en-US" dirty="0" smtClean="0"/>
+              <a:t>Usability</a:t>
+            </a:r>
+            <a:endParaRPr lang="en-US" dirty="0"/>
+          </a:p>
+        </p:txBody>
+      </p:sp>
+      <p:sp>
+        <p:nvSpPr>
+          <p:cNvPr id="3" name="Content Placeholder 2"/>
+          <p:cNvSpPr>
+            <a:spLocks noGrp="1"/>
+          </p:cNvSpPr>
+          <p:nvPr>
+            <p:ph idx="1"/>
+          </p:nvPr>
+        </p:nvSpPr>
+        <p:spPr/>
+        <p:txBody>
+          <a:bodyPr/>
+          <a:lstStyle/>
+          <a:p>
+            <a:r>
+              <a:rPr lang="en-US" sz="2400" i="1" dirty="0" smtClean="0">
+                <a:solidFill>
+                  <a:srgbClr val="C00000"/>
+                </a:solidFill>
+              </a:rPr>
+              <a:t>Usability</a:t>
+            </a:r>
+            <a:r>
+              <a:rPr lang="en-US" sz="2400" dirty="0" smtClean="0"/>
+              <a:t> is concerned with </a:t>
+            </a:r>
+            <a:r>
+              <a:rPr lang="en-US" sz="2400" u="sng" dirty="0" smtClean="0"/>
+              <a:t>how easy</a:t>
+            </a:r>
+            <a:r>
+              <a:rPr lang="en-US" sz="2400" dirty="0" smtClean="0"/>
+              <a:t> it is for the user to </a:t>
+            </a:r>
+            <a:r>
+              <a:rPr lang="en-US" sz="2400" u="sng" dirty="0" smtClean="0"/>
+              <a:t>accomplish a desired task</a:t>
+            </a:r>
+            <a:r>
+              <a:rPr lang="en-US" sz="2400" dirty="0" smtClean="0"/>
+              <a:t> and the kind of user support that the system provides.</a:t>
+            </a:r>
+            <a:endParaRPr lang="en-US" sz="2400" dirty="0"/>
+          </a:p>
+        </p:txBody>
+      </p:sp>
+      <p:pic>
+        <p:nvPicPr>
+          <p:cNvPr id="62467" name="Picture 3"/>
+          <p:cNvPicPr>
+            <a:picLocks noChangeAspect="1" noChangeArrowheads="1"/>
+          </p:cNvPicPr>
+          <p:nvPr/>
+        </p:nvPicPr>
+        <p:blipFill>
+          <a:blip r:embed="rId2" cstate="print"/>
+          <a:srcRect/>
+          <a:stretch>
+            <a:fillRect/>
+          </a:stretch>
+        </p:blipFill>
+        <p:spPr bwMode="auto">
+          <a:xfrm>
+            <a:off x="730250" y="3419475"/>
+            <a:ext cx="7683500" cy="2066925"/>
+          </a:xfrm>
+          <a:prstGeom prst="rect">
+            <a:avLst/>
+          </a:prstGeom>
+          <a:noFill/>
+          <a:ln w="9525">
+            <a:noFill/>
+            <a:miter lim="800000"/>
+            <a:headEnd/>
+            <a:tailEnd/>
+          </a:ln>
+        </p:spPr>
+      </p:pic>
+    </p:spTree>
+  </p:cSld>
+  <p:clrMapOvr>
+    <a:masterClrMapping/>
+  </p:clrMapOvr>
+</p:sld>
+</file>
+
+<file path=ppt/slides/slide57.xml><?xml version="1.0" encoding="utf-8"?>
+<p:sld xmlns:a="http://schemas.openxmlformats.org/drawingml/2006/main" xmlns:r="http://schemas.openxmlformats.org/officeDocument/2006/relationships" xmlns:p="http://schemas.openxmlformats.org/presentationml/2006/main">
+  <p:cSld>
+    <p:spTree>
+      <p:nvGrpSpPr>
+        <p:cNvPr id="1" name=""/>
+        <p:cNvGrpSpPr/>
+        <p:nvPr/>
+      </p:nvGrpSpPr>
+      <p:grpSpPr>
+        <a:xfrm>
+          <a:off x="0" y="0"/>
+          <a:ext cx="0" cy="0"/>
+          <a:chOff x="0" y="0"/>
+          <a:chExt cx="0" cy="0"/>
+        </a:xfrm>
+      </p:grpSpPr>
+      <p:sp>
+        <p:nvSpPr>
+          <p:cNvPr id="2" name="Title 1"/>
+          <p:cNvSpPr>
+            <a:spLocks noGrp="1"/>
+          </p:cNvSpPr>
+          <p:nvPr>
+            <p:ph type="title"/>
+          </p:nvPr>
+        </p:nvSpPr>
+        <p:spPr/>
+        <p:txBody>
+          <a:bodyPr/>
+          <a:lstStyle/>
+          <a:p>
+            <a:r>
+              <a:rPr lang="en-US" dirty="0" smtClean="0"/>
+              <a:t>Tactics for Usability</a:t>
+            </a:r>
+            <a:endParaRPr lang="en-US" dirty="0"/>
+          </a:p>
+        </p:txBody>
+      </p:sp>
+      <p:pic>
+        <p:nvPicPr>
+          <p:cNvPr id="63490" name="Picture 2"/>
+          <p:cNvPicPr>
+            <a:picLocks noChangeAspect="1" noChangeArrowheads="1"/>
+          </p:cNvPicPr>
+          <p:nvPr/>
+        </p:nvPicPr>
+        <p:blipFill>
+          <a:blip r:embed="rId2" cstate="print"/>
+          <a:srcRect/>
+          <a:stretch>
+            <a:fillRect/>
+          </a:stretch>
+        </p:blipFill>
+        <p:spPr bwMode="auto">
+          <a:xfrm>
+            <a:off x="1952625" y="2108200"/>
+            <a:ext cx="5238750" cy="3302000"/>
+          </a:xfrm>
+          <a:prstGeom prst="rect">
+            <a:avLst/>
+          </a:prstGeom>
+          <a:noFill/>
+          <a:ln w="9525">
+            <a:noFill/>
+            <a:miter lim="800000"/>
+            <a:headEnd/>
+            <a:tailEnd/>
+          </a:ln>
+        </p:spPr>
+      </p:pic>
+    </p:spTree>
+  </p:cSld>
+  <p:clrMapOvr>
+    <a:masterClrMapping/>
+  </p:clrMapOvr>
+</p:sld>
+</file>
+
+<file path=ppt/slides/slide58.xml><?xml version="1.0" encoding="utf-8"?>
+<p:sld xmlns:a="http://schemas.openxmlformats.org/drawingml/2006/main" xmlns:r="http://schemas.openxmlformats.org/officeDocument/2006/relationships" xmlns:p="http://schemas.openxmlformats.org/presentationml/2006/main">
+  <p:cSld>
+    <p:spTree>
+      <p:nvGrpSpPr>
+        <p:cNvPr id="1" name=""/>
+        <p:cNvGrpSpPr/>
+        <p:nvPr/>
+      </p:nvGrpSpPr>
+      <p:grpSpPr>
+        <a:xfrm>
+          <a:off x="0" y="0"/>
+          <a:ext cx="0" cy="0"/>
+          <a:chOff x="0" y="0"/>
+          <a:chExt cx="0" cy="0"/>
+        </a:xfrm>
+      </p:grpSpPr>
+      <p:sp>
+        <p:nvSpPr>
+          <p:cNvPr id="2" name="Title 1"/>
+          <p:cNvSpPr>
+            <a:spLocks noGrp="1"/>
+          </p:cNvSpPr>
+          <p:nvPr>
+            <p:ph type="title"/>
+          </p:nvPr>
+        </p:nvSpPr>
+        <p:spPr/>
+        <p:txBody>
+          <a:bodyPr/>
+          <a:lstStyle/>
+          <a:p>
+            <a:r>
+              <a:rPr lang="en-US" dirty="0" smtClean="0"/>
+              <a:t>Maintain Task Model</a:t>
+            </a:r>
+            <a:endParaRPr lang="en-US" dirty="0"/>
+          </a:p>
+        </p:txBody>
+      </p:sp>
+      <p:sp>
+        <p:nvSpPr>
+          <p:cNvPr id="3" name="Content Placeholder 2"/>
+          <p:cNvSpPr>
+            <a:spLocks noGrp="1"/>
+          </p:cNvSpPr>
+          <p:nvPr>
+            <p:ph idx="1"/>
+          </p:nvPr>
+        </p:nvSpPr>
+        <p:spPr/>
+        <p:txBody>
+          <a:bodyPr/>
+          <a:lstStyle/>
+          <a:p>
+            <a:r>
+              <a:rPr lang="en-US" sz="2400" dirty="0" smtClean="0"/>
+              <a:t>The </a:t>
+            </a:r>
+            <a:r>
+              <a:rPr lang="en-US" sz="2400" i="1" dirty="0" smtClean="0">
+                <a:solidFill>
+                  <a:srgbClr val="C00000"/>
+                </a:solidFill>
+              </a:rPr>
+              <a:t>task model</a:t>
+            </a:r>
+            <a:r>
+              <a:rPr lang="en-US" sz="2400" dirty="0" smtClean="0"/>
+              <a:t> is used to determine context so the system can have some </a:t>
+            </a:r>
+            <a:r>
+              <a:rPr lang="en-US" sz="2400" u="sng" dirty="0" smtClean="0"/>
+              <a:t>idea of what the user is attempting to do</a:t>
+            </a:r>
+            <a:r>
+              <a:rPr lang="en-US" sz="2400" dirty="0" smtClean="0"/>
+              <a:t> and provide assistance.</a:t>
+            </a:r>
+          </a:p>
+          <a:p>
+            <a:r>
+              <a:rPr lang="en-US" sz="2400" dirty="0" smtClean="0"/>
+              <a:t>For example, many search engines provide </a:t>
+            </a:r>
+            <a:r>
+              <a:rPr lang="en-US" sz="2400" i="1" dirty="0" smtClean="0">
+                <a:solidFill>
+                  <a:srgbClr val="C00000"/>
+                </a:solidFill>
+              </a:rPr>
+              <a:t>predictive type-ahead capabilities</a:t>
+            </a:r>
+            <a:r>
+              <a:rPr lang="en-US" sz="2400" dirty="0" smtClean="0"/>
+              <a:t>, and many mail clients provide spell-correction. Both of these functions are based on task models.</a:t>
+            </a:r>
+          </a:p>
+        </p:txBody>
+      </p:sp>
+      <p:pic>
+        <p:nvPicPr>
+          <p:cNvPr id="6146" name="Picture 2" descr="https://images.samsung.com/is/image/samsung/assets/uk/support/mobile-devices/how-can-i-personalise-and-turn-predictive-text-on-and-off-on-my-samsung-galaxy-device/images/1-uk-how-can-i-personalise-and-turn-predictive-text-on-and-off.png?$ORIGIN_PNG$"/>
+          <p:cNvPicPr>
+            <a:picLocks noChangeAspect="1" noChangeArrowheads="1"/>
+          </p:cNvPicPr>
+          <p:nvPr/>
+        </p:nvPicPr>
+        <p:blipFill>
+          <a:blip r:embed="rId2" cstate="print"/>
+          <a:srcRect/>
+          <a:stretch>
+            <a:fillRect/>
+          </a:stretch>
+        </p:blipFill>
+        <p:spPr bwMode="auto">
+          <a:xfrm>
+            <a:off x="3124200" y="4419600"/>
+            <a:ext cx="2767013" cy="1524000"/>
+          </a:xfrm>
+          <a:prstGeom prst="rect">
+            <a:avLst/>
+          </a:prstGeom>
+          <a:noFill/>
+        </p:spPr>
+      </p:pic>
+    </p:spTree>
+  </p:cSld>
+  <p:clrMapOvr>
+    <a:masterClrMapping/>
+  </p:clrMapOvr>
+</p:sld>
+</file>
+
 <file path=ppt/slides/slide59.xml><?xml version="1.0" encoding="utf-8"?>
 <p:sld xmlns:a="http://schemas.openxmlformats.org/drawingml/2006/main" xmlns:r="http://schemas.openxmlformats.org/officeDocument/2006/relationships" xmlns:p="http://schemas.openxmlformats.org/presentationml/2006/main">
   <p:cSld>
@@ -11835,15 +12160,81 @@
           <a:p>
             <a:r>
               <a:rPr lang="en-US" dirty="0" smtClean="0"/>
-              <a:t>Other Kinds of Quality Attributes</a:t>
+              <a:t>Maintain User Model</a:t>
             </a:r>
             <a:endParaRPr lang="en-US" dirty="0"/>
+          </a:p>
+        </p:txBody>
+      </p:sp>
+      <p:sp>
+        <p:nvSpPr>
+          <p:cNvPr id="3" name="Content Placeholder 2"/>
+          <p:cNvSpPr>
+            <a:spLocks noGrp="1"/>
+          </p:cNvSpPr>
+          <p:nvPr>
+            <p:ph idx="1"/>
+          </p:nvPr>
+        </p:nvSpPr>
+        <p:spPr/>
+        <p:txBody>
+          <a:bodyPr/>
+          <a:lstStyle/>
+          <a:p>
+            <a:r>
+              <a:rPr lang="en-US" sz="2200" dirty="0" smtClean="0"/>
+              <a:t>The </a:t>
+            </a:r>
+            <a:r>
+              <a:rPr lang="en-US" sz="2200" i="1" dirty="0" smtClean="0">
+                <a:solidFill>
+                  <a:srgbClr val="C00000"/>
+                </a:solidFill>
+              </a:rPr>
+              <a:t>user model</a:t>
+            </a:r>
+            <a:r>
+              <a:rPr lang="en-US" sz="2200" dirty="0" smtClean="0"/>
+              <a:t> explicitly represents </a:t>
+            </a:r>
+            <a:r>
+              <a:rPr lang="en-US" sz="2200" u="sng" dirty="0" smtClean="0"/>
+              <a:t>the user's knowledge of the system</a:t>
+            </a:r>
+            <a:r>
+              <a:rPr lang="en-US" sz="2200" dirty="0" smtClean="0"/>
+              <a:t>, the user's behavior in terms of expected response time, and other aspects specific to a user or a class of users.</a:t>
+            </a:r>
+          </a:p>
+          <a:p>
+            <a:r>
+              <a:rPr lang="en-US" sz="2200" dirty="0" smtClean="0"/>
+              <a:t>For example, language-learning apps are constantly monitoring areas </a:t>
+            </a:r>
+            <a:r>
+              <a:rPr lang="en-US" sz="2200" i="1" dirty="0" smtClean="0">
+                <a:solidFill>
+                  <a:srgbClr val="C00000"/>
+                </a:solidFill>
+              </a:rPr>
+              <a:t>where a user makes mistakes</a:t>
+            </a:r>
+            <a:r>
+              <a:rPr lang="en-US" sz="2200" dirty="0" smtClean="0"/>
+              <a:t> and then providing additional exercises to correct those behaviors.</a:t>
+            </a:r>
+          </a:p>
+          <a:p>
+            <a:r>
+              <a:rPr lang="en-US" sz="2200" dirty="0" smtClean="0"/>
+              <a:t>A special case of this tactic is commonly found in user interface customization, wherein a user can explicitly modify the system's user model.</a:t>
+            </a:r>
           </a:p>
         </p:txBody>
       </p:sp>
       <p:pic>
         <p:nvPicPr>
-          <p:cNvPr id="3074" name="Picture 2" descr="https://article.imrpress.com/journal/CEOG/51/4/10.31083/j.ceog5104088/2709-0094-51-4-088/fig1.png"/>
+          <p:cNvPr id="5122" name="Picture 2"/>
           <p:cNvPicPr>
             <a:picLocks noChangeAspect="1" noChangeArrowheads="1"/>
           </p:cNvPicPr>
@@ -11858,66 +12249,21 @@
         </p:blipFill>
         <p:spPr bwMode="auto">
           <a:xfrm>
-            <a:off x="609600" y="1676400"/>
-            <a:ext cx="8185726" cy="4422047"/>
+            <a:off x="2879725" y="4689475"/>
+            <a:ext cx="3384550" cy="1787525"/>
           </a:xfrm>
           <a:prstGeom prst="rect">
             <a:avLst/>
           </a:prstGeom>
           <a:noFill/>
+          <a:ln w="9525">
+            <a:noFill/>
+            <a:miter lim="800000"/>
+            <a:headEnd/>
+            <a:tailEnd/>
+          </a:ln>
         </p:spPr>
       </p:pic>
-      <p:sp>
-        <p:nvSpPr>
-          <p:cNvPr id="5" name="Rectangle 4"/>
-          <p:cNvSpPr/>
-          <p:nvPr/>
-        </p:nvSpPr>
-        <p:spPr>
-          <a:xfrm>
-            <a:off x="381000" y="4572000"/>
-            <a:ext cx="3200400" cy="1754326"/>
-          </a:xfrm>
-          <a:prstGeom prst="rect">
-            <a:avLst/>
-          </a:prstGeom>
-        </p:spPr>
-        <p:style>
-          <a:lnRef idx="2">
-            <a:schemeClr val="dk1"/>
-          </a:lnRef>
-          <a:fillRef idx="1">
-            <a:schemeClr val="lt1"/>
-          </a:fillRef>
-          <a:effectRef idx="0">
-            <a:schemeClr val="dk1"/>
-          </a:effectRef>
-          <a:fontRef idx="minor">
-            <a:schemeClr val="dk1"/>
-          </a:fontRef>
-        </p:style>
-        <p:txBody>
-          <a:bodyPr wrap="square">
-            <a:spAutoFit/>
-          </a:bodyPr>
-          <a:lstStyle/>
-          <a:p>
-            <a:r>
-              <a:rPr lang="en-US" dirty="0" smtClean="0"/>
-              <a:t>ISO/IEC FCD 25010: Systems and Software Engineering: Systems and Software Product Quality Requirements and Evaluation (</a:t>
-            </a:r>
-            <a:r>
-              <a:rPr lang="en-US" dirty="0" err="1" smtClean="0"/>
-              <a:t>SQuaRE</a:t>
-            </a:r>
-            <a:r>
-              <a:rPr lang="en-US" dirty="0" smtClean="0"/>
-              <a:t>): System and Software Quality Models.</a:t>
-            </a:r>
-            <a:endParaRPr lang="en-US" dirty="0"/>
-          </a:p>
-        </p:txBody>
-      </p:sp>
     </p:spTree>
   </p:cSld>
   <p:clrMapOvr>
@@ -12086,6 +12432,331 @@
 </file>
 
 <file path=ppt/slides/slide60.xml><?xml version="1.0" encoding="utf-8"?>
+<p:sld xmlns:a="http://schemas.openxmlformats.org/drawingml/2006/main" xmlns:r="http://schemas.openxmlformats.org/officeDocument/2006/relationships" xmlns:p="http://schemas.openxmlformats.org/presentationml/2006/main">
+  <p:cSld>
+    <p:spTree>
+      <p:nvGrpSpPr>
+        <p:cNvPr id="1" name=""/>
+        <p:cNvGrpSpPr/>
+        <p:nvPr/>
+      </p:nvGrpSpPr>
+      <p:grpSpPr>
+        <a:xfrm>
+          <a:off x="0" y="0"/>
+          <a:ext cx="0" cy="0"/>
+          <a:chOff x="0" y="0"/>
+          <a:chExt cx="0" cy="0"/>
+        </a:xfrm>
+      </p:grpSpPr>
+      <p:sp>
+        <p:nvSpPr>
+          <p:cNvPr id="2" name="Title 1"/>
+          <p:cNvSpPr>
+            <a:spLocks noGrp="1"/>
+          </p:cNvSpPr>
+          <p:nvPr>
+            <p:ph type="title"/>
+          </p:nvPr>
+        </p:nvSpPr>
+        <p:spPr/>
+        <p:txBody>
+          <a:bodyPr/>
+          <a:lstStyle/>
+          <a:p>
+            <a:r>
+              <a:rPr lang="en-US" dirty="0" smtClean="0"/>
+              <a:t>Maintain System Model</a:t>
+            </a:r>
+            <a:endParaRPr lang="en-US" dirty="0"/>
+          </a:p>
+        </p:txBody>
+      </p:sp>
+      <p:sp>
+        <p:nvSpPr>
+          <p:cNvPr id="3" name="Content Placeholder 2"/>
+          <p:cNvSpPr>
+            <a:spLocks noGrp="1"/>
+          </p:cNvSpPr>
+          <p:nvPr>
+            <p:ph idx="1"/>
+          </p:nvPr>
+        </p:nvSpPr>
+        <p:spPr/>
+        <p:txBody>
+          <a:bodyPr/>
+          <a:lstStyle/>
+          <a:p>
+            <a:r>
+              <a:rPr lang="en-US" sz="2400" dirty="0" smtClean="0"/>
+              <a:t>The </a:t>
+            </a:r>
+            <a:r>
+              <a:rPr lang="en-US" sz="2400" i="1" dirty="0" smtClean="0">
+                <a:solidFill>
+                  <a:srgbClr val="C00000"/>
+                </a:solidFill>
+              </a:rPr>
+              <a:t>system</a:t>
+            </a:r>
+            <a:r>
+              <a:rPr lang="en-US" sz="2400" dirty="0" smtClean="0"/>
+              <a:t> maintains an explicit model of itself. This is used to determine </a:t>
+            </a:r>
+            <a:r>
+              <a:rPr lang="en-US" sz="2400" u="sng" dirty="0" smtClean="0"/>
+              <a:t>expected system behavior</a:t>
+            </a:r>
+            <a:r>
+              <a:rPr lang="en-US" sz="2400" dirty="0" smtClean="0"/>
+              <a:t> so that </a:t>
+            </a:r>
+            <a:r>
+              <a:rPr lang="en-US" sz="2400" u="sng" dirty="0" smtClean="0"/>
+              <a:t>appropriate feedback</a:t>
+            </a:r>
+            <a:r>
+              <a:rPr lang="en-US" sz="2400" dirty="0" smtClean="0"/>
+              <a:t> can be given to the user.</a:t>
+            </a:r>
+          </a:p>
+          <a:p>
+            <a:r>
+              <a:rPr lang="en-US" sz="2400" dirty="0" smtClean="0"/>
+              <a:t>A common manifestation of a system model is </a:t>
+            </a:r>
+            <a:r>
+              <a:rPr lang="en-US" sz="2400" i="1" dirty="0" smtClean="0">
+                <a:solidFill>
+                  <a:srgbClr val="C00000"/>
+                </a:solidFill>
+              </a:rPr>
+              <a:t>a progress bar</a:t>
+            </a:r>
+            <a:r>
+              <a:rPr lang="en-US" sz="2400" dirty="0" smtClean="0"/>
+              <a:t> that predicts the time needed to complete the current activity.</a:t>
+            </a:r>
+            <a:endParaRPr lang="en-US" sz="2400" dirty="0"/>
+          </a:p>
+        </p:txBody>
+      </p:sp>
+      <p:pic>
+        <p:nvPicPr>
+          <p:cNvPr id="4098" name="Picture 2"/>
+          <p:cNvPicPr>
+            <a:picLocks noChangeAspect="1" noChangeArrowheads="1"/>
+          </p:cNvPicPr>
+          <p:nvPr/>
+        </p:nvPicPr>
+        <p:blipFill>
+          <a:blip r:embed="rId2" cstate="print"/>
+          <a:srcRect/>
+          <a:stretch>
+            <a:fillRect/>
+          </a:stretch>
+        </p:blipFill>
+        <p:spPr bwMode="auto">
+          <a:xfrm>
+            <a:off x="3048000" y="4267200"/>
+            <a:ext cx="3101340" cy="1619250"/>
+          </a:xfrm>
+          <a:prstGeom prst="rect">
+            <a:avLst/>
+          </a:prstGeom>
+          <a:noFill/>
+          <a:ln w="9525">
+            <a:noFill/>
+            <a:miter lim="800000"/>
+            <a:headEnd/>
+            <a:tailEnd/>
+          </a:ln>
+        </p:spPr>
+      </p:pic>
+    </p:spTree>
+  </p:cSld>
+  <p:clrMapOvr>
+    <a:masterClrMapping/>
+  </p:clrMapOvr>
+</p:sld>
+</file>
+
+<file path=ppt/slides/slide61.xml><?xml version="1.0" encoding="utf-8"?>
+<p:sld xmlns:a="http://schemas.openxmlformats.org/drawingml/2006/main" xmlns:r="http://schemas.openxmlformats.org/officeDocument/2006/relationships" xmlns:p="http://schemas.openxmlformats.org/presentationml/2006/main">
+  <p:cSld>
+    <p:spTree>
+      <p:nvGrpSpPr>
+        <p:cNvPr id="1" name=""/>
+        <p:cNvGrpSpPr/>
+        <p:nvPr/>
+      </p:nvGrpSpPr>
+      <p:grpSpPr>
+        <a:xfrm>
+          <a:off x="0" y="0"/>
+          <a:ext cx="0" cy="0"/>
+          <a:chOff x="0" y="0"/>
+          <a:chExt cx="0" cy="0"/>
+        </a:xfrm>
+      </p:grpSpPr>
+      <p:pic>
+        <p:nvPicPr>
+          <p:cNvPr id="4" name="Picture 2" descr="https://lh3.ggpht.com/1IfZLL2QDSjZ0wS7sUhaMlsAOS8BBzdR3wZ1WawgRn7KZAM8nEVZYMOUM-lqQb0ikIzp=w300"/>
+          <p:cNvPicPr>
+            <a:picLocks noChangeAspect="1" noChangeArrowheads="1"/>
+          </p:cNvPicPr>
+          <p:nvPr/>
+        </p:nvPicPr>
+        <p:blipFill>
+          <a:blip r:embed="rId2" cstate="print"/>
+          <a:srcRect/>
+          <a:stretch>
+            <a:fillRect/>
+          </a:stretch>
+        </p:blipFill>
+        <p:spPr bwMode="auto">
+          <a:xfrm>
+            <a:off x="3276600" y="1905000"/>
+            <a:ext cx="2857500" cy="2857500"/>
+          </a:xfrm>
+          <a:prstGeom prst="rect">
+            <a:avLst/>
+          </a:prstGeom>
+          <a:noFill/>
+        </p:spPr>
+      </p:pic>
+    </p:spTree>
+  </p:cSld>
+  <p:clrMapOvr>
+    <a:masterClrMapping/>
+  </p:clrMapOvr>
+</p:sld>
+</file>
+
+<file path=ppt/slides/slide62.xml><?xml version="1.0" encoding="utf-8"?>
+<p:sld xmlns:a="http://schemas.openxmlformats.org/drawingml/2006/main" xmlns:r="http://schemas.openxmlformats.org/officeDocument/2006/relationships" xmlns:p="http://schemas.openxmlformats.org/presentationml/2006/main">
+  <p:cSld>
+    <p:spTree>
+      <p:nvGrpSpPr>
+        <p:cNvPr id="1" name=""/>
+        <p:cNvGrpSpPr/>
+        <p:nvPr/>
+      </p:nvGrpSpPr>
+      <p:grpSpPr>
+        <a:xfrm>
+          <a:off x="0" y="0"/>
+          <a:ext cx="0" cy="0"/>
+          <a:chOff x="0" y="0"/>
+          <a:chExt cx="0" cy="0"/>
+        </a:xfrm>
+      </p:grpSpPr>
+      <p:sp>
+        <p:nvSpPr>
+          <p:cNvPr id="2" name="Title 1"/>
+          <p:cNvSpPr>
+            <a:spLocks noGrp="1"/>
+          </p:cNvSpPr>
+          <p:nvPr>
+            <p:ph type="title"/>
+          </p:nvPr>
+        </p:nvSpPr>
+        <p:spPr/>
+        <p:txBody>
+          <a:bodyPr/>
+          <a:lstStyle/>
+          <a:p>
+            <a:r>
+              <a:rPr lang="en-US" dirty="0" smtClean="0"/>
+              <a:t>Other Kinds of Quality Attributes</a:t>
+            </a:r>
+            <a:endParaRPr lang="en-US" dirty="0"/>
+          </a:p>
+        </p:txBody>
+      </p:sp>
+      <p:pic>
+        <p:nvPicPr>
+          <p:cNvPr id="3074" name="Picture 2" descr="https://article.imrpress.com/journal/CEOG/51/4/10.31083/j.ceog5104088/2709-0094-51-4-088/fig1.png"/>
+          <p:cNvPicPr>
+            <a:picLocks noChangeAspect="1" noChangeArrowheads="1"/>
+          </p:cNvPicPr>
+          <p:nvPr/>
+        </p:nvPicPr>
+        <p:blipFill>
+          <a:blip r:embed="rId2" cstate="print"/>
+          <a:srcRect/>
+          <a:stretch>
+            <a:fillRect/>
+          </a:stretch>
+        </p:blipFill>
+        <p:spPr bwMode="auto">
+          <a:xfrm>
+            <a:off x="609600" y="1676400"/>
+            <a:ext cx="8185726" cy="4422047"/>
+          </a:xfrm>
+          <a:prstGeom prst="rect">
+            <a:avLst/>
+          </a:prstGeom>
+          <a:noFill/>
+        </p:spPr>
+      </p:pic>
+      <p:sp>
+        <p:nvSpPr>
+          <p:cNvPr id="5" name="Rectangle 4"/>
+          <p:cNvSpPr/>
+          <p:nvPr/>
+        </p:nvSpPr>
+        <p:spPr>
+          <a:xfrm>
+            <a:off x="381000" y="4572000"/>
+            <a:ext cx="3200400" cy="1754326"/>
+          </a:xfrm>
+          <a:prstGeom prst="rect">
+            <a:avLst/>
+          </a:prstGeom>
+        </p:spPr>
+        <p:style>
+          <a:lnRef idx="2">
+            <a:schemeClr val="dk1"/>
+          </a:lnRef>
+          <a:fillRef idx="1">
+            <a:schemeClr val="lt1"/>
+          </a:fillRef>
+          <a:effectRef idx="0">
+            <a:schemeClr val="dk1"/>
+          </a:effectRef>
+          <a:fontRef idx="minor">
+            <a:schemeClr val="dk1"/>
+          </a:fontRef>
+        </p:style>
+        <p:txBody>
+          <a:bodyPr wrap="square">
+            <a:spAutoFit/>
+          </a:bodyPr>
+          <a:lstStyle/>
+          <a:p>
+            <a:r>
+              <a:rPr lang="en-US" dirty="0" smtClean="0"/>
+              <a:t>ISO/IEC FCD 25010: Systems and Software Engineering: Systems and Software Product Quality Requirements and Evaluation (</a:t>
+            </a:r>
+            <a:r>
+              <a:rPr lang="en-US" dirty="0" err="1" smtClean="0"/>
+              <a:t>SQuaRE</a:t>
+            </a:r>
+            <a:r>
+              <a:rPr lang="en-US" dirty="0" smtClean="0"/>
+              <a:t>): System and Software Quality Models.</a:t>
+            </a:r>
+            <a:endParaRPr lang="en-US" dirty="0"/>
+          </a:p>
+        </p:txBody>
+      </p:sp>
+    </p:spTree>
+  </p:cSld>
+  <p:clrMapOvr>
+    <a:masterClrMapping/>
+  </p:clrMapOvr>
+</p:sld>
+</file>
+
+<file path=ppt/slides/slide63.xml><?xml version="1.0" encoding="utf-8"?>
 <p:sld xmlns:a="http://schemas.openxmlformats.org/drawingml/2006/main" xmlns:r="http://schemas.openxmlformats.org/officeDocument/2006/relationships" xmlns:p="http://schemas.openxmlformats.org/presentationml/2006/main">
   <p:cSld>
     <p:spTree>

--- a/Software Design/08. Quality Attributes.pptx
+++ b/Software Design/08. Quality Attributes.pptx
@@ -5,7 +5,7 @@
     <p:sldMasterId id="2147483708" r:id="rId1"/>
   </p:sldMasterIdLst>
   <p:notesMasterIdLst>
-    <p:notesMasterId r:id="rId65"/>
+    <p:notesMasterId r:id="rId67"/>
   </p:notesMasterIdLst>
   <p:sldIdLst>
     <p:sldId id="256" r:id="rId2"/>
@@ -30,47 +30,49 @@
     <p:sldId id="544" r:id="rId21"/>
     <p:sldId id="546" r:id="rId22"/>
     <p:sldId id="547" r:id="rId23"/>
-    <p:sldId id="482" r:id="rId24"/>
-    <p:sldId id="440" r:id="rId25"/>
-    <p:sldId id="483" r:id="rId26"/>
-    <p:sldId id="438" r:id="rId27"/>
-    <p:sldId id="441" r:id="rId28"/>
-    <p:sldId id="522" r:id="rId29"/>
-    <p:sldId id="523" r:id="rId30"/>
-    <p:sldId id="484" r:id="rId31"/>
-    <p:sldId id="533" r:id="rId32"/>
-    <p:sldId id="536" r:id="rId33"/>
-    <p:sldId id="507" r:id="rId34"/>
-    <p:sldId id="534" r:id="rId35"/>
-    <p:sldId id="535" r:id="rId36"/>
-    <p:sldId id="509" r:id="rId37"/>
-    <p:sldId id="487" r:id="rId38"/>
-    <p:sldId id="494" r:id="rId39"/>
-    <p:sldId id="525" r:id="rId40"/>
-    <p:sldId id="510" r:id="rId41"/>
-    <p:sldId id="499" r:id="rId42"/>
-    <p:sldId id="500" r:id="rId43"/>
-    <p:sldId id="497" r:id="rId44"/>
-    <p:sldId id="498" r:id="rId45"/>
-    <p:sldId id="526" r:id="rId46"/>
-    <p:sldId id="511" r:id="rId47"/>
-    <p:sldId id="503" r:id="rId48"/>
-    <p:sldId id="504" r:id="rId49"/>
-    <p:sldId id="512" r:id="rId50"/>
-    <p:sldId id="501" r:id="rId51"/>
-    <p:sldId id="502" r:id="rId52"/>
-    <p:sldId id="514" r:id="rId53"/>
-    <p:sldId id="515" r:id="rId54"/>
-    <p:sldId id="516" r:id="rId55"/>
-    <p:sldId id="527" r:id="rId56"/>
-    <p:sldId id="528" r:id="rId57"/>
-    <p:sldId id="529" r:id="rId58"/>
-    <p:sldId id="530" r:id="rId59"/>
-    <p:sldId id="531" r:id="rId60"/>
-    <p:sldId id="532" r:id="rId61"/>
-    <p:sldId id="517" r:id="rId62"/>
-    <p:sldId id="518" r:id="rId63"/>
-    <p:sldId id="359" r:id="rId64"/>
+    <p:sldId id="548" r:id="rId24"/>
+    <p:sldId id="549" r:id="rId25"/>
+    <p:sldId id="482" r:id="rId26"/>
+    <p:sldId id="440" r:id="rId27"/>
+    <p:sldId id="483" r:id="rId28"/>
+    <p:sldId id="438" r:id="rId29"/>
+    <p:sldId id="441" r:id="rId30"/>
+    <p:sldId id="522" r:id="rId31"/>
+    <p:sldId id="523" r:id="rId32"/>
+    <p:sldId id="484" r:id="rId33"/>
+    <p:sldId id="533" r:id="rId34"/>
+    <p:sldId id="536" r:id="rId35"/>
+    <p:sldId id="507" r:id="rId36"/>
+    <p:sldId id="534" r:id="rId37"/>
+    <p:sldId id="535" r:id="rId38"/>
+    <p:sldId id="509" r:id="rId39"/>
+    <p:sldId id="487" r:id="rId40"/>
+    <p:sldId id="494" r:id="rId41"/>
+    <p:sldId id="525" r:id="rId42"/>
+    <p:sldId id="510" r:id="rId43"/>
+    <p:sldId id="499" r:id="rId44"/>
+    <p:sldId id="500" r:id="rId45"/>
+    <p:sldId id="497" r:id="rId46"/>
+    <p:sldId id="498" r:id="rId47"/>
+    <p:sldId id="526" r:id="rId48"/>
+    <p:sldId id="511" r:id="rId49"/>
+    <p:sldId id="503" r:id="rId50"/>
+    <p:sldId id="504" r:id="rId51"/>
+    <p:sldId id="512" r:id="rId52"/>
+    <p:sldId id="501" r:id="rId53"/>
+    <p:sldId id="502" r:id="rId54"/>
+    <p:sldId id="514" r:id="rId55"/>
+    <p:sldId id="515" r:id="rId56"/>
+    <p:sldId id="516" r:id="rId57"/>
+    <p:sldId id="527" r:id="rId58"/>
+    <p:sldId id="528" r:id="rId59"/>
+    <p:sldId id="529" r:id="rId60"/>
+    <p:sldId id="530" r:id="rId61"/>
+    <p:sldId id="531" r:id="rId62"/>
+    <p:sldId id="532" r:id="rId63"/>
+    <p:sldId id="517" r:id="rId64"/>
+    <p:sldId id="518" r:id="rId65"/>
+    <p:sldId id="359" r:id="rId66"/>
   </p:sldIdLst>
   <p:sldSz cx="9144000" cy="6858000" type="screen4x3"/>
   <p:notesSz cx="6858000" cy="9144000"/>
@@ -4996,13 +4998,10 @@
           <a:bodyPr/>
           <a:lstStyle/>
           <a:p>
+            <a:pPr algn="l"/>
             <a:r>
               <a:rPr lang="en-US" dirty="0" smtClean="0"/>
-              <a:t>Record </a:t>
-            </a:r>
-            <a:r>
-              <a:rPr lang="en-US" dirty="0" smtClean="0"/>
-              <a:t>PC </a:t>
+              <a:t>1. Record PC </a:t>
             </a:r>
             <a:r>
               <a:rPr lang="en-US" dirty="0" smtClean="0"/>
@@ -5380,9 +5379,10 @@
           <a:bodyPr/>
           <a:lstStyle/>
           <a:p>
+            <a:pPr algn="l"/>
             <a:r>
               <a:rPr lang="en-US" dirty="0" smtClean="0"/>
-              <a:t>Install </a:t>
+              <a:t>2. Install </a:t>
             </a:r>
             <a:r>
               <a:rPr lang="en-US" dirty="0" smtClean="0"/>
@@ -5585,9 +5585,10 @@
           <a:bodyPr/>
           <a:lstStyle/>
           <a:p>
+            <a:pPr algn="l"/>
             <a:r>
               <a:rPr lang="en-US" dirty="0" smtClean="0"/>
-              <a:t>Install </a:t>
+              <a:t>3. Install </a:t>
             </a:r>
             <a:r>
               <a:rPr lang="en-US" dirty="0" smtClean="0"/>
@@ -5786,7 +5787,7 @@
                   <a:srgbClr val="C00000"/>
                 </a:solidFill>
               </a:rPr>
-              <a:t>stream</a:t>
+              <a:t>stream (Ask Claude Code to fix build errors without using WSL and download files only to the source folder if necessary)</a:t>
             </a:r>
             <a:endParaRPr lang="en-US" sz="1800" b="1" dirty="0" smtClean="0">
               <a:solidFill>
@@ -5795,6 +5796,14 @@
             </a:endParaRPr>
           </a:p>
           <a:p>
+            <a:r>
+              <a:rPr lang="en-US" sz="1800" dirty="0" smtClean="0"/>
+              <a:t>.\</a:t>
+            </a:r>
+            <a:r>
+              <a:rPr lang="en-US" sz="1800" dirty="0" smtClean="0"/>
+              <a:t>stream.exe</a:t>
+            </a:r>
             <a:endParaRPr lang="en-US" sz="1800" dirty="0" smtClean="0"/>
           </a:p>
         </p:txBody>
@@ -5839,9 +5848,10 @@
           <a:bodyPr/>
           <a:lstStyle/>
           <a:p>
+            <a:pPr algn="l"/>
             <a:r>
               <a:rPr lang="en-US" dirty="0" smtClean="0"/>
-              <a:t>Record </a:t>
+              <a:t>4. Record </a:t>
             </a:r>
             <a:r>
               <a:rPr lang="en-US" dirty="0" err="1" smtClean="0"/>
@@ -6027,9 +6037,10 @@
           <a:bodyPr/>
           <a:lstStyle/>
           <a:p>
+            <a:pPr algn="l"/>
             <a:r>
               <a:rPr lang="en-US" dirty="0" smtClean="0"/>
-              <a:t>Install </a:t>
+              <a:t>5. Install </a:t>
             </a:r>
             <a:r>
               <a:rPr lang="en-US" dirty="0" smtClean="0"/>
@@ -6404,9 +6415,10 @@
           <a:bodyPr/>
           <a:lstStyle/>
           <a:p>
+            <a:pPr algn="l"/>
             <a:r>
               <a:rPr lang="en-US" dirty="0" smtClean="0"/>
-              <a:t>Install </a:t>
+              <a:t>6. Install </a:t>
             </a:r>
             <a:r>
               <a:rPr lang="en-US" dirty="0" smtClean="0"/>
@@ -6572,9 +6584,14 @@
           <a:bodyPr/>
           <a:lstStyle/>
           <a:p>
+            <a:pPr algn="l"/>
             <a:r>
               <a:rPr lang="en-US" dirty="0" smtClean="0"/>
-              <a:t>Run the CPU benchmark</a:t>
+              <a:t>7. Run </a:t>
+            </a:r>
+            <a:r>
+              <a:rPr lang="en-US" dirty="0" smtClean="0"/>
+              <a:t>the CPU benchmark</a:t>
             </a:r>
             <a:endParaRPr lang="en-US" dirty="0"/>
           </a:p>
@@ -6836,19 +6853,20 @@
           <a:bodyPr/>
           <a:lstStyle/>
           <a:p>
-            <a:r>
-              <a:rPr lang="en-US" dirty="0" smtClean="0"/>
-              <a:t>Interpret </a:t>
-            </a:r>
-            <a:r>
-              <a:rPr lang="en-US" dirty="0" smtClean="0"/>
+            <a:pPr algn="l"/>
+            <a:r>
+              <a:rPr lang="en-US" sz="4000" dirty="0" smtClean="0"/>
+              <a:t>8. Interpret </a:t>
+            </a:r>
+            <a:r>
+              <a:rPr lang="en-US" sz="4000" dirty="0" smtClean="0"/>
               <a:t>the CPU </a:t>
             </a:r>
             <a:r>
-              <a:rPr lang="en-US" dirty="0" smtClean="0"/>
+              <a:rPr lang="en-US" sz="4000" dirty="0" smtClean="0"/>
               <a:t>benchmark results</a:t>
             </a:r>
-            <a:endParaRPr lang="en-US" dirty="0"/>
+            <a:endParaRPr lang="en-US" sz="4000" dirty="0"/>
           </a:p>
         </p:txBody>
       </p:sp>
@@ -7008,6 +7026,482 @@
           <a:bodyPr/>
           <a:lstStyle/>
           <a:p>
+            <a:pPr algn="l"/>
+            <a:r>
+              <a:rPr lang="en-US" dirty="0" smtClean="0"/>
+              <a:t>9. Run </a:t>
+            </a:r>
+            <a:r>
+              <a:rPr lang="en-US" dirty="0" smtClean="0"/>
+              <a:t>the </a:t>
+            </a:r>
+            <a:r>
+              <a:rPr lang="en-US" dirty="0" smtClean="0"/>
+              <a:t>RAM </a:t>
+            </a:r>
+            <a:r>
+              <a:rPr lang="en-US" dirty="0" smtClean="0"/>
+              <a:t>benchmark</a:t>
+            </a:r>
+            <a:endParaRPr lang="en-US" dirty="0"/>
+          </a:p>
+        </p:txBody>
+      </p:sp>
+      <p:sp>
+        <p:nvSpPr>
+          <p:cNvPr id="3" name="Content Placeholder 2"/>
+          <p:cNvSpPr>
+            <a:spLocks noGrp="1"/>
+          </p:cNvSpPr>
+          <p:nvPr>
+            <p:ph idx="1"/>
+          </p:nvPr>
+        </p:nvSpPr>
+        <p:spPr/>
+        <p:txBody>
+          <a:bodyPr/>
+          <a:lstStyle/>
+          <a:p>
+            <a:endParaRPr lang="en-US" dirty="0"/>
+          </a:p>
+        </p:txBody>
+      </p:sp>
+      <p:sp>
+        <p:nvSpPr>
+          <p:cNvPr id="4" name="Rectangle 3"/>
+          <p:cNvSpPr/>
+          <p:nvPr/>
+        </p:nvSpPr>
+        <p:spPr>
+          <a:xfrm>
+            <a:off x="457200" y="1600200"/>
+            <a:ext cx="8229600" cy="1200329"/>
+          </a:xfrm>
+          <a:prstGeom prst="rect">
+            <a:avLst/>
+          </a:prstGeom>
+        </p:spPr>
+        <p:style>
+          <a:lnRef idx="2">
+            <a:schemeClr val="dk1"/>
+          </a:lnRef>
+          <a:fillRef idx="1">
+            <a:schemeClr val="lt1"/>
+          </a:fillRef>
+          <a:effectRef idx="0">
+            <a:schemeClr val="dk1"/>
+          </a:effectRef>
+          <a:fontRef idx="minor">
+            <a:schemeClr val="dk1"/>
+          </a:fontRef>
+        </p:style>
+        <p:txBody>
+          <a:bodyPr wrap="square">
+            <a:spAutoFit/>
+          </a:bodyPr>
+          <a:lstStyle/>
+          <a:p>
+            <a:r>
+              <a:rPr lang="en-US" b="1" dirty="0" smtClean="0"/>
+              <a:t># In Windows </a:t>
+            </a:r>
+            <a:r>
+              <a:rPr lang="en-US" b="1" dirty="0" err="1" smtClean="0"/>
+              <a:t>PowerShell</a:t>
+            </a:r>
+            <a:r>
+              <a:rPr lang="en-US" b="1" dirty="0" smtClean="0"/>
+              <a:t>:</a:t>
+            </a:r>
+            <a:endParaRPr lang="en-US" dirty="0" smtClean="0"/>
+          </a:p>
+          <a:p>
+            <a:r>
+              <a:rPr lang="en-US" dirty="0" smtClean="0"/>
+              <a:t>.\stream.exe | Tee-Object </a:t>
+            </a:r>
+            <a:r>
+              <a:rPr lang="en-US" dirty="0" smtClean="0"/>
+              <a:t>stream-pc-run1.txt</a:t>
+            </a:r>
+          </a:p>
+          <a:p>
+            <a:r>
+              <a:rPr lang="en-US" dirty="0" smtClean="0"/>
+              <a:t>.\stream.exe | Tee-Object </a:t>
+            </a:r>
+            <a:r>
+              <a:rPr lang="en-US" dirty="0" smtClean="0"/>
+              <a:t>stream-pc-run2.txt</a:t>
+            </a:r>
+          </a:p>
+          <a:p>
+            <a:r>
+              <a:rPr lang="en-US" dirty="0" smtClean="0"/>
+              <a:t>.\stream.exe | Tee-Object </a:t>
+            </a:r>
+            <a:r>
+              <a:rPr lang="en-US" dirty="0" smtClean="0"/>
+              <a:t>stream-pc-run3.txt</a:t>
+            </a:r>
+            <a:endParaRPr lang="en-US" dirty="0"/>
+          </a:p>
+        </p:txBody>
+      </p:sp>
+      <p:sp>
+        <p:nvSpPr>
+          <p:cNvPr id="6" name="Rectangle 5"/>
+          <p:cNvSpPr/>
+          <p:nvPr/>
+        </p:nvSpPr>
+        <p:spPr>
+          <a:xfrm>
+            <a:off x="457200" y="4038600"/>
+            <a:ext cx="8229600" cy="1200329"/>
+          </a:xfrm>
+          <a:prstGeom prst="rect">
+            <a:avLst/>
+          </a:prstGeom>
+        </p:spPr>
+        <p:style>
+          <a:lnRef idx="2">
+            <a:schemeClr val="dk1"/>
+          </a:lnRef>
+          <a:fillRef idx="1">
+            <a:schemeClr val="lt1"/>
+          </a:fillRef>
+          <a:effectRef idx="0">
+            <a:schemeClr val="dk1"/>
+          </a:effectRef>
+          <a:fontRef idx="minor">
+            <a:schemeClr val="dk1"/>
+          </a:fontRef>
+        </p:style>
+        <p:txBody>
+          <a:bodyPr wrap="square">
+            <a:spAutoFit/>
+          </a:bodyPr>
+          <a:lstStyle/>
+          <a:p>
+            <a:r>
+              <a:rPr lang="en-US" b="1" dirty="0" smtClean="0"/>
+              <a:t># In Terminal on </a:t>
+            </a:r>
+            <a:r>
+              <a:rPr lang="en-US" b="1" dirty="0" err="1" smtClean="0"/>
+              <a:t>macOS</a:t>
+            </a:r>
+            <a:r>
+              <a:rPr lang="en-US" b="1" dirty="0" smtClean="0"/>
+              <a:t> over SSH:</a:t>
+            </a:r>
+            <a:endParaRPr lang="en-US" dirty="0" smtClean="0"/>
+          </a:p>
+          <a:p>
+            <a:r>
+              <a:rPr lang="en-US" dirty="0" smtClean="0"/>
+              <a:t>./stream | tee </a:t>
+            </a:r>
+            <a:r>
+              <a:rPr lang="en-US" dirty="0" smtClean="0"/>
+              <a:t>stream-mac-run1.txt</a:t>
+            </a:r>
+          </a:p>
+          <a:p>
+            <a:r>
+              <a:rPr lang="en-US" dirty="0" smtClean="0"/>
+              <a:t>./stream | tee </a:t>
+            </a:r>
+            <a:r>
+              <a:rPr lang="en-US" dirty="0" smtClean="0"/>
+              <a:t>stream-mac-run2.txt</a:t>
+            </a:r>
+          </a:p>
+          <a:p>
+            <a:r>
+              <a:rPr lang="en-US" dirty="0" smtClean="0"/>
+              <a:t>./stream | tee </a:t>
+            </a:r>
+            <a:r>
+              <a:rPr lang="en-US" dirty="0" smtClean="0"/>
+              <a:t>stream-mac-run3.txt </a:t>
+            </a:r>
+            <a:endParaRPr lang="en-US" dirty="0" smtClean="0"/>
+          </a:p>
+        </p:txBody>
+      </p:sp>
+    </p:spTree>
+  </p:cSld>
+  <p:clrMapOvr>
+    <a:masterClrMapping/>
+  </p:clrMapOvr>
+</p:sld>
+</file>
+
+<file path=ppt/slides/slide24.xml><?xml version="1.0" encoding="utf-8"?>
+<p:sld xmlns:a="http://schemas.openxmlformats.org/drawingml/2006/main" xmlns:r="http://schemas.openxmlformats.org/officeDocument/2006/relationships" xmlns:p="http://schemas.openxmlformats.org/presentationml/2006/main">
+  <p:cSld>
+    <p:spTree>
+      <p:nvGrpSpPr>
+        <p:cNvPr id="1" name=""/>
+        <p:cNvGrpSpPr/>
+        <p:nvPr/>
+      </p:nvGrpSpPr>
+      <p:grpSpPr>
+        <a:xfrm>
+          <a:off x="0" y="0"/>
+          <a:ext cx="0" cy="0"/>
+          <a:chOff x="0" y="0"/>
+          <a:chExt cx="0" cy="0"/>
+        </a:xfrm>
+      </p:grpSpPr>
+      <p:sp>
+        <p:nvSpPr>
+          <p:cNvPr id="2" name="Title 1"/>
+          <p:cNvSpPr>
+            <a:spLocks noGrp="1"/>
+          </p:cNvSpPr>
+          <p:nvPr>
+            <p:ph type="title"/>
+          </p:nvPr>
+        </p:nvSpPr>
+        <p:spPr/>
+        <p:txBody>
+          <a:bodyPr/>
+          <a:lstStyle/>
+          <a:p>
+            <a:pPr algn="l"/>
+            <a:r>
+              <a:rPr lang="en-US" sz="3800" dirty="0" smtClean="0"/>
+              <a:t>10. Interpret </a:t>
+            </a:r>
+            <a:r>
+              <a:rPr lang="en-US" sz="3800" dirty="0" smtClean="0"/>
+              <a:t>the </a:t>
+            </a:r>
+            <a:r>
+              <a:rPr lang="en-US" sz="3800" dirty="0" smtClean="0"/>
+              <a:t>RAM benchmark results</a:t>
+            </a:r>
+            <a:endParaRPr lang="en-US" sz="3800" dirty="0"/>
+          </a:p>
+        </p:txBody>
+      </p:sp>
+      <p:sp>
+        <p:nvSpPr>
+          <p:cNvPr id="3" name="Content Placeholder 2"/>
+          <p:cNvSpPr>
+            <a:spLocks noGrp="1"/>
+          </p:cNvSpPr>
+          <p:nvPr>
+            <p:ph idx="1"/>
+          </p:nvPr>
+        </p:nvSpPr>
+        <p:spPr/>
+        <p:txBody>
+          <a:bodyPr/>
+          <a:lstStyle/>
+          <a:p>
+            <a:r>
+              <a:rPr lang="en-US" sz="1600" b="1" dirty="0" smtClean="0"/>
+              <a:t>Copy</a:t>
+            </a:r>
+            <a:r>
+              <a:rPr lang="en-US" sz="1600" dirty="0" smtClean="0"/>
+              <a:t>: memory copy bandwidth </a:t>
+            </a:r>
+          </a:p>
+          <a:p>
+            <a:r>
+              <a:rPr lang="en-US" sz="1600" b="1" dirty="0" smtClean="0"/>
+              <a:t>Scale</a:t>
+            </a:r>
+            <a:r>
+              <a:rPr lang="en-US" sz="1600" dirty="0" smtClean="0"/>
+              <a:t>: read, multiply, and write </a:t>
+            </a:r>
+          </a:p>
+          <a:p>
+            <a:r>
+              <a:rPr lang="en-US" sz="1600" b="1" dirty="0" smtClean="0"/>
+              <a:t>Add</a:t>
+            </a:r>
+            <a:r>
+              <a:rPr lang="en-US" sz="1600" dirty="0" smtClean="0"/>
+              <a:t>: two reads and one write </a:t>
+            </a:r>
+          </a:p>
+          <a:p>
+            <a:r>
+              <a:rPr lang="en-US" sz="1600" b="1" dirty="0" smtClean="0"/>
+              <a:t>Triad</a:t>
+            </a:r>
+            <a:r>
+              <a:rPr lang="en-US" sz="1600" dirty="0" smtClean="0"/>
+              <a:t>: two reads, one multiply, one add, and one write (the most representative overall</a:t>
+            </a:r>
+            <a:r>
+              <a:rPr lang="en-US" sz="1600" dirty="0" smtClean="0"/>
+              <a:t>)</a:t>
+            </a:r>
+          </a:p>
+          <a:p>
+            <a:r>
+              <a:rPr lang="en-US" sz="1600" dirty="0" smtClean="0"/>
+              <a:t>Use </a:t>
+            </a:r>
+            <a:r>
+              <a:rPr lang="en-US" sz="1600" b="1" dirty="0" smtClean="0"/>
+              <a:t>Triad</a:t>
+            </a:r>
+            <a:r>
+              <a:rPr lang="en-US" sz="1600" dirty="0" smtClean="0"/>
+              <a:t> as the primary comparison.</a:t>
+            </a:r>
+          </a:p>
+          <a:p>
+            <a:r>
+              <a:rPr lang="en-US" sz="1600" dirty="0" smtClean="0"/>
+              <a:t>STREAM developers recommend </a:t>
+            </a:r>
+            <a:r>
+              <a:rPr lang="en-US" sz="1600" b="1" dirty="0" smtClean="0"/>
+              <a:t>Triad</a:t>
+            </a:r>
+            <a:r>
+              <a:rPr lang="en-US" sz="1600" dirty="0" smtClean="0"/>
+              <a:t> because it represents a realistic memory-intensive workload involving both reads and writes. The other operations provide additional context:</a:t>
+            </a:r>
+          </a:p>
+          <a:p>
+            <a:r>
+              <a:rPr lang="en-US" sz="1600" dirty="0" smtClean="0"/>
+              <a:t>Upload the result files and ask </a:t>
+            </a:r>
+            <a:r>
+              <a:rPr lang="en-US" sz="1600" dirty="0" err="1" smtClean="0"/>
+              <a:t>ChatGPT</a:t>
+            </a:r>
+            <a:r>
+              <a:rPr lang="en-US" sz="1600" dirty="0" smtClean="0"/>
+              <a:t> to </a:t>
+            </a:r>
+            <a:r>
+              <a:rPr lang="en-US" sz="1600" dirty="0" err="1" smtClean="0"/>
+              <a:t>calaculte</a:t>
+            </a:r>
+            <a:r>
+              <a:rPr lang="en-US" sz="1600" dirty="0" smtClean="0"/>
+              <a:t> and compare RAM benchmark results.</a:t>
+            </a:r>
+            <a:endParaRPr lang="en-US" sz="1600" dirty="0"/>
+          </a:p>
+        </p:txBody>
+      </p:sp>
+      <p:pic>
+        <p:nvPicPr>
+          <p:cNvPr id="2050" name="Picture 2"/>
+          <p:cNvPicPr>
+            <a:picLocks noChangeAspect="1" noChangeArrowheads="1"/>
+          </p:cNvPicPr>
+          <p:nvPr/>
+        </p:nvPicPr>
+        <p:blipFill>
+          <a:blip r:embed="rId2" cstate="print"/>
+          <a:srcRect/>
+          <a:stretch>
+            <a:fillRect/>
+          </a:stretch>
+        </p:blipFill>
+        <p:spPr bwMode="auto">
+          <a:xfrm>
+            <a:off x="2286000" y="4152900"/>
+            <a:ext cx="4594225" cy="876300"/>
+          </a:xfrm>
+          <a:prstGeom prst="rect">
+            <a:avLst/>
+          </a:prstGeom>
+          <a:noFill/>
+          <a:ln w="9525">
+            <a:noFill/>
+            <a:miter lim="800000"/>
+            <a:headEnd/>
+            <a:tailEnd/>
+          </a:ln>
+        </p:spPr>
+      </p:pic>
+      <p:pic>
+        <p:nvPicPr>
+          <p:cNvPr id="2051" name="Picture 3"/>
+          <p:cNvPicPr>
+            <a:picLocks noChangeAspect="1" noChangeArrowheads="1"/>
+          </p:cNvPicPr>
+          <p:nvPr/>
+        </p:nvPicPr>
+        <p:blipFill>
+          <a:blip r:embed="rId3" cstate="print"/>
+          <a:srcRect/>
+          <a:stretch>
+            <a:fillRect/>
+          </a:stretch>
+        </p:blipFill>
+        <p:spPr bwMode="auto">
+          <a:xfrm>
+            <a:off x="2209800" y="5410200"/>
+            <a:ext cx="4787900" cy="727075"/>
+          </a:xfrm>
+          <a:prstGeom prst="rect">
+            <a:avLst/>
+          </a:prstGeom>
+          <a:noFill/>
+          <a:ln w="9525">
+            <a:noFill/>
+            <a:miter lim="800000"/>
+            <a:headEnd/>
+            <a:tailEnd/>
+          </a:ln>
+        </p:spPr>
+      </p:pic>
+    </p:spTree>
+  </p:cSld>
+  <p:clrMapOvr>
+    <a:masterClrMapping/>
+  </p:clrMapOvr>
+</p:sld>
+</file>
+
+<file path=ppt/slides/slide25.xml><?xml version="1.0" encoding="utf-8"?>
+<p:sld xmlns:a="http://schemas.openxmlformats.org/drawingml/2006/main" xmlns:r="http://schemas.openxmlformats.org/officeDocument/2006/relationships" xmlns:p="http://schemas.openxmlformats.org/presentationml/2006/main">
+  <p:cSld>
+    <p:spTree>
+      <p:nvGrpSpPr>
+        <p:cNvPr id="1" name=""/>
+        <p:cNvGrpSpPr/>
+        <p:nvPr/>
+      </p:nvGrpSpPr>
+      <p:grpSpPr>
+        <a:xfrm>
+          <a:off x="0" y="0"/>
+          <a:ext cx="0" cy="0"/>
+          <a:chOff x="0" y="0"/>
+          <a:chExt cx="0" cy="0"/>
+        </a:xfrm>
+      </p:grpSpPr>
+      <p:sp>
+        <p:nvSpPr>
+          <p:cNvPr id="2" name="Title 1"/>
+          <p:cNvSpPr>
+            <a:spLocks noGrp="1"/>
+          </p:cNvSpPr>
+          <p:nvPr>
+            <p:ph type="title"/>
+          </p:nvPr>
+        </p:nvSpPr>
+        <p:spPr/>
+        <p:txBody>
+          <a:bodyPr/>
+          <a:lstStyle/>
+          <a:p>
             <a:r>
               <a:rPr lang="en-US" sz="3800" dirty="0" smtClean="0"/>
               <a:t>Example Quality Attribute: Modifiability</a:t>
@@ -7169,7 +7663,7 @@
 </p:sld>
 </file>
 
-<file path=ppt/slides/slide24.xml><?xml version="1.0" encoding="utf-8"?>
+<file path=ppt/slides/slide26.xml><?xml version="1.0" encoding="utf-8"?>
 <p:sld xmlns:a="http://schemas.openxmlformats.org/drawingml/2006/main" xmlns:r="http://schemas.openxmlformats.org/officeDocument/2006/relationships" xmlns:p="http://schemas.openxmlformats.org/presentationml/2006/main">
   <p:cSld>
     <p:spTree>
@@ -7334,7 +7828,7 @@
 </p:sld>
 </file>
 
-<file path=ppt/slides/slide25.xml><?xml version="1.0" encoding="utf-8"?>
+<file path=ppt/slides/slide27.xml><?xml version="1.0" encoding="utf-8"?>
 <p:sld xmlns:a="http://schemas.openxmlformats.org/drawingml/2006/main" xmlns:r="http://schemas.openxmlformats.org/officeDocument/2006/relationships" xmlns:p="http://schemas.openxmlformats.org/presentationml/2006/main">
   <p:cSld>
     <p:spTree>
@@ -7385,322 +7879,6 @@
 </p:sld>
 </file>
 
-<file path=ppt/slides/slide26.xml><?xml version="1.0" encoding="utf-8"?>
-<p:sld xmlns:a="http://schemas.openxmlformats.org/drawingml/2006/main" xmlns:r="http://schemas.openxmlformats.org/officeDocument/2006/relationships" xmlns:p="http://schemas.openxmlformats.org/presentationml/2006/main">
-  <p:cSld>
-    <p:spTree>
-      <p:nvGrpSpPr>
-        <p:cNvPr id="1" name=""/>
-        <p:cNvGrpSpPr/>
-        <p:nvPr/>
-      </p:nvGrpSpPr>
-      <p:grpSpPr>
-        <a:xfrm>
-          <a:off x="0" y="0"/>
-          <a:ext cx="0" cy="0"/>
-          <a:chOff x="0" y="0"/>
-          <a:chExt cx="0" cy="0"/>
-        </a:xfrm>
-      </p:grpSpPr>
-      <p:sp>
-        <p:nvSpPr>
-          <p:cNvPr id="2" name="Title 1"/>
-          <p:cNvSpPr>
-            <a:spLocks noGrp="1"/>
-          </p:cNvSpPr>
-          <p:nvPr>
-            <p:ph type="title"/>
-          </p:nvPr>
-        </p:nvSpPr>
-        <p:spPr/>
-        <p:txBody>
-          <a:bodyPr/>
-          <a:lstStyle/>
-          <a:p>
-            <a:r>
-              <a:rPr lang="en-US" dirty="0" smtClean="0"/>
-              <a:t>Scenarios</a:t>
-            </a:r>
-            <a:endParaRPr lang="en-US" dirty="0"/>
-          </a:p>
-        </p:txBody>
-      </p:sp>
-      <p:sp>
-        <p:nvSpPr>
-          <p:cNvPr id="3" name="Content Placeholder 2"/>
-          <p:cNvSpPr>
-            <a:spLocks noGrp="1"/>
-          </p:cNvSpPr>
-          <p:nvPr>
-            <p:ph idx="1"/>
-          </p:nvPr>
-        </p:nvSpPr>
-        <p:spPr/>
-        <p:txBody>
-          <a:bodyPr/>
-          <a:lstStyle/>
-          <a:p>
-            <a:r>
-              <a:rPr lang="en-US" sz="2200" dirty="0" smtClean="0"/>
-              <a:t>Typically the first job of an architecture analysis is to precisely </a:t>
-            </a:r>
-            <a:r>
-              <a:rPr lang="en-US" sz="2200" i="1" dirty="0" smtClean="0">
-                <a:solidFill>
-                  <a:srgbClr val="C00000"/>
-                </a:solidFill>
-              </a:rPr>
-              <a:t>elicit the specific quality goals</a:t>
-            </a:r>
-            <a:r>
-              <a:rPr lang="en-US" sz="2200" dirty="0" smtClean="0"/>
-              <a:t> against which the architecture will be judged. The </a:t>
-            </a:r>
-            <a:r>
-              <a:rPr lang="en-US" sz="2200" i="1" dirty="0" smtClean="0">
-                <a:solidFill>
-                  <a:srgbClr val="C00000"/>
-                </a:solidFill>
-              </a:rPr>
-              <a:t>mechanism</a:t>
-            </a:r>
-            <a:r>
-              <a:rPr lang="en-US" sz="2200" dirty="0" smtClean="0"/>
-              <a:t> that we use for this elicitation is the </a:t>
-            </a:r>
-            <a:r>
-              <a:rPr lang="en-US" sz="2200" u="sng" dirty="0" smtClean="0"/>
-              <a:t>scenario</a:t>
-            </a:r>
-            <a:r>
-              <a:rPr lang="en-US" sz="2200" dirty="0" smtClean="0"/>
-              <a:t>.</a:t>
-            </a:r>
-          </a:p>
-          <a:p>
-            <a:r>
-              <a:rPr lang="en-US" sz="2200" i="1" dirty="0" smtClean="0">
-                <a:solidFill>
-                  <a:srgbClr val="C00000"/>
-                </a:solidFill>
-              </a:rPr>
-              <a:t>A scenario</a:t>
-            </a:r>
-            <a:r>
-              <a:rPr lang="en-US" sz="2200" dirty="0" smtClean="0"/>
-              <a:t> is a </a:t>
-            </a:r>
-            <a:r>
-              <a:rPr lang="en-US" sz="2200" u="sng" dirty="0" smtClean="0"/>
-              <a:t>short statement</a:t>
-            </a:r>
-            <a:r>
-              <a:rPr lang="en-US" sz="2200" dirty="0" smtClean="0"/>
-              <a:t> describing an </a:t>
-            </a:r>
-            <a:r>
-              <a:rPr lang="en-US" sz="2200" u="sng" dirty="0" smtClean="0"/>
-              <a:t>interaction</a:t>
-            </a:r>
-            <a:r>
-              <a:rPr lang="en-US" sz="2200" dirty="0" smtClean="0"/>
-              <a:t> of one of the </a:t>
-            </a:r>
-            <a:r>
-              <a:rPr lang="en-US" sz="2200" u="sng" dirty="0" smtClean="0"/>
-              <a:t>stakeholders</a:t>
-            </a:r>
-            <a:r>
-              <a:rPr lang="en-US" sz="2200" dirty="0" smtClean="0"/>
-              <a:t> with the system.</a:t>
-            </a:r>
-          </a:p>
-          <a:p>
-            <a:pPr lvl="1"/>
-            <a:r>
-              <a:rPr lang="en-US" sz="1700" i="1" dirty="0" smtClean="0">
-                <a:solidFill>
-                  <a:srgbClr val="C00000"/>
-                </a:solidFill>
-              </a:rPr>
-              <a:t>A user</a:t>
-            </a:r>
-            <a:r>
-              <a:rPr lang="en-US" sz="1700" dirty="0" smtClean="0"/>
-              <a:t> would describe using the system to perform some task; his scenarios would very much resemble use cases in object-oriented parlance.</a:t>
-            </a:r>
-          </a:p>
-          <a:p>
-            <a:pPr lvl="1"/>
-            <a:r>
-              <a:rPr lang="en-US" sz="1700" i="1" dirty="0" smtClean="0">
-                <a:solidFill>
-                  <a:srgbClr val="C00000"/>
-                </a:solidFill>
-              </a:rPr>
-              <a:t>A maintainer</a:t>
-            </a:r>
-            <a:r>
-              <a:rPr lang="en-US" sz="1700" dirty="0" smtClean="0"/>
-              <a:t> would describe making a change to the system, such as upgrading the operating system in a particular way or adding a specific new function.</a:t>
-            </a:r>
-          </a:p>
-          <a:p>
-            <a:pPr lvl="1"/>
-            <a:r>
-              <a:rPr lang="en-US" sz="1700" i="1" dirty="0" smtClean="0">
-                <a:solidFill>
-                  <a:srgbClr val="C00000"/>
-                </a:solidFill>
-              </a:rPr>
-              <a:t>A developer's</a:t>
-            </a:r>
-            <a:r>
-              <a:rPr lang="en-US" sz="1700" dirty="0" smtClean="0"/>
-              <a:t> scenario might talk about using the architecture to build the system or predict its performance.</a:t>
-            </a:r>
-          </a:p>
-          <a:p>
-            <a:pPr lvl="1"/>
-            <a:r>
-              <a:rPr lang="en-US" sz="1700" i="1" dirty="0" smtClean="0">
-                <a:solidFill>
-                  <a:srgbClr val="C00000"/>
-                </a:solidFill>
-              </a:rPr>
-              <a:t>A customer's</a:t>
-            </a:r>
-            <a:r>
-              <a:rPr lang="en-US" sz="1700" dirty="0" smtClean="0"/>
-              <a:t> scenario might describe how the architecture is to be re-used for a second product in a product line.</a:t>
-            </a:r>
-          </a:p>
-        </p:txBody>
-      </p:sp>
-    </p:spTree>
-  </p:cSld>
-  <p:clrMapOvr>
-    <a:masterClrMapping/>
-  </p:clrMapOvr>
-</p:sld>
-</file>
-
-<file path=ppt/slides/slide27.xml><?xml version="1.0" encoding="utf-8"?>
-<p:sld xmlns:a="http://schemas.openxmlformats.org/drawingml/2006/main" xmlns:r="http://schemas.openxmlformats.org/officeDocument/2006/relationships" xmlns:p="http://schemas.openxmlformats.org/presentationml/2006/main">
-  <p:cSld>
-    <p:spTree>
-      <p:nvGrpSpPr>
-        <p:cNvPr id="1" name=""/>
-        <p:cNvGrpSpPr/>
-        <p:nvPr/>
-      </p:nvGrpSpPr>
-      <p:grpSpPr>
-        <a:xfrm>
-          <a:off x="0" y="0"/>
-          <a:ext cx="0" cy="0"/>
-          <a:chOff x="0" y="0"/>
-          <a:chExt cx="0" cy="0"/>
-        </a:xfrm>
-      </p:grpSpPr>
-      <p:sp>
-        <p:nvSpPr>
-          <p:cNvPr id="2" name="Title 1"/>
-          <p:cNvSpPr>
-            <a:spLocks noGrp="1"/>
-          </p:cNvSpPr>
-          <p:nvPr>
-            <p:ph type="title"/>
-          </p:nvPr>
-        </p:nvSpPr>
-        <p:spPr/>
-        <p:txBody>
-          <a:bodyPr/>
-          <a:lstStyle/>
-          <a:p>
-            <a:r>
-              <a:rPr lang="en-US" dirty="0" smtClean="0"/>
-              <a:t>Use Case Scenarios</a:t>
-            </a:r>
-            <a:endParaRPr lang="en-US" dirty="0"/>
-          </a:p>
-        </p:txBody>
-      </p:sp>
-      <p:sp>
-        <p:nvSpPr>
-          <p:cNvPr id="3" name="Content Placeholder 2"/>
-          <p:cNvSpPr>
-            <a:spLocks noGrp="1"/>
-          </p:cNvSpPr>
-          <p:nvPr>
-            <p:ph idx="1"/>
-          </p:nvPr>
-        </p:nvSpPr>
-        <p:spPr/>
-        <p:txBody>
-          <a:bodyPr/>
-          <a:lstStyle/>
-          <a:p>
-            <a:r>
-              <a:rPr lang="en-US" sz="2600" i="1" dirty="0" smtClean="0">
-                <a:solidFill>
-                  <a:srgbClr val="C00000"/>
-                </a:solidFill>
-              </a:rPr>
-              <a:t>Use case scenarios</a:t>
-            </a:r>
-            <a:r>
-              <a:rPr lang="en-US" sz="2600" dirty="0" smtClean="0"/>
-              <a:t> describe a </a:t>
-            </a:r>
-            <a:r>
-              <a:rPr lang="en-US" sz="2600" u="sng" dirty="0" smtClean="0"/>
-              <a:t>user's intended interaction</a:t>
-            </a:r>
-            <a:r>
-              <a:rPr lang="en-US" sz="2600" dirty="0" smtClean="0"/>
-              <a:t> with the completed, running system.</a:t>
-            </a:r>
-          </a:p>
-          <a:p>
-            <a:pPr lvl="1"/>
-            <a:r>
-              <a:rPr lang="en-US" sz="2200" dirty="0" smtClean="0"/>
-              <a:t>The user wants to examine budgetary and actual data under different fiscal years without re-entering project data. (</a:t>
-            </a:r>
-            <a:r>
-              <a:rPr lang="en-US" sz="2200" b="1" dirty="0" smtClean="0"/>
-              <a:t>usability</a:t>
-            </a:r>
-            <a:r>
-              <a:rPr lang="en-US" sz="2200" dirty="0" smtClean="0"/>
-              <a:t>)</a:t>
-            </a:r>
-          </a:p>
-          <a:p>
-            <a:pPr lvl="1"/>
-            <a:r>
-              <a:rPr lang="en-US" sz="2200" dirty="0" smtClean="0"/>
-              <a:t>User changes graph layout from horizontal to vertical and graph is redrawn in one second. (</a:t>
-            </a:r>
-            <a:r>
-              <a:rPr lang="en-US" sz="2200" b="1" dirty="0" smtClean="0"/>
-              <a:t>performance</a:t>
-            </a:r>
-            <a:r>
-              <a:rPr lang="en-US" sz="2200" dirty="0" smtClean="0"/>
-              <a:t>)</a:t>
-            </a:r>
-          </a:p>
-        </p:txBody>
-      </p:sp>
-    </p:spTree>
-  </p:cSld>
-  <p:clrMapOvr>
-    <a:masterClrMapping/>
-  </p:clrMapOvr>
-</p:sld>
-</file>
-
 <file path=ppt/slides/slide28.xml><?xml version="1.0" encoding="utf-8"?>
 <p:sld xmlns:a="http://schemas.openxmlformats.org/drawingml/2006/main" xmlns:r="http://schemas.openxmlformats.org/officeDocument/2006/relationships" xmlns:p="http://schemas.openxmlformats.org/presentationml/2006/main">
   <p:cSld>
@@ -7735,7 +7913,7 @@
           <a:p>
             <a:r>
               <a:rPr lang="en-US" dirty="0" smtClean="0"/>
-              <a:t>Growth Scenarios</a:t>
+              <a:t>Scenarios</a:t>
             </a:r>
             <a:endParaRPr lang="en-US" dirty="0"/>
           </a:p>
@@ -7757,51 +7935,138 @@
           <a:lstStyle/>
           <a:p>
             <a:r>
-              <a:rPr lang="en-US" sz="2600" i="1" dirty="0" smtClean="0">
+              <a:rPr lang="en-US" sz="2200" dirty="0" smtClean="0"/>
+              <a:t>Typically the first job of an architecture analysis is to precisely </a:t>
+            </a:r>
+            <a:r>
+              <a:rPr lang="en-US" sz="2200" i="1" dirty="0" smtClean="0">
                 <a:solidFill>
                   <a:srgbClr val="C00000"/>
                 </a:solidFill>
               </a:rPr>
-              <a:t>Growth scenarios</a:t>
-            </a:r>
-            <a:r>
-              <a:rPr lang="en-US" sz="2600" dirty="0" smtClean="0"/>
-              <a:t> represent typical anticipated future changes to a system.</a:t>
-            </a:r>
-          </a:p>
-          <a:p>
-            <a:pPr lvl="1"/>
+              <a:t>elicit the specific quality goals</a:t>
+            </a:r>
             <a:r>
               <a:rPr lang="en-US" sz="2200" dirty="0" smtClean="0"/>
-              <a:t>The maximum number of tracks to be handled by the system doubles and the maximum latency of track data to the screen is kept to </a:t>
-            </a:r>
-            <a:r>
-              <a:rPr lang="en-US" sz="2200" b="1" dirty="0" smtClean="0"/>
-              <a:t>200 </a:t>
-            </a:r>
-            <a:r>
-              <a:rPr lang="en-US" sz="2200" b="1" dirty="0" err="1" smtClean="0"/>
-              <a:t>ms</a:t>
-            </a:r>
-            <a:r>
-              <a:rPr lang="en-US" sz="2200" dirty="0" err="1" smtClean="0"/>
-              <a:t>.</a:t>
-            </a:r>
-            <a:endParaRPr lang="en-US" sz="2200" dirty="0" smtClean="0"/>
-          </a:p>
-          <a:p>
-            <a:pPr lvl="1"/>
+              <a:t> against which the architecture will be judged. The </a:t>
+            </a:r>
+            <a:r>
+              <a:rPr lang="en-US" sz="2200" i="1" dirty="0" smtClean="0">
+                <a:solidFill>
+                  <a:srgbClr val="C00000"/>
+                </a:solidFill>
+              </a:rPr>
+              <a:t>mechanism</a:t>
+            </a:r>
             <a:r>
               <a:rPr lang="en-US" sz="2200" dirty="0" smtClean="0"/>
-              <a:t>Migrate to a new operating system, or a new release of the existing operating system in less than </a:t>
-            </a:r>
-            <a:r>
-              <a:rPr lang="en-US" sz="2200" b="1" dirty="0" smtClean="0"/>
-              <a:t>a person-year of work</a:t>
+              <a:t> that we use for this elicitation is the </a:t>
+            </a:r>
+            <a:r>
+              <a:rPr lang="en-US" sz="2200" u="sng" dirty="0" smtClean="0"/>
+              <a:t>scenario</a:t>
             </a:r>
             <a:r>
               <a:rPr lang="en-US" sz="2200" dirty="0" smtClean="0"/>
               <a:t>.</a:t>
+            </a:r>
+          </a:p>
+          <a:p>
+            <a:r>
+              <a:rPr lang="en-US" sz="2200" i="1" dirty="0" smtClean="0">
+                <a:solidFill>
+                  <a:srgbClr val="C00000"/>
+                </a:solidFill>
+              </a:rPr>
+              <a:t>A scenario</a:t>
+            </a:r>
+            <a:r>
+              <a:rPr lang="en-US" sz="2200" dirty="0" smtClean="0"/>
+              <a:t> is a </a:t>
+            </a:r>
+            <a:r>
+              <a:rPr lang="en-US" sz="2200" u="sng" dirty="0" smtClean="0"/>
+              <a:t>short statement</a:t>
+            </a:r>
+            <a:r>
+              <a:rPr lang="en-US" sz="2200" dirty="0" smtClean="0"/>
+              <a:t> describing an </a:t>
+            </a:r>
+            <a:r>
+              <a:rPr lang="en-US" sz="2200" u="sng" dirty="0" smtClean="0"/>
+              <a:t>interaction</a:t>
+            </a:r>
+            <a:r>
+              <a:rPr lang="en-US" sz="2200" dirty="0" smtClean="0"/>
+              <a:t> of one of the </a:t>
+            </a:r>
+            <a:r>
+              <a:rPr lang="en-US" sz="2200" u="sng" dirty="0" smtClean="0"/>
+              <a:t>stakeholders</a:t>
+            </a:r>
+            <a:r>
+              <a:rPr lang="en-US" sz="2200" dirty="0" smtClean="0"/>
+              <a:t> with the system.</a:t>
+            </a:r>
+          </a:p>
+          <a:p>
+            <a:pPr lvl="1"/>
+            <a:r>
+              <a:rPr lang="en-US" sz="1700" i="1" dirty="0" smtClean="0">
+                <a:solidFill>
+                  <a:srgbClr val="C00000"/>
+                </a:solidFill>
+              </a:rPr>
+              <a:t>A user</a:t>
+            </a:r>
+            <a:r>
+              <a:rPr lang="en-US" sz="1700" dirty="0" smtClean="0"/>
+              <a:t> would describe using the system to perform some task; his scenarios would very much resemble use cases in object-oriented parlance.</a:t>
+            </a:r>
+          </a:p>
+          <a:p>
+            <a:pPr lvl="1"/>
+            <a:r>
+              <a:rPr lang="en-US" sz="1700" i="1" dirty="0" smtClean="0">
+                <a:solidFill>
+                  <a:srgbClr val="C00000"/>
+                </a:solidFill>
+              </a:rPr>
+              <a:t>A maintainer</a:t>
+            </a:r>
+            <a:r>
+              <a:rPr lang="en-US" sz="1700" dirty="0" smtClean="0"/>
+              <a:t> would describe making a change to the system, such as upgrading the operating system in a particular way or adding a specific new function.</a:t>
+            </a:r>
+          </a:p>
+          <a:p>
+            <a:pPr lvl="1"/>
+            <a:r>
+              <a:rPr lang="en-US" sz="1700" i="1" dirty="0" smtClean="0">
+                <a:solidFill>
+                  <a:srgbClr val="C00000"/>
+                </a:solidFill>
+              </a:rPr>
+              <a:t>A developer's</a:t>
+            </a:r>
+            <a:r>
+              <a:rPr lang="en-US" sz="1700" dirty="0" smtClean="0"/>
+              <a:t> scenario might talk about using the architecture to build the system or predict its performance.</a:t>
+            </a:r>
+          </a:p>
+          <a:p>
+            <a:pPr lvl="1"/>
+            <a:r>
+              <a:rPr lang="en-US" sz="1700" i="1" dirty="0" smtClean="0">
+                <a:solidFill>
+                  <a:srgbClr val="C00000"/>
+                </a:solidFill>
+              </a:rPr>
+              <a:t>A customer's</a:t>
+            </a:r>
+            <a:r>
+              <a:rPr lang="en-US" sz="1700" dirty="0" smtClean="0"/>
+              <a:t> scenario might describe how the architecture is to be re-used for a second product in a product line.</a:t>
             </a:r>
           </a:p>
         </p:txBody>
@@ -7848,7 +8113,7 @@
           <a:p>
             <a:r>
               <a:rPr lang="en-US" dirty="0" smtClean="0"/>
-              <a:t>Exploratory Scenarios</a:t>
+              <a:t>Use Case Scenarios</a:t>
             </a:r>
             <a:endParaRPr lang="en-US" dirty="0"/>
           </a:p>
@@ -7875,43 +8140,50 @@
                   <a:srgbClr val="C00000"/>
                 </a:solidFill>
               </a:rPr>
-              <a:t>Exploratory scenarios</a:t>
+              <a:t>Use case scenarios</a:t>
             </a:r>
             <a:r>
               <a:rPr lang="en-US" sz="2600" dirty="0" smtClean="0"/>
-              <a:t> push the envelope and stress the system.</a:t>
+              <a:t> describe a </a:t>
+            </a:r>
+            <a:r>
+              <a:rPr lang="en-US" sz="2600" u="sng" dirty="0" smtClean="0"/>
+              <a:t>user's intended interaction</a:t>
+            </a:r>
+            <a:r>
+              <a:rPr lang="en-US" sz="2600" dirty="0" smtClean="0"/>
+              <a:t> with the completed, running system.</a:t>
             </a:r>
           </a:p>
           <a:p>
             <a:pPr lvl="1"/>
             <a:r>
               <a:rPr lang="en-US" sz="2200" dirty="0" smtClean="0"/>
-              <a:t>Improve the system's </a:t>
+              <a:t>The user wants to examine budgetary and actual data under different fiscal years without re-entering project data. (</a:t>
             </a:r>
             <a:r>
               <a:rPr lang="en-US" sz="2200" b="1" dirty="0" smtClean="0"/>
-              <a:t>availability</a:t>
+              <a:t>usability</a:t>
             </a:r>
             <a:r>
               <a:rPr lang="en-US" sz="2200" dirty="0" smtClean="0"/>
-              <a:t> from 98% to 99.999%.</a:t>
+              <a:t>)</a:t>
             </a:r>
           </a:p>
           <a:p>
             <a:pPr lvl="1"/>
             <a:r>
               <a:rPr lang="en-US" sz="2200" dirty="0" smtClean="0"/>
-              <a:t>Half of the servers go down during normal operation without affecting overall system </a:t>
+              <a:t>User changes graph layout from horizontal to vertical and graph is redrawn in one second. (</a:t>
             </a:r>
             <a:r>
               <a:rPr lang="en-US" sz="2200" b="1" dirty="0" smtClean="0"/>
-              <a:t>availability</a:t>
+              <a:t>performance</a:t>
             </a:r>
             <a:r>
               <a:rPr lang="en-US" sz="2200" dirty="0" smtClean="0"/>
-              <a:t>.</a:t>
-            </a:r>
-            <a:endParaRPr lang="en-US" sz="2200" dirty="0"/>
+              <a:t>)</a:t>
+            </a:r>
           </a:p>
         </p:txBody>
       </p:sp>
@@ -8105,6 +8377,228 @@
           <a:p>
             <a:r>
               <a:rPr lang="en-US" dirty="0" smtClean="0"/>
+              <a:t>Growth Scenarios</a:t>
+            </a:r>
+            <a:endParaRPr lang="en-US" dirty="0"/>
+          </a:p>
+        </p:txBody>
+      </p:sp>
+      <p:sp>
+        <p:nvSpPr>
+          <p:cNvPr id="3" name="Content Placeholder 2"/>
+          <p:cNvSpPr>
+            <a:spLocks noGrp="1"/>
+          </p:cNvSpPr>
+          <p:nvPr>
+            <p:ph idx="1"/>
+          </p:nvPr>
+        </p:nvSpPr>
+        <p:spPr/>
+        <p:txBody>
+          <a:bodyPr/>
+          <a:lstStyle/>
+          <a:p>
+            <a:r>
+              <a:rPr lang="en-US" sz="2600" i="1" dirty="0" smtClean="0">
+                <a:solidFill>
+                  <a:srgbClr val="C00000"/>
+                </a:solidFill>
+              </a:rPr>
+              <a:t>Growth scenarios</a:t>
+            </a:r>
+            <a:r>
+              <a:rPr lang="en-US" sz="2600" dirty="0" smtClean="0"/>
+              <a:t> represent typical anticipated future changes to a system.</a:t>
+            </a:r>
+          </a:p>
+          <a:p>
+            <a:pPr lvl="1"/>
+            <a:r>
+              <a:rPr lang="en-US" sz="2200" dirty="0" smtClean="0"/>
+              <a:t>The maximum number of tracks to be handled by the system doubles and the maximum latency of track data to the screen is kept to </a:t>
+            </a:r>
+            <a:r>
+              <a:rPr lang="en-US" sz="2200" b="1" dirty="0" smtClean="0"/>
+              <a:t>200 </a:t>
+            </a:r>
+            <a:r>
+              <a:rPr lang="en-US" sz="2200" b="1" dirty="0" err="1" smtClean="0"/>
+              <a:t>ms</a:t>
+            </a:r>
+            <a:r>
+              <a:rPr lang="en-US" sz="2200" dirty="0" err="1" smtClean="0"/>
+              <a:t>.</a:t>
+            </a:r>
+            <a:endParaRPr lang="en-US" sz="2200" dirty="0" smtClean="0"/>
+          </a:p>
+          <a:p>
+            <a:pPr lvl="1"/>
+            <a:r>
+              <a:rPr lang="en-US" sz="2200" dirty="0" smtClean="0"/>
+              <a:t>Migrate to a new operating system, or a new release of the existing operating system in less than </a:t>
+            </a:r>
+            <a:r>
+              <a:rPr lang="en-US" sz="2200" b="1" dirty="0" smtClean="0"/>
+              <a:t>a person-year of work</a:t>
+            </a:r>
+            <a:r>
+              <a:rPr lang="en-US" sz="2200" dirty="0" smtClean="0"/>
+              <a:t>.</a:t>
+            </a:r>
+          </a:p>
+        </p:txBody>
+      </p:sp>
+    </p:spTree>
+  </p:cSld>
+  <p:clrMapOvr>
+    <a:masterClrMapping/>
+  </p:clrMapOvr>
+</p:sld>
+</file>
+
+<file path=ppt/slides/slide31.xml><?xml version="1.0" encoding="utf-8"?>
+<p:sld xmlns:a="http://schemas.openxmlformats.org/drawingml/2006/main" xmlns:r="http://schemas.openxmlformats.org/officeDocument/2006/relationships" xmlns:p="http://schemas.openxmlformats.org/presentationml/2006/main">
+  <p:cSld>
+    <p:spTree>
+      <p:nvGrpSpPr>
+        <p:cNvPr id="1" name=""/>
+        <p:cNvGrpSpPr/>
+        <p:nvPr/>
+      </p:nvGrpSpPr>
+      <p:grpSpPr>
+        <a:xfrm>
+          <a:off x="0" y="0"/>
+          <a:ext cx="0" cy="0"/>
+          <a:chOff x="0" y="0"/>
+          <a:chExt cx="0" cy="0"/>
+        </a:xfrm>
+      </p:grpSpPr>
+      <p:sp>
+        <p:nvSpPr>
+          <p:cNvPr id="2" name="Title 1"/>
+          <p:cNvSpPr>
+            <a:spLocks noGrp="1"/>
+          </p:cNvSpPr>
+          <p:nvPr>
+            <p:ph type="title"/>
+          </p:nvPr>
+        </p:nvSpPr>
+        <p:spPr/>
+        <p:txBody>
+          <a:bodyPr/>
+          <a:lstStyle/>
+          <a:p>
+            <a:r>
+              <a:rPr lang="en-US" dirty="0" smtClean="0"/>
+              <a:t>Exploratory Scenarios</a:t>
+            </a:r>
+            <a:endParaRPr lang="en-US" dirty="0"/>
+          </a:p>
+        </p:txBody>
+      </p:sp>
+      <p:sp>
+        <p:nvSpPr>
+          <p:cNvPr id="3" name="Content Placeholder 2"/>
+          <p:cNvSpPr>
+            <a:spLocks noGrp="1"/>
+          </p:cNvSpPr>
+          <p:nvPr>
+            <p:ph idx="1"/>
+          </p:nvPr>
+        </p:nvSpPr>
+        <p:spPr/>
+        <p:txBody>
+          <a:bodyPr/>
+          <a:lstStyle/>
+          <a:p>
+            <a:r>
+              <a:rPr lang="en-US" sz="2600" i="1" dirty="0" smtClean="0">
+                <a:solidFill>
+                  <a:srgbClr val="C00000"/>
+                </a:solidFill>
+              </a:rPr>
+              <a:t>Exploratory scenarios</a:t>
+            </a:r>
+            <a:r>
+              <a:rPr lang="en-US" sz="2600" dirty="0" smtClean="0"/>
+              <a:t> push the envelope and stress the system.</a:t>
+            </a:r>
+          </a:p>
+          <a:p>
+            <a:pPr lvl="1"/>
+            <a:r>
+              <a:rPr lang="en-US" sz="2200" dirty="0" smtClean="0"/>
+              <a:t>Improve the system's </a:t>
+            </a:r>
+            <a:r>
+              <a:rPr lang="en-US" sz="2200" b="1" dirty="0" smtClean="0"/>
+              <a:t>availability</a:t>
+            </a:r>
+            <a:r>
+              <a:rPr lang="en-US" sz="2200" dirty="0" smtClean="0"/>
+              <a:t> from 98% to 99.999%.</a:t>
+            </a:r>
+          </a:p>
+          <a:p>
+            <a:pPr lvl="1"/>
+            <a:r>
+              <a:rPr lang="en-US" sz="2200" dirty="0" smtClean="0"/>
+              <a:t>Half of the servers go down during normal operation without affecting overall system </a:t>
+            </a:r>
+            <a:r>
+              <a:rPr lang="en-US" sz="2200" b="1" dirty="0" smtClean="0"/>
+              <a:t>availability</a:t>
+            </a:r>
+            <a:r>
+              <a:rPr lang="en-US" sz="2200" dirty="0" smtClean="0"/>
+              <a:t>.</a:t>
+            </a:r>
+            <a:endParaRPr lang="en-US" sz="2200" dirty="0"/>
+          </a:p>
+        </p:txBody>
+      </p:sp>
+    </p:spTree>
+  </p:cSld>
+  <p:clrMapOvr>
+    <a:masterClrMapping/>
+  </p:clrMapOvr>
+</p:sld>
+</file>
+
+<file path=ppt/slides/slide32.xml><?xml version="1.0" encoding="utf-8"?>
+<p:sld xmlns:a="http://schemas.openxmlformats.org/drawingml/2006/main" xmlns:r="http://schemas.openxmlformats.org/officeDocument/2006/relationships" xmlns:p="http://schemas.openxmlformats.org/presentationml/2006/main">
+  <p:cSld>
+    <p:spTree>
+      <p:nvGrpSpPr>
+        <p:cNvPr id="1" name=""/>
+        <p:cNvGrpSpPr/>
+        <p:nvPr/>
+      </p:nvGrpSpPr>
+      <p:grpSpPr>
+        <a:xfrm>
+          <a:off x="0" y="0"/>
+          <a:ext cx="0" cy="0"/>
+          <a:chOff x="0" y="0"/>
+          <a:chExt cx="0" cy="0"/>
+        </a:xfrm>
+      </p:grpSpPr>
+      <p:sp>
+        <p:nvSpPr>
+          <p:cNvPr id="2" name="Title 1"/>
+          <p:cNvSpPr>
+            <a:spLocks noGrp="1"/>
+          </p:cNvSpPr>
+          <p:nvPr>
+            <p:ph type="title"/>
+          </p:nvPr>
+        </p:nvSpPr>
+        <p:spPr/>
+        <p:txBody>
+          <a:bodyPr/>
+          <a:lstStyle/>
+          <a:p>
+            <a:r>
+              <a:rPr lang="en-US" dirty="0" smtClean="0"/>
               <a:t>Quality Attribute Scenario Representation [1]</a:t>
             </a:r>
             <a:endParaRPr lang="en-US" dirty="0"/>
@@ -8179,7 +8673,7 @@
 </p:sld>
 </file>
 
-<file path=ppt/slides/slide31.xml><?xml version="1.0" encoding="utf-8"?>
+<file path=ppt/slides/slide33.xml><?xml version="1.0" encoding="utf-8"?>
 <p:sld xmlns:a="http://schemas.openxmlformats.org/drawingml/2006/main" xmlns:r="http://schemas.openxmlformats.org/officeDocument/2006/relationships" xmlns:p="http://schemas.openxmlformats.org/presentationml/2006/main">
   <p:cSld>
     <p:spTree>
@@ -8304,7 +8798,7 @@
 </p:sld>
 </file>
 
-<file path=ppt/slides/slide32.xml><?xml version="1.0" encoding="utf-8"?>
+<file path=ppt/slides/slide34.xml><?xml version="1.0" encoding="utf-8"?>
 <p:sld xmlns:a="http://schemas.openxmlformats.org/drawingml/2006/main" xmlns:r="http://schemas.openxmlformats.org/officeDocument/2006/relationships" xmlns:p="http://schemas.openxmlformats.org/presentationml/2006/main">
   <p:cSld>
     <p:spTree>
@@ -8384,7 +8878,7 @@
 </p:sld>
 </file>
 
-<file path=ppt/slides/slide33.xml><?xml version="1.0" encoding="utf-8"?>
+<file path=ppt/slides/slide35.xml><?xml version="1.0" encoding="utf-8"?>
 <p:sld xmlns:a="http://schemas.openxmlformats.org/drawingml/2006/main" xmlns:r="http://schemas.openxmlformats.org/officeDocument/2006/relationships" xmlns:p="http://schemas.openxmlformats.org/presentationml/2006/main">
   <p:cSld>
     <p:spTree>
@@ -8582,7 +9076,7 @@
 </p:sld>
 </file>
 
-<file path=ppt/slides/slide34.xml><?xml version="1.0" encoding="utf-8"?>
+<file path=ppt/slides/slide36.xml><?xml version="1.0" encoding="utf-8"?>
 <p:sld xmlns:a="http://schemas.openxmlformats.org/drawingml/2006/main" xmlns:r="http://schemas.openxmlformats.org/officeDocument/2006/relationships" xmlns:p="http://schemas.openxmlformats.org/presentationml/2006/main">
   <p:cSld>
     <p:spTree>
@@ -8803,7 +9297,7 @@
 </p:sld>
 </file>
 
-<file path=ppt/slides/slide35.xml><?xml version="1.0" encoding="utf-8"?>
+<file path=ppt/slides/slide37.xml><?xml version="1.0" encoding="utf-8"?>
 <p:sld xmlns:a="http://schemas.openxmlformats.org/drawingml/2006/main" xmlns:r="http://schemas.openxmlformats.org/officeDocument/2006/relationships" xmlns:p="http://schemas.openxmlformats.org/presentationml/2006/main">
   <p:cSld>
     <p:spTree>
@@ -8986,7 +9480,7 @@
 </p:sld>
 </file>
 
-<file path=ppt/slides/slide36.xml><?xml version="1.0" encoding="utf-8"?>
+<file path=ppt/slides/slide38.xml><?xml version="1.0" encoding="utf-8"?>
 <p:sld xmlns:a="http://schemas.openxmlformats.org/drawingml/2006/main" xmlns:r="http://schemas.openxmlformats.org/officeDocument/2006/relationships" xmlns:p="http://schemas.openxmlformats.org/presentationml/2006/main">
   <p:cSld>
     <p:spTree>
@@ -9037,7 +9531,7 @@
 </p:sld>
 </file>
 
-<file path=ppt/slides/slide37.xml><?xml version="1.0" encoding="utf-8"?>
+<file path=ppt/slides/slide39.xml><?xml version="1.0" encoding="utf-8"?>
 <p:sld xmlns:a="http://schemas.openxmlformats.org/drawingml/2006/main" xmlns:r="http://schemas.openxmlformats.org/officeDocument/2006/relationships" xmlns:p="http://schemas.openxmlformats.org/presentationml/2006/main">
   <p:cSld>
     <p:spTree>
@@ -9156,7 +9650,163 @@
 </p:sld>
 </file>
 
-<file path=ppt/slides/slide38.xml><?xml version="1.0" encoding="utf-8"?>
+<file path=ppt/slides/slide4.xml><?xml version="1.0" encoding="utf-8"?>
+<p:sld xmlns:a="http://schemas.openxmlformats.org/drawingml/2006/main" xmlns:r="http://schemas.openxmlformats.org/officeDocument/2006/relationships" xmlns:p="http://schemas.openxmlformats.org/presentationml/2006/main">
+  <p:cSld>
+    <p:spTree>
+      <p:nvGrpSpPr>
+        <p:cNvPr id="1" name=""/>
+        <p:cNvGrpSpPr/>
+        <p:nvPr/>
+      </p:nvGrpSpPr>
+      <p:grpSpPr>
+        <a:xfrm>
+          <a:off x="0" y="0"/>
+          <a:ext cx="0" cy="0"/>
+          <a:chOff x="0" y="0"/>
+          <a:chExt cx="0" cy="0"/>
+        </a:xfrm>
+      </p:grpSpPr>
+      <p:sp>
+        <p:nvSpPr>
+          <p:cNvPr id="2" name="Title 1"/>
+          <p:cNvSpPr>
+            <a:spLocks noGrp="1"/>
+          </p:cNvSpPr>
+          <p:nvPr>
+            <p:ph type="title"/>
+          </p:nvPr>
+        </p:nvSpPr>
+        <p:spPr/>
+        <p:txBody>
+          <a:bodyPr/>
+          <a:lstStyle/>
+          <a:p>
+            <a:r>
+              <a:rPr lang="en-US" dirty="0" smtClean="0"/>
+              <a:t>References</a:t>
+            </a:r>
+            <a:endParaRPr lang="en-US" dirty="0"/>
+          </a:p>
+        </p:txBody>
+      </p:sp>
+      <p:sp>
+        <p:nvSpPr>
+          <p:cNvPr id="3" name="Content Placeholder 2"/>
+          <p:cNvSpPr>
+            <a:spLocks noGrp="1"/>
+          </p:cNvSpPr>
+          <p:nvPr>
+            <p:ph idx="1"/>
+          </p:nvPr>
+        </p:nvSpPr>
+        <p:spPr>
+          <a:xfrm>
+            <a:off x="304800" y="1600200"/>
+            <a:ext cx="5867400" cy="4724400"/>
+          </a:xfrm>
+        </p:spPr>
+        <p:txBody>
+          <a:bodyPr/>
+          <a:lstStyle/>
+          <a:p>
+            <a:pPr marL="457200" indent="-457200">
+              <a:buFont typeface="+mj-lt"/>
+              <a:buAutoNum type="arabicPeriod"/>
+            </a:pPr>
+            <a:r>
+              <a:rPr lang="en-US" sz="2400" dirty="0" smtClean="0"/>
+              <a:t>Len Bass, Paul Clements and Rick </a:t>
+            </a:r>
+            <a:r>
+              <a:rPr lang="en-US" sz="2400" dirty="0" err="1" smtClean="0"/>
+              <a:t>Kazman</a:t>
+            </a:r>
+            <a:r>
+              <a:rPr lang="en-US" sz="2400" dirty="0" smtClean="0"/>
+              <a:t> (2021). Software Architecture in Practice. Addison-Wesley.</a:t>
+            </a:r>
+          </a:p>
+          <a:p>
+            <a:pPr marL="457200" indent="-457200">
+              <a:buFont typeface="+mj-lt"/>
+              <a:buAutoNum type="arabicPeriod"/>
+            </a:pPr>
+            <a:r>
+              <a:rPr lang="en-US" sz="2400" dirty="0" smtClean="0"/>
+              <a:t>R. </a:t>
+            </a:r>
+            <a:r>
+              <a:rPr lang="en-US" sz="2400" dirty="0" err="1" smtClean="0"/>
+              <a:t>Kazman</a:t>
+            </a:r>
+            <a:r>
+              <a:rPr lang="en-US" sz="2400" dirty="0" smtClean="0"/>
+              <a:t>, M. Klein and P. Clements (1998). Evaluating Software Architectures for Real-Time Systems.</a:t>
+            </a:r>
+          </a:p>
+          <a:p>
+            <a:pPr marL="457200" indent="-457200">
+              <a:buFont typeface="+mj-lt"/>
+              <a:buAutoNum type="arabicPeriod"/>
+            </a:pPr>
+            <a:r>
+              <a:rPr lang="en-US" sz="2400" dirty="0" smtClean="0"/>
+              <a:t>Rick </a:t>
+            </a:r>
+            <a:r>
+              <a:rPr lang="en-US" sz="2400" dirty="0" err="1" smtClean="0"/>
+              <a:t>Kazman</a:t>
+            </a:r>
+            <a:r>
+              <a:rPr lang="en-US" sz="2400" dirty="0" smtClean="0"/>
+              <a:t>, Mark Klein and Paul Clements (2000). ATAM: Method for Architecture Evaluation.</a:t>
+            </a:r>
+          </a:p>
+        </p:txBody>
+      </p:sp>
+      <p:pic>
+        <p:nvPicPr>
+          <p:cNvPr id="4" name="Picture 4" descr="http://2.bp.blogspot.com/-FqRM_5NQE6Q/TaSdzyWfvtI/AAAAAAAAAFg/C_2LDJWJOx4/s1600/books-pile.jpg"/>
+          <p:cNvPicPr>
+            <a:picLocks noChangeAspect="1" noChangeArrowheads="1"/>
+          </p:cNvPicPr>
+          <p:nvPr/>
+        </p:nvPicPr>
+        <p:blipFill>
+          <a:blip r:embed="rId2" cstate="print"/>
+          <a:srcRect/>
+          <a:stretch>
+            <a:fillRect/>
+          </a:stretch>
+        </p:blipFill>
+        <p:spPr bwMode="auto">
+          <a:xfrm>
+            <a:off x="6267450" y="1752600"/>
+            <a:ext cx="2724150" cy="4133850"/>
+          </a:xfrm>
+          <a:prstGeom prst="rect">
+            <a:avLst/>
+          </a:prstGeom>
+          <a:noFill/>
+        </p:spPr>
+      </p:pic>
+    </p:spTree>
+  </p:cSld>
+  <p:clrMapOvr>
+    <a:masterClrMapping/>
+  </p:clrMapOvr>
+  <p:timing>
+    <p:tnLst>
+      <p:par>
+        <p:cTn id="1" dur="indefinite" restart="never" nodeType="tmRoot"/>
+      </p:par>
+    </p:tnLst>
+  </p:timing>
+</p:sld>
+</file>
+
+<file path=ppt/slides/slide40.xml><?xml version="1.0" encoding="utf-8"?>
 <p:sld xmlns:a="http://schemas.openxmlformats.org/drawingml/2006/main" xmlns:r="http://schemas.openxmlformats.org/officeDocument/2006/relationships" xmlns:p="http://schemas.openxmlformats.org/presentationml/2006/main">
   <p:cSld>
     <p:spTree>
@@ -9383,7 +10033,7 @@
 </p:sld>
 </file>
 
-<file path=ppt/slides/slide39.xml><?xml version="1.0" encoding="utf-8"?>
+<file path=ppt/slides/slide41.xml><?xml version="1.0" encoding="utf-8"?>
 <p:sld xmlns:a="http://schemas.openxmlformats.org/drawingml/2006/main" xmlns:r="http://schemas.openxmlformats.org/officeDocument/2006/relationships" xmlns:p="http://schemas.openxmlformats.org/presentationml/2006/main">
   <p:cSld>
     <p:spTree>
@@ -9584,163 +10234,7 @@
 </p:sld>
 </file>
 
-<file path=ppt/slides/slide4.xml><?xml version="1.0" encoding="utf-8"?>
-<p:sld xmlns:a="http://schemas.openxmlformats.org/drawingml/2006/main" xmlns:r="http://schemas.openxmlformats.org/officeDocument/2006/relationships" xmlns:p="http://schemas.openxmlformats.org/presentationml/2006/main">
-  <p:cSld>
-    <p:spTree>
-      <p:nvGrpSpPr>
-        <p:cNvPr id="1" name=""/>
-        <p:cNvGrpSpPr/>
-        <p:nvPr/>
-      </p:nvGrpSpPr>
-      <p:grpSpPr>
-        <a:xfrm>
-          <a:off x="0" y="0"/>
-          <a:ext cx="0" cy="0"/>
-          <a:chOff x="0" y="0"/>
-          <a:chExt cx="0" cy="0"/>
-        </a:xfrm>
-      </p:grpSpPr>
-      <p:sp>
-        <p:nvSpPr>
-          <p:cNvPr id="2" name="Title 1"/>
-          <p:cNvSpPr>
-            <a:spLocks noGrp="1"/>
-          </p:cNvSpPr>
-          <p:nvPr>
-            <p:ph type="title"/>
-          </p:nvPr>
-        </p:nvSpPr>
-        <p:spPr/>
-        <p:txBody>
-          <a:bodyPr/>
-          <a:lstStyle/>
-          <a:p>
-            <a:r>
-              <a:rPr lang="en-US" dirty="0" smtClean="0"/>
-              <a:t>References</a:t>
-            </a:r>
-            <a:endParaRPr lang="en-US" dirty="0"/>
-          </a:p>
-        </p:txBody>
-      </p:sp>
-      <p:sp>
-        <p:nvSpPr>
-          <p:cNvPr id="3" name="Content Placeholder 2"/>
-          <p:cNvSpPr>
-            <a:spLocks noGrp="1"/>
-          </p:cNvSpPr>
-          <p:nvPr>
-            <p:ph idx="1"/>
-          </p:nvPr>
-        </p:nvSpPr>
-        <p:spPr>
-          <a:xfrm>
-            <a:off x="304800" y="1600200"/>
-            <a:ext cx="5867400" cy="4724400"/>
-          </a:xfrm>
-        </p:spPr>
-        <p:txBody>
-          <a:bodyPr/>
-          <a:lstStyle/>
-          <a:p>
-            <a:pPr marL="457200" indent="-457200">
-              <a:buFont typeface="+mj-lt"/>
-              <a:buAutoNum type="arabicPeriod"/>
-            </a:pPr>
-            <a:r>
-              <a:rPr lang="en-US" sz="2400" dirty="0" smtClean="0"/>
-              <a:t>Len Bass, Paul Clements and Rick </a:t>
-            </a:r>
-            <a:r>
-              <a:rPr lang="en-US" sz="2400" dirty="0" err="1" smtClean="0"/>
-              <a:t>Kazman</a:t>
-            </a:r>
-            <a:r>
-              <a:rPr lang="en-US" sz="2400" dirty="0" smtClean="0"/>
-              <a:t> (2021). Software Architecture in Practice. Addison-Wesley.</a:t>
-            </a:r>
-          </a:p>
-          <a:p>
-            <a:pPr marL="457200" indent="-457200">
-              <a:buFont typeface="+mj-lt"/>
-              <a:buAutoNum type="arabicPeriod"/>
-            </a:pPr>
-            <a:r>
-              <a:rPr lang="en-US" sz="2400" dirty="0" smtClean="0"/>
-              <a:t>R. </a:t>
-            </a:r>
-            <a:r>
-              <a:rPr lang="en-US" sz="2400" dirty="0" err="1" smtClean="0"/>
-              <a:t>Kazman</a:t>
-            </a:r>
-            <a:r>
-              <a:rPr lang="en-US" sz="2400" dirty="0" smtClean="0"/>
-              <a:t>, M. Klein and P. Clements (1998). Evaluating Software Architectures for Real-Time Systems.</a:t>
-            </a:r>
-          </a:p>
-          <a:p>
-            <a:pPr marL="457200" indent="-457200">
-              <a:buFont typeface="+mj-lt"/>
-              <a:buAutoNum type="arabicPeriod"/>
-            </a:pPr>
-            <a:r>
-              <a:rPr lang="en-US" sz="2400" dirty="0" smtClean="0"/>
-              <a:t>Rick </a:t>
-            </a:r>
-            <a:r>
-              <a:rPr lang="en-US" sz="2400" dirty="0" err="1" smtClean="0"/>
-              <a:t>Kazman</a:t>
-            </a:r>
-            <a:r>
-              <a:rPr lang="en-US" sz="2400" dirty="0" smtClean="0"/>
-              <a:t>, Mark Klein and Paul Clements (2000). ATAM: Method for Architecture Evaluation.</a:t>
-            </a:r>
-          </a:p>
-        </p:txBody>
-      </p:sp>
-      <p:pic>
-        <p:nvPicPr>
-          <p:cNvPr id="4" name="Picture 4" descr="http://2.bp.blogspot.com/-FqRM_5NQE6Q/TaSdzyWfvtI/AAAAAAAAAFg/C_2LDJWJOx4/s1600/books-pile.jpg"/>
-          <p:cNvPicPr>
-            <a:picLocks noChangeAspect="1" noChangeArrowheads="1"/>
-          </p:cNvPicPr>
-          <p:nvPr/>
-        </p:nvPicPr>
-        <p:blipFill>
-          <a:blip r:embed="rId2" cstate="print"/>
-          <a:srcRect/>
-          <a:stretch>
-            <a:fillRect/>
-          </a:stretch>
-        </p:blipFill>
-        <p:spPr bwMode="auto">
-          <a:xfrm>
-            <a:off x="6267450" y="1752600"/>
-            <a:ext cx="2724150" cy="4133850"/>
-          </a:xfrm>
-          <a:prstGeom prst="rect">
-            <a:avLst/>
-          </a:prstGeom>
-          <a:noFill/>
-        </p:spPr>
-      </p:pic>
-    </p:spTree>
-  </p:cSld>
-  <p:clrMapOvr>
-    <a:masterClrMapping/>
-  </p:clrMapOvr>
-  <p:timing>
-    <p:tnLst>
-      <p:par>
-        <p:cTn id="1" dur="indefinite" restart="never" nodeType="tmRoot"/>
-      </p:par>
-    </p:tnLst>
-  </p:timing>
-</p:sld>
-</file>
-
-<file path=ppt/slides/slide40.xml><?xml version="1.0" encoding="utf-8"?>
+<file path=ppt/slides/slide42.xml><?xml version="1.0" encoding="utf-8"?>
 <p:sld xmlns:a="http://schemas.openxmlformats.org/drawingml/2006/main" xmlns:r="http://schemas.openxmlformats.org/officeDocument/2006/relationships" xmlns:p="http://schemas.openxmlformats.org/presentationml/2006/main">
   <p:cSld>
     <p:spTree>
@@ -9791,7 +10285,7 @@
 </p:sld>
 </file>
 
-<file path=ppt/slides/slide41.xml><?xml version="1.0" encoding="utf-8"?>
+<file path=ppt/slides/slide43.xml><?xml version="1.0" encoding="utf-8"?>
 <p:sld xmlns:a="http://schemas.openxmlformats.org/drawingml/2006/main" xmlns:r="http://schemas.openxmlformats.org/officeDocument/2006/relationships" xmlns:p="http://schemas.openxmlformats.org/presentationml/2006/main">
   <p:cSld>
     <p:spTree>
@@ -9944,7 +10438,7 @@
 </p:sld>
 </file>
 
-<file path=ppt/slides/slide42.xml><?xml version="1.0" encoding="utf-8"?>
+<file path=ppt/slides/slide44.xml><?xml version="1.0" encoding="utf-8"?>
 <p:sld xmlns:a="http://schemas.openxmlformats.org/drawingml/2006/main" xmlns:r="http://schemas.openxmlformats.org/officeDocument/2006/relationships" xmlns:p="http://schemas.openxmlformats.org/presentationml/2006/main">
   <p:cSld>
     <p:spTree>
@@ -10094,7 +10588,7 @@
 </p:sld>
 </file>
 
-<file path=ppt/slides/slide43.xml><?xml version="1.0" encoding="utf-8"?>
+<file path=ppt/slides/slide45.xml><?xml version="1.0" encoding="utf-8"?>
 <p:sld xmlns:a="http://schemas.openxmlformats.org/drawingml/2006/main" xmlns:r="http://schemas.openxmlformats.org/officeDocument/2006/relationships" xmlns:p="http://schemas.openxmlformats.org/presentationml/2006/main">
   <p:cSld>
     <p:spTree>
@@ -10220,7 +10714,7 @@
 </p:sld>
 </file>
 
-<file path=ppt/slides/slide44.xml><?xml version="1.0" encoding="utf-8"?>
+<file path=ppt/slides/slide46.xml><?xml version="1.0" encoding="utf-8"?>
 <p:sld xmlns:a="http://schemas.openxmlformats.org/drawingml/2006/main" xmlns:r="http://schemas.openxmlformats.org/officeDocument/2006/relationships" xmlns:p="http://schemas.openxmlformats.org/presentationml/2006/main">
   <p:cSld>
     <p:spTree>
@@ -10447,7 +10941,7 @@
 </p:sld>
 </file>
 
-<file path=ppt/slides/slide45.xml><?xml version="1.0" encoding="utf-8"?>
+<file path=ppt/slides/slide47.xml><?xml version="1.0" encoding="utf-8"?>
 <p:sld xmlns:a="http://schemas.openxmlformats.org/drawingml/2006/main" xmlns:r="http://schemas.openxmlformats.org/officeDocument/2006/relationships" xmlns:p="http://schemas.openxmlformats.org/presentationml/2006/main">
   <p:cSld>
     <p:spTree>
@@ -10632,7 +11126,7 @@
 </p:sld>
 </file>
 
-<file path=ppt/slides/slide46.xml><?xml version="1.0" encoding="utf-8"?>
+<file path=ppt/slides/slide48.xml><?xml version="1.0" encoding="utf-8"?>
 <p:sld xmlns:a="http://schemas.openxmlformats.org/drawingml/2006/main" xmlns:r="http://schemas.openxmlformats.org/officeDocument/2006/relationships" xmlns:p="http://schemas.openxmlformats.org/presentationml/2006/main">
   <p:cSld>
     <p:spTree>
@@ -10683,7 +11177,7 @@
 </p:sld>
 </file>
 
-<file path=ppt/slides/slide47.xml><?xml version="1.0" encoding="utf-8"?>
+<file path=ppt/slides/slide49.xml><?xml version="1.0" encoding="utf-8"?>
 <p:sld xmlns:a="http://schemas.openxmlformats.org/drawingml/2006/main" xmlns:r="http://schemas.openxmlformats.org/officeDocument/2006/relationships" xmlns:p="http://schemas.openxmlformats.org/presentationml/2006/main">
   <p:cSld>
     <p:spTree>
@@ -10794,7 +11288,184 @@
 </p:sld>
 </file>
 
-<file path=ppt/slides/slide48.xml><?xml version="1.0" encoding="utf-8"?>
+<file path=ppt/slides/slide5.xml><?xml version="1.0" encoding="utf-8"?>
+<p:sld xmlns:a="http://schemas.openxmlformats.org/drawingml/2006/main" xmlns:r="http://schemas.openxmlformats.org/officeDocument/2006/relationships" xmlns:p="http://schemas.openxmlformats.org/presentationml/2006/main">
+  <p:cSld>
+    <p:spTree>
+      <p:nvGrpSpPr>
+        <p:cNvPr id="1" name=""/>
+        <p:cNvGrpSpPr/>
+        <p:nvPr/>
+      </p:nvGrpSpPr>
+      <p:grpSpPr>
+        <a:xfrm>
+          <a:off x="0" y="0"/>
+          <a:ext cx="0" cy="0"/>
+          <a:chOff x="0" y="0"/>
+          <a:chExt cx="0" cy="0"/>
+        </a:xfrm>
+      </p:grpSpPr>
+      <p:sp>
+        <p:nvSpPr>
+          <p:cNvPr id="2" name="Title 1"/>
+          <p:cNvSpPr>
+            <a:spLocks noGrp="1"/>
+          </p:cNvSpPr>
+          <p:nvPr>
+            <p:ph type="title"/>
+          </p:nvPr>
+        </p:nvSpPr>
+        <p:spPr/>
+        <p:txBody>
+          <a:bodyPr/>
+          <a:lstStyle/>
+          <a:p>
+            <a:r>
+              <a:rPr lang="en-US" dirty="0" smtClean="0"/>
+              <a:t>Functionality [1]</a:t>
+            </a:r>
+            <a:endParaRPr lang="en-US" dirty="0"/>
+          </a:p>
+        </p:txBody>
+      </p:sp>
+      <p:sp>
+        <p:nvSpPr>
+          <p:cNvPr id="3" name="Content Placeholder 2"/>
+          <p:cNvSpPr>
+            <a:spLocks noGrp="1"/>
+          </p:cNvSpPr>
+          <p:nvPr>
+            <p:ph idx="1"/>
+          </p:nvPr>
+        </p:nvSpPr>
+        <p:spPr/>
+        <p:txBody>
+          <a:bodyPr/>
+          <a:lstStyle/>
+          <a:p>
+            <a:r>
+              <a:rPr lang="en-US" sz="2400" i="1" dirty="0" smtClean="0">
+                <a:solidFill>
+                  <a:srgbClr val="C00000"/>
+                </a:solidFill>
+              </a:rPr>
+              <a:t>Functionality</a:t>
+            </a:r>
+            <a:r>
+              <a:rPr lang="en-US" sz="2400" dirty="0" smtClean="0"/>
+              <a:t> is the ability of the system to </a:t>
+            </a:r>
+            <a:r>
+              <a:rPr lang="en-US" sz="2400" u="sng" dirty="0" smtClean="0"/>
+              <a:t>do the work</a:t>
+            </a:r>
+            <a:r>
+              <a:rPr lang="en-US" sz="2400" dirty="0" smtClean="0"/>
+              <a:t> for which it was intended.</a:t>
+            </a:r>
+          </a:p>
+          <a:p>
+            <a:r>
+              <a:rPr lang="en-US" sz="2400" dirty="0" smtClean="0"/>
+              <a:t>If functionality were </a:t>
+            </a:r>
+            <a:r>
+              <a:rPr lang="en-US" sz="2400" i="1" dirty="0" smtClean="0">
+                <a:solidFill>
+                  <a:srgbClr val="C00000"/>
+                </a:solidFill>
+              </a:rPr>
+              <a:t>the only thing</a:t>
+            </a:r>
+            <a:r>
+              <a:rPr lang="en-US" sz="2400" dirty="0" smtClean="0"/>
+              <a:t> that mattered, you wouldn't have to divide the system into pieces at all; a single monolithic blob with </a:t>
+            </a:r>
+            <a:r>
+              <a:rPr lang="en-US" sz="2400" u="sng" dirty="0" smtClean="0"/>
+              <a:t>no internal structure</a:t>
+            </a:r>
+            <a:r>
+              <a:rPr lang="en-US" sz="2400" dirty="0" smtClean="0"/>
+              <a:t> would do just fine.</a:t>
+            </a:r>
+          </a:p>
+          <a:p>
+            <a:r>
+              <a:rPr lang="en-US" sz="2400" dirty="0" smtClean="0"/>
+              <a:t>But although functionality is </a:t>
+            </a:r>
+            <a:r>
+              <a:rPr lang="en-US" sz="2400" u="sng" dirty="0" smtClean="0"/>
+              <a:t>independent of any particular structure</a:t>
+            </a:r>
+            <a:r>
+              <a:rPr lang="en-US" sz="2400" dirty="0" smtClean="0"/>
+              <a:t>, functionality is achieved by </a:t>
+            </a:r>
+            <a:r>
+              <a:rPr lang="en-US" sz="2400" i="1" dirty="0" smtClean="0">
+                <a:solidFill>
+                  <a:srgbClr val="C00000"/>
+                </a:solidFill>
+              </a:rPr>
+              <a:t>assigning responsibilities to architectural elements</a:t>
+            </a:r>
+            <a:r>
+              <a:rPr lang="en-US" sz="2400" dirty="0" smtClean="0"/>
+              <a:t>, resulting in one of the most basic of architectural structures.</a:t>
+            </a:r>
+          </a:p>
+          <a:p>
+            <a:r>
+              <a:rPr lang="en-US" sz="2400" dirty="0" smtClean="0"/>
+              <a:t>The architect's interest in functionality is in how it </a:t>
+            </a:r>
+            <a:r>
+              <a:rPr lang="en-US" sz="2400" i="1" dirty="0" smtClean="0">
+                <a:solidFill>
+                  <a:srgbClr val="C00000"/>
+                </a:solidFill>
+              </a:rPr>
+              <a:t>interacts with</a:t>
+            </a:r>
+            <a:r>
+              <a:rPr lang="en-US" sz="2400" dirty="0" smtClean="0"/>
+              <a:t> and </a:t>
+            </a:r>
+            <a:r>
+              <a:rPr lang="en-US" sz="2400" i="1" dirty="0" smtClean="0">
+                <a:solidFill>
+                  <a:srgbClr val="C00000"/>
+                </a:solidFill>
+              </a:rPr>
+              <a:t>constrains</a:t>
+            </a:r>
+            <a:r>
+              <a:rPr lang="en-US" sz="2400" dirty="0" smtClean="0"/>
+              <a:t> </a:t>
+            </a:r>
+            <a:r>
+              <a:rPr lang="en-US" sz="2400" b="1" u="sng" dirty="0" smtClean="0"/>
+              <a:t>other qualities</a:t>
+            </a:r>
+            <a:r>
+              <a:rPr lang="en-US" sz="2400" dirty="0" smtClean="0"/>
+              <a:t>.</a:t>
+            </a:r>
+            <a:endParaRPr lang="en-US" sz="2400" dirty="0"/>
+          </a:p>
+        </p:txBody>
+      </p:sp>
+    </p:spTree>
+  </p:cSld>
+  <p:clrMapOvr>
+    <a:masterClrMapping/>
+  </p:clrMapOvr>
+</p:sld>
+</file>
+
+<file path=ppt/slides/slide50.xml><?xml version="1.0" encoding="utf-8"?>
 <p:sld xmlns:a="http://schemas.openxmlformats.org/drawingml/2006/main" xmlns:r="http://schemas.openxmlformats.org/officeDocument/2006/relationships" xmlns:p="http://schemas.openxmlformats.org/presentationml/2006/main">
   <p:cSld>
     <p:spTree>
@@ -10951,7 +11622,7 @@
 </p:sld>
 </file>
 
-<file path=ppt/slides/slide49.xml><?xml version="1.0" encoding="utf-8"?>
+<file path=ppt/slides/slide51.xml><?xml version="1.0" encoding="utf-8"?>
 <p:sld xmlns:a="http://schemas.openxmlformats.org/drawingml/2006/main" xmlns:r="http://schemas.openxmlformats.org/officeDocument/2006/relationships" xmlns:p="http://schemas.openxmlformats.org/presentationml/2006/main">
   <p:cSld>
     <p:spTree>
@@ -11002,184 +11673,7 @@
 </p:sld>
 </file>
 
-<file path=ppt/slides/slide5.xml><?xml version="1.0" encoding="utf-8"?>
-<p:sld xmlns:a="http://schemas.openxmlformats.org/drawingml/2006/main" xmlns:r="http://schemas.openxmlformats.org/officeDocument/2006/relationships" xmlns:p="http://schemas.openxmlformats.org/presentationml/2006/main">
-  <p:cSld>
-    <p:spTree>
-      <p:nvGrpSpPr>
-        <p:cNvPr id="1" name=""/>
-        <p:cNvGrpSpPr/>
-        <p:nvPr/>
-      </p:nvGrpSpPr>
-      <p:grpSpPr>
-        <a:xfrm>
-          <a:off x="0" y="0"/>
-          <a:ext cx="0" cy="0"/>
-          <a:chOff x="0" y="0"/>
-          <a:chExt cx="0" cy="0"/>
-        </a:xfrm>
-      </p:grpSpPr>
-      <p:sp>
-        <p:nvSpPr>
-          <p:cNvPr id="2" name="Title 1"/>
-          <p:cNvSpPr>
-            <a:spLocks noGrp="1"/>
-          </p:cNvSpPr>
-          <p:nvPr>
-            <p:ph type="title"/>
-          </p:nvPr>
-        </p:nvSpPr>
-        <p:spPr/>
-        <p:txBody>
-          <a:bodyPr/>
-          <a:lstStyle/>
-          <a:p>
-            <a:r>
-              <a:rPr lang="en-US" dirty="0" smtClean="0"/>
-              <a:t>Functionality [1]</a:t>
-            </a:r>
-            <a:endParaRPr lang="en-US" dirty="0"/>
-          </a:p>
-        </p:txBody>
-      </p:sp>
-      <p:sp>
-        <p:nvSpPr>
-          <p:cNvPr id="3" name="Content Placeholder 2"/>
-          <p:cNvSpPr>
-            <a:spLocks noGrp="1"/>
-          </p:cNvSpPr>
-          <p:nvPr>
-            <p:ph idx="1"/>
-          </p:nvPr>
-        </p:nvSpPr>
-        <p:spPr/>
-        <p:txBody>
-          <a:bodyPr/>
-          <a:lstStyle/>
-          <a:p>
-            <a:r>
-              <a:rPr lang="en-US" sz="2400" i="1" dirty="0" smtClean="0">
-                <a:solidFill>
-                  <a:srgbClr val="C00000"/>
-                </a:solidFill>
-              </a:rPr>
-              <a:t>Functionality</a:t>
-            </a:r>
-            <a:r>
-              <a:rPr lang="en-US" sz="2400" dirty="0" smtClean="0"/>
-              <a:t> is the ability of the system to </a:t>
-            </a:r>
-            <a:r>
-              <a:rPr lang="en-US" sz="2400" u="sng" dirty="0" smtClean="0"/>
-              <a:t>do the work</a:t>
-            </a:r>
-            <a:r>
-              <a:rPr lang="en-US" sz="2400" dirty="0" smtClean="0"/>
-              <a:t> for which it was intended.</a:t>
-            </a:r>
-          </a:p>
-          <a:p>
-            <a:r>
-              <a:rPr lang="en-US" sz="2400" dirty="0" smtClean="0"/>
-              <a:t>If functionality were </a:t>
-            </a:r>
-            <a:r>
-              <a:rPr lang="en-US" sz="2400" i="1" dirty="0" smtClean="0">
-                <a:solidFill>
-                  <a:srgbClr val="C00000"/>
-                </a:solidFill>
-              </a:rPr>
-              <a:t>the only thing</a:t>
-            </a:r>
-            <a:r>
-              <a:rPr lang="en-US" sz="2400" dirty="0" smtClean="0"/>
-              <a:t> that mattered, you wouldn't have to divide the system into pieces at all; a single monolithic blob with </a:t>
-            </a:r>
-            <a:r>
-              <a:rPr lang="en-US" sz="2400" u="sng" dirty="0" smtClean="0"/>
-              <a:t>no internal structure</a:t>
-            </a:r>
-            <a:r>
-              <a:rPr lang="en-US" sz="2400" dirty="0" smtClean="0"/>
-              <a:t> would do just fine.</a:t>
-            </a:r>
-          </a:p>
-          <a:p>
-            <a:r>
-              <a:rPr lang="en-US" sz="2400" dirty="0" smtClean="0"/>
-              <a:t>But although functionality is </a:t>
-            </a:r>
-            <a:r>
-              <a:rPr lang="en-US" sz="2400" u="sng" dirty="0" smtClean="0"/>
-              <a:t>independent of any particular structure</a:t>
-            </a:r>
-            <a:r>
-              <a:rPr lang="en-US" sz="2400" dirty="0" smtClean="0"/>
-              <a:t>, functionality is achieved by </a:t>
-            </a:r>
-            <a:r>
-              <a:rPr lang="en-US" sz="2400" i="1" dirty="0" smtClean="0">
-                <a:solidFill>
-                  <a:srgbClr val="C00000"/>
-                </a:solidFill>
-              </a:rPr>
-              <a:t>assigning responsibilities to architectural elements</a:t>
-            </a:r>
-            <a:r>
-              <a:rPr lang="en-US" sz="2400" dirty="0" smtClean="0"/>
-              <a:t>, resulting in one of the most basic of architectural structures.</a:t>
-            </a:r>
-          </a:p>
-          <a:p>
-            <a:r>
-              <a:rPr lang="en-US" sz="2400" dirty="0" smtClean="0"/>
-              <a:t>The architect's interest in functionality is in how it </a:t>
-            </a:r>
-            <a:r>
-              <a:rPr lang="en-US" sz="2400" i="1" dirty="0" smtClean="0">
-                <a:solidFill>
-                  <a:srgbClr val="C00000"/>
-                </a:solidFill>
-              </a:rPr>
-              <a:t>interacts with</a:t>
-            </a:r>
-            <a:r>
-              <a:rPr lang="en-US" sz="2400" dirty="0" smtClean="0"/>
-              <a:t> and </a:t>
-            </a:r>
-            <a:r>
-              <a:rPr lang="en-US" sz="2400" i="1" dirty="0" smtClean="0">
-                <a:solidFill>
-                  <a:srgbClr val="C00000"/>
-                </a:solidFill>
-              </a:rPr>
-              <a:t>constrains</a:t>
-            </a:r>
-            <a:r>
-              <a:rPr lang="en-US" sz="2400" dirty="0" smtClean="0"/>
-              <a:t> </a:t>
-            </a:r>
-            <a:r>
-              <a:rPr lang="en-US" sz="2400" b="1" u="sng" dirty="0" smtClean="0"/>
-              <a:t>other qualities</a:t>
-            </a:r>
-            <a:r>
-              <a:rPr lang="en-US" sz="2400" dirty="0" smtClean="0"/>
-              <a:t>.</a:t>
-            </a:r>
-            <a:endParaRPr lang="en-US" sz="2400" dirty="0"/>
-          </a:p>
-        </p:txBody>
-      </p:sp>
-    </p:spTree>
-  </p:cSld>
-  <p:clrMapOvr>
-    <a:masterClrMapping/>
-  </p:clrMapOvr>
-</p:sld>
-</file>
-
-<file path=ppt/slides/slide50.xml><?xml version="1.0" encoding="utf-8"?>
+<file path=ppt/slides/slide52.xml><?xml version="1.0" encoding="utf-8"?>
 <p:sld xmlns:a="http://schemas.openxmlformats.org/drawingml/2006/main" xmlns:r="http://schemas.openxmlformats.org/officeDocument/2006/relationships" xmlns:p="http://schemas.openxmlformats.org/presentationml/2006/main">
   <p:cSld>
     <p:spTree>
@@ -11312,7 +11806,7 @@
 </p:sld>
 </file>
 
-<file path=ppt/slides/slide51.xml><?xml version="1.0" encoding="utf-8"?>
+<file path=ppt/slides/slide53.xml><?xml version="1.0" encoding="utf-8"?>
 <p:sld xmlns:a="http://schemas.openxmlformats.org/drawingml/2006/main" xmlns:r="http://schemas.openxmlformats.org/officeDocument/2006/relationships" xmlns:p="http://schemas.openxmlformats.org/presentationml/2006/main">
   <p:cSld>
     <p:spTree>
@@ -11488,7 +11982,7 @@
 </p:sld>
 </file>
 
-<file path=ppt/slides/slide52.xml><?xml version="1.0" encoding="utf-8"?>
+<file path=ppt/slides/slide54.xml><?xml version="1.0" encoding="utf-8"?>
 <p:sld xmlns:a="http://schemas.openxmlformats.org/drawingml/2006/main" xmlns:r="http://schemas.openxmlformats.org/officeDocument/2006/relationships" xmlns:p="http://schemas.openxmlformats.org/presentationml/2006/main">
   <p:cSld>
     <p:spTree>
@@ -11539,7 +12033,7 @@
 </p:sld>
 </file>
 
-<file path=ppt/slides/slide53.xml><?xml version="1.0" encoding="utf-8"?>
+<file path=ppt/slides/slide55.xml><?xml version="1.0" encoding="utf-8"?>
 <p:sld xmlns:a="http://schemas.openxmlformats.org/drawingml/2006/main" xmlns:r="http://schemas.openxmlformats.org/officeDocument/2006/relationships" xmlns:p="http://schemas.openxmlformats.org/presentationml/2006/main">
   <p:cSld>
     <p:spTree>
@@ -11650,7 +12144,7 @@
 </p:sld>
 </file>
 
-<file path=ppt/slides/slide54.xml><?xml version="1.0" encoding="utf-8"?>
+<file path=ppt/slides/slide56.xml><?xml version="1.0" encoding="utf-8"?>
 <p:sld xmlns:a="http://schemas.openxmlformats.org/drawingml/2006/main" xmlns:r="http://schemas.openxmlformats.org/officeDocument/2006/relationships" xmlns:p="http://schemas.openxmlformats.org/presentationml/2006/main">
   <p:cSld>
     <p:spTree>
@@ -11734,7 +12228,7 @@
 </p:sld>
 </file>
 
-<file path=ppt/slides/slide55.xml><?xml version="1.0" encoding="utf-8"?>
+<file path=ppt/slides/slide57.xml><?xml version="1.0" encoding="utf-8"?>
 <p:sld xmlns:a="http://schemas.openxmlformats.org/drawingml/2006/main" xmlns:r="http://schemas.openxmlformats.org/officeDocument/2006/relationships" xmlns:p="http://schemas.openxmlformats.org/presentationml/2006/main">
   <p:cSld>
     <p:spTree>
@@ -11785,7 +12279,7 @@
 </p:sld>
 </file>
 
-<file path=ppt/slides/slide56.xml><?xml version="1.0" encoding="utf-8"?>
+<file path=ppt/slides/slide58.xml><?xml version="1.0" encoding="utf-8"?>
 <p:sld xmlns:a="http://schemas.openxmlformats.org/drawingml/2006/main" xmlns:r="http://schemas.openxmlformats.org/officeDocument/2006/relationships" xmlns:p="http://schemas.openxmlformats.org/presentationml/2006/main">
   <p:cSld>
     <p:spTree>
@@ -11912,7 +12406,7 @@
 </p:sld>
 </file>
 
-<file path=ppt/slides/slide57.xml><?xml version="1.0" encoding="utf-8"?>
+<file path=ppt/slides/slide59.xml><?xml version="1.0" encoding="utf-8"?>
 <p:sld xmlns:a="http://schemas.openxmlformats.org/drawingml/2006/main" xmlns:r="http://schemas.openxmlformats.org/officeDocument/2006/relationships" xmlns:p="http://schemas.openxmlformats.org/presentationml/2006/main">
   <p:cSld>
     <p:spTree>
@@ -11971,286 +12465,6 @@
           <a:xfrm>
             <a:off x="1952625" y="2108200"/>
             <a:ext cx="5238750" cy="3302000"/>
-          </a:xfrm>
-          <a:prstGeom prst="rect">
-            <a:avLst/>
-          </a:prstGeom>
-          <a:noFill/>
-          <a:ln w="9525">
-            <a:noFill/>
-            <a:miter lim="800000"/>
-            <a:headEnd/>
-            <a:tailEnd/>
-          </a:ln>
-        </p:spPr>
-      </p:pic>
-    </p:spTree>
-  </p:cSld>
-  <p:clrMapOvr>
-    <a:masterClrMapping/>
-  </p:clrMapOvr>
-</p:sld>
-</file>
-
-<file path=ppt/slides/slide58.xml><?xml version="1.0" encoding="utf-8"?>
-<p:sld xmlns:a="http://schemas.openxmlformats.org/drawingml/2006/main" xmlns:r="http://schemas.openxmlformats.org/officeDocument/2006/relationships" xmlns:p="http://schemas.openxmlformats.org/presentationml/2006/main">
-  <p:cSld>
-    <p:spTree>
-      <p:nvGrpSpPr>
-        <p:cNvPr id="1" name=""/>
-        <p:cNvGrpSpPr/>
-        <p:nvPr/>
-      </p:nvGrpSpPr>
-      <p:grpSpPr>
-        <a:xfrm>
-          <a:off x="0" y="0"/>
-          <a:ext cx="0" cy="0"/>
-          <a:chOff x="0" y="0"/>
-          <a:chExt cx="0" cy="0"/>
-        </a:xfrm>
-      </p:grpSpPr>
-      <p:sp>
-        <p:nvSpPr>
-          <p:cNvPr id="2" name="Title 1"/>
-          <p:cNvSpPr>
-            <a:spLocks noGrp="1"/>
-          </p:cNvSpPr>
-          <p:nvPr>
-            <p:ph type="title"/>
-          </p:nvPr>
-        </p:nvSpPr>
-        <p:spPr/>
-        <p:txBody>
-          <a:bodyPr/>
-          <a:lstStyle/>
-          <a:p>
-            <a:r>
-              <a:rPr lang="en-US" dirty="0" smtClean="0"/>
-              <a:t>Maintain Task Model</a:t>
-            </a:r>
-            <a:endParaRPr lang="en-US" dirty="0"/>
-          </a:p>
-        </p:txBody>
-      </p:sp>
-      <p:sp>
-        <p:nvSpPr>
-          <p:cNvPr id="3" name="Content Placeholder 2"/>
-          <p:cNvSpPr>
-            <a:spLocks noGrp="1"/>
-          </p:cNvSpPr>
-          <p:nvPr>
-            <p:ph idx="1"/>
-          </p:nvPr>
-        </p:nvSpPr>
-        <p:spPr/>
-        <p:txBody>
-          <a:bodyPr/>
-          <a:lstStyle/>
-          <a:p>
-            <a:r>
-              <a:rPr lang="en-US" sz="2400" dirty="0" smtClean="0"/>
-              <a:t>The </a:t>
-            </a:r>
-            <a:r>
-              <a:rPr lang="en-US" sz="2400" i="1" dirty="0" smtClean="0">
-                <a:solidFill>
-                  <a:srgbClr val="C00000"/>
-                </a:solidFill>
-              </a:rPr>
-              <a:t>task model</a:t>
-            </a:r>
-            <a:r>
-              <a:rPr lang="en-US" sz="2400" dirty="0" smtClean="0"/>
-              <a:t> is used to determine context so the system can have some </a:t>
-            </a:r>
-            <a:r>
-              <a:rPr lang="en-US" sz="2400" u="sng" dirty="0" smtClean="0"/>
-              <a:t>idea of what the user is attempting to do</a:t>
-            </a:r>
-            <a:r>
-              <a:rPr lang="en-US" sz="2400" dirty="0" smtClean="0"/>
-              <a:t> and provide assistance.</a:t>
-            </a:r>
-          </a:p>
-          <a:p>
-            <a:r>
-              <a:rPr lang="en-US" sz="2400" dirty="0" smtClean="0"/>
-              <a:t>For example, many search engines provide </a:t>
-            </a:r>
-            <a:r>
-              <a:rPr lang="en-US" sz="2400" i="1" dirty="0" smtClean="0">
-                <a:solidFill>
-                  <a:srgbClr val="C00000"/>
-                </a:solidFill>
-              </a:rPr>
-              <a:t>predictive type-ahead capabilities</a:t>
-            </a:r>
-            <a:r>
-              <a:rPr lang="en-US" sz="2400" dirty="0" smtClean="0"/>
-              <a:t>, and many mail clients provide spell-correction. Both of these functions are based on task models.</a:t>
-            </a:r>
-          </a:p>
-        </p:txBody>
-      </p:sp>
-      <p:pic>
-        <p:nvPicPr>
-          <p:cNvPr id="6146" name="Picture 2" descr="https://images.samsung.com/is/image/samsung/assets/uk/support/mobile-devices/how-can-i-personalise-and-turn-predictive-text-on-and-off-on-my-samsung-galaxy-device/images/1-uk-how-can-i-personalise-and-turn-predictive-text-on-and-off.png?$ORIGIN_PNG$"/>
-          <p:cNvPicPr>
-            <a:picLocks noChangeAspect="1" noChangeArrowheads="1"/>
-          </p:cNvPicPr>
-          <p:nvPr/>
-        </p:nvPicPr>
-        <p:blipFill>
-          <a:blip r:embed="rId2" cstate="print"/>
-          <a:srcRect/>
-          <a:stretch>
-            <a:fillRect/>
-          </a:stretch>
-        </p:blipFill>
-        <p:spPr bwMode="auto">
-          <a:xfrm>
-            <a:off x="3124200" y="4419600"/>
-            <a:ext cx="2767013" cy="1524000"/>
-          </a:xfrm>
-          <a:prstGeom prst="rect">
-            <a:avLst/>
-          </a:prstGeom>
-          <a:noFill/>
-        </p:spPr>
-      </p:pic>
-    </p:spTree>
-  </p:cSld>
-  <p:clrMapOvr>
-    <a:masterClrMapping/>
-  </p:clrMapOvr>
-</p:sld>
-</file>
-
-<file path=ppt/slides/slide59.xml><?xml version="1.0" encoding="utf-8"?>
-<p:sld xmlns:a="http://schemas.openxmlformats.org/drawingml/2006/main" xmlns:r="http://schemas.openxmlformats.org/officeDocument/2006/relationships" xmlns:p="http://schemas.openxmlformats.org/presentationml/2006/main">
-  <p:cSld>
-    <p:spTree>
-      <p:nvGrpSpPr>
-        <p:cNvPr id="1" name=""/>
-        <p:cNvGrpSpPr/>
-        <p:nvPr/>
-      </p:nvGrpSpPr>
-      <p:grpSpPr>
-        <a:xfrm>
-          <a:off x="0" y="0"/>
-          <a:ext cx="0" cy="0"/>
-          <a:chOff x="0" y="0"/>
-          <a:chExt cx="0" cy="0"/>
-        </a:xfrm>
-      </p:grpSpPr>
-      <p:sp>
-        <p:nvSpPr>
-          <p:cNvPr id="2" name="Title 1"/>
-          <p:cNvSpPr>
-            <a:spLocks noGrp="1"/>
-          </p:cNvSpPr>
-          <p:nvPr>
-            <p:ph type="title"/>
-          </p:nvPr>
-        </p:nvSpPr>
-        <p:spPr/>
-        <p:txBody>
-          <a:bodyPr/>
-          <a:lstStyle/>
-          <a:p>
-            <a:r>
-              <a:rPr lang="en-US" dirty="0" smtClean="0"/>
-              <a:t>Maintain User Model</a:t>
-            </a:r>
-            <a:endParaRPr lang="en-US" dirty="0"/>
-          </a:p>
-        </p:txBody>
-      </p:sp>
-      <p:sp>
-        <p:nvSpPr>
-          <p:cNvPr id="3" name="Content Placeholder 2"/>
-          <p:cNvSpPr>
-            <a:spLocks noGrp="1"/>
-          </p:cNvSpPr>
-          <p:nvPr>
-            <p:ph idx="1"/>
-          </p:nvPr>
-        </p:nvSpPr>
-        <p:spPr/>
-        <p:txBody>
-          <a:bodyPr/>
-          <a:lstStyle/>
-          <a:p>
-            <a:r>
-              <a:rPr lang="en-US" sz="2200" dirty="0" smtClean="0"/>
-              <a:t>The </a:t>
-            </a:r>
-            <a:r>
-              <a:rPr lang="en-US" sz="2200" i="1" dirty="0" smtClean="0">
-                <a:solidFill>
-                  <a:srgbClr val="C00000"/>
-                </a:solidFill>
-              </a:rPr>
-              <a:t>user model</a:t>
-            </a:r>
-            <a:r>
-              <a:rPr lang="en-US" sz="2200" dirty="0" smtClean="0"/>
-              <a:t> explicitly represents </a:t>
-            </a:r>
-            <a:r>
-              <a:rPr lang="en-US" sz="2200" u="sng" dirty="0" smtClean="0"/>
-              <a:t>the user's knowledge of the system</a:t>
-            </a:r>
-            <a:r>
-              <a:rPr lang="en-US" sz="2200" dirty="0" smtClean="0"/>
-              <a:t>, the user's behavior in terms of expected response time, and other aspects specific to a user or a class of users.</a:t>
-            </a:r>
-          </a:p>
-          <a:p>
-            <a:r>
-              <a:rPr lang="en-US" sz="2200" dirty="0" smtClean="0"/>
-              <a:t>For example, language-learning apps are constantly monitoring areas </a:t>
-            </a:r>
-            <a:r>
-              <a:rPr lang="en-US" sz="2200" i="1" dirty="0" smtClean="0">
-                <a:solidFill>
-                  <a:srgbClr val="C00000"/>
-                </a:solidFill>
-              </a:rPr>
-              <a:t>where a user makes mistakes</a:t>
-            </a:r>
-            <a:r>
-              <a:rPr lang="en-US" sz="2200" dirty="0" smtClean="0"/>
-              <a:t> and then providing additional exercises to correct those behaviors.</a:t>
-            </a:r>
-          </a:p>
-          <a:p>
-            <a:r>
-              <a:rPr lang="en-US" sz="2200" dirty="0" smtClean="0"/>
-              <a:t>A special case of this tactic is commonly found in user interface customization, wherein a user can explicitly modify the system's user model.</a:t>
-            </a:r>
-          </a:p>
-        </p:txBody>
-      </p:sp>
-      <p:pic>
-        <p:nvPicPr>
-          <p:cNvPr id="5122" name="Picture 2"/>
-          <p:cNvPicPr>
-            <a:picLocks noChangeAspect="1" noChangeArrowheads="1"/>
-          </p:cNvPicPr>
-          <p:nvPr/>
-        </p:nvPicPr>
-        <p:blipFill>
-          <a:blip r:embed="rId2" cstate="print"/>
-          <a:srcRect/>
-          <a:stretch>
-            <a:fillRect/>
-          </a:stretch>
-        </p:blipFill>
-        <p:spPr bwMode="auto">
-          <a:xfrm>
-            <a:off x="2879725" y="4689475"/>
-            <a:ext cx="3384550" cy="1787525"/>
           </a:xfrm>
           <a:prstGeom prst="rect">
             <a:avLst/>
@@ -12465,6 +12679,286 @@
           <a:p>
             <a:r>
               <a:rPr lang="en-US" dirty="0" smtClean="0"/>
+              <a:t>Maintain Task Model</a:t>
+            </a:r>
+            <a:endParaRPr lang="en-US" dirty="0"/>
+          </a:p>
+        </p:txBody>
+      </p:sp>
+      <p:sp>
+        <p:nvSpPr>
+          <p:cNvPr id="3" name="Content Placeholder 2"/>
+          <p:cNvSpPr>
+            <a:spLocks noGrp="1"/>
+          </p:cNvSpPr>
+          <p:nvPr>
+            <p:ph idx="1"/>
+          </p:nvPr>
+        </p:nvSpPr>
+        <p:spPr/>
+        <p:txBody>
+          <a:bodyPr/>
+          <a:lstStyle/>
+          <a:p>
+            <a:r>
+              <a:rPr lang="en-US" sz="2400" dirty="0" smtClean="0"/>
+              <a:t>The </a:t>
+            </a:r>
+            <a:r>
+              <a:rPr lang="en-US" sz="2400" i="1" dirty="0" smtClean="0">
+                <a:solidFill>
+                  <a:srgbClr val="C00000"/>
+                </a:solidFill>
+              </a:rPr>
+              <a:t>task model</a:t>
+            </a:r>
+            <a:r>
+              <a:rPr lang="en-US" sz="2400" dirty="0" smtClean="0"/>
+              <a:t> is used to determine context so the system can have some </a:t>
+            </a:r>
+            <a:r>
+              <a:rPr lang="en-US" sz="2400" u="sng" dirty="0" smtClean="0"/>
+              <a:t>idea of what the user is attempting to do</a:t>
+            </a:r>
+            <a:r>
+              <a:rPr lang="en-US" sz="2400" dirty="0" smtClean="0"/>
+              <a:t> and provide assistance.</a:t>
+            </a:r>
+          </a:p>
+          <a:p>
+            <a:r>
+              <a:rPr lang="en-US" sz="2400" dirty="0" smtClean="0"/>
+              <a:t>For example, many search engines provide </a:t>
+            </a:r>
+            <a:r>
+              <a:rPr lang="en-US" sz="2400" i="1" dirty="0" smtClean="0">
+                <a:solidFill>
+                  <a:srgbClr val="C00000"/>
+                </a:solidFill>
+              </a:rPr>
+              <a:t>predictive type-ahead capabilities</a:t>
+            </a:r>
+            <a:r>
+              <a:rPr lang="en-US" sz="2400" dirty="0" smtClean="0"/>
+              <a:t>, and many mail clients provide spell-correction. Both of these functions are based on task models.</a:t>
+            </a:r>
+          </a:p>
+        </p:txBody>
+      </p:sp>
+      <p:pic>
+        <p:nvPicPr>
+          <p:cNvPr id="6146" name="Picture 2" descr="https://images.samsung.com/is/image/samsung/assets/uk/support/mobile-devices/how-can-i-personalise-and-turn-predictive-text-on-and-off-on-my-samsung-galaxy-device/images/1-uk-how-can-i-personalise-and-turn-predictive-text-on-and-off.png?$ORIGIN_PNG$"/>
+          <p:cNvPicPr>
+            <a:picLocks noChangeAspect="1" noChangeArrowheads="1"/>
+          </p:cNvPicPr>
+          <p:nvPr/>
+        </p:nvPicPr>
+        <p:blipFill>
+          <a:blip r:embed="rId2" cstate="print"/>
+          <a:srcRect/>
+          <a:stretch>
+            <a:fillRect/>
+          </a:stretch>
+        </p:blipFill>
+        <p:spPr bwMode="auto">
+          <a:xfrm>
+            <a:off x="3124200" y="4419600"/>
+            <a:ext cx="2767013" cy="1524000"/>
+          </a:xfrm>
+          <a:prstGeom prst="rect">
+            <a:avLst/>
+          </a:prstGeom>
+          <a:noFill/>
+        </p:spPr>
+      </p:pic>
+    </p:spTree>
+  </p:cSld>
+  <p:clrMapOvr>
+    <a:masterClrMapping/>
+  </p:clrMapOvr>
+</p:sld>
+</file>
+
+<file path=ppt/slides/slide61.xml><?xml version="1.0" encoding="utf-8"?>
+<p:sld xmlns:a="http://schemas.openxmlformats.org/drawingml/2006/main" xmlns:r="http://schemas.openxmlformats.org/officeDocument/2006/relationships" xmlns:p="http://schemas.openxmlformats.org/presentationml/2006/main">
+  <p:cSld>
+    <p:spTree>
+      <p:nvGrpSpPr>
+        <p:cNvPr id="1" name=""/>
+        <p:cNvGrpSpPr/>
+        <p:nvPr/>
+      </p:nvGrpSpPr>
+      <p:grpSpPr>
+        <a:xfrm>
+          <a:off x="0" y="0"/>
+          <a:ext cx="0" cy="0"/>
+          <a:chOff x="0" y="0"/>
+          <a:chExt cx="0" cy="0"/>
+        </a:xfrm>
+      </p:grpSpPr>
+      <p:sp>
+        <p:nvSpPr>
+          <p:cNvPr id="2" name="Title 1"/>
+          <p:cNvSpPr>
+            <a:spLocks noGrp="1"/>
+          </p:cNvSpPr>
+          <p:nvPr>
+            <p:ph type="title"/>
+          </p:nvPr>
+        </p:nvSpPr>
+        <p:spPr/>
+        <p:txBody>
+          <a:bodyPr/>
+          <a:lstStyle/>
+          <a:p>
+            <a:r>
+              <a:rPr lang="en-US" dirty="0" smtClean="0"/>
+              <a:t>Maintain User Model</a:t>
+            </a:r>
+            <a:endParaRPr lang="en-US" dirty="0"/>
+          </a:p>
+        </p:txBody>
+      </p:sp>
+      <p:sp>
+        <p:nvSpPr>
+          <p:cNvPr id="3" name="Content Placeholder 2"/>
+          <p:cNvSpPr>
+            <a:spLocks noGrp="1"/>
+          </p:cNvSpPr>
+          <p:nvPr>
+            <p:ph idx="1"/>
+          </p:nvPr>
+        </p:nvSpPr>
+        <p:spPr/>
+        <p:txBody>
+          <a:bodyPr/>
+          <a:lstStyle/>
+          <a:p>
+            <a:r>
+              <a:rPr lang="en-US" sz="2200" dirty="0" smtClean="0"/>
+              <a:t>The </a:t>
+            </a:r>
+            <a:r>
+              <a:rPr lang="en-US" sz="2200" i="1" dirty="0" smtClean="0">
+                <a:solidFill>
+                  <a:srgbClr val="C00000"/>
+                </a:solidFill>
+              </a:rPr>
+              <a:t>user model</a:t>
+            </a:r>
+            <a:r>
+              <a:rPr lang="en-US" sz="2200" dirty="0" smtClean="0"/>
+              <a:t> explicitly represents </a:t>
+            </a:r>
+            <a:r>
+              <a:rPr lang="en-US" sz="2200" u="sng" dirty="0" smtClean="0"/>
+              <a:t>the user's knowledge of the system</a:t>
+            </a:r>
+            <a:r>
+              <a:rPr lang="en-US" sz="2200" dirty="0" smtClean="0"/>
+              <a:t>, the user's behavior in terms of expected response time, and other aspects specific to a user or a class of users.</a:t>
+            </a:r>
+          </a:p>
+          <a:p>
+            <a:r>
+              <a:rPr lang="en-US" sz="2200" dirty="0" smtClean="0"/>
+              <a:t>For example, language-learning apps are constantly monitoring areas </a:t>
+            </a:r>
+            <a:r>
+              <a:rPr lang="en-US" sz="2200" i="1" dirty="0" smtClean="0">
+                <a:solidFill>
+                  <a:srgbClr val="C00000"/>
+                </a:solidFill>
+              </a:rPr>
+              <a:t>where a user makes mistakes</a:t>
+            </a:r>
+            <a:r>
+              <a:rPr lang="en-US" sz="2200" dirty="0" smtClean="0"/>
+              <a:t> and then providing additional exercises to correct those behaviors.</a:t>
+            </a:r>
+          </a:p>
+          <a:p>
+            <a:r>
+              <a:rPr lang="en-US" sz="2200" dirty="0" smtClean="0"/>
+              <a:t>A special case of this tactic is commonly found in user interface customization, wherein a user can explicitly modify the system's user model.</a:t>
+            </a:r>
+          </a:p>
+        </p:txBody>
+      </p:sp>
+      <p:pic>
+        <p:nvPicPr>
+          <p:cNvPr id="5122" name="Picture 2"/>
+          <p:cNvPicPr>
+            <a:picLocks noChangeAspect="1" noChangeArrowheads="1"/>
+          </p:cNvPicPr>
+          <p:nvPr/>
+        </p:nvPicPr>
+        <p:blipFill>
+          <a:blip r:embed="rId2" cstate="print"/>
+          <a:srcRect/>
+          <a:stretch>
+            <a:fillRect/>
+          </a:stretch>
+        </p:blipFill>
+        <p:spPr bwMode="auto">
+          <a:xfrm>
+            <a:off x="2879725" y="4689475"/>
+            <a:ext cx="3384550" cy="1787525"/>
+          </a:xfrm>
+          <a:prstGeom prst="rect">
+            <a:avLst/>
+          </a:prstGeom>
+          <a:noFill/>
+          <a:ln w="9525">
+            <a:noFill/>
+            <a:miter lim="800000"/>
+            <a:headEnd/>
+            <a:tailEnd/>
+          </a:ln>
+        </p:spPr>
+      </p:pic>
+    </p:spTree>
+  </p:cSld>
+  <p:clrMapOvr>
+    <a:masterClrMapping/>
+  </p:clrMapOvr>
+</p:sld>
+</file>
+
+<file path=ppt/slides/slide62.xml><?xml version="1.0" encoding="utf-8"?>
+<p:sld xmlns:a="http://schemas.openxmlformats.org/drawingml/2006/main" xmlns:r="http://schemas.openxmlformats.org/officeDocument/2006/relationships" xmlns:p="http://schemas.openxmlformats.org/presentationml/2006/main">
+  <p:cSld>
+    <p:spTree>
+      <p:nvGrpSpPr>
+        <p:cNvPr id="1" name=""/>
+        <p:cNvGrpSpPr/>
+        <p:nvPr/>
+      </p:nvGrpSpPr>
+      <p:grpSpPr>
+        <a:xfrm>
+          <a:off x="0" y="0"/>
+          <a:ext cx="0" cy="0"/>
+          <a:chOff x="0" y="0"/>
+          <a:chExt cx="0" cy="0"/>
+        </a:xfrm>
+      </p:grpSpPr>
+      <p:sp>
+        <p:nvSpPr>
+          <p:cNvPr id="2" name="Title 1"/>
+          <p:cNvSpPr>
+            <a:spLocks noGrp="1"/>
+          </p:cNvSpPr>
+          <p:nvPr>
+            <p:ph type="title"/>
+          </p:nvPr>
+        </p:nvSpPr>
+        <p:spPr/>
+        <p:txBody>
+          <a:bodyPr/>
+          <a:lstStyle/>
+          <a:p>
+            <a:r>
+              <a:rPr lang="en-US" dirty="0" smtClean="0"/>
               <a:t>Maintain System Model</a:t>
             </a:r>
             <a:endParaRPr lang="en-US" dirty="0"/>
@@ -12580,7 +13074,7 @@
 </p:sld>
 </file>
 
-<file path=ppt/slides/slide61.xml><?xml version="1.0" encoding="utf-8"?>
+<file path=ppt/slides/slide63.xml><?xml version="1.0" encoding="utf-8"?>
 <p:sld xmlns:a="http://schemas.openxmlformats.org/drawingml/2006/main" xmlns:r="http://schemas.openxmlformats.org/officeDocument/2006/relationships" xmlns:p="http://schemas.openxmlformats.org/presentationml/2006/main">
   <p:cSld>
     <p:spTree>
@@ -12631,7 +13125,7 @@
 </p:sld>
 </file>
 
-<file path=ppt/slides/slide62.xml><?xml version="1.0" encoding="utf-8"?>
+<file path=ppt/slides/slide64.xml><?xml version="1.0" encoding="utf-8"?>
 <p:sld xmlns:a="http://schemas.openxmlformats.org/drawingml/2006/main" xmlns:r="http://schemas.openxmlformats.org/officeDocument/2006/relationships" xmlns:p="http://schemas.openxmlformats.org/presentationml/2006/main">
   <p:cSld>
     <p:spTree>
@@ -12756,7 +13250,7 @@
 </p:sld>
 </file>
 
-<file path=ppt/slides/slide63.xml><?xml version="1.0" encoding="utf-8"?>
+<file path=ppt/slides/slide65.xml><?xml version="1.0" encoding="utf-8"?>
 <p:sld xmlns:a="http://schemas.openxmlformats.org/drawingml/2006/main" xmlns:r="http://schemas.openxmlformats.org/officeDocument/2006/relationships" xmlns:p="http://schemas.openxmlformats.org/presentationml/2006/main">
   <p:cSld>
     <p:spTree>
